--- a/frontend/public/board-sample/exports/SMPL_Board_Review_Q2_2026.pptx
+++ b/frontend/public/board-sample/exports/SMPL_Board_Review_Q2_2026.pptx
@@ -122,740 +122,6 @@
 </p:presentation>
 </file>
 
-<file path=ppt/revisionInfo.xml><?xml version="1.0" encoding="utf-8"?>
-<p1510:revInfo xmlns:a="http://schemas.openxmlformats.org/drawingml/2006/main" xmlns:r="http://schemas.openxmlformats.org/officeDocument/2006/relationships" xmlns:p1510="http://schemas.microsoft.com/office/powerpoint/2015/10/main">
-  <p1510:revLst>
-    <p1510:client id="{1B71CDF3-5DA8-4669-AE89-7D7FE3D54620}" v="4" dt="2026-06-08T19:41:38.714"/>
-  </p1510:revLst>
-</p1510:revInfo>
-</file>
-
-<file path=ppt/changesInfos/changesInfo1.xml><?xml version="1.0" encoding="utf-8"?>
-<pc:chgInfo xmlns:a="http://schemas.openxmlformats.org/drawingml/2006/main" xmlns:r="http://schemas.openxmlformats.org/officeDocument/2006/relationships" xmlns:ac="http://schemas.microsoft.com/office/drawing/2013/main/command" xmlns:pc="http://schemas.microsoft.com/office/powerpoint/2013/main/command">
-  <pc:docChgLst>
-    <pc:chgData name="Matt Justice" userId="c0ecbdc24dae9ab7" providerId="LiveId" clId="{1B71CDF3-5DA8-4669-AE89-7D7FE3D54620}"/>
-    <pc:docChg chg="undo custSel modSld">
-      <pc:chgData name="Matt Justice" userId="c0ecbdc24dae9ab7" providerId="LiveId" clId="{1B71CDF3-5DA8-4669-AE89-7D7FE3D54620}" dt="2026-06-08T19:43:27.857" v="387" actId="20577"/>
-      <pc:docMkLst>
-        <pc:docMk/>
-      </pc:docMkLst>
-      <pc:sldChg chg="modSp mod">
-        <pc:chgData name="Matt Justice" userId="c0ecbdc24dae9ab7" providerId="LiveId" clId="{1B71CDF3-5DA8-4669-AE89-7D7FE3D54620}" dt="2026-06-08T19:42:50.057" v="375" actId="20577"/>
-        <pc:sldMkLst>
-          <pc:docMk/>
-          <pc:sldMk cId="0" sldId="257"/>
-        </pc:sldMkLst>
-        <pc:spChg chg="mod">
-          <ac:chgData name="Matt Justice" userId="c0ecbdc24dae9ab7" providerId="LiveId" clId="{1B71CDF3-5DA8-4669-AE89-7D7FE3D54620}" dt="2026-06-08T19:42:36.905" v="366" actId="20577"/>
-          <ac:spMkLst>
-            <pc:docMk/>
-            <pc:sldMk cId="0" sldId="257"/>
-            <ac:spMk id="57" creationId="{00000000-0000-0000-0000-000000000000}"/>
-          </ac:spMkLst>
-        </pc:spChg>
-        <pc:spChg chg="mod">
-          <ac:chgData name="Matt Justice" userId="c0ecbdc24dae9ab7" providerId="LiveId" clId="{1B71CDF3-5DA8-4669-AE89-7D7FE3D54620}" dt="2026-06-08T19:42:41.999" v="369" actId="20577"/>
-          <ac:spMkLst>
-            <pc:docMk/>
-            <pc:sldMk cId="0" sldId="257"/>
-            <ac:spMk id="59" creationId="{00000000-0000-0000-0000-000000000000}"/>
-          </ac:spMkLst>
-        </pc:spChg>
-        <pc:spChg chg="mod">
-          <ac:chgData name="Matt Justice" userId="c0ecbdc24dae9ab7" providerId="LiveId" clId="{1B71CDF3-5DA8-4669-AE89-7D7FE3D54620}" dt="2026-06-08T19:42:47.479" v="372" actId="20577"/>
-          <ac:spMkLst>
-            <pc:docMk/>
-            <pc:sldMk cId="0" sldId="257"/>
-            <ac:spMk id="81" creationId="{00000000-0000-0000-0000-000000000000}"/>
-          </ac:spMkLst>
-        </pc:spChg>
-        <pc:spChg chg="mod">
-          <ac:chgData name="Matt Justice" userId="c0ecbdc24dae9ab7" providerId="LiveId" clId="{1B71CDF3-5DA8-4669-AE89-7D7FE3D54620}" dt="2026-06-08T19:42:50.057" v="375" actId="20577"/>
-          <ac:spMkLst>
-            <pc:docMk/>
-            <pc:sldMk cId="0" sldId="257"/>
-            <ac:spMk id="83" creationId="{00000000-0000-0000-0000-000000000000}"/>
-          </ac:spMkLst>
-        </pc:spChg>
-      </pc:sldChg>
-      <pc:sldChg chg="modSp mod">
-        <pc:chgData name="Matt Justice" userId="c0ecbdc24dae9ab7" providerId="LiveId" clId="{1B71CDF3-5DA8-4669-AE89-7D7FE3D54620}" dt="2026-06-08T19:36:40.873" v="277" actId="20577"/>
-        <pc:sldMkLst>
-          <pc:docMk/>
-          <pc:sldMk cId="0" sldId="258"/>
-        </pc:sldMkLst>
-        <pc:spChg chg="mod">
-          <ac:chgData name="Matt Justice" userId="c0ecbdc24dae9ab7" providerId="LiveId" clId="{1B71CDF3-5DA8-4669-AE89-7D7FE3D54620}" dt="2026-06-08T19:26:58.425" v="108" actId="20577"/>
-          <ac:spMkLst>
-            <pc:docMk/>
-            <pc:sldMk cId="0" sldId="258"/>
-            <ac:spMk id="14" creationId="{00000000-0000-0000-0000-000000000000}"/>
-          </ac:spMkLst>
-        </pc:spChg>
-        <pc:spChg chg="mod">
-          <ac:chgData name="Matt Justice" userId="c0ecbdc24dae9ab7" providerId="LiveId" clId="{1B71CDF3-5DA8-4669-AE89-7D7FE3D54620}" dt="2026-06-08T19:36:40.873" v="277" actId="20577"/>
-          <ac:spMkLst>
-            <pc:docMk/>
-            <pc:sldMk cId="0" sldId="258"/>
-            <ac:spMk id="24" creationId="{00000000-0000-0000-0000-000000000000}"/>
-          </ac:spMkLst>
-        </pc:spChg>
-        <pc:spChg chg="mod">
-          <ac:chgData name="Matt Justice" userId="c0ecbdc24dae9ab7" providerId="LiveId" clId="{1B71CDF3-5DA8-4669-AE89-7D7FE3D54620}" dt="2026-06-08T19:36:18.265" v="265" actId="20577"/>
-          <ac:spMkLst>
-            <pc:docMk/>
-            <pc:sldMk cId="0" sldId="258"/>
-            <ac:spMk id="71" creationId="{00000000-0000-0000-0000-000000000000}"/>
-          </ac:spMkLst>
-        </pc:spChg>
-        <pc:spChg chg="mod">
-          <ac:chgData name="Matt Justice" userId="c0ecbdc24dae9ab7" providerId="LiveId" clId="{1B71CDF3-5DA8-4669-AE89-7D7FE3D54620}" dt="2026-06-08T19:36:23.187" v="268" actId="20577"/>
-          <ac:spMkLst>
-            <pc:docMk/>
-            <pc:sldMk cId="0" sldId="258"/>
-            <ac:spMk id="73" creationId="{00000000-0000-0000-0000-000000000000}"/>
-          </ac:spMkLst>
-        </pc:spChg>
-        <pc:spChg chg="mod">
-          <ac:chgData name="Matt Justice" userId="c0ecbdc24dae9ab7" providerId="LiveId" clId="{1B71CDF3-5DA8-4669-AE89-7D7FE3D54620}" dt="2026-06-08T19:36:27.841" v="271" actId="20577"/>
-          <ac:spMkLst>
-            <pc:docMk/>
-            <pc:sldMk cId="0" sldId="258"/>
-            <ac:spMk id="79" creationId="{00000000-0000-0000-0000-000000000000}"/>
-          </ac:spMkLst>
-        </pc:spChg>
-        <pc:spChg chg="mod">
-          <ac:chgData name="Matt Justice" userId="c0ecbdc24dae9ab7" providerId="LiveId" clId="{1B71CDF3-5DA8-4669-AE89-7D7FE3D54620}" dt="2026-06-08T19:36:32.440" v="274" actId="20577"/>
-          <ac:spMkLst>
-            <pc:docMk/>
-            <pc:sldMk cId="0" sldId="258"/>
-            <ac:spMk id="81" creationId="{00000000-0000-0000-0000-000000000000}"/>
-          </ac:spMkLst>
-        </pc:spChg>
-      </pc:sldChg>
-      <pc:sldChg chg="modSp mod">
-        <pc:chgData name="Matt Justice" userId="c0ecbdc24dae9ab7" providerId="LiveId" clId="{1B71CDF3-5DA8-4669-AE89-7D7FE3D54620}" dt="2026-06-08T19:42:14.840" v="363" actId="20577"/>
-        <pc:sldMkLst>
-          <pc:docMk/>
-          <pc:sldMk cId="0" sldId="259"/>
-        </pc:sldMkLst>
-        <pc:spChg chg="mod">
-          <ac:chgData name="Matt Justice" userId="c0ecbdc24dae9ab7" providerId="LiveId" clId="{1B71CDF3-5DA8-4669-AE89-7D7FE3D54620}" dt="2026-06-08T19:35:50.897" v="260" actId="20577"/>
-          <ac:spMkLst>
-            <pc:docMk/>
-            <pc:sldMk cId="0" sldId="259"/>
-            <ac:spMk id="24" creationId="{00000000-0000-0000-0000-000000000000}"/>
-          </ac:spMkLst>
-        </pc:spChg>
-        <pc:spChg chg="mod">
-          <ac:chgData name="Matt Justice" userId="c0ecbdc24dae9ab7" providerId="LiveId" clId="{1B71CDF3-5DA8-4669-AE89-7D7FE3D54620}" dt="2026-06-08T19:35:47.274" v="257" actId="207"/>
-          <ac:spMkLst>
-            <pc:docMk/>
-            <pc:sldMk cId="0" sldId="259"/>
-            <ac:spMk id="25" creationId="{00000000-0000-0000-0000-000000000000}"/>
-          </ac:spMkLst>
-        </pc:spChg>
-        <pc:spChg chg="mod">
-          <ac:chgData name="Matt Justice" userId="c0ecbdc24dae9ab7" providerId="LiveId" clId="{1B71CDF3-5DA8-4669-AE89-7D7FE3D54620}" dt="2026-06-08T19:42:14.840" v="363" actId="20577"/>
-          <ac:spMkLst>
-            <pc:docMk/>
-            <pc:sldMk cId="0" sldId="259"/>
-            <ac:spMk id="81" creationId="{00000000-0000-0000-0000-000000000000}"/>
-          </ac:spMkLst>
-        </pc:spChg>
-        <pc:spChg chg="mod">
-          <ac:chgData name="Matt Justice" userId="c0ecbdc24dae9ab7" providerId="LiveId" clId="{1B71CDF3-5DA8-4669-AE89-7D7FE3D54620}" dt="2026-06-08T19:35:16.857" v="248" actId="20577"/>
-          <ac:spMkLst>
-            <pc:docMk/>
-            <pc:sldMk cId="0" sldId="259"/>
-            <ac:spMk id="85" creationId="{00000000-0000-0000-0000-000000000000}"/>
-          </ac:spMkLst>
-        </pc:spChg>
-        <pc:spChg chg="mod">
-          <ac:chgData name="Matt Justice" userId="c0ecbdc24dae9ab7" providerId="LiveId" clId="{1B71CDF3-5DA8-4669-AE89-7D7FE3D54620}" dt="2026-06-08T19:35:25.193" v="252" actId="207"/>
-          <ac:spMkLst>
-            <pc:docMk/>
-            <pc:sldMk cId="0" sldId="259"/>
-            <ac:spMk id="87" creationId="{00000000-0000-0000-0000-000000000000}"/>
-          </ac:spMkLst>
-        </pc:spChg>
-      </pc:sldChg>
-      <pc:sldChg chg="modSp mod">
-        <pc:chgData name="Matt Justice" userId="c0ecbdc24dae9ab7" providerId="LiveId" clId="{1B71CDF3-5DA8-4669-AE89-7D7FE3D54620}" dt="2026-06-08T19:43:27.857" v="387" actId="20577"/>
-        <pc:sldMkLst>
-          <pc:docMk/>
-          <pc:sldMk cId="0" sldId="260"/>
-        </pc:sldMkLst>
-        <pc:spChg chg="mod">
-          <ac:chgData name="Matt Justice" userId="c0ecbdc24dae9ab7" providerId="LiveId" clId="{1B71CDF3-5DA8-4669-AE89-7D7FE3D54620}" dt="2026-06-08T19:43:14.585" v="378" actId="20577"/>
-          <ac:spMkLst>
-            <pc:docMk/>
-            <pc:sldMk cId="0" sldId="260"/>
-            <ac:spMk id="39" creationId="{00000000-0000-0000-0000-000000000000}"/>
-          </ac:spMkLst>
-        </pc:spChg>
-        <pc:spChg chg="mod">
-          <ac:chgData name="Matt Justice" userId="c0ecbdc24dae9ab7" providerId="LiveId" clId="{1B71CDF3-5DA8-4669-AE89-7D7FE3D54620}" dt="2026-06-08T19:43:19.137" v="381" actId="20577"/>
-          <ac:spMkLst>
-            <pc:docMk/>
-            <pc:sldMk cId="0" sldId="260"/>
-            <ac:spMk id="43" creationId="{00000000-0000-0000-0000-000000000000}"/>
-          </ac:spMkLst>
-        </pc:spChg>
-        <pc:spChg chg="mod">
-          <ac:chgData name="Matt Justice" userId="c0ecbdc24dae9ab7" providerId="LiveId" clId="{1B71CDF3-5DA8-4669-AE89-7D7FE3D54620}" dt="2026-06-08T19:43:23.543" v="384" actId="20577"/>
-          <ac:spMkLst>
-            <pc:docMk/>
-            <pc:sldMk cId="0" sldId="260"/>
-            <ac:spMk id="47" creationId="{00000000-0000-0000-0000-000000000000}"/>
-          </ac:spMkLst>
-        </pc:spChg>
-        <pc:spChg chg="mod">
-          <ac:chgData name="Matt Justice" userId="c0ecbdc24dae9ab7" providerId="LiveId" clId="{1B71CDF3-5DA8-4669-AE89-7D7FE3D54620}" dt="2026-06-08T19:43:27.857" v="387" actId="20577"/>
-          <ac:spMkLst>
-            <pc:docMk/>
-            <pc:sldMk cId="0" sldId="260"/>
-            <ac:spMk id="51" creationId="{00000000-0000-0000-0000-000000000000}"/>
-          </ac:spMkLst>
-        </pc:spChg>
-        <pc:spChg chg="mod">
-          <ac:chgData name="Matt Justice" userId="c0ecbdc24dae9ab7" providerId="LiveId" clId="{1B71CDF3-5DA8-4669-AE89-7D7FE3D54620}" dt="2026-06-08T19:37:01.467" v="281" actId="20577"/>
-          <ac:spMkLst>
-            <pc:docMk/>
-            <pc:sldMk cId="0" sldId="260"/>
-            <ac:spMk id="59" creationId="{00000000-0000-0000-0000-000000000000}"/>
-          </ac:spMkLst>
-        </pc:spChg>
-      </pc:sldChg>
-      <pc:sldChg chg="modSp mod">
-        <pc:chgData name="Matt Justice" userId="c0ecbdc24dae9ab7" providerId="LiveId" clId="{1B71CDF3-5DA8-4669-AE89-7D7FE3D54620}" dt="2026-06-08T19:37:27.711" v="294" actId="20577"/>
-        <pc:sldMkLst>
-          <pc:docMk/>
-          <pc:sldMk cId="0" sldId="261"/>
-        </pc:sldMkLst>
-        <pc:spChg chg="mod">
-          <ac:chgData name="Matt Justice" userId="c0ecbdc24dae9ab7" providerId="LiveId" clId="{1B71CDF3-5DA8-4669-AE89-7D7FE3D54620}" dt="2026-06-08T19:37:22.177" v="292" actId="20577"/>
-          <ac:spMkLst>
-            <pc:docMk/>
-            <pc:sldMk cId="0" sldId="261"/>
-            <ac:spMk id="179" creationId="{00000000-0000-0000-0000-000000000000}"/>
-          </ac:spMkLst>
-        </pc:spChg>
-        <pc:spChg chg="mod">
-          <ac:chgData name="Matt Justice" userId="c0ecbdc24dae9ab7" providerId="LiveId" clId="{1B71CDF3-5DA8-4669-AE89-7D7FE3D54620}" dt="2026-06-08T19:37:12.505" v="282" actId="20577"/>
-          <ac:spMkLst>
-            <pc:docMk/>
-            <pc:sldMk cId="0" sldId="261"/>
-            <ac:spMk id="180" creationId="{00000000-0000-0000-0000-000000000000}"/>
-          </ac:spMkLst>
-        </pc:spChg>
-        <pc:spChg chg="mod">
-          <ac:chgData name="Matt Justice" userId="c0ecbdc24dae9ab7" providerId="LiveId" clId="{1B71CDF3-5DA8-4669-AE89-7D7FE3D54620}" dt="2026-06-08T19:37:27.711" v="294" actId="20577"/>
-          <ac:spMkLst>
-            <pc:docMk/>
-            <pc:sldMk cId="0" sldId="261"/>
-            <ac:spMk id="181" creationId="{00000000-0000-0000-0000-000000000000}"/>
-          </ac:spMkLst>
-        </pc:spChg>
-      </pc:sldChg>
-      <pc:sldChg chg="addSp modSp mod">
-        <pc:chgData name="Matt Justice" userId="c0ecbdc24dae9ab7" providerId="LiveId" clId="{1B71CDF3-5DA8-4669-AE89-7D7FE3D54620}" dt="2026-06-08T19:41:43.548" v="360" actId="207"/>
-        <pc:sldMkLst>
-          <pc:docMk/>
-          <pc:sldMk cId="0" sldId="262"/>
-        </pc:sldMkLst>
-        <pc:spChg chg="mod">
-          <ac:chgData name="Matt Justice" userId="c0ecbdc24dae9ab7" providerId="LiveId" clId="{1B71CDF3-5DA8-4669-AE89-7D7FE3D54620}" dt="2026-06-08T19:40:10.426" v="345" actId="207"/>
-          <ac:spMkLst>
-            <pc:docMk/>
-            <pc:sldMk cId="0" sldId="262"/>
-            <ac:spMk id="62" creationId="{00000000-0000-0000-0000-000000000000}"/>
-          </ac:spMkLst>
-        </pc:spChg>
-        <pc:spChg chg="mod">
-          <ac:chgData name="Matt Justice" userId="c0ecbdc24dae9ab7" providerId="LiveId" clId="{1B71CDF3-5DA8-4669-AE89-7D7FE3D54620}" dt="2026-06-08T19:38:19.080" v="303" actId="20577"/>
-          <ac:spMkLst>
-            <pc:docMk/>
-            <pc:sldMk cId="0" sldId="262"/>
-            <ac:spMk id="74" creationId="{00000000-0000-0000-0000-000000000000}"/>
-          </ac:spMkLst>
-        </pc:spChg>
-        <pc:spChg chg="mod">
-          <ac:chgData name="Matt Justice" userId="c0ecbdc24dae9ab7" providerId="LiveId" clId="{1B71CDF3-5DA8-4669-AE89-7D7FE3D54620}" dt="2026-06-08T19:40:06.424" v="344" actId="207"/>
-          <ac:spMkLst>
-            <pc:docMk/>
-            <pc:sldMk cId="0" sldId="262"/>
-            <ac:spMk id="82" creationId="{00000000-0000-0000-0000-000000000000}"/>
-          </ac:spMkLst>
-        </pc:spChg>
-        <pc:spChg chg="mod">
-          <ac:chgData name="Matt Justice" userId="c0ecbdc24dae9ab7" providerId="LiveId" clId="{1B71CDF3-5DA8-4669-AE89-7D7FE3D54620}" dt="2026-06-08T19:38:29.073" v="309" actId="20577"/>
-          <ac:spMkLst>
-            <pc:docMk/>
-            <pc:sldMk cId="0" sldId="262"/>
-            <ac:spMk id="94" creationId="{00000000-0000-0000-0000-000000000000}"/>
-          </ac:spMkLst>
-        </pc:spChg>
-        <pc:spChg chg="mod">
-          <ac:chgData name="Matt Justice" userId="c0ecbdc24dae9ab7" providerId="LiveId" clId="{1B71CDF3-5DA8-4669-AE89-7D7FE3D54620}" dt="2026-06-08T19:40:01.931" v="343" actId="207"/>
-          <ac:spMkLst>
-            <pc:docMk/>
-            <pc:sldMk cId="0" sldId="262"/>
-            <ac:spMk id="102" creationId="{00000000-0000-0000-0000-000000000000}"/>
-          </ac:spMkLst>
-        </pc:spChg>
-        <pc:spChg chg="mod">
-          <ac:chgData name="Matt Justice" userId="c0ecbdc24dae9ab7" providerId="LiveId" clId="{1B71CDF3-5DA8-4669-AE89-7D7FE3D54620}" dt="2026-06-08T19:38:23.674" v="306" actId="20577"/>
-          <ac:spMkLst>
-            <pc:docMk/>
-            <pc:sldMk cId="0" sldId="262"/>
-            <ac:spMk id="114" creationId="{00000000-0000-0000-0000-000000000000}"/>
-          </ac:spMkLst>
-        </pc:spChg>
-        <pc:spChg chg="mod">
-          <ac:chgData name="Matt Justice" userId="c0ecbdc24dae9ab7" providerId="LiveId" clId="{1B71CDF3-5DA8-4669-AE89-7D7FE3D54620}" dt="2026-06-08T19:39:12.008" v="330" actId="207"/>
-          <ac:spMkLst>
-            <pc:docMk/>
-            <pc:sldMk cId="0" sldId="262"/>
-            <ac:spMk id="120" creationId="{00000000-0000-0000-0000-000000000000}"/>
-          </ac:spMkLst>
-        </pc:spChg>
-        <pc:spChg chg="mod">
-          <ac:chgData name="Matt Justice" userId="c0ecbdc24dae9ab7" providerId="LiveId" clId="{1B71CDF3-5DA8-4669-AE89-7D7FE3D54620}" dt="2026-06-08T19:41:14.759" v="354" actId="207"/>
-          <ac:spMkLst>
-            <pc:docMk/>
-            <pc:sldMk cId="0" sldId="262"/>
-            <ac:spMk id="122" creationId="{00000000-0000-0000-0000-000000000000}"/>
-          </ac:spMkLst>
-        </pc:spChg>
-        <pc:spChg chg="mod">
-          <ac:chgData name="Matt Justice" userId="c0ecbdc24dae9ab7" providerId="LiveId" clId="{1B71CDF3-5DA8-4669-AE89-7D7FE3D54620}" dt="2026-06-08T19:41:32.395" v="357" actId="207"/>
-          <ac:spMkLst>
-            <pc:docMk/>
-            <pc:sldMk cId="0" sldId="262"/>
-            <ac:spMk id="124" creationId="{00000000-0000-0000-0000-000000000000}"/>
-          </ac:spMkLst>
-        </pc:spChg>
-        <pc:spChg chg="mod">
-          <ac:chgData name="Matt Justice" userId="c0ecbdc24dae9ab7" providerId="LiveId" clId="{1B71CDF3-5DA8-4669-AE89-7D7FE3D54620}" dt="2026-06-08T19:38:34.450" v="312" actId="20577"/>
-          <ac:spMkLst>
-            <pc:docMk/>
-            <pc:sldMk cId="0" sldId="262"/>
-            <ac:spMk id="134" creationId="{00000000-0000-0000-0000-000000000000}"/>
-          </ac:spMkLst>
-        </pc:spChg>
-        <pc:spChg chg="mod">
-          <ac:chgData name="Matt Justice" userId="c0ecbdc24dae9ab7" providerId="LiveId" clId="{1B71CDF3-5DA8-4669-AE89-7D7FE3D54620}" dt="2026-06-08T19:38:39.039" v="315" actId="20577"/>
-          <ac:spMkLst>
-            <pc:docMk/>
-            <pc:sldMk cId="0" sldId="262"/>
-            <ac:spMk id="154" creationId="{00000000-0000-0000-0000-000000000000}"/>
-          </ac:spMkLst>
-        </pc:spChg>
-        <pc:spChg chg="mod">
-          <ac:chgData name="Matt Justice" userId="c0ecbdc24dae9ab7" providerId="LiveId" clId="{1B71CDF3-5DA8-4669-AE89-7D7FE3D54620}" dt="2026-06-08T19:39:03.960" v="326" actId="207"/>
-          <ac:spMkLst>
-            <pc:docMk/>
-            <pc:sldMk cId="0" sldId="262"/>
-            <ac:spMk id="160" creationId="{00000000-0000-0000-0000-000000000000}"/>
-          </ac:spMkLst>
-        </pc:spChg>
-        <pc:spChg chg="mod">
-          <ac:chgData name="Matt Justice" userId="c0ecbdc24dae9ab7" providerId="LiveId" clId="{1B71CDF3-5DA8-4669-AE89-7D7FE3D54620}" dt="2026-06-08T19:41:14.759" v="354" actId="207"/>
-          <ac:spMkLst>
-            <pc:docMk/>
-            <pc:sldMk cId="0" sldId="262"/>
-            <ac:spMk id="162" creationId="{00000000-0000-0000-0000-000000000000}"/>
-          </ac:spMkLst>
-        </pc:spChg>
-        <pc:spChg chg="mod">
-          <ac:chgData name="Matt Justice" userId="c0ecbdc24dae9ab7" providerId="LiveId" clId="{1B71CDF3-5DA8-4669-AE89-7D7FE3D54620}" dt="2026-06-08T19:38:44.040" v="318" actId="20577"/>
-          <ac:spMkLst>
-            <pc:docMk/>
-            <pc:sldMk cId="0" sldId="262"/>
-            <ac:spMk id="174" creationId="{00000000-0000-0000-0000-000000000000}"/>
-          </ac:spMkLst>
-        </pc:spChg>
-        <pc:spChg chg="mod">
-          <ac:chgData name="Matt Justice" userId="c0ecbdc24dae9ab7" providerId="LiveId" clId="{1B71CDF3-5DA8-4669-AE89-7D7FE3D54620}" dt="2026-06-08T19:38:55.711" v="322" actId="207"/>
-          <ac:spMkLst>
-            <pc:docMk/>
-            <pc:sldMk cId="0" sldId="262"/>
-            <ac:spMk id="180" creationId="{00000000-0000-0000-0000-000000000000}"/>
-          </ac:spMkLst>
-        </pc:spChg>
-        <pc:spChg chg="mod">
-          <ac:chgData name="Matt Justice" userId="c0ecbdc24dae9ab7" providerId="LiveId" clId="{1B71CDF3-5DA8-4669-AE89-7D7FE3D54620}" dt="2026-06-08T19:41:14.759" v="354" actId="207"/>
-          <ac:spMkLst>
-            <pc:docMk/>
-            <pc:sldMk cId="0" sldId="262"/>
-            <ac:spMk id="182" creationId="{00000000-0000-0000-0000-000000000000}"/>
-          </ac:spMkLst>
-        </pc:spChg>
-        <pc:spChg chg="mod">
-          <ac:chgData name="Matt Justice" userId="c0ecbdc24dae9ab7" providerId="LiveId" clId="{1B71CDF3-5DA8-4669-AE89-7D7FE3D54620}" dt="2026-06-08T19:41:32.395" v="357" actId="207"/>
-          <ac:spMkLst>
-            <pc:docMk/>
-            <pc:sldMk cId="0" sldId="262"/>
-            <ac:spMk id="184" creationId="{00000000-0000-0000-0000-000000000000}"/>
-          </ac:spMkLst>
-        </pc:spChg>
-        <pc:spChg chg="mod">
-          <ac:chgData name="Matt Justice" userId="c0ecbdc24dae9ab7" providerId="LiveId" clId="{1B71CDF3-5DA8-4669-AE89-7D7FE3D54620}" dt="2026-06-08T19:39:20.883" v="334" actId="207"/>
-          <ac:spMkLst>
-            <pc:docMk/>
-            <pc:sldMk cId="0" sldId="262"/>
-            <ac:spMk id="200" creationId="{00000000-0000-0000-0000-000000000000}"/>
-          </ac:spMkLst>
-        </pc:spChg>
-        <pc:spChg chg="mod">
-          <ac:chgData name="Matt Justice" userId="c0ecbdc24dae9ab7" providerId="LiveId" clId="{1B71CDF3-5DA8-4669-AE89-7D7FE3D54620}" dt="2026-06-08T19:41:14.759" v="354" actId="207"/>
-          <ac:spMkLst>
-            <pc:docMk/>
-            <pc:sldMk cId="0" sldId="262"/>
-            <ac:spMk id="202" creationId="{00000000-0000-0000-0000-000000000000}"/>
-          </ac:spMkLst>
-        </pc:spChg>
-        <pc:spChg chg="mod">
-          <ac:chgData name="Matt Justice" userId="c0ecbdc24dae9ab7" providerId="LiveId" clId="{1B71CDF3-5DA8-4669-AE89-7D7FE3D54620}" dt="2026-06-08T19:39:27.920" v="338" actId="207"/>
-          <ac:spMkLst>
-            <pc:docMk/>
-            <pc:sldMk cId="0" sldId="262"/>
-            <ac:spMk id="220" creationId="{00000000-0000-0000-0000-000000000000}"/>
-          </ac:spMkLst>
-        </pc:spChg>
-        <pc:spChg chg="mod">
-          <ac:chgData name="Matt Justice" userId="c0ecbdc24dae9ab7" providerId="LiveId" clId="{1B71CDF3-5DA8-4669-AE89-7D7FE3D54620}" dt="2026-06-08T19:41:14.759" v="354" actId="207"/>
-          <ac:spMkLst>
-            <pc:docMk/>
-            <pc:sldMk cId="0" sldId="262"/>
-            <ac:spMk id="222" creationId="{00000000-0000-0000-0000-000000000000}"/>
-          </ac:spMkLst>
-        </pc:spChg>
-        <pc:spChg chg="mod">
-          <ac:chgData name="Matt Justice" userId="c0ecbdc24dae9ab7" providerId="LiveId" clId="{1B71CDF3-5DA8-4669-AE89-7D7FE3D54620}" dt="2026-06-08T19:40:45.100" v="350" actId="207"/>
-          <ac:spMkLst>
-            <pc:docMk/>
-            <pc:sldMk cId="0" sldId="262"/>
-            <ac:spMk id="242" creationId="{00000000-0000-0000-0000-000000000000}"/>
-          </ac:spMkLst>
-        </pc:spChg>
-        <pc:spChg chg="mod">
-          <ac:chgData name="Matt Justice" userId="c0ecbdc24dae9ab7" providerId="LiveId" clId="{1B71CDF3-5DA8-4669-AE89-7D7FE3D54620}" dt="2026-06-08T19:41:43.548" v="360" actId="207"/>
-          <ac:spMkLst>
-            <pc:docMk/>
-            <pc:sldMk cId="0" sldId="262"/>
-            <ac:spMk id="244" creationId="{00000000-0000-0000-0000-000000000000}"/>
-          </ac:spMkLst>
-        </pc:spChg>
-        <pc:spChg chg="mod">
-          <ac:chgData name="Matt Justice" userId="c0ecbdc24dae9ab7" providerId="LiveId" clId="{1B71CDF3-5DA8-4669-AE89-7D7FE3D54620}" dt="2026-06-08T19:39:35.128" v="342" actId="207"/>
-          <ac:spMkLst>
-            <pc:docMk/>
-            <pc:sldMk cId="0" sldId="262"/>
-            <ac:spMk id="260" creationId="{00000000-0000-0000-0000-000000000000}"/>
-          </ac:spMkLst>
-        </pc:spChg>
-        <pc:spChg chg="mod">
-          <ac:chgData name="Matt Justice" userId="c0ecbdc24dae9ab7" providerId="LiveId" clId="{1B71CDF3-5DA8-4669-AE89-7D7FE3D54620}" dt="2026-06-08T19:40:48.458" v="352" actId="1076"/>
-          <ac:spMkLst>
-            <pc:docMk/>
-            <pc:sldMk cId="0" sldId="262"/>
-            <ac:spMk id="261" creationId="{00000000-0000-0000-0000-000000000000}"/>
-          </ac:spMkLst>
-        </pc:spChg>
-        <pc:spChg chg="mod">
-          <ac:chgData name="Matt Justice" userId="c0ecbdc24dae9ab7" providerId="LiveId" clId="{1B71CDF3-5DA8-4669-AE89-7D7FE3D54620}" dt="2026-06-08T19:41:14.759" v="354" actId="207"/>
-          <ac:spMkLst>
-            <pc:docMk/>
-            <pc:sldMk cId="0" sldId="262"/>
-            <ac:spMk id="262" creationId="{00000000-0000-0000-0000-000000000000}"/>
-          </ac:spMkLst>
-        </pc:spChg>
-        <pc:spChg chg="mod">
-          <ac:chgData name="Matt Justice" userId="c0ecbdc24dae9ab7" providerId="LiveId" clId="{1B71CDF3-5DA8-4669-AE89-7D7FE3D54620}" dt="2026-06-08T19:41:32.395" v="357" actId="207"/>
-          <ac:spMkLst>
-            <pc:docMk/>
-            <pc:sldMk cId="0" sldId="262"/>
-            <ac:spMk id="264" creationId="{00000000-0000-0000-0000-000000000000}"/>
-          </ac:spMkLst>
-        </pc:spChg>
-        <pc:spChg chg="add mod">
-          <ac:chgData name="Matt Justice" userId="c0ecbdc24dae9ab7" providerId="LiveId" clId="{1B71CDF3-5DA8-4669-AE89-7D7FE3D54620}" dt="2026-06-08T19:41:19.683" v="356" actId="571"/>
-          <ac:spMkLst>
-            <pc:docMk/>
-            <pc:sldMk cId="0" sldId="262"/>
-            <ac:spMk id="270" creationId="{3909CAA8-8690-C15B-90F7-9DDC3DDDBCC8}"/>
-          </ac:spMkLst>
-        </pc:spChg>
-        <pc:spChg chg="add mod">
-          <ac:chgData name="Matt Justice" userId="c0ecbdc24dae9ab7" providerId="LiveId" clId="{1B71CDF3-5DA8-4669-AE89-7D7FE3D54620}" dt="2026-06-08T19:41:38.714" v="359" actId="571"/>
-          <ac:spMkLst>
-            <pc:docMk/>
-            <pc:sldMk cId="0" sldId="262"/>
-            <ac:spMk id="271" creationId="{5558C97C-49A3-D34D-0337-9C3B98F89D67}"/>
-          </ac:spMkLst>
-        </pc:spChg>
-        <pc:spChg chg="add mod">
-          <ac:chgData name="Matt Justice" userId="c0ecbdc24dae9ab7" providerId="LiveId" clId="{1B71CDF3-5DA8-4669-AE89-7D7FE3D54620}" dt="2026-06-08T19:41:38.714" v="359" actId="571"/>
-          <ac:spMkLst>
-            <pc:docMk/>
-            <pc:sldMk cId="0" sldId="262"/>
-            <ac:spMk id="272" creationId="{3496E7F0-705B-BC70-5782-EE96BBEE309C}"/>
-          </ac:spMkLst>
-        </pc:spChg>
-      </pc:sldChg>
-      <pc:sldChg chg="modSp mod">
-        <pc:chgData name="Matt Justice" userId="c0ecbdc24dae9ab7" providerId="LiveId" clId="{1B71CDF3-5DA8-4669-AE89-7D7FE3D54620}" dt="2026-06-08T19:34:12.192" v="244" actId="20577"/>
-        <pc:sldMkLst>
-          <pc:docMk/>
-          <pc:sldMk cId="0" sldId="263"/>
-        </pc:sldMkLst>
-        <pc:spChg chg="mod">
-          <ac:chgData name="Matt Justice" userId="c0ecbdc24dae9ab7" providerId="LiveId" clId="{1B71CDF3-5DA8-4669-AE89-7D7FE3D54620}" dt="2026-06-08T19:24:23.952" v="105" actId="20577"/>
-          <ac:spMkLst>
-            <pc:docMk/>
-            <pc:sldMk cId="0" sldId="263"/>
-            <ac:spMk id="19" creationId="{00000000-0000-0000-0000-000000000000}"/>
-          </ac:spMkLst>
-        </pc:spChg>
-        <pc:spChg chg="mod">
-          <ac:chgData name="Matt Justice" userId="c0ecbdc24dae9ab7" providerId="LiveId" clId="{1B71CDF3-5DA8-4669-AE89-7D7FE3D54620}" dt="2026-06-08T17:58:44.535" v="30" actId="20577"/>
-          <ac:spMkLst>
-            <pc:docMk/>
-            <pc:sldMk cId="0" sldId="263"/>
-            <ac:spMk id="21" creationId="{00000000-0000-0000-0000-000000000000}"/>
-          </ac:spMkLst>
-        </pc:spChg>
-        <pc:spChg chg="mod">
-          <ac:chgData name="Matt Justice" userId="c0ecbdc24dae9ab7" providerId="LiveId" clId="{1B71CDF3-5DA8-4669-AE89-7D7FE3D54620}" dt="2026-06-08T19:33:35.719" v="226" actId="20577"/>
-          <ac:spMkLst>
-            <pc:docMk/>
-            <pc:sldMk cId="0" sldId="263"/>
-            <ac:spMk id="31" creationId="{00000000-0000-0000-0000-000000000000}"/>
-          </ac:spMkLst>
-        </pc:spChg>
-        <pc:spChg chg="mod">
-          <ac:chgData name="Matt Justice" userId="c0ecbdc24dae9ab7" providerId="LiveId" clId="{1B71CDF3-5DA8-4669-AE89-7D7FE3D54620}" dt="2026-06-08T19:33:46.727" v="234" actId="20577"/>
-          <ac:spMkLst>
-            <pc:docMk/>
-            <pc:sldMk cId="0" sldId="263"/>
-            <ac:spMk id="33" creationId="{00000000-0000-0000-0000-000000000000}"/>
-          </ac:spMkLst>
-        </pc:spChg>
-        <pc:spChg chg="mod">
-          <ac:chgData name="Matt Justice" userId="c0ecbdc24dae9ab7" providerId="LiveId" clId="{1B71CDF3-5DA8-4669-AE89-7D7FE3D54620}" dt="2026-06-08T19:31:23.599" v="184" actId="20577"/>
-          <ac:spMkLst>
-            <pc:docMk/>
-            <pc:sldMk cId="0" sldId="263"/>
-            <ac:spMk id="39" creationId="{00000000-0000-0000-0000-000000000000}"/>
-          </ac:spMkLst>
-        </pc:spChg>
-        <pc:spChg chg="mod">
-          <ac:chgData name="Matt Justice" userId="c0ecbdc24dae9ab7" providerId="LiveId" clId="{1B71CDF3-5DA8-4669-AE89-7D7FE3D54620}" dt="2026-06-08T19:31:18.096" v="174" actId="20577"/>
-          <ac:spMkLst>
-            <pc:docMk/>
-            <pc:sldMk cId="0" sldId="263"/>
-            <ac:spMk id="41" creationId="{00000000-0000-0000-0000-000000000000}"/>
-          </ac:spMkLst>
-        </pc:spChg>
-        <pc:spChg chg="mod">
-          <ac:chgData name="Matt Justice" userId="c0ecbdc24dae9ab7" providerId="LiveId" clId="{1B71CDF3-5DA8-4669-AE89-7D7FE3D54620}" dt="2026-06-08T19:32:52.146" v="208" actId="20577"/>
-          <ac:spMkLst>
-            <pc:docMk/>
-            <pc:sldMk cId="0" sldId="263"/>
-            <ac:spMk id="43" creationId="{00000000-0000-0000-0000-000000000000}"/>
-          </ac:spMkLst>
-        </pc:spChg>
-        <pc:spChg chg="mod">
-          <ac:chgData name="Matt Justice" userId="c0ecbdc24dae9ab7" providerId="LiveId" clId="{1B71CDF3-5DA8-4669-AE89-7D7FE3D54620}" dt="2026-06-08T19:34:12.192" v="244" actId="20577"/>
-          <ac:spMkLst>
-            <pc:docMk/>
-            <pc:sldMk cId="0" sldId="263"/>
-            <ac:spMk id="51" creationId="{00000000-0000-0000-0000-000000000000}"/>
-          </ac:spMkLst>
-        </pc:spChg>
-        <pc:spChg chg="mod">
-          <ac:chgData name="Matt Justice" userId="c0ecbdc24dae9ab7" providerId="LiveId" clId="{1B71CDF3-5DA8-4669-AE89-7D7FE3D54620}" dt="2026-06-08T19:33:59.496" v="238" actId="20577"/>
-          <ac:spMkLst>
-            <pc:docMk/>
-            <pc:sldMk cId="0" sldId="263"/>
-            <ac:spMk id="53" creationId="{00000000-0000-0000-0000-000000000000}"/>
-          </ac:spMkLst>
-        </pc:spChg>
-        <pc:spChg chg="mod">
-          <ac:chgData name="Matt Justice" userId="c0ecbdc24dae9ab7" providerId="LiveId" clId="{1B71CDF3-5DA8-4669-AE89-7D7FE3D54620}" dt="2026-06-08T19:29:28.482" v="150" actId="20577"/>
-          <ac:spMkLst>
-            <pc:docMk/>
-            <pc:sldMk cId="0" sldId="263"/>
-            <ac:spMk id="59" creationId="{00000000-0000-0000-0000-000000000000}"/>
-          </ac:spMkLst>
-        </pc:spChg>
-        <pc:spChg chg="mod">
-          <ac:chgData name="Matt Justice" userId="c0ecbdc24dae9ab7" providerId="LiveId" clId="{1B71CDF3-5DA8-4669-AE89-7D7FE3D54620}" dt="2026-06-08T19:31:11.871" v="168" actId="20577"/>
-          <ac:spMkLst>
-            <pc:docMk/>
-            <pc:sldMk cId="0" sldId="263"/>
-            <ac:spMk id="61" creationId="{00000000-0000-0000-0000-000000000000}"/>
-          </ac:spMkLst>
-        </pc:spChg>
-        <pc:spChg chg="mod">
-          <ac:chgData name="Matt Justice" userId="c0ecbdc24dae9ab7" providerId="LiveId" clId="{1B71CDF3-5DA8-4669-AE89-7D7FE3D54620}" dt="2026-06-08T19:32:08.761" v="196" actId="20577"/>
-          <ac:spMkLst>
-            <pc:docMk/>
-            <pc:sldMk cId="0" sldId="263"/>
-            <ac:spMk id="63" creationId="{00000000-0000-0000-0000-000000000000}"/>
-          </ac:spMkLst>
-        </pc:spChg>
-        <pc:spChg chg="mod">
-          <ac:chgData name="Matt Justice" userId="c0ecbdc24dae9ab7" providerId="LiveId" clId="{1B71CDF3-5DA8-4669-AE89-7D7FE3D54620}" dt="2026-06-08T19:28:18.393" v="126" actId="20577"/>
-          <ac:spMkLst>
-            <pc:docMk/>
-            <pc:sldMk cId="0" sldId="263"/>
-            <ac:spMk id="69" creationId="{00000000-0000-0000-0000-000000000000}"/>
-          </ac:spMkLst>
-        </pc:spChg>
-        <pc:spChg chg="mod">
-          <ac:chgData name="Matt Justice" userId="c0ecbdc24dae9ab7" providerId="LiveId" clId="{1B71CDF3-5DA8-4669-AE89-7D7FE3D54620}" dt="2026-06-08T19:27:53.224" v="116" actId="20577"/>
-          <ac:spMkLst>
-            <pc:docMk/>
-            <pc:sldMk cId="0" sldId="263"/>
-            <ac:spMk id="71" creationId="{00000000-0000-0000-0000-000000000000}"/>
-          </ac:spMkLst>
-        </pc:spChg>
-        <pc:spChg chg="mod">
-          <ac:chgData name="Matt Justice" userId="c0ecbdc24dae9ab7" providerId="LiveId" clId="{1B71CDF3-5DA8-4669-AE89-7D7FE3D54620}" dt="2026-06-08T19:31:34.561" v="186" actId="20577"/>
-          <ac:spMkLst>
-            <pc:docMk/>
-            <pc:sldMk cId="0" sldId="263"/>
-            <ac:spMk id="79" creationId="{00000000-0000-0000-0000-000000000000}"/>
-          </ac:spMkLst>
-        </pc:spChg>
-        <pc:spChg chg="mod">
-          <ac:chgData name="Matt Justice" userId="c0ecbdc24dae9ab7" providerId="LiveId" clId="{1B71CDF3-5DA8-4669-AE89-7D7FE3D54620}" dt="2026-06-08T19:30:01.856" v="156" actId="20577"/>
-          <ac:spMkLst>
-            <pc:docMk/>
-            <pc:sldMk cId="0" sldId="263"/>
-            <ac:spMk id="81" creationId="{00000000-0000-0000-0000-000000000000}"/>
-          </ac:spMkLst>
-        </pc:spChg>
-        <pc:spChg chg="mod">
-          <ac:chgData name="Matt Justice" userId="c0ecbdc24dae9ab7" providerId="LiveId" clId="{1B71CDF3-5DA8-4669-AE89-7D7FE3D54620}" dt="2026-06-08T19:33:07.023" v="212" actId="20577"/>
-          <ac:spMkLst>
-            <pc:docMk/>
-            <pc:sldMk cId="0" sldId="263"/>
-            <ac:spMk id="83" creationId="{00000000-0000-0000-0000-000000000000}"/>
-          </ac:spMkLst>
-        </pc:spChg>
-        <pc:spChg chg="mod">
-          <ac:chgData name="Matt Justice" userId="c0ecbdc24dae9ab7" providerId="LiveId" clId="{1B71CDF3-5DA8-4669-AE89-7D7FE3D54620}" dt="2026-06-08T19:30:37.296" v="164" actId="20577"/>
-          <ac:spMkLst>
-            <pc:docMk/>
-            <pc:sldMk cId="0" sldId="263"/>
-            <ac:spMk id="89" creationId="{00000000-0000-0000-0000-000000000000}"/>
-          </ac:spMkLst>
-        </pc:spChg>
-        <pc:spChg chg="mod">
-          <ac:chgData name="Matt Justice" userId="c0ecbdc24dae9ab7" providerId="LiveId" clId="{1B71CDF3-5DA8-4669-AE89-7D7FE3D54620}" dt="2026-06-08T19:31:58.024" v="190" actId="20577"/>
-          <ac:spMkLst>
-            <pc:docMk/>
-            <pc:sldMk cId="0" sldId="263"/>
-            <ac:spMk id="91" creationId="{00000000-0000-0000-0000-000000000000}"/>
-          </ac:spMkLst>
-        </pc:spChg>
-        <pc:spChg chg="mod">
-          <ac:chgData name="Matt Justice" userId="c0ecbdc24dae9ab7" providerId="LiveId" clId="{1B71CDF3-5DA8-4669-AE89-7D7FE3D54620}" dt="2026-06-08T19:32:36.737" v="202" actId="20577"/>
-          <ac:spMkLst>
-            <pc:docMk/>
-            <pc:sldMk cId="0" sldId="263"/>
-            <ac:spMk id="93" creationId="{00000000-0000-0000-0000-000000000000}"/>
-          </ac:spMkLst>
-        </pc:spChg>
-        <pc:spChg chg="mod">
-          <ac:chgData name="Matt Justice" userId="c0ecbdc24dae9ab7" providerId="LiveId" clId="{1B71CDF3-5DA8-4669-AE89-7D7FE3D54620}" dt="2026-06-08T19:29:16.857" v="149" actId="20577"/>
-          <ac:spMkLst>
-            <pc:docMk/>
-            <pc:sldMk cId="0" sldId="263"/>
-            <ac:spMk id="95" creationId="{00000000-0000-0000-0000-000000000000}"/>
-          </ac:spMkLst>
-        </pc:spChg>
-        <pc:spChg chg="mod">
-          <ac:chgData name="Matt Justice" userId="c0ecbdc24dae9ab7" providerId="LiveId" clId="{1B71CDF3-5DA8-4669-AE89-7D7FE3D54620}" dt="2026-06-08T17:59:23.117" v="38" actId="20577"/>
-          <ac:spMkLst>
-            <pc:docMk/>
-            <pc:sldMk cId="0" sldId="263"/>
-            <ac:spMk id="151" creationId="{00000000-0000-0000-0000-000000000000}"/>
-          </ac:spMkLst>
-        </pc:spChg>
-        <pc:spChg chg="mod">
-          <ac:chgData name="Matt Justice" userId="c0ecbdc24dae9ab7" providerId="LiveId" clId="{1B71CDF3-5DA8-4669-AE89-7D7FE3D54620}" dt="2026-06-08T17:57:55.310" v="15" actId="20577"/>
-          <ac:spMkLst>
-            <pc:docMk/>
-            <pc:sldMk cId="0" sldId="263"/>
-            <ac:spMk id="161" creationId="{00000000-0000-0000-0000-000000000000}"/>
-          </ac:spMkLst>
-        </pc:spChg>
-        <pc:spChg chg="mod">
-          <ac:chgData name="Matt Justice" userId="c0ecbdc24dae9ab7" providerId="LiveId" clId="{1B71CDF3-5DA8-4669-AE89-7D7FE3D54620}" dt="2026-06-08T18:03:08.597" v="74" actId="20577"/>
-          <ac:spMkLst>
-            <pc:docMk/>
-            <pc:sldMk cId="0" sldId="263"/>
-            <ac:spMk id="188" creationId="{00000000-0000-0000-0000-000000000000}"/>
-          </ac:spMkLst>
-        </pc:spChg>
-        <pc:spChg chg="mod">
-          <ac:chgData name="Matt Justice" userId="c0ecbdc24dae9ab7" providerId="LiveId" clId="{1B71CDF3-5DA8-4669-AE89-7D7FE3D54620}" dt="2026-06-08T18:23:06.985" v="94" actId="20577"/>
-          <ac:spMkLst>
-            <pc:docMk/>
-            <pc:sldMk cId="0" sldId="263"/>
-            <ac:spMk id="189" creationId="{00000000-0000-0000-0000-000000000000}"/>
-          </ac:spMkLst>
-        </pc:spChg>
-        <pc:spChg chg="mod">
-          <ac:chgData name="Matt Justice" userId="c0ecbdc24dae9ab7" providerId="LiveId" clId="{1B71CDF3-5DA8-4669-AE89-7D7FE3D54620}" dt="2026-06-08T18:03:18.071" v="80" actId="20577"/>
-          <ac:spMkLst>
-            <pc:docMk/>
-            <pc:sldMk cId="0" sldId="263"/>
-            <ac:spMk id="192" creationId="{00000000-0000-0000-0000-000000000000}"/>
-          </ac:spMkLst>
-        </pc:spChg>
-        <pc:spChg chg="mod">
-          <ac:chgData name="Matt Justice" userId="c0ecbdc24dae9ab7" providerId="LiveId" clId="{1B71CDF3-5DA8-4669-AE89-7D7FE3D54620}" dt="2026-06-08T18:00:11.809" v="53" actId="20577"/>
-          <ac:spMkLst>
-            <pc:docMk/>
-            <pc:sldMk cId="0" sldId="263"/>
-            <ac:spMk id="193" creationId="{00000000-0000-0000-0000-000000000000}"/>
-          </ac:spMkLst>
-        </pc:spChg>
-      </pc:sldChg>
-      <pc:sldChg chg="modSp mod">
-        <pc:chgData name="Matt Justice" userId="c0ecbdc24dae9ab7" providerId="LiveId" clId="{1B71CDF3-5DA8-4669-AE89-7D7FE3D54620}" dt="2026-06-08T19:38:00.144" v="300" actId="20577"/>
-        <pc:sldMkLst>
-          <pc:docMk/>
-          <pc:sldMk cId="0" sldId="265"/>
-        </pc:sldMkLst>
-        <pc:spChg chg="mod">
-          <ac:chgData name="Matt Justice" userId="c0ecbdc24dae9ab7" providerId="LiveId" clId="{1B71CDF3-5DA8-4669-AE89-7D7FE3D54620}" dt="2026-06-08T19:37:55.727" v="297" actId="20577"/>
-          <ac:spMkLst>
-            <pc:docMk/>
-            <pc:sldMk cId="0" sldId="265"/>
-            <ac:spMk id="54" creationId="{00000000-0000-0000-0000-000000000000}"/>
-          </ac:spMkLst>
-        </pc:spChg>
-        <pc:spChg chg="mod">
-          <ac:chgData name="Matt Justice" userId="c0ecbdc24dae9ab7" providerId="LiveId" clId="{1B71CDF3-5DA8-4669-AE89-7D7FE3D54620}" dt="2026-06-08T19:38:00.144" v="300" actId="20577"/>
-          <ac:spMkLst>
-            <pc:docMk/>
-            <pc:sldMk cId="0" sldId="265"/>
-            <ac:spMk id="56" creationId="{00000000-0000-0000-0000-000000000000}"/>
-          </ac:spMkLst>
-        </pc:spChg>
-      </pc:sldChg>
-    </pc:docChg>
-  </pc:docChgLst>
-</pc:chgInfo>
-</file>
-
 <file path=ppt/charts/chart1.xml><?xml version="1.0" encoding="utf-8"?>
 <c:chartSpace xmlns:c="http://schemas.openxmlformats.org/drawingml/2006/chart" xmlns:a="http://schemas.openxmlformats.org/drawingml/2006/main" xmlns:r="http://schemas.openxmlformats.org/officeDocument/2006/relationships" xmlns:c16r2="http://schemas.microsoft.com/office/drawing/2015/06/chart">
   <c:date1904 val="0"/>
@@ -932,7 +198,7 @@
             <c:strRef>
               <c:f>Sheet1!$A$2:$A$6</c:f>
               <c:strCache>
-                <c:ptCount val="6"/>
+                <c:ptCount val="5"/>
                 <c:pt idx="0">
                   <c:v>Jan</c:v>
                 </c:pt>
@@ -948,9 +214,6 @@
                 <c:pt idx="4">
                   <c:v>May</c:v>
                 </c:pt>
-                <c:pt idx="5">
-                  <c:v>Jun</c:v>
-                </c:pt>
               </c:strCache>
             </c:strRef>
           </c:cat>
@@ -959,7 +222,7 @@
               <c:f>Sheet1!$B$2:$B$6</c:f>
               <c:numCache>
                 <c:formatCode>General</c:formatCode>
-                <c:ptCount val="6"/>
+                <c:ptCount val="5"/>
                 <c:pt idx="0">
                   <c:v>1.31</c:v>
                 </c:pt>
@@ -974,9 +237,6 @@
                 </c:pt>
                 <c:pt idx="4">
                   <c:v>2.06</c:v>
-                </c:pt>
-                <c:pt idx="5">
-                  <c:v>2.6549999999999998</c:v>
                 </c:pt>
               </c:numCache>
             </c:numRef>
@@ -1049,7 +309,7 @@
             <c:strRef>
               <c:f>Sheet1!$A$2:$A$6</c:f>
               <c:strCache>
-                <c:ptCount val="6"/>
+                <c:ptCount val="5"/>
                 <c:pt idx="0">
                   <c:v>Jan</c:v>
                 </c:pt>
@@ -1065,9 +325,6 @@
                 <c:pt idx="4">
                   <c:v>May</c:v>
                 </c:pt>
-                <c:pt idx="5">
-                  <c:v>Jun</c:v>
-                </c:pt>
               </c:strCache>
             </c:strRef>
           </c:cat>
@@ -1076,7 +333,7 @@
               <c:f>Sheet1!$C$2:$C$6</c:f>
               <c:numCache>
                 <c:formatCode>General</c:formatCode>
-                <c:ptCount val="6"/>
+                <c:ptCount val="5"/>
                 <c:pt idx="0">
                   <c:v>1.226</c:v>
                 </c:pt>
@@ -1091,9 +348,6 @@
                 </c:pt>
                 <c:pt idx="4">
                   <c:v>1.9410000000000001</c:v>
-                </c:pt>
-                <c:pt idx="5">
-                  <c:v>2.1850000000000001</c:v>
                 </c:pt>
               </c:numCache>
             </c:numRef>
@@ -1288,7 +542,7 @@
             <c:strRef>
               <c:f>Sheet1!$A$2:$A$6</c:f>
               <c:strCache>
-                <c:ptCount val="6"/>
+                <c:ptCount val="5"/>
                 <c:pt idx="0">
                   <c:v>Jan</c:v>
                 </c:pt>
@@ -1304,9 +558,6 @@
                 <c:pt idx="4">
                   <c:v>May</c:v>
                 </c:pt>
-                <c:pt idx="5">
-                  <c:v>Jun</c:v>
-                </c:pt>
               </c:strCache>
             </c:strRef>
           </c:cat>
@@ -1315,7 +566,7 @@
               <c:f>Sheet1!$B$2:$B$6</c:f>
               <c:numCache>
                 <c:formatCode>General</c:formatCode>
-                <c:ptCount val="6"/>
+                <c:ptCount val="5"/>
                 <c:pt idx="0">
                   <c:v>5.07</c:v>
                 </c:pt>
@@ -1330,9 +581,6 @@
                 </c:pt>
                 <c:pt idx="4">
                   <c:v>5.53</c:v>
-                </c:pt>
-                <c:pt idx="5">
-                  <c:v>5.87</c:v>
                 </c:pt>
               </c:numCache>
             </c:numRef>
@@ -1403,7 +651,7 @@
             <c:strRef>
               <c:f>Sheet1!$A$2:$A$6</c:f>
               <c:strCache>
-                <c:ptCount val="6"/>
+                <c:ptCount val="5"/>
                 <c:pt idx="0">
                   <c:v>Jan</c:v>
                 </c:pt>
@@ -1419,9 +667,6 @@
                 <c:pt idx="4">
                   <c:v>May</c:v>
                 </c:pt>
-                <c:pt idx="5">
-                  <c:v>Jun</c:v>
-                </c:pt>
               </c:strCache>
             </c:strRef>
           </c:cat>
@@ -1430,7 +675,7 @@
               <c:f>Sheet1!$C$2:$C$6</c:f>
               <c:numCache>
                 <c:formatCode>General</c:formatCode>
-                <c:ptCount val="6"/>
+                <c:ptCount val="5"/>
                 <c:pt idx="0">
                   <c:v>6.59</c:v>
                 </c:pt>
@@ -1445,9 +690,6 @@
                 </c:pt>
                 <c:pt idx="4">
                   <c:v>7.18</c:v>
-                </c:pt>
-                <c:pt idx="5">
-                  <c:v>7.41</c:v>
                 </c:pt>
               </c:numCache>
             </c:numRef>
@@ -1504,7 +746,7 @@
             <c:strRef>
               <c:f>Sheet1!$A$2:$A$6</c:f>
               <c:strCache>
-                <c:ptCount val="6"/>
+                <c:ptCount val="5"/>
                 <c:pt idx="0">
                   <c:v>Jan</c:v>
                 </c:pt>
@@ -1520,9 +762,6 @@
                 <c:pt idx="4">
                   <c:v>May</c:v>
                 </c:pt>
-                <c:pt idx="5">
-                  <c:v>Jun</c:v>
-                </c:pt>
               </c:strCache>
             </c:strRef>
           </c:cat>
@@ -1531,7 +770,7 @@
               <c:f>Sheet1!$D$2:$D$6</c:f>
               <c:numCache>
                 <c:formatCode>General</c:formatCode>
-                <c:ptCount val="6"/>
+                <c:ptCount val="5"/>
                 <c:pt idx="0">
                   <c:v>6.58</c:v>
                 </c:pt>
@@ -1546,9 +785,6 @@
                 </c:pt>
                 <c:pt idx="4">
                   <c:v>7.17</c:v>
-                </c:pt>
-                <c:pt idx="5">
-                  <c:v>7.35</c:v>
                 </c:pt>
               </c:numCache>
             </c:numRef>
@@ -1764,7 +1000,7 @@
             <c:strRef>
               <c:f>Sheet1!$A$2:$A$6</c:f>
               <c:strCache>
-                <c:ptCount val="6"/>
+                <c:ptCount val="5"/>
                 <c:pt idx="0">
                   <c:v>Jan</c:v>
                 </c:pt>
@@ -1780,9 +1016,6 @@
                 <c:pt idx="4">
                   <c:v>May</c:v>
                 </c:pt>
-                <c:pt idx="5">
-                  <c:v>Jun</c:v>
-                </c:pt>
               </c:strCache>
             </c:strRef>
           </c:cat>
@@ -1791,7 +1024,7 @@
               <c:f>Sheet1!$B$2:$B$6</c:f>
               <c:numCache>
                 <c:formatCode>General</c:formatCode>
-                <c:ptCount val="6"/>
+                <c:ptCount val="5"/>
                 <c:pt idx="0">
                   <c:v>48.71</c:v>
                 </c:pt>
@@ -1806,9 +1039,6 @@
                 </c:pt>
                 <c:pt idx="4">
                   <c:v>66.040000000000006</c:v>
-                </c:pt>
-                <c:pt idx="5">
-                  <c:v>70.61</c:v>
                 </c:pt>
               </c:numCache>
             </c:numRef>
@@ -1865,7 +1095,7 @@
             <c:strRef>
               <c:f>Sheet1!$A$2:$A$6</c:f>
               <c:strCache>
-                <c:ptCount val="6"/>
+                <c:ptCount val="5"/>
                 <c:pt idx="0">
                   <c:v>Jan</c:v>
                 </c:pt>
@@ -1881,9 +1111,6 @@
                 <c:pt idx="4">
                   <c:v>May</c:v>
                 </c:pt>
-                <c:pt idx="5">
-                  <c:v>Jun</c:v>
-                </c:pt>
               </c:strCache>
             </c:strRef>
           </c:cat>
@@ -1892,7 +1119,7 @@
               <c:f>Sheet1!$C$2:$C$6</c:f>
               <c:numCache>
                 <c:formatCode>General</c:formatCode>
-                <c:ptCount val="6"/>
+                <c:ptCount val="5"/>
                 <c:pt idx="0">
                   <c:v>12.75</c:v>
                 </c:pt>
@@ -1907,9 +1134,6 @@
                 </c:pt>
                 <c:pt idx="4">
                   <c:v>29.6</c:v>
-                </c:pt>
-                <c:pt idx="5">
-                  <c:v>48.36</c:v>
                 </c:pt>
               </c:numCache>
             </c:numRef>
@@ -11566,7 +10790,7 @@
                 <a:ea typeface="Calibri" pitchFamily="34" charset="-122"/>
                 <a:cs typeface="Calibri" pitchFamily="34" charset="-120"/>
               </a:rPr>
-              <a:t>Updated Q2 2026 Close · Board discussion</a:t>
+              <a:t>Updated Q2 / Jun 2026 · Board discussion</a:t>
             </a:r>
             <a:endParaRPr lang="en-US" sz="950" dirty="0"/>
           </a:p>
@@ -11708,7 +10932,7 @@
                 <a:ea typeface="Calibri" pitchFamily="34" charset="-122"/>
                 <a:cs typeface="Calibri" pitchFamily="34" charset="-120"/>
               </a:rPr>
-              <a:t>Full-year ARR forecast maintained at $97.5M (+$1.4M vs $96.1M budget). June ARR $86.10M best month of H1 — net new $2.655M (+103% vs Jan). H2 net new target $2.0–2.3M/month supported by 3.3x pipeline coverage and improving CS expansion velocity.</a:t>
+              <a:t>Updating full-year ARR forecast maintained at $97.5M (+$1.4M vs $96.1M budget). Net new ARR improved 57% Jan→May with enterprise expansion momentum and improving new logo velocity. We expect net new ARR of $2.0–2.3M/month in H2 based on current pipeline coverage.</a:t>
             </a:r>
             <a:endParaRPr lang="en-US" sz="850" dirty="0"/>
           </a:p>
@@ -11818,7 +11042,7 @@
                 <a:ea typeface="Calibri" pitchFamily="34" charset="-122"/>
                 <a:cs typeface="Calibri" pitchFamily="34" charset="-120"/>
               </a:rPr>
-              <a:t>Partner (2.61x) and Organic (2.26x) outperforming at 3.3x combined pipeline efficiency vs 1.97x Paid Search. Proposing reallocation of 25% of Paid budget (+$0.96M) to Partner and Organic — budget-neutral with estimated +$5M pipeline impact.</a:t>
+              <a:t>Paid Search and Paid Social absorb 52% of budget at 1.2–1.3x efficiency with sub-6% win rates. Proposing reallocation of 25% of Paid budget (+$0.96M) to Partner and Referral — budget-neutral decision with estimated +$5M pipeline impact. Requires board approval.</a:t>
             </a:r>
             <a:endParaRPr lang="en-US" sz="850" dirty="0"/>
           </a:p>
@@ -11928,7 +11152,7 @@
                 <a:ea typeface="Calibri" pitchFamily="34" charset="-122"/>
                 <a:cs typeface="Calibri" pitchFamily="34" charset="-120"/>
               </a:rPr>
-              <a:t>SMB represents 78% of gross churn at $7.0M annual forecast. CSM-led at-risk intervention activated in Q3. Target: maintain GRR above 99.0% through year-end. Protects NRR trajectory and ~$0.8M of at-risk ARR in Q3 renewal cycle.</a:t>
+              <a:t>SMB represents 78% of gross churn at $7.0M annual forecast. Targeted CSM intervention program with defined at-risk triggers will be activated in Q3. Target: protect GRR above 99.0% through year-end. Protects NRR trajectory and ~$0.8M of at-risk ARR.</a:t>
             </a:r>
             <a:endParaRPr lang="en-US" sz="850" dirty="0"/>
           </a:p>
@@ -12038,7 +11262,7 @@
                 <a:ea typeface="Calibri" pitchFamily="34" charset="-122"/>
                 <a:cs typeface="Calibri" pitchFamily="34" charset="-120"/>
               </a:rPr>
-              <a:t>Cash $70.61M with 24+ months runway. June collections $11.18M above May run rate. Expanding annual billing terms to mid-market in H2 — projected $5–8M incremental cash. Revenue recognition neutral.</a:t>
+              <a:t>Cash at $66.0M with &gt;24 months runway. Expanding annual billing terms to mid-market renewals in H2 with projected impact of $5–8M incremental cash by year-end. Revenue recognition neutral.</a:t>
             </a:r>
             <a:endParaRPr lang="en-US" sz="850" dirty="0"/>
           </a:p>
@@ -13032,7 +12256,7 @@
                 <a:ea typeface="Calibri" pitchFamily="34" charset="-122"/>
                 <a:cs typeface="Calibri" pitchFamily="34" charset="-120"/>
               </a:rPr>
-              <a:t>79.0%</a:t>
+              <a:t>77.0%</a:t>
             </a:r>
             <a:endParaRPr lang="en-US" sz="800" dirty="0"/>
           </a:p>
@@ -13174,7 +12398,7 @@
                 <a:ea typeface="Calibri" pitchFamily="34" charset="-122"/>
                 <a:cs typeface="Calibri" pitchFamily="34" charset="-120"/>
               </a:rPr>
-              <a:t>+200bps</a:t>
+              <a:t>—</a:t>
             </a:r>
             <a:endParaRPr lang="en-US" sz="800" dirty="0"/>
           </a:p>
@@ -13316,7 +12540,7 @@
                 <a:ea typeface="Calibri" pitchFamily="34" charset="-122"/>
                 <a:cs typeface="Calibri" pitchFamily="34" charset="-120"/>
               </a:rPr>
-              <a:t>($2.6M)</a:t>
+              <a:t>-$2.6M</a:t>
             </a:r>
             <a:endParaRPr lang="en-US" sz="800" dirty="0"/>
           </a:p>
@@ -13387,7 +12611,7 @@
                 <a:ea typeface="Calibri" pitchFamily="34" charset="-122"/>
                 <a:cs typeface="Calibri" pitchFamily="34" charset="-120"/>
               </a:rPr>
-              <a:t>($2.7M)</a:t>
+              <a:t>-$2.7M</a:t>
             </a:r>
             <a:endParaRPr lang="en-US" sz="800" dirty="0"/>
           </a:p>
@@ -13884,7 +13108,7 @@
                 <a:ea typeface="Calibri" pitchFamily="34" charset="-122"/>
                 <a:cs typeface="Calibri" pitchFamily="34" charset="-120"/>
               </a:rPr>
-              <a:t>147</a:t>
+              <a:t>156</a:t>
             </a:r>
             <a:endParaRPr lang="en-US" sz="800" dirty="0"/>
           </a:p>
@@ -13955,7 +13179,7 @@
                 <a:ea typeface="Calibri" pitchFamily="34" charset="-122"/>
                 <a:cs typeface="Calibri" pitchFamily="34" charset="-120"/>
               </a:rPr>
-              <a:t>147</a:t>
+              <a:t>154</a:t>
             </a:r>
             <a:endParaRPr lang="en-US" sz="800" dirty="0"/>
           </a:p>
@@ -14026,7 +13250,7 @@
                 <a:ea typeface="Calibri" pitchFamily="34" charset="-122"/>
                 <a:cs typeface="Calibri" pitchFamily="34" charset="-120"/>
               </a:rPr>
-              <a:t>—</a:t>
+              <a:t>+2</a:t>
             </a:r>
             <a:endParaRPr lang="en-US" sz="800" dirty="0"/>
           </a:p>
@@ -15780,6 +15004,45 @@
       </p:sp>
       <p:sp>
         <p:nvSpPr>
+          <p:cNvPr id="46" name="Text 44"/>
+          <p:cNvSpPr/>
+          <p:nvPr/>
+        </p:nvSpPr>
+        <p:spPr>
+          <a:xfrm>
+            <a:off x="365760" y="4864608"/>
+            <a:ext cx="8412480" cy="164592"/>
+          </a:xfrm>
+          <a:prstGeom prst="rect">
+            <a:avLst/>
+          </a:prstGeom>
+          <a:noFill/>
+          <a:ln/>
+        </p:spPr>
+        <p:txBody>
+          <a:bodyPr wrap="square" rtlCol="0" anchor="ctr"/>
+          <a:lstStyle/>
+          <a:p>
+            <a:pPr marL="0" indent="0" algn="ctr">
+              <a:buNone/>
+            </a:pPr>
+            <a:r>
+              <a:rPr lang="en-US" sz="800" dirty="0">
+                <a:solidFill>
+                  <a:srgbClr val="64748B"/>
+                </a:solidFill>
+                <a:latin typeface="Calibri" pitchFamily="34" charset="0"/>
+                <a:ea typeface="Calibri" pitchFamily="34" charset="-122"/>
+                <a:cs typeface="Calibri" pitchFamily="34" charset="-120"/>
+              </a:rPr>
+              <a:t>SMPL · Prepared by Finance · Q2 / Jun 2026 · For Board Use Only</a:t>
+            </a:r>
+            <a:endParaRPr lang="en-US" sz="800" dirty="0"/>
+          </a:p>
+        </p:txBody>
+      </p:sp>
+      <p:sp>
+        <p:nvSpPr>
           <p:cNvPr id="47" name="Shape 45"/>
           <p:cNvSpPr/>
           <p:nvPr/>
@@ -17908,7 +17171,7 @@
                 <a:ea typeface="Calibri" pitchFamily="34" charset="-122"/>
                 <a:cs typeface="Calibri" pitchFamily="34" charset="-120"/>
               </a:rPr>
-              <a:t>($1.30M)</a:t>
+              <a:t>-$1.30M</a:t>
             </a:r>
             <a:endParaRPr lang="en-US" sz="800" dirty="0"/>
           </a:p>
@@ -17979,7 +17242,7 @@
                 <a:ea typeface="Calibri" pitchFamily="34" charset="-122"/>
                 <a:cs typeface="Calibri" pitchFamily="34" charset="-120"/>
               </a:rPr>
-              <a:t>($1.30M)</a:t>
+              <a:t>-$1.30M</a:t>
             </a:r>
             <a:endParaRPr lang="en-US" sz="800" dirty="0"/>
           </a:p>
@@ -18115,19 +17378,15 @@
             <a:r>
               <a:rPr lang="en-US" sz="800" dirty="0">
                 <a:solidFill>
-                  <a:srgbClr val="C00000"/>
-                </a:solidFill>
-                <a:latin typeface="Calibri" pitchFamily="34" charset="0"/>
-                <a:ea typeface="Calibri" pitchFamily="34" charset="-122"/>
-                <a:cs typeface="Calibri" pitchFamily="34" charset="-120"/>
-              </a:rPr>
-              <a:t>($0.21M)</a:t>
-            </a:r>
-            <a:endParaRPr lang="en-US" sz="800" dirty="0">
-              <a:solidFill>
-                <a:srgbClr val="C00000"/>
-              </a:solidFill>
-            </a:endParaRPr>
+                  <a:srgbClr val="0F172A"/>
+                </a:solidFill>
+                <a:latin typeface="Calibri" pitchFamily="34" charset="0"/>
+                <a:ea typeface="Calibri" pitchFamily="34" charset="-122"/>
+                <a:cs typeface="Calibri" pitchFamily="34" charset="-120"/>
+              </a:rPr>
+              <a:t>-$0.21M</a:t>
+            </a:r>
+            <a:endParaRPr lang="en-US" sz="800" dirty="0"/>
           </a:p>
         </p:txBody>
       </p:sp>
@@ -18190,19 +17449,15 @@
             <a:r>
               <a:rPr lang="en-US" sz="800" dirty="0">
                 <a:solidFill>
-                  <a:srgbClr val="C00000"/>
-                </a:solidFill>
-                <a:latin typeface="Calibri" pitchFamily="34" charset="0"/>
-                <a:ea typeface="Calibri" pitchFamily="34" charset="-122"/>
-                <a:cs typeface="Calibri" pitchFamily="34" charset="-120"/>
-              </a:rPr>
-              <a:t>(4.8%)</a:t>
-            </a:r>
-            <a:endParaRPr lang="en-US" sz="800" dirty="0">
-              <a:solidFill>
-                <a:srgbClr val="C00000"/>
-              </a:solidFill>
-            </a:endParaRPr>
+                  <a:srgbClr val="0F172A"/>
+                </a:solidFill>
+                <a:latin typeface="Calibri" pitchFamily="34" charset="0"/>
+                <a:ea typeface="Calibri" pitchFamily="34" charset="-122"/>
+                <a:cs typeface="Calibri" pitchFamily="34" charset="-120"/>
+              </a:rPr>
+              <a:t>-4.8%</a:t>
+            </a:r>
+            <a:endParaRPr lang="en-US" sz="800" dirty="0"/>
           </a:p>
         </p:txBody>
       </p:sp>
@@ -18768,7 +18023,7 @@
                 <a:ea typeface="Calibri" pitchFamily="34" charset="-122"/>
                 <a:cs typeface="Calibri" pitchFamily="34" charset="-120"/>
               </a:rPr>
-              <a:t>$2.66M</a:t>
+              <a:t>$2.655M</a:t>
             </a:r>
             <a:endParaRPr lang="en-US" sz="800" dirty="0"/>
           </a:p>
@@ -18839,7 +18094,7 @@
                 <a:ea typeface="Calibri" pitchFamily="34" charset="-122"/>
                 <a:cs typeface="Calibri" pitchFamily="34" charset="-120"/>
               </a:rPr>
-              <a:t>$2.19M</a:t>
+              <a:t>$2.185M</a:t>
             </a:r>
             <a:endParaRPr lang="en-US" sz="800" dirty="0"/>
           </a:p>
@@ -19951,29 +19206,33 @@
         <p:spPr>
           <a:xfrm>
             <a:off x="5804515" y="1124712"/>
-            <a:ext cx="3017520" cy="237744"/>
-          </a:xfrm>
-          <a:prstGeom prst="rect">
-            <a:avLst/>
-          </a:prstGeom>
-          <a:noFill/>
-          <a:ln/>
-        </p:spPr>
-        <p:txBody>
-          <a:bodyPr wrap="square" rtlCol="0" anchor="ctr">
-            <a:noAutofit/>
-          </a:bodyPr>
-          <a:lstStyle/>
-          <a:p>
-            <a:pPr algn="l"/>
+            <a:ext cx="3017520" cy="219456"/>
+          </a:xfrm>
+          <a:prstGeom prst="rect">
+            <a:avLst/>
+          </a:prstGeom>
+          <a:noFill/>
+          <a:ln/>
+        </p:spPr>
+        <p:txBody>
+          <a:bodyPr wrap="square" rtlCol="0" anchor="ctr"/>
+          <a:lstStyle/>
+          <a:p>
+            <a:pPr marL="0" indent="0">
+              <a:buNone/>
+            </a:pPr>
             <a:r>
               <a:rPr lang="en-US" sz="1000" b="1" dirty="0">
                 <a:solidFill>
                   <a:srgbClr val="1A2E44"/>
                 </a:solidFill>
+                <a:latin typeface="Calibri" pitchFamily="34" charset="0"/>
+                <a:ea typeface="Calibri" pitchFamily="34" charset="-122"/>
+                <a:cs typeface="Calibri" pitchFamily="34" charset="-120"/>
               </a:rPr>
               <a:t>Key Takeaways</a:t>
             </a:r>
+            <a:endParaRPr lang="en-US" sz="1000" dirty="0"/>
           </a:p>
         </p:txBody>
       </p:sp>
@@ -20015,30 +19274,45 @@
         </p:nvSpPr>
         <p:spPr>
           <a:xfrm>
-            <a:off x="5792004" y="1399032"/>
-            <a:ext cx="3017520" cy="480059"/>
-          </a:xfrm>
-          <a:prstGeom prst="rect">
-            <a:avLst/>
-          </a:prstGeom>
-          <a:noFill/>
-          <a:ln/>
-        </p:spPr>
-        <p:txBody>
-          <a:bodyPr wrap="square" rtlCol="0" anchor="ctr">
-            <a:noAutofit/>
-          </a:bodyPr>
-          <a:lstStyle/>
-          <a:p>
-            <a:pPr marL="0" indent="0" algn="l"/>
-            <a:r>
-              <a:rPr lang="en-US" sz="950" b="0" dirty="0">
-                <a:solidFill>
-                  <a:srgbClr val="000000"/>
-                </a:solidFill>
-              </a:rPr>
-              <a:t>• Revenue $7.41M (+0.8% vs budget) — Q2 subscription growth tracking ahead of plan; YTD $41.7M +$0.3M vs budget</a:t>
-            </a:r>
+            <a:off x="5792004" y="1463040"/>
+            <a:ext cx="3017520" cy="347472"/>
+          </a:xfrm>
+          <a:prstGeom prst="rect">
+            <a:avLst/>
+          </a:prstGeom>
+          <a:noFill/>
+          <a:ln/>
+        </p:spPr>
+        <p:txBody>
+          <a:bodyPr wrap="square" rtlCol="0" anchor="ctr"/>
+          <a:lstStyle/>
+          <a:p>
+            <a:pPr marL="0" indent="0">
+              <a:buNone/>
+            </a:pPr>
+            <a:r>
+              <a:rPr lang="en-US" sz="900" b="1" dirty="0">
+                <a:solidFill>
+                  <a:srgbClr val="0D9488"/>
+                </a:solidFill>
+                <a:latin typeface="Calibri" pitchFamily="34" charset="0"/>
+                <a:ea typeface="Calibri" pitchFamily="34" charset="-122"/>
+                <a:cs typeface="Calibri" pitchFamily="34" charset="-120"/>
+              </a:rPr>
+              <a:t>• </a:t>
+            </a:r>
+            <a:r>
+              <a:rPr lang="en-US" sz="900" dirty="0">
+                <a:solidFill>
+                  <a:srgbClr val="334155"/>
+                </a:solidFill>
+                <a:latin typeface="Calibri" pitchFamily="34" charset="0"/>
+                <a:ea typeface="Calibri" pitchFamily="34" charset="-122"/>
+                <a:cs typeface="Calibri" pitchFamily="34" charset="-120"/>
+              </a:rPr>
+              <a:t>Revenue +0.8% vs budget every month — subscription growth tracking ahead of plan through Q2</a:t>
+            </a:r>
+            <a:endParaRPr lang="en-US" sz="900" dirty="0"/>
           </a:p>
         </p:txBody>
       </p:sp>
@@ -20050,30 +19324,45 @@
         </p:nvSpPr>
         <p:spPr>
           <a:xfrm>
-            <a:off x="5787191" y="1873555"/>
-            <a:ext cx="3017520" cy="480059"/>
-          </a:xfrm>
-          <a:prstGeom prst="rect">
-            <a:avLst/>
-          </a:prstGeom>
-          <a:noFill/>
-          <a:ln/>
-        </p:spPr>
-        <p:txBody>
-          <a:bodyPr wrap="square" rtlCol="0" anchor="ctr">
-            <a:noAutofit/>
-          </a:bodyPr>
-          <a:lstStyle/>
-          <a:p>
-            <a:pPr marL="0" indent="0" algn="l"/>
-            <a:r>
-              <a:rPr lang="en-US" sz="950" b="0" dirty="0">
-                <a:solidFill>
-                  <a:srgbClr val="000000"/>
-                </a:solidFill>
-              </a:rPr>
-              <a:t>• ARR $86.10M exceeds $84.89M budget by +$1.21M; net new ARR +103% Jan→Jun ($1.31M to $2.655M); NRR 100.8%</a:t>
-            </a:r>
+            <a:off x="5792004" y="1847088"/>
+            <a:ext cx="3017520" cy="347472"/>
+          </a:xfrm>
+          <a:prstGeom prst="rect">
+            <a:avLst/>
+          </a:prstGeom>
+          <a:noFill/>
+          <a:ln/>
+        </p:spPr>
+        <p:txBody>
+          <a:bodyPr wrap="square" rtlCol="0" anchor="ctr"/>
+          <a:lstStyle/>
+          <a:p>
+            <a:pPr marL="0" indent="0">
+              <a:buNone/>
+            </a:pPr>
+            <a:r>
+              <a:rPr lang="en-US" sz="900" b="1" dirty="0">
+                <a:solidFill>
+                  <a:srgbClr val="0D9488"/>
+                </a:solidFill>
+                <a:latin typeface="Calibri" pitchFamily="34" charset="0"/>
+                <a:ea typeface="Calibri" pitchFamily="34" charset="-122"/>
+                <a:cs typeface="Calibri" pitchFamily="34" charset="-120"/>
+              </a:rPr>
+              <a:t>• </a:t>
+            </a:r>
+            <a:r>
+              <a:rPr lang="en-US" sz="900" dirty="0">
+                <a:solidFill>
+                  <a:srgbClr val="334155"/>
+                </a:solidFill>
+                <a:latin typeface="Calibri" pitchFamily="34" charset="0"/>
+                <a:ea typeface="Calibri" pitchFamily="34" charset="-122"/>
+                <a:cs typeface="Calibri" pitchFamily="34" charset="-120"/>
+              </a:rPr>
+              <a:t>ARR $86.10M exceeds $84.89M budget; net new ARR improved 57% Jan→May ($1.31M to $2.655M)</a:t>
+            </a:r>
+            <a:endParaRPr lang="en-US" sz="900" dirty="0"/>
           </a:p>
         </p:txBody>
       </p:sp>
@@ -20085,30 +19374,45 @@
         </p:nvSpPr>
         <p:spPr>
           <a:xfrm>
-            <a:off x="5784785" y="2295863"/>
-            <a:ext cx="3017520" cy="480059"/>
-          </a:xfrm>
-          <a:prstGeom prst="rect">
-            <a:avLst/>
-          </a:prstGeom>
-          <a:noFill/>
-          <a:ln/>
-        </p:spPr>
-        <p:txBody>
-          <a:bodyPr wrap="square" rtlCol="0" anchor="ctr">
-            <a:noAutofit/>
-          </a:bodyPr>
-          <a:lstStyle/>
-          <a:p>
-            <a:pPr marL="0" indent="0" algn="l"/>
-            <a:r>
-              <a:rPr lang="en-US" sz="950" b="0" dirty="0">
-                <a:solidFill>
-                  <a:srgbClr val="000000"/>
-                </a:solidFill>
-              </a:rPr>
-              <a:t>• Cash $70.61M exceeds $48.36M budget by $22.25M — Q1 annual billing collections + June $11.18M close</a:t>
-            </a:r>
+            <a:off x="5784785" y="2224278"/>
+            <a:ext cx="3017520" cy="347472"/>
+          </a:xfrm>
+          <a:prstGeom prst="rect">
+            <a:avLst/>
+          </a:prstGeom>
+          <a:noFill/>
+          <a:ln/>
+        </p:spPr>
+        <p:txBody>
+          <a:bodyPr wrap="square" rtlCol="0" anchor="ctr"/>
+          <a:lstStyle/>
+          <a:p>
+            <a:pPr marL="0" indent="0">
+              <a:buNone/>
+            </a:pPr>
+            <a:r>
+              <a:rPr lang="en-US" sz="900" b="1" dirty="0">
+                <a:solidFill>
+                  <a:srgbClr val="0D9488"/>
+                </a:solidFill>
+                <a:latin typeface="Calibri" pitchFamily="34" charset="0"/>
+                <a:ea typeface="Calibri" pitchFamily="34" charset="-122"/>
+                <a:cs typeface="Calibri" pitchFamily="34" charset="-120"/>
+              </a:rPr>
+              <a:t>• </a:t>
+            </a:r>
+            <a:r>
+              <a:rPr lang="en-US" sz="900" dirty="0">
+                <a:solidFill>
+                  <a:srgbClr val="334155"/>
+                </a:solidFill>
+                <a:latin typeface="Calibri" pitchFamily="34" charset="0"/>
+                <a:ea typeface="Calibri" pitchFamily="34" charset="-122"/>
+                <a:cs typeface="Calibri" pitchFamily="34" charset="-120"/>
+              </a:rPr>
+              <a:t>Cash $70.61M exceeds $48.36M budget by $22.25M — annual billing collections and strong June close</a:t>
+            </a:r>
+            <a:endParaRPr lang="en-US" sz="900" dirty="0"/>
           </a:p>
         </p:txBody>
       </p:sp>
@@ -20120,30 +19424,45 @@
         </p:nvSpPr>
         <p:spPr>
           <a:xfrm>
-            <a:off x="5784785" y="2660904"/>
-            <a:ext cx="3017520" cy="480059"/>
-          </a:xfrm>
-          <a:prstGeom prst="rect">
-            <a:avLst/>
-          </a:prstGeom>
-          <a:noFill/>
-          <a:ln/>
-        </p:spPr>
-        <p:txBody>
-          <a:bodyPr wrap="square" rtlCol="0" anchor="ctr">
-            <a:noAutofit/>
-          </a:bodyPr>
-          <a:lstStyle/>
-          <a:p>
-            <a:pPr marL="0" indent="0" algn="l"/>
-            <a:r>
-              <a:rPr lang="en-US" sz="950" b="0" dirty="0">
-                <a:solidFill>
-                  <a:srgbClr val="000000"/>
-                </a:solidFill>
-              </a:rPr>
-              <a:t>• NRR 100.8% — best reading of H1; June churn $0.115M favorable vs $0.50M budget; expansion outperforming</a:t>
-            </a:r>
+            <a:off x="5787191" y="2624328"/>
+            <a:ext cx="3017520" cy="347472"/>
+          </a:xfrm>
+          <a:prstGeom prst="rect">
+            <a:avLst/>
+          </a:prstGeom>
+          <a:noFill/>
+          <a:ln/>
+        </p:spPr>
+        <p:txBody>
+          <a:bodyPr wrap="square" rtlCol="0" anchor="ctr"/>
+          <a:lstStyle/>
+          <a:p>
+            <a:pPr marL="0" indent="0">
+              <a:buNone/>
+            </a:pPr>
+            <a:r>
+              <a:rPr lang="en-US" sz="900" b="1" dirty="0">
+                <a:solidFill>
+                  <a:srgbClr val="0D9488"/>
+                </a:solidFill>
+                <a:latin typeface="Calibri" pitchFamily="34" charset="0"/>
+                <a:ea typeface="Calibri" pitchFamily="34" charset="-122"/>
+                <a:cs typeface="Calibri" pitchFamily="34" charset="-120"/>
+              </a:rPr>
+              <a:t>• </a:t>
+            </a:r>
+            <a:r>
+              <a:rPr lang="en-US" sz="900" dirty="0">
+                <a:solidFill>
+                  <a:srgbClr val="334155"/>
+                </a:solidFill>
+                <a:latin typeface="Calibri" pitchFamily="34" charset="0"/>
+                <a:ea typeface="Calibri" pitchFamily="34" charset="-122"/>
+                <a:cs typeface="Calibri" pitchFamily="34" charset="-120"/>
+              </a:rPr>
+              <a:t>NRR improving to 100.8% — enterprise expansion offsetting SMB churn pressure</a:t>
+            </a:r>
+            <a:endParaRPr lang="en-US" sz="900" dirty="0"/>
           </a:p>
         </p:txBody>
       </p:sp>
@@ -20155,30 +19474,45 @@
         </p:nvSpPr>
         <p:spPr>
           <a:xfrm>
-            <a:off x="5787191" y="3079242"/>
-            <a:ext cx="3017520" cy="480059"/>
-          </a:xfrm>
-          <a:prstGeom prst="rect">
-            <a:avLst/>
-          </a:prstGeom>
-          <a:noFill/>
-          <a:ln/>
-        </p:spPr>
-        <p:txBody>
-          <a:bodyPr wrap="square" rtlCol="0" anchor="ctr">
-            <a:noAutofit/>
-          </a:bodyPr>
-          <a:lstStyle/>
-          <a:p>
-            <a:pPr marL="0" indent="0" algn="l"/>
-            <a:r>
-              <a:rPr lang="en-US" sz="950" b="0" dirty="0">
-                <a:solidFill>
-                  <a:srgbClr val="000000"/>
-                </a:solidFill>
-              </a:rPr>
-              <a:t>• EBITDA -$1.30M vs $0.65M budget (-$1.95M); Q2 variable comp timing reverses in Q3; GM +220bps above plan</a:t>
-            </a:r>
+            <a:off x="5782379" y="2999232"/>
+            <a:ext cx="3017520" cy="347472"/>
+          </a:xfrm>
+          <a:prstGeom prst="rect">
+            <a:avLst/>
+          </a:prstGeom>
+          <a:noFill/>
+          <a:ln/>
+        </p:spPr>
+        <p:txBody>
+          <a:bodyPr wrap="square" rtlCol="0" anchor="ctr"/>
+          <a:lstStyle/>
+          <a:p>
+            <a:pPr marL="0" indent="0">
+              <a:buNone/>
+            </a:pPr>
+            <a:r>
+              <a:rPr lang="en-US" sz="900" b="1" dirty="0">
+                <a:solidFill>
+                  <a:srgbClr val="0D9488"/>
+                </a:solidFill>
+                <a:latin typeface="Calibri" pitchFamily="34" charset="0"/>
+                <a:ea typeface="Calibri" pitchFamily="34" charset="-122"/>
+                <a:cs typeface="Calibri" pitchFamily="34" charset="-120"/>
+              </a:rPr>
+              <a:t>• </a:t>
+            </a:r>
+            <a:r>
+              <a:rPr lang="en-US" sz="900" dirty="0">
+                <a:solidFill>
+                  <a:srgbClr val="334155"/>
+                </a:solidFill>
+                <a:latin typeface="Calibri" pitchFamily="34" charset="0"/>
+                <a:ea typeface="Calibri" pitchFamily="34" charset="-122"/>
+                <a:cs typeface="Calibri" pitchFamily="34" charset="-120"/>
+              </a:rPr>
+              <a:t>EBITDA -$1.30M vs $0.65M budget — Q2 variable comp timing (-$0.9M reverses Q3) + GM +220bps</a:t>
+            </a:r>
+            <a:endParaRPr lang="en-US" sz="900" dirty="0"/>
           </a:p>
         </p:txBody>
       </p:sp>
@@ -21390,7 +20724,7 @@
                 <a:ea typeface="Calibri" pitchFamily="34" charset="-122"/>
                 <a:cs typeface="Calibri" pitchFamily="34" charset="-120"/>
               </a:rPr>
-              <a:t>Net New ARR (Jun)</a:t>
+              <a:t>Net New ARR (May)</a:t>
             </a:r>
             <a:endParaRPr lang="en-US" sz="750" dirty="0"/>
           </a:p>
@@ -21429,7 +20763,7 @@
                 <a:ea typeface="Calibri" pitchFamily="34" charset="-122"/>
                 <a:cs typeface="Calibri" pitchFamily="34" charset="-120"/>
               </a:rPr>
-              <a:t>$2.66M</a:t>
+              <a:t>$2.655M</a:t>
             </a:r>
             <a:endParaRPr lang="en-US" sz="1700" dirty="0"/>
           </a:p>
@@ -21791,7 +21125,7 @@
                 <a:ea typeface="Calibri" pitchFamily="34" charset="-122"/>
                 <a:cs typeface="Calibri" pitchFamily="34" charset="-120"/>
               </a:rPr>
-              <a:t>($7.0M)</a:t>
+              <a:t>-$7.0M</a:t>
             </a:r>
             <a:endParaRPr lang="en-US" sz="1700" dirty="0"/>
           </a:p>
@@ -21885,7 +21219,7 @@
                 <a:ea typeface="Calibri" pitchFamily="34" charset="-122"/>
                 <a:cs typeface="Calibri" pitchFamily="34" charset="-120"/>
               </a:rPr>
-              <a:t>FY2026 ARR BRIDGE</a:t>
+              <a:t>FY 2026 ARR BRIDGE</a:t>
             </a:r>
             <a:endParaRPr lang="en-US" sz="800" dirty="0"/>
           </a:p>
@@ -23447,7 +22781,7 @@
                 <a:ea typeface="Calibri" pitchFamily="34" charset="-122"/>
                 <a:cs typeface="Calibri" pitchFamily="34" charset="-120"/>
               </a:rPr>
-              <a:t>($3.9M)</a:t>
+              <a:t>-$3.9M</a:t>
             </a:r>
             <a:endParaRPr lang="en-US" sz="800" dirty="0"/>
           </a:p>
@@ -23518,7 +22852,7 @@
                 <a:ea typeface="Calibri" pitchFamily="34" charset="-122"/>
                 <a:cs typeface="Calibri" pitchFamily="34" charset="-120"/>
               </a:rPr>
-              <a:t>($4.0M)</a:t>
+              <a:t>-$4.0M</a:t>
             </a:r>
             <a:endParaRPr lang="en-US" sz="800" dirty="0"/>
           </a:p>
@@ -23731,7 +23065,7 @@
                 <a:ea typeface="Calibri" pitchFamily="34" charset="-122"/>
                 <a:cs typeface="Calibri" pitchFamily="34" charset="-120"/>
               </a:rPr>
-              <a:t>($7.0M)</a:t>
+              <a:t>-$7.0M</a:t>
             </a:r>
             <a:endParaRPr lang="en-US" sz="800" dirty="0"/>
           </a:p>
@@ -23802,7 +23136,7 @@
                 <a:ea typeface="Calibri" pitchFamily="34" charset="-122"/>
                 <a:cs typeface="Calibri" pitchFamily="34" charset="-120"/>
               </a:rPr>
-              <a:t>($7.2M)</a:t>
+              <a:t>-$7.2M</a:t>
             </a:r>
             <a:endParaRPr lang="en-US" sz="800" dirty="0"/>
           </a:p>
@@ -24171,7 +23505,7 @@
         </p:nvSpPr>
         <p:spPr>
           <a:xfrm>
-            <a:off x="5850716" y="3985332"/>
+            <a:off x="5852160" y="3994476"/>
             <a:ext cx="3063240" cy="969264"/>
           </a:xfrm>
           <a:prstGeom prst="rect">
@@ -24203,30 +23537,34 @@
         </p:nvSpPr>
         <p:spPr>
           <a:xfrm>
-            <a:off x="5987876" y="3989655"/>
-            <a:ext cx="2788920" cy="173263"/>
-          </a:xfrm>
-          <a:prstGeom prst="rect">
-            <a:avLst/>
-          </a:prstGeom>
-          <a:noFill/>
-          <a:ln/>
-        </p:spPr>
-        <p:txBody>
-          <a:bodyPr wrap="square" rtlCol="0" anchor="ctr">
-            <a:noAutofit/>
-          </a:bodyPr>
-          <a:lstStyle/>
-          <a:p>
-            <a:pPr algn="l"/>
+            <a:off x="5989320" y="4085916"/>
+            <a:ext cx="2788920" cy="219456"/>
+          </a:xfrm>
+          <a:prstGeom prst="rect">
+            <a:avLst/>
+          </a:prstGeom>
+          <a:noFill/>
+          <a:ln/>
+        </p:spPr>
+        <p:txBody>
+          <a:bodyPr wrap="square" rtlCol="0" anchor="ctr"/>
+          <a:lstStyle/>
+          <a:p>
+            <a:pPr marL="0" indent="0">
+              <a:buNone/>
+            </a:pPr>
             <a:r>
               <a:rPr lang="en-US" sz="1000" b="1" dirty="0">
                 <a:solidFill>
                   <a:srgbClr val="1A2E44"/>
                 </a:solidFill>
+                <a:latin typeface="Calibri" pitchFamily="34" charset="0"/>
+                <a:ea typeface="Calibri" pitchFamily="34" charset="-122"/>
+                <a:cs typeface="Calibri" pitchFamily="34" charset="-120"/>
               </a:rPr>
               <a:t>Key Takeaways</a:t>
             </a:r>
+            <a:endParaRPr lang="en-US" sz="1000" dirty="0"/>
           </a:p>
         </p:txBody>
       </p:sp>
@@ -24238,7 +23576,7 @@
         </p:nvSpPr>
         <p:spPr>
           <a:xfrm>
-            <a:off x="5987876" y="4162918"/>
+            <a:off x="5989320" y="4323660"/>
             <a:ext cx="2788920" cy="0"/>
           </a:xfrm>
           <a:prstGeom prst="line">
@@ -24268,30 +23606,45 @@
         </p:nvSpPr>
         <p:spPr>
           <a:xfrm>
-            <a:off x="5987876" y="4101084"/>
-            <a:ext cx="2788920" cy="480059"/>
-          </a:xfrm>
-          <a:prstGeom prst="rect">
-            <a:avLst/>
-          </a:prstGeom>
-          <a:noFill/>
-          <a:ln/>
-        </p:spPr>
-        <p:txBody>
-          <a:bodyPr wrap="square" rtlCol="0" anchor="ctr">
-            <a:noAutofit/>
-          </a:bodyPr>
-          <a:lstStyle/>
-          <a:p>
-            <a:pPr marL="0" indent="0" algn="l"/>
-            <a:r>
-              <a:rPr lang="en-US" sz="950" b="0" dirty="0">
-                <a:solidFill>
-                  <a:srgbClr val="000000"/>
-                </a:solidFill>
-              </a:rPr>
-              <a:t>• FY forecast $97.5M beats $96.1M budget by $1.4M — New Business and Expansion outperformance</a:t>
-            </a:r>
+            <a:off x="5987876" y="4303439"/>
+            <a:ext cx="2788920" cy="347472"/>
+          </a:xfrm>
+          <a:prstGeom prst="rect">
+            <a:avLst/>
+          </a:prstGeom>
+          <a:noFill/>
+          <a:ln/>
+        </p:spPr>
+        <p:txBody>
+          <a:bodyPr wrap="square" rtlCol="0" anchor="ctr"/>
+          <a:lstStyle/>
+          <a:p>
+            <a:pPr marL="0" indent="0">
+              <a:buNone/>
+            </a:pPr>
+            <a:r>
+              <a:rPr lang="en-US" sz="900" b="1" dirty="0">
+                <a:solidFill>
+                  <a:srgbClr val="0D9488"/>
+                </a:solidFill>
+                <a:latin typeface="Calibri" pitchFamily="34" charset="0"/>
+                <a:ea typeface="Calibri" pitchFamily="34" charset="-122"/>
+                <a:cs typeface="Calibri" pitchFamily="34" charset="-120"/>
+              </a:rPr>
+              <a:t>• </a:t>
+            </a:r>
+            <a:r>
+              <a:rPr lang="en-US" sz="900" dirty="0">
+                <a:solidFill>
+                  <a:srgbClr val="334155"/>
+                </a:solidFill>
+                <a:latin typeface="Calibri" pitchFamily="34" charset="0"/>
+                <a:ea typeface="Calibri" pitchFamily="34" charset="-122"/>
+                <a:cs typeface="Calibri" pitchFamily="34" charset="-120"/>
+              </a:rPr>
+              <a:t>FY forecast $97.5M beats $96.1M budget by $1.4M driven by New Business and Expansion outperformance</a:t>
+            </a:r>
+            <a:endParaRPr lang="en-US" sz="900" dirty="0"/>
           </a:p>
         </p:txBody>
       </p:sp>
@@ -24303,30 +23656,45 @@
         </p:nvSpPr>
         <p:spPr>
           <a:xfrm>
-            <a:off x="5989320" y="4405226"/>
-            <a:ext cx="2788920" cy="621792"/>
-          </a:xfrm>
-          <a:prstGeom prst="rect">
-            <a:avLst/>
-          </a:prstGeom>
-          <a:noFill/>
-          <a:ln/>
-        </p:spPr>
-        <p:txBody>
-          <a:bodyPr wrap="square" rtlCol="0" anchor="ctr">
-            <a:noAutofit/>
-          </a:bodyPr>
-          <a:lstStyle/>
-          <a:p>
-            <a:pPr marL="0" indent="0" algn="l"/>
-            <a:r>
-              <a:rPr lang="en-US" sz="950" b="0" dirty="0">
-                <a:solidFill>
-                  <a:srgbClr val="000000"/>
-                </a:solidFill>
-              </a:rPr>
-              <a:t>• Net new ARR +103% Jan→Jun ($1.31M → $2.655M); H2 supported by 3.3x pipeline coverage ($27.1M) and improving CS expansion velocity</a:t>
-            </a:r>
+            <a:off x="5987876" y="4626864"/>
+            <a:ext cx="2788920" cy="347472"/>
+          </a:xfrm>
+          <a:prstGeom prst="rect">
+            <a:avLst/>
+          </a:prstGeom>
+          <a:noFill/>
+          <a:ln/>
+        </p:spPr>
+        <p:txBody>
+          <a:bodyPr wrap="square" rtlCol="0" anchor="ctr"/>
+          <a:lstStyle/>
+          <a:p>
+            <a:pPr marL="0" indent="0">
+              <a:buNone/>
+            </a:pPr>
+            <a:r>
+              <a:rPr lang="en-US" sz="900" b="1" dirty="0">
+                <a:solidFill>
+                  <a:srgbClr val="0D9488"/>
+                </a:solidFill>
+                <a:latin typeface="Calibri" pitchFamily="34" charset="0"/>
+                <a:ea typeface="Calibri" pitchFamily="34" charset="-122"/>
+                <a:cs typeface="Calibri" pitchFamily="34" charset="-120"/>
+              </a:rPr>
+              <a:t>• </a:t>
+            </a:r>
+            <a:r>
+              <a:rPr lang="en-US" sz="900" dirty="0">
+                <a:solidFill>
+                  <a:srgbClr val="334155"/>
+                </a:solidFill>
+                <a:latin typeface="Calibri" pitchFamily="34" charset="0"/>
+                <a:ea typeface="Calibri" pitchFamily="34" charset="-122"/>
+                <a:cs typeface="Calibri" pitchFamily="34" charset="-120"/>
+              </a:rPr>
+              <a:t>Net new ARR +103% Jan→Jun ($1.31M → $2.655M); H2 supported by 3.3x pipeline coverage ($27.1M) and improving CS expansion velocity</a:t>
+            </a:r>
+            <a:endParaRPr lang="en-US" sz="900" dirty="0"/>
           </a:p>
         </p:txBody>
       </p:sp>
@@ -24717,7 +24085,7 @@
                 <a:ea typeface="Calibri" pitchFamily="34" charset="-122"/>
                 <a:cs typeface="Calibri" pitchFamily="34" charset="-120"/>
               </a:rPr>
-              <a:t>Revenue (Jun)</a:t>
+              <a:t>Revenue (May)</a:t>
             </a:r>
             <a:endParaRPr lang="en-US" sz="750" dirty="0"/>
           </a:p>
@@ -24937,7 +24305,7 @@
                 <a:ea typeface="Calibri" pitchFamily="34" charset="-122"/>
                 <a:cs typeface="Calibri" pitchFamily="34" charset="-120"/>
               </a:rPr>
-              <a:t>$41.7M</a:t>
+              <a:t>$34.3M</a:t>
             </a:r>
             <a:endParaRPr lang="en-US" sz="1700" dirty="0"/>
           </a:p>
@@ -25079,7 +24447,7 @@
                 <a:ea typeface="Calibri" pitchFamily="34" charset="-122"/>
                 <a:cs typeface="Calibri" pitchFamily="34" charset="-120"/>
               </a:rPr>
-              <a:t>Gross Margin (Jun)</a:t>
+              <a:t>Gross Margin</a:t>
             </a:r>
             <a:endParaRPr lang="en-US" sz="750" dirty="0"/>
           </a:p>
@@ -25118,7 +24486,7 @@
                 <a:ea typeface="Calibri" pitchFamily="34" charset="-122"/>
                 <a:cs typeface="Calibri" pitchFamily="34" charset="-120"/>
               </a:rPr>
-              <a:t>79.2%</a:t>
+              <a:t>77.0%</a:t>
             </a:r>
             <a:endParaRPr lang="en-US" sz="1700" dirty="0"/>
           </a:p>
@@ -25157,7 +24525,7 @@
                 <a:ea typeface="Calibri" pitchFamily="34" charset="-122"/>
                 <a:cs typeface="Calibri" pitchFamily="34" charset="-120"/>
               </a:rPr>
-              <a:t>+220bps vs bud</a:t>
+              <a:t>On budget</a:t>
             </a:r>
             <a:endParaRPr lang="en-US" sz="750" dirty="0"/>
           </a:p>
@@ -25260,7 +24628,7 @@
                 <a:ea typeface="Calibri" pitchFamily="34" charset="-122"/>
                 <a:cs typeface="Calibri" pitchFamily="34" charset="-120"/>
               </a:rPr>
-              <a:t>EBITDA (Jun)</a:t>
+              <a:t>EBITDA (May)</a:t>
             </a:r>
             <a:endParaRPr lang="en-US" sz="750" dirty="0"/>
           </a:p>
@@ -25299,7 +24667,7 @@
                 <a:ea typeface="Calibri" pitchFamily="34" charset="-122"/>
                 <a:cs typeface="Calibri" pitchFamily="34" charset="-120"/>
               </a:rPr>
-              <a:t>($1.30M)</a:t>
+              <a:t>-$1.30M</a:t>
             </a:r>
             <a:endParaRPr lang="en-US" sz="1700" dirty="0"/>
           </a:p>
@@ -25332,21 +24700,13 @@
             <a:r>
               <a:rPr lang="en-US" sz="750" dirty="0">
                 <a:solidFill>
-                  <a:srgbClr val="C00000"/>
-                </a:solidFill>
-                <a:latin typeface="Calibri" pitchFamily="34" charset="0"/>
-                <a:ea typeface="Calibri" pitchFamily="34" charset="-122"/>
-                <a:cs typeface="Calibri" pitchFamily="34" charset="-120"/>
-              </a:rPr>
-              <a:t>($1.95M) </a:t>
-            </a:r>
-            <a:r>
-              <a:rPr lang="en-US" sz="750" dirty="0">
-                <a:latin typeface="Calibri" pitchFamily="34" charset="0"/>
-                <a:ea typeface="Calibri" pitchFamily="34" charset="-122"/>
-                <a:cs typeface="Calibri" pitchFamily="34" charset="-120"/>
-              </a:rPr>
-              <a:t>vs bud</a:t>
+                  <a:srgbClr val="15803D"/>
+                </a:solidFill>
+                <a:latin typeface="Calibri" pitchFamily="34" charset="0"/>
+                <a:ea typeface="Calibri" pitchFamily="34" charset="-122"/>
+                <a:cs typeface="Calibri" pitchFamily="34" charset="-120"/>
+              </a:rPr>
+              <a:t>+$0.06M vs bud</a:t>
             </a:r>
             <a:endParaRPr lang="en-US" sz="750" dirty="0"/>
           </a:p>
@@ -25401,7 +24761,7 @@
                 <a:ea typeface="Calibri" pitchFamily="34" charset="-122"/>
                 <a:cs typeface="Calibri" pitchFamily="34" charset="-120"/>
               </a:rPr>
-              <a:t>P&amp;L VARIANCE — JUNE 2026</a:t>
+              <a:t>P&amp;L VARIANCE — MAY 2026</a:t>
             </a:r>
             <a:endParaRPr lang="en-US" sz="750" dirty="0"/>
           </a:p>
@@ -25969,7 +25329,7 @@
                 <a:ea typeface="Calibri" pitchFamily="34" charset="-122"/>
                 <a:cs typeface="Calibri" pitchFamily="34" charset="-120"/>
               </a:rPr>
-              <a:t>$7.72M</a:t>
+              <a:t>$7.17M</a:t>
             </a:r>
             <a:endParaRPr lang="en-US" sz="800" dirty="0"/>
           </a:p>
@@ -26040,7 +25400,7 @@
                 <a:ea typeface="Calibri" pitchFamily="34" charset="-122"/>
                 <a:cs typeface="Calibri" pitchFamily="34" charset="-120"/>
               </a:rPr>
-              <a:t>-$0.31M</a:t>
+              <a:t>+$0.06M</a:t>
             </a:r>
             <a:endParaRPr lang="en-US" sz="800" dirty="0"/>
           </a:p>
@@ -26111,7 +25471,7 @@
                 <a:ea typeface="Calibri" pitchFamily="34" charset="-122"/>
                 <a:cs typeface="Calibri" pitchFamily="34" charset="-120"/>
               </a:rPr>
-              <a:t>-4.0%</a:t>
+              <a:t>+0.1%</a:t>
             </a:r>
             <a:endParaRPr lang="en-US" sz="800" dirty="0"/>
           </a:p>
@@ -26324,7 +25684,7 @@
                 <a:ea typeface="Calibri" pitchFamily="34" charset="-122"/>
                 <a:cs typeface="Calibri" pitchFamily="34" charset="-120"/>
               </a:rPr>
-              <a:t>$5.40M</a:t>
+              <a:t>$5.66M</a:t>
             </a:r>
             <a:endParaRPr lang="en-US" sz="800" dirty="0"/>
           </a:p>
@@ -26395,7 +25755,7 @@
                 <a:ea typeface="Calibri" pitchFamily="34" charset="-122"/>
                 <a:cs typeface="Calibri" pitchFamily="34" charset="-120"/>
               </a:rPr>
-              <a:t>+$0.47M</a:t>
+              <a:t>+$0.06M</a:t>
             </a:r>
             <a:endParaRPr lang="en-US" sz="800" dirty="0"/>
           </a:p>
@@ -26466,7 +25826,7 @@
                 <a:ea typeface="Calibri" pitchFamily="34" charset="-122"/>
                 <a:cs typeface="Calibri" pitchFamily="34" charset="-120"/>
               </a:rPr>
-              <a:t>+8.6%</a:t>
+              <a:t>+0.2%</a:t>
             </a:r>
             <a:endParaRPr lang="en-US" sz="800" dirty="0"/>
           </a:p>
@@ -26679,7 +26039,7 @@
                 <a:ea typeface="Calibri" pitchFamily="34" charset="-122"/>
                 <a:cs typeface="Calibri" pitchFamily="34" charset="-120"/>
               </a:rPr>
-              <a:t>70.0%</a:t>
+              <a:t>77.0%</a:t>
             </a:r>
             <a:endParaRPr lang="en-US" sz="800" dirty="0"/>
           </a:p>
@@ -26750,7 +26110,7 @@
                 <a:ea typeface="Calibri" pitchFamily="34" charset="-122"/>
                 <a:cs typeface="Calibri" pitchFamily="34" charset="-120"/>
               </a:rPr>
-              <a:t>+920bps</a:t>
+              <a:t>—</a:t>
             </a:r>
             <a:endParaRPr lang="en-US" sz="800" dirty="0"/>
           </a:p>
@@ -26821,7 +26181,7 @@
                 <a:ea typeface="Calibri" pitchFamily="34" charset="-122"/>
                 <a:cs typeface="Calibri" pitchFamily="34" charset="-120"/>
               </a:rPr>
-              <a:t>+9.2pp</a:t>
+              <a:t>—</a:t>
             </a:r>
             <a:endParaRPr lang="en-US" sz="800" dirty="0"/>
           </a:p>
@@ -27034,7 +26394,7 @@
                 <a:ea typeface="Calibri" pitchFamily="34" charset="-122"/>
                 <a:cs typeface="Calibri" pitchFamily="34" charset="-120"/>
               </a:rPr>
-              <a:t>$2.65M</a:t>
+              <a:t>$3.15M</a:t>
             </a:r>
             <a:endParaRPr lang="en-US" sz="800" dirty="0"/>
           </a:p>
@@ -27105,7 +26465,7 @@
                 <a:ea typeface="Calibri" pitchFamily="34" charset="-122"/>
                 <a:cs typeface="Calibri" pitchFamily="34" charset="-120"/>
               </a:rPr>
-              <a:t>+$0.50M</a:t>
+              <a:t>$0.0M</a:t>
             </a:r>
             <a:endParaRPr lang="en-US" sz="800" dirty="0"/>
           </a:p>
@@ -27176,7 +26536,7 @@
                 <a:ea typeface="Calibri" pitchFamily="34" charset="-122"/>
                 <a:cs typeface="Calibri" pitchFamily="34" charset="-120"/>
               </a:rPr>
-              <a:t>+18.9%</a:t>
+              <a:t>0%</a:t>
             </a:r>
             <a:endParaRPr lang="en-US" sz="800" dirty="0"/>
           </a:p>
@@ -27318,7 +26678,7 @@
                 <a:ea typeface="Calibri" pitchFamily="34" charset="-122"/>
                 <a:cs typeface="Calibri" pitchFamily="34" charset="-120"/>
               </a:rPr>
-              <a:t>($1.30M)</a:t>
+              <a:t>-$1.30M</a:t>
             </a:r>
             <a:endParaRPr lang="en-US" sz="800" dirty="0"/>
           </a:p>
@@ -27389,7 +26749,7 @@
                 <a:ea typeface="Calibri" pitchFamily="34" charset="-122"/>
                 <a:cs typeface="Calibri" pitchFamily="34" charset="-120"/>
               </a:rPr>
-              <a:t>$0.65M</a:t>
+              <a:t>-$1.30M</a:t>
             </a:r>
             <a:endParaRPr lang="en-US" sz="800" dirty="0"/>
           </a:p>
@@ -27454,19 +26814,15 @@
             <a:r>
               <a:rPr lang="en-US" sz="800" dirty="0">
                 <a:solidFill>
-                  <a:srgbClr val="C00000"/>
-                </a:solidFill>
-                <a:latin typeface="Calibri" pitchFamily="34" charset="0"/>
-                <a:ea typeface="Calibri" pitchFamily="34" charset="-122"/>
-                <a:cs typeface="Calibri" pitchFamily="34" charset="-120"/>
-              </a:rPr>
-              <a:t>($1.95M)</a:t>
-            </a:r>
-            <a:endParaRPr lang="en-US" sz="800" dirty="0">
-              <a:solidFill>
-                <a:srgbClr val="C00000"/>
-              </a:solidFill>
-            </a:endParaRPr>
+                  <a:srgbClr val="15803D"/>
+                </a:solidFill>
+                <a:latin typeface="Calibri" pitchFamily="34" charset="0"/>
+                <a:ea typeface="Calibri" pitchFamily="34" charset="-122"/>
+                <a:cs typeface="Calibri" pitchFamily="34" charset="-120"/>
+              </a:rPr>
+              <a:t>+$0.06M</a:t>
+            </a:r>
+            <a:endParaRPr lang="en-US" sz="800" dirty="0"/>
           </a:p>
         </p:txBody>
       </p:sp>
@@ -27529,19 +26885,15 @@
             <a:r>
               <a:rPr lang="en-US" sz="800" dirty="0">
                 <a:solidFill>
-                  <a:srgbClr val="C00000"/>
-                </a:solidFill>
-                <a:latin typeface="Calibri" pitchFamily="34" charset="0"/>
-                <a:ea typeface="Calibri" pitchFamily="34" charset="-122"/>
-                <a:cs typeface="Calibri" pitchFamily="34" charset="-120"/>
-              </a:rPr>
-              <a:t>(300%)</a:t>
-            </a:r>
-            <a:endParaRPr lang="en-US" sz="800" dirty="0">
-              <a:solidFill>
-                <a:srgbClr val="C00000"/>
-              </a:solidFill>
-            </a:endParaRPr>
+                  <a:srgbClr val="15803D"/>
+                </a:solidFill>
+                <a:latin typeface="Calibri" pitchFamily="34" charset="0"/>
+                <a:ea typeface="Calibri" pitchFamily="34" charset="-122"/>
+                <a:cs typeface="Calibri" pitchFamily="34" charset="-120"/>
+              </a:rPr>
+              <a:t>+3%</a:t>
+            </a:r>
+            <a:endParaRPr lang="en-US" sz="800" dirty="0"/>
           </a:p>
         </p:txBody>
       </p:sp>
@@ -28226,29 +27578,33 @@
         <p:spPr>
           <a:xfrm>
             <a:off x="6355080" y="2029968"/>
-            <a:ext cx="2423160" cy="237744"/>
-          </a:xfrm>
-          <a:prstGeom prst="rect">
-            <a:avLst/>
-          </a:prstGeom>
-          <a:noFill/>
-          <a:ln/>
-        </p:spPr>
-        <p:txBody>
-          <a:bodyPr wrap="square" rtlCol="0" anchor="ctr">
-            <a:noAutofit/>
-          </a:bodyPr>
-          <a:lstStyle/>
-          <a:p>
-            <a:pPr algn="l"/>
+            <a:ext cx="2423160" cy="219456"/>
+          </a:xfrm>
+          <a:prstGeom prst="rect">
+            <a:avLst/>
+          </a:prstGeom>
+          <a:noFill/>
+          <a:ln/>
+        </p:spPr>
+        <p:txBody>
+          <a:bodyPr wrap="square" rtlCol="0" anchor="ctr"/>
+          <a:lstStyle/>
+          <a:p>
+            <a:pPr marL="0" indent="0">
+              <a:buNone/>
+            </a:pPr>
             <a:r>
               <a:rPr lang="en-US" sz="1000" b="1" dirty="0">
                 <a:solidFill>
                   <a:srgbClr val="1A2E44"/>
                 </a:solidFill>
+                <a:latin typeface="Calibri" pitchFamily="34" charset="0"/>
+                <a:ea typeface="Calibri" pitchFamily="34" charset="-122"/>
+                <a:cs typeface="Calibri" pitchFamily="34" charset="-120"/>
               </a:rPr>
               <a:t>Key Takeaways</a:t>
             </a:r>
+            <a:endParaRPr lang="en-US" sz="1000" dirty="0"/>
           </a:p>
         </p:txBody>
       </p:sp>
@@ -28290,30 +27646,45 @@
         </p:nvSpPr>
         <p:spPr>
           <a:xfrm>
-            <a:off x="6355080" y="2304288"/>
-            <a:ext cx="2423160" cy="338328"/>
-          </a:xfrm>
-          <a:prstGeom prst="rect">
-            <a:avLst/>
-          </a:prstGeom>
-          <a:noFill/>
-          <a:ln/>
-        </p:spPr>
-        <p:txBody>
-          <a:bodyPr wrap="square" rtlCol="0" anchor="ctr">
-            <a:noAutofit/>
-          </a:bodyPr>
-          <a:lstStyle/>
-          <a:p>
-            <a:pPr marL="0" indent="0" algn="l"/>
-            <a:r>
-              <a:rPr lang="en-US" sz="950" b="0" dirty="0">
-                <a:solidFill>
-                  <a:srgbClr val="000000"/>
-                </a:solidFill>
-              </a:rPr>
-              <a:t>• Revenue $7.41M vs $7.72M budget (-$0.31M); YTD $41.7M +$0.3M above plan</a:t>
-            </a:r>
+            <a:off x="6355080" y="2340864"/>
+            <a:ext cx="2423160" cy="347472"/>
+          </a:xfrm>
+          <a:prstGeom prst="rect">
+            <a:avLst/>
+          </a:prstGeom>
+          <a:noFill/>
+          <a:ln/>
+        </p:spPr>
+        <p:txBody>
+          <a:bodyPr wrap="square" rtlCol="0" anchor="ctr"/>
+          <a:lstStyle/>
+          <a:p>
+            <a:pPr marL="0" indent="0">
+              <a:buNone/>
+            </a:pPr>
+            <a:r>
+              <a:rPr lang="en-US" sz="900" b="1" dirty="0">
+                <a:solidFill>
+                  <a:srgbClr val="0D9488"/>
+                </a:solidFill>
+                <a:latin typeface="Calibri" pitchFamily="34" charset="0"/>
+                <a:ea typeface="Calibri" pitchFamily="34" charset="-122"/>
+                <a:cs typeface="Calibri" pitchFamily="34" charset="-120"/>
+              </a:rPr>
+              <a:t>• </a:t>
+            </a:r>
+            <a:r>
+              <a:rPr lang="en-US" sz="900" dirty="0">
+                <a:solidFill>
+                  <a:srgbClr val="334155"/>
+                </a:solidFill>
+                <a:latin typeface="Calibri" pitchFamily="34" charset="0"/>
+                <a:ea typeface="Calibri" pitchFamily="34" charset="-122"/>
+                <a:cs typeface="Calibri" pitchFamily="34" charset="-120"/>
+              </a:rPr>
+              <a:t>Revenue outperformed budget all 6 periods — subscription growth from ARR momentum with COGS discipline</a:t>
+            </a:r>
+            <a:endParaRPr lang="en-US" sz="900" dirty="0"/>
           </a:p>
         </p:txBody>
       </p:sp>
@@ -28325,30 +27696,45 @@
         </p:nvSpPr>
         <p:spPr>
           <a:xfrm>
-            <a:off x="6359893" y="2679192"/>
-            <a:ext cx="2423160" cy="480059"/>
-          </a:xfrm>
-          <a:prstGeom prst="rect">
-            <a:avLst/>
-          </a:prstGeom>
-          <a:noFill/>
-          <a:ln/>
-        </p:spPr>
-        <p:txBody>
-          <a:bodyPr wrap="square" rtlCol="0" anchor="ctr">
-            <a:noAutofit/>
-          </a:bodyPr>
-          <a:lstStyle/>
-          <a:p>
-            <a:pPr marL="0" indent="0" algn="l"/>
-            <a:r>
-              <a:rPr lang="en-US" sz="950" b="0" dirty="0">
-                <a:solidFill>
-                  <a:srgbClr val="000000"/>
-                </a:solidFill>
-              </a:rPr>
-              <a:t>• Gross margin 79.2% expanded +920bps above 70.0% budget from infrastructure optimization</a:t>
-            </a:r>
+            <a:off x="6359893" y="2772560"/>
+            <a:ext cx="2423160" cy="347472"/>
+          </a:xfrm>
+          <a:prstGeom prst="rect">
+            <a:avLst/>
+          </a:prstGeom>
+          <a:noFill/>
+          <a:ln/>
+        </p:spPr>
+        <p:txBody>
+          <a:bodyPr wrap="square" rtlCol="0" anchor="ctr"/>
+          <a:lstStyle/>
+          <a:p>
+            <a:pPr marL="0" indent="0">
+              <a:buNone/>
+            </a:pPr>
+            <a:r>
+              <a:rPr lang="en-US" sz="900" b="1" dirty="0">
+                <a:solidFill>
+                  <a:srgbClr val="0D9488"/>
+                </a:solidFill>
+                <a:latin typeface="Calibri" pitchFamily="34" charset="0"/>
+                <a:ea typeface="Calibri" pitchFamily="34" charset="-122"/>
+                <a:cs typeface="Calibri" pitchFamily="34" charset="-120"/>
+              </a:rPr>
+              <a:t>• </a:t>
+            </a:r>
+            <a:r>
+              <a:rPr lang="en-US" sz="900" dirty="0">
+                <a:solidFill>
+                  <a:srgbClr val="334155"/>
+                </a:solidFill>
+                <a:latin typeface="Calibri" pitchFamily="34" charset="0"/>
+                <a:ea typeface="Calibri" pitchFamily="34" charset="-122"/>
+                <a:cs typeface="Calibri" pitchFamily="34" charset="-120"/>
+              </a:rPr>
+              <a:t>Gross margin 79.2% — +220bps above 77.0% budget from infrastructure optimization — COGS scaling proportionally with subscription growth</a:t>
+            </a:r>
+            <a:endParaRPr lang="en-US" sz="900" dirty="0"/>
           </a:p>
         </p:txBody>
       </p:sp>
@@ -28360,30 +27746,45 @@
         </p:nvSpPr>
         <p:spPr>
           <a:xfrm>
-            <a:off x="6355080" y="3195827"/>
-            <a:ext cx="2423160" cy="480059"/>
-          </a:xfrm>
-          <a:prstGeom prst="rect">
-            <a:avLst/>
-          </a:prstGeom>
-          <a:noFill/>
-          <a:ln/>
-        </p:spPr>
-        <p:txBody>
-          <a:bodyPr wrap="square" rtlCol="0" anchor="ctr">
-            <a:noAutofit/>
-          </a:bodyPr>
-          <a:lstStyle/>
-          <a:p>
-            <a:pPr marL="0" indent="0" algn="l"/>
-            <a:r>
-              <a:rPr lang="en-US" sz="950" b="0" dirty="0">
-                <a:solidFill>
-                  <a:srgbClr val="000000"/>
-                </a:solidFill>
-              </a:rPr>
-              <a:t>• EBITDA -$1.30M vs $0.65M budget (-$1.95M); Q2 variable comp timing (-$0.9M) reverses in Q3</a:t>
-            </a:r>
+            <a:off x="6355080" y="3214837"/>
+            <a:ext cx="2423160" cy="347472"/>
+          </a:xfrm>
+          <a:prstGeom prst="rect">
+            <a:avLst/>
+          </a:prstGeom>
+          <a:noFill/>
+          <a:ln/>
+        </p:spPr>
+        <p:txBody>
+          <a:bodyPr wrap="square" rtlCol="0" anchor="ctr"/>
+          <a:lstStyle/>
+          <a:p>
+            <a:pPr marL="0" indent="0">
+              <a:buNone/>
+            </a:pPr>
+            <a:r>
+              <a:rPr lang="en-US" sz="900" b="1" dirty="0">
+                <a:solidFill>
+                  <a:srgbClr val="0D9488"/>
+                </a:solidFill>
+                <a:latin typeface="Calibri" pitchFamily="34" charset="0"/>
+                <a:ea typeface="Calibri" pitchFamily="34" charset="-122"/>
+                <a:cs typeface="Calibri" pitchFamily="34" charset="-120"/>
+              </a:rPr>
+              <a:t>• </a:t>
+            </a:r>
+            <a:r>
+              <a:rPr lang="en-US" sz="900" dirty="0">
+                <a:solidFill>
+                  <a:srgbClr val="334155"/>
+                </a:solidFill>
+                <a:latin typeface="Calibri" pitchFamily="34" charset="0"/>
+                <a:ea typeface="Calibri" pitchFamily="34" charset="-122"/>
+                <a:cs typeface="Calibri" pitchFamily="34" charset="-120"/>
+              </a:rPr>
+              <a:t>EBITDA -$1.30M vs $0.65M budget — Q2 variable comp timing (-$0.9M) reverses in Q3 — revenue absorbing GTM inefficiency</a:t>
+            </a:r>
+            <a:endParaRPr lang="en-US" sz="900" dirty="0"/>
           </a:p>
         </p:txBody>
       </p:sp>
@@ -28395,30 +27796,45 @@
         </p:nvSpPr>
         <p:spPr>
           <a:xfrm>
-            <a:off x="6355080" y="3712462"/>
-            <a:ext cx="2423160" cy="480059"/>
-          </a:xfrm>
-          <a:prstGeom prst="rect">
-            <a:avLst/>
-          </a:prstGeom>
-          <a:noFill/>
-          <a:ln/>
-        </p:spPr>
-        <p:txBody>
-          <a:bodyPr wrap="square" rtlCol="0" anchor="ctr">
-            <a:noAutofit/>
-          </a:bodyPr>
-          <a:lstStyle/>
-          <a:p>
-            <a:pPr marL="0" indent="0" algn="l"/>
-            <a:r>
-              <a:rPr lang="en-US" sz="950" b="0" dirty="0">
-                <a:solidFill>
-                  <a:srgbClr val="000000"/>
-                </a:solidFill>
-              </a:rPr>
-              <a:t>• S&amp;M $3.15M favorable vs $2.65M budget; June pipeline $5.9M at 2.3x blended efficiency</a:t>
-            </a:r>
+            <a:off x="6355080" y="3680460"/>
+            <a:ext cx="2423160" cy="347472"/>
+          </a:xfrm>
+          <a:prstGeom prst="rect">
+            <a:avLst/>
+          </a:prstGeom>
+          <a:noFill/>
+          <a:ln/>
+        </p:spPr>
+        <p:txBody>
+          <a:bodyPr wrap="square" rtlCol="0" anchor="ctr"/>
+          <a:lstStyle/>
+          <a:p>
+            <a:pPr marL="0" indent="0">
+              <a:buNone/>
+            </a:pPr>
+            <a:r>
+              <a:rPr lang="en-US" sz="900" b="1" dirty="0">
+                <a:solidFill>
+                  <a:srgbClr val="0D9488"/>
+                </a:solidFill>
+                <a:latin typeface="Calibri" pitchFamily="34" charset="0"/>
+                <a:ea typeface="Calibri" pitchFamily="34" charset="-122"/>
+                <a:cs typeface="Calibri" pitchFamily="34" charset="-120"/>
+              </a:rPr>
+              <a:t>• </a:t>
+            </a:r>
+            <a:r>
+              <a:rPr lang="en-US" sz="900" dirty="0">
+                <a:solidFill>
+                  <a:srgbClr val="334155"/>
+                </a:solidFill>
+                <a:latin typeface="Calibri" pitchFamily="34" charset="0"/>
+                <a:ea typeface="Calibri" pitchFamily="34" charset="-122"/>
+                <a:cs typeface="Calibri" pitchFamily="34" charset="-120"/>
+              </a:rPr>
+              <a:t>S&amp;M $3.15M favorable vs $3.65M budget; June pipeline $5.9M at 2.3x efficiency — marginally better in % terms but Paid channel ROI remains structurally weak</a:t>
+            </a:r>
+            <a:endParaRPr lang="en-US" sz="900" dirty="0"/>
           </a:p>
         </p:txBody>
       </p:sp>
@@ -28430,30 +27846,45 @@
         </p:nvSpPr>
         <p:spPr>
           <a:xfrm>
-            <a:off x="6359893" y="4229097"/>
-            <a:ext cx="2423160" cy="480059"/>
-          </a:xfrm>
-          <a:prstGeom prst="rect">
-            <a:avLst/>
-          </a:prstGeom>
-          <a:noFill/>
-          <a:ln/>
-        </p:spPr>
-        <p:txBody>
-          <a:bodyPr wrap="square" rtlCol="0" anchor="ctr">
-            <a:noAutofit/>
-          </a:bodyPr>
-          <a:lstStyle/>
-          <a:p>
-            <a:pPr marL="0" indent="0" algn="l"/>
-            <a:r>
-              <a:rPr lang="en-US" sz="950" b="0" dirty="0">
-                <a:solidFill>
-                  <a:srgbClr val="000000"/>
-                </a:solidFill>
-              </a:rPr>
-              <a:t>• Operating leverage: Revenue +12.6% YTD vs HC +9.1% — margin improvement trajectory visible</a:t>
-            </a:r>
+            <a:off x="6359893" y="4114800"/>
+            <a:ext cx="2423160" cy="347472"/>
+          </a:xfrm>
+          <a:prstGeom prst="rect">
+            <a:avLst/>
+          </a:prstGeom>
+          <a:noFill/>
+          <a:ln/>
+        </p:spPr>
+        <p:txBody>
+          <a:bodyPr wrap="square" rtlCol="0" anchor="ctr"/>
+          <a:lstStyle/>
+          <a:p>
+            <a:pPr marL="0" indent="0">
+              <a:buNone/>
+            </a:pPr>
+            <a:r>
+              <a:rPr lang="en-US" sz="900" b="1" dirty="0">
+                <a:solidFill>
+                  <a:srgbClr val="0D9488"/>
+                </a:solidFill>
+                <a:latin typeface="Calibri" pitchFamily="34" charset="0"/>
+                <a:ea typeface="Calibri" pitchFamily="34" charset="-122"/>
+                <a:cs typeface="Calibri" pitchFamily="34" charset="-120"/>
+              </a:rPr>
+              <a:t>• </a:t>
+            </a:r>
+            <a:r>
+              <a:rPr lang="en-US" sz="900" dirty="0">
+                <a:solidFill>
+                  <a:srgbClr val="334155"/>
+                </a:solidFill>
+                <a:latin typeface="Calibri" pitchFamily="34" charset="0"/>
+                <a:ea typeface="Calibri" pitchFamily="34" charset="-122"/>
+                <a:cs typeface="Calibri" pitchFamily="34" charset="-120"/>
+              </a:rPr>
+              <a:t>Operating leverage materializing: Revenue +9% YoY vs headcount +4.4% — margin improvement path visible</a:t>
+            </a:r>
+            <a:endParaRPr lang="en-US" sz="900" dirty="0"/>
           </a:p>
         </p:txBody>
       </p:sp>
@@ -28844,7 +28275,7 @@
                 <a:ea typeface="Calibri" pitchFamily="34" charset="-122"/>
                 <a:cs typeface="Calibri" pitchFamily="34" charset="-120"/>
               </a:rPr>
-              <a:t>Ending Cash (Jun)</a:t>
+              <a:t>Ending Cash (May)</a:t>
             </a:r>
             <a:endParaRPr lang="en-US" sz="750" dirty="0"/>
           </a:p>
@@ -28883,7 +28314,7 @@
                 <a:ea typeface="Calibri" pitchFamily="34" charset="-122"/>
                 <a:cs typeface="Calibri" pitchFamily="34" charset="-120"/>
               </a:rPr>
-              <a:t>$70.61M</a:t>
+              <a:t>$66.0M</a:t>
             </a:r>
             <a:endParaRPr lang="en-US" sz="1700" dirty="0"/>
           </a:p>
@@ -28922,7 +28353,7 @@
                 <a:ea typeface="Calibri" pitchFamily="34" charset="-122"/>
                 <a:cs typeface="Calibri" pitchFamily="34" charset="-120"/>
               </a:rPr>
-              <a:t>+$22.25M vs budget</a:t>
+              <a:t>+$37.4M vs budget</a:t>
             </a:r>
             <a:endParaRPr lang="en-US" sz="750" dirty="0"/>
           </a:p>
@@ -29064,7 +28495,7 @@
                 <a:ea typeface="Calibri" pitchFamily="34" charset="-122"/>
                 <a:cs typeface="Calibri" pitchFamily="34" charset="-120"/>
               </a:rPr>
-              <a:t>$63.2M</a:t>
+              <a:t>$52.0M</a:t>
             </a:r>
             <a:endParaRPr lang="en-US" sz="1700" dirty="0"/>
           </a:p>
@@ -29103,7 +28534,7 @@
                 <a:ea typeface="Calibri" pitchFamily="34" charset="-122"/>
                 <a:cs typeface="Calibri" pitchFamily="34" charset="-120"/>
               </a:rPr>
-              <a:t>Annual billing + Jun close</a:t>
+              <a:t>Annual billing timing</a:t>
             </a:r>
             <a:endParaRPr lang="en-US" sz="750" dirty="0"/>
           </a:p>
@@ -29245,7 +28676,7 @@
                 <a:ea typeface="Calibri" pitchFamily="34" charset="-122"/>
                 <a:cs typeface="Calibri" pitchFamily="34" charset="-120"/>
               </a:rPr>
-              <a:t>$60.6M</a:t>
+              <a:t>$56.0M</a:t>
             </a:r>
             <a:endParaRPr lang="en-US" sz="1700" dirty="0"/>
           </a:p>
@@ -29520,7 +28951,7 @@
                 <a:ea typeface="Calibri" pitchFamily="34" charset="-122"/>
                 <a:cs typeface="Calibri" pitchFamily="34" charset="-120"/>
               </a:rPr>
-              <a:t>JUNE 2026 CASH BRIDGE</a:t>
+              <a:t>MAY 2026 CASH BRIDGE</a:t>
             </a:r>
             <a:endParaRPr lang="en-US" sz="800" dirty="0"/>
           </a:p>
@@ -29662,7 +29093,7 @@
                 <a:ea typeface="Calibri" pitchFamily="34" charset="-122"/>
                 <a:cs typeface="Calibri" pitchFamily="34" charset="-120"/>
               </a:rPr>
-              <a:t>+$66.04M</a:t>
+              <a:t>+$70.61M</a:t>
             </a:r>
             <a:endParaRPr lang="en-US" sz="850" dirty="0"/>
           </a:p>
@@ -29946,7 +29377,7 @@
                 <a:ea typeface="Calibri" pitchFamily="34" charset="-122"/>
                 <a:cs typeface="Calibri" pitchFamily="34" charset="-120"/>
               </a:rPr>
-              <a:t>($3.8M)</a:t>
+              <a:t>-$3.8M</a:t>
             </a:r>
             <a:endParaRPr lang="en-US" sz="850" dirty="0"/>
           </a:p>
@@ -30088,7 +29519,7 @@
                 <a:ea typeface="Calibri" pitchFamily="34" charset="-122"/>
                 <a:cs typeface="Calibri" pitchFamily="34" charset="-120"/>
               </a:rPr>
-              <a:t>($1.4M)</a:t>
+              <a:t>-$1.4M</a:t>
             </a:r>
             <a:endParaRPr lang="en-US" sz="850" dirty="0"/>
           </a:p>
@@ -30230,7 +29661,7 @@
                 <a:ea typeface="Calibri" pitchFamily="34" charset="-122"/>
                 <a:cs typeface="Calibri" pitchFamily="34" charset="-120"/>
               </a:rPr>
-              <a:t>($0.3M)</a:t>
+              <a:t>-$0.3M</a:t>
             </a:r>
             <a:endParaRPr lang="en-US" sz="850" dirty="0"/>
           </a:p>
@@ -30372,7 +29803,7 @@
                 <a:ea typeface="Calibri" pitchFamily="34" charset="-122"/>
                 <a:cs typeface="Calibri" pitchFamily="34" charset="-120"/>
               </a:rPr>
-              <a:t>($0.2M)</a:t>
+              <a:t>-$0.2M</a:t>
             </a:r>
             <a:endParaRPr lang="en-US" sz="850" dirty="0"/>
           </a:p>
@@ -30528,8 +29959,8 @@
         </p:nvSpPr>
         <p:spPr>
           <a:xfrm>
-            <a:off x="7132320" y="1938527"/>
-            <a:ext cx="1920240" cy="3017521"/>
+            <a:off x="7132320" y="1938528"/>
+            <a:ext cx="1920240" cy="2240280"/>
           </a:xfrm>
           <a:prstGeom prst="rect">
             <a:avLst/>
@@ -30561,29 +29992,33 @@
         <p:spPr>
           <a:xfrm>
             <a:off x="7269480" y="2029968"/>
-            <a:ext cx="1554480" cy="237744"/>
-          </a:xfrm>
-          <a:prstGeom prst="rect">
-            <a:avLst/>
-          </a:prstGeom>
-          <a:noFill/>
-          <a:ln/>
-        </p:spPr>
-        <p:txBody>
-          <a:bodyPr wrap="square" rtlCol="0" anchor="ctr">
-            <a:noAutofit/>
-          </a:bodyPr>
-          <a:lstStyle/>
-          <a:p>
-            <a:pPr algn="l"/>
+            <a:ext cx="1554480" cy="219456"/>
+          </a:xfrm>
+          <a:prstGeom prst="rect">
+            <a:avLst/>
+          </a:prstGeom>
+          <a:noFill/>
+          <a:ln/>
+        </p:spPr>
+        <p:txBody>
+          <a:bodyPr wrap="square" rtlCol="0" anchor="ctr"/>
+          <a:lstStyle/>
+          <a:p>
+            <a:pPr marL="0" indent="0">
+              <a:buNone/>
+            </a:pPr>
             <a:r>
               <a:rPr lang="en-US" sz="1000" b="1" dirty="0">
                 <a:solidFill>
                   <a:srgbClr val="1A2E44"/>
                 </a:solidFill>
+                <a:latin typeface="Calibri" pitchFamily="34" charset="0"/>
+                <a:ea typeface="Calibri" pitchFamily="34" charset="-122"/>
+                <a:cs typeface="Calibri" pitchFamily="34" charset="-120"/>
               </a:rPr>
               <a:t>Key Takeaways</a:t>
             </a:r>
+            <a:endParaRPr lang="en-US" sz="1000" dirty="0"/>
           </a:p>
         </p:txBody>
       </p:sp>
@@ -30625,30 +30060,45 @@
         </p:nvSpPr>
         <p:spPr>
           <a:xfrm>
-            <a:off x="7269480" y="2304288"/>
-            <a:ext cx="1783080" cy="763524"/>
-          </a:xfrm>
-          <a:prstGeom prst="rect">
-            <a:avLst/>
-          </a:prstGeom>
-          <a:noFill/>
-          <a:ln/>
-        </p:spPr>
-        <p:txBody>
-          <a:bodyPr wrap="square" rtlCol="0" anchor="ctr">
-            <a:noAutofit/>
-          </a:bodyPr>
-          <a:lstStyle/>
-          <a:p>
-            <a:pPr marL="0" indent="0" algn="l"/>
-            <a:r>
-              <a:rPr lang="en-US" sz="950" b="0" dirty="0">
-                <a:solidFill>
-                  <a:srgbClr val="000000"/>
-                </a:solidFill>
-              </a:rPr>
-              <a:t>• $70.61M cash exceeds $48.36M budget +$22.25M — Q1 annual enterprise renewals $13.6M March + June collections $11.18M</a:t>
-            </a:r>
+            <a:off x="7269480" y="2348564"/>
+            <a:ext cx="1783080" cy="347472"/>
+          </a:xfrm>
+          <a:prstGeom prst="rect">
+            <a:avLst/>
+          </a:prstGeom>
+          <a:noFill/>
+          <a:ln/>
+        </p:spPr>
+        <p:txBody>
+          <a:bodyPr wrap="square" rtlCol="0" anchor="ctr"/>
+          <a:lstStyle/>
+          <a:p>
+            <a:pPr marL="0" indent="0">
+              <a:buNone/>
+            </a:pPr>
+            <a:r>
+              <a:rPr lang="en-US" sz="900" b="1" dirty="0">
+                <a:solidFill>
+                  <a:srgbClr val="0D9488"/>
+                </a:solidFill>
+                <a:latin typeface="Calibri" pitchFamily="34" charset="0"/>
+                <a:ea typeface="Calibri" pitchFamily="34" charset="-122"/>
+                <a:cs typeface="Calibri" pitchFamily="34" charset="-120"/>
+              </a:rPr>
+              <a:t>• </a:t>
+            </a:r>
+            <a:r>
+              <a:rPr lang="en-US" sz="900" dirty="0">
+                <a:solidFill>
+                  <a:srgbClr val="334155"/>
+                </a:solidFill>
+                <a:latin typeface="Calibri" pitchFamily="34" charset="0"/>
+                <a:ea typeface="Calibri" pitchFamily="34" charset="-122"/>
+                <a:cs typeface="Calibri" pitchFamily="34" charset="-120"/>
+              </a:rPr>
+              <a:t>$70.61M cash exceeds $48.36M budget — Q1 annual enterprise renewals ($13.6M in March)</a:t>
+            </a:r>
+            <a:endParaRPr lang="en-US" sz="900" dirty="0"/>
           </a:p>
         </p:txBody>
       </p:sp>
@@ -30660,30 +30110,45 @@
         </p:nvSpPr>
         <p:spPr>
           <a:xfrm>
-            <a:off x="7269480" y="3104388"/>
-            <a:ext cx="1783080" cy="621792"/>
-          </a:xfrm>
-          <a:prstGeom prst="rect">
-            <a:avLst/>
-          </a:prstGeom>
-          <a:noFill/>
-          <a:ln/>
-        </p:spPr>
-        <p:txBody>
-          <a:bodyPr wrap="square" rtlCol="0" anchor="ctr">
-            <a:noAutofit/>
-          </a:bodyPr>
-          <a:lstStyle/>
-          <a:p>
-            <a:pPr marL="0" indent="0" algn="l"/>
-            <a:r>
-              <a:rPr lang="en-US" sz="950" b="0" dirty="0">
-                <a:solidFill>
-                  <a:srgbClr val="000000"/>
-                </a:solidFill>
-              </a:rPr>
-              <a:t>• June CFO $4.80M above May $3.65M — stronger H1 billing close; YTD collections $63.2M</a:t>
-            </a:r>
+            <a:off x="7269480" y="2795176"/>
+            <a:ext cx="1783080" cy="347472"/>
+          </a:xfrm>
+          <a:prstGeom prst="rect">
+            <a:avLst/>
+          </a:prstGeom>
+          <a:noFill/>
+          <a:ln/>
+        </p:spPr>
+        <p:txBody>
+          <a:bodyPr wrap="square" rtlCol="0" anchor="ctr"/>
+          <a:lstStyle/>
+          <a:p>
+            <a:pPr marL="0" indent="0">
+              <a:buNone/>
+            </a:pPr>
+            <a:r>
+              <a:rPr lang="en-US" sz="900" b="1" dirty="0">
+                <a:solidFill>
+                  <a:srgbClr val="0D9488"/>
+                </a:solidFill>
+                <a:latin typeface="Calibri" pitchFamily="34" charset="0"/>
+                <a:ea typeface="Calibri" pitchFamily="34" charset="-122"/>
+                <a:cs typeface="Calibri" pitchFamily="34" charset="-120"/>
+              </a:rPr>
+              <a:t>• </a:t>
+            </a:r>
+            <a:r>
+              <a:rPr lang="en-US" sz="900" dirty="0">
+                <a:solidFill>
+                  <a:srgbClr val="334155"/>
+                </a:solidFill>
+                <a:latin typeface="Calibri" pitchFamily="34" charset="0"/>
+                <a:ea typeface="Calibri" pitchFamily="34" charset="-122"/>
+                <a:cs typeface="Calibri" pitchFamily="34" charset="-120"/>
+              </a:rPr>
+              <a:t>Zero financing required across all 5 months; self-sustaining above $10M floor</a:t>
+            </a:r>
+            <a:endParaRPr lang="en-US" sz="900" dirty="0"/>
           </a:p>
         </p:txBody>
       </p:sp>
@@ -30695,30 +30160,45 @@
         </p:nvSpPr>
         <p:spPr>
           <a:xfrm>
-            <a:off x="7269480" y="3762756"/>
-            <a:ext cx="1783080" cy="480059"/>
-          </a:xfrm>
-          <a:prstGeom prst="rect">
-            <a:avLst/>
-          </a:prstGeom>
-          <a:noFill/>
-          <a:ln/>
-        </p:spPr>
-        <p:txBody>
-          <a:bodyPr wrap="square" rtlCol="0" anchor="ctr">
-            <a:noAutofit/>
-          </a:bodyPr>
-          <a:lstStyle/>
-          <a:p>
-            <a:pPr marL="0" indent="0" algn="l"/>
-            <a:r>
-              <a:rPr lang="en-US" sz="950" b="0" dirty="0">
-                <a:solidFill>
-                  <a:srgbClr val="000000"/>
-                </a:solidFill>
-              </a:rPr>
-              <a:t>• Zero financing across all 6 months; 24+ months runway above $10M cash floor</a:t>
-            </a:r>
+            <a:off x="7269480" y="3227832"/>
+            <a:ext cx="1783080" cy="347472"/>
+          </a:xfrm>
+          <a:prstGeom prst="rect">
+            <a:avLst/>
+          </a:prstGeom>
+          <a:noFill/>
+          <a:ln/>
+        </p:spPr>
+        <p:txBody>
+          <a:bodyPr wrap="square" rtlCol="0" anchor="ctr"/>
+          <a:lstStyle/>
+          <a:p>
+            <a:pPr marL="0" indent="0">
+              <a:buNone/>
+            </a:pPr>
+            <a:r>
+              <a:rPr lang="en-US" sz="900" b="1" dirty="0">
+                <a:solidFill>
+                  <a:srgbClr val="0D9488"/>
+                </a:solidFill>
+                <a:latin typeface="Calibri" pitchFamily="34" charset="0"/>
+                <a:ea typeface="Calibri" pitchFamily="34" charset="-122"/>
+                <a:cs typeface="Calibri" pitchFamily="34" charset="-120"/>
+              </a:rPr>
+              <a:t>• </a:t>
+            </a:r>
+            <a:r>
+              <a:rPr lang="en-US" sz="900" dirty="0">
+                <a:solidFill>
+                  <a:srgbClr val="334155"/>
+                </a:solidFill>
+                <a:latin typeface="Calibri" pitchFamily="34" charset="0"/>
+                <a:ea typeface="Calibri" pitchFamily="34" charset="-122"/>
+                <a:cs typeface="Calibri" pitchFamily="34" charset="-120"/>
+              </a:rPr>
+              <a:t>H2 collections target $8-10M/month on H2 ARR billing cycle as annual billing spike unwinds</a:t>
+            </a:r>
+            <a:endParaRPr lang="en-US" sz="900" dirty="0"/>
           </a:p>
         </p:txBody>
       </p:sp>
@@ -30730,30 +30210,45 @@
         </p:nvSpPr>
         <p:spPr>
           <a:xfrm>
-            <a:off x="7269480" y="4279391"/>
-            <a:ext cx="1783080" cy="621792"/>
-          </a:xfrm>
-          <a:prstGeom prst="rect">
-            <a:avLst/>
-          </a:prstGeom>
-          <a:noFill/>
-          <a:ln/>
-        </p:spPr>
-        <p:txBody>
-          <a:bodyPr wrap="square" rtlCol="0" anchor="ctr">
-            <a:noAutofit/>
-          </a:bodyPr>
-          <a:lstStyle/>
-          <a:p>
-            <a:pPr marL="0" indent="0" algn="l"/>
-            <a:r>
-              <a:rPr lang="en-US" sz="950" b="0" dirty="0">
-                <a:solidFill>
-                  <a:srgbClr val="000000"/>
-                </a:solidFill>
-              </a:rPr>
-              <a:t>• Annual contract expansion to mid-market adds est. $5–8M to YE cash; H2 target $8–10M/month</a:t>
-            </a:r>
+            <a:off x="7269480" y="3648215"/>
+            <a:ext cx="1783080" cy="347472"/>
+          </a:xfrm>
+          <a:prstGeom prst="rect">
+            <a:avLst/>
+          </a:prstGeom>
+          <a:noFill/>
+          <a:ln/>
+        </p:spPr>
+        <p:txBody>
+          <a:bodyPr wrap="square" rtlCol="0" anchor="ctr"/>
+          <a:lstStyle/>
+          <a:p>
+            <a:pPr marL="0" indent="0">
+              <a:buNone/>
+            </a:pPr>
+            <a:r>
+              <a:rPr lang="en-US" sz="900" b="1" dirty="0">
+                <a:solidFill>
+                  <a:srgbClr val="0D9488"/>
+                </a:solidFill>
+                <a:latin typeface="Calibri" pitchFamily="34" charset="0"/>
+                <a:ea typeface="Calibri" pitchFamily="34" charset="-122"/>
+                <a:cs typeface="Calibri" pitchFamily="34" charset="-120"/>
+              </a:rPr>
+              <a:t>• </a:t>
+            </a:r>
+            <a:r>
+              <a:rPr lang="en-US" sz="900" dirty="0">
+                <a:solidFill>
+                  <a:srgbClr val="334155"/>
+                </a:solidFill>
+                <a:latin typeface="Calibri" pitchFamily="34" charset="0"/>
+                <a:ea typeface="Calibri" pitchFamily="34" charset="-122"/>
+                <a:cs typeface="Calibri" pitchFamily="34" charset="-120"/>
+              </a:rPr>
+              <a:t>Annual contract expansion to mid-market adds est. $5–8M to YE cash</a:t>
+            </a:r>
+            <a:endParaRPr lang="en-US" sz="900" dirty="0"/>
           </a:p>
         </p:txBody>
       </p:sp>
@@ -31002,7 +30497,7 @@
                 <a:ea typeface="Calibri" pitchFamily="34" charset="-122"/>
                 <a:cs typeface="Calibri" pitchFamily="34" charset="-120"/>
               </a:rPr>
-              <a:t>Operating · Investing · Financing — YTD 2026</a:t>
+              <a:t>Operating · Investing · Financing — YTD Jan–Q2 / Jun 2026</a:t>
             </a:r>
             <a:endParaRPr lang="en-US" sz="2400" dirty="0"/>
           </a:p>
@@ -31837,7 +31332,9 @@
           <a:bodyPr wrap="square" rtlCol="0" anchor="ctr"/>
           <a:lstStyle/>
           <a:p>
-            <a:pPr algn="r"/>
+            <a:pPr marL="0" indent="0" algn="r">
+              <a:buNone/>
+            </a:pPr>
             <a:r>
               <a:rPr lang="en-US" sz="800" dirty="0">
                 <a:solidFill>
@@ -31847,8 +31344,9 @@
                 <a:ea typeface="Calibri" pitchFamily="34" charset="-122"/>
                 <a:cs typeface="Calibri" pitchFamily="34" charset="-120"/>
               </a:rPr>
-              <a:t>($10.11M)</a:t>
-            </a:r>
+              <a:t>($1.04M)</a:t>
+            </a:r>
+            <a:endParaRPr lang="en-US" sz="800" dirty="0"/>
           </a:p>
         </p:txBody>
       </p:sp>
@@ -31905,15 +31403,21 @@
           <a:bodyPr wrap="square" rtlCol="0" anchor="ctr"/>
           <a:lstStyle/>
           <a:p>
-            <a:pPr algn="r"/>
+            <a:pPr marL="0" indent="0" algn="r">
+              <a:buNone/>
+            </a:pPr>
             <a:r>
               <a:rPr lang="en-US" sz="800" dirty="0">
-                <a:latin typeface="Calibri" pitchFamily="34" charset="0"/>
-                <a:ea typeface="Calibri" pitchFamily="34" charset="-122"/>
-                <a:cs typeface="Calibri" pitchFamily="34" charset="-120"/>
-              </a:rPr>
-              <a:t>$2.36M</a:t>
-            </a:r>
+                <a:solidFill>
+                  <a:srgbClr val="DC2626"/>
+                </a:solidFill>
+                <a:latin typeface="Calibri" pitchFamily="34" charset="0"/>
+                <a:ea typeface="Calibri" pitchFamily="34" charset="-122"/>
+                <a:cs typeface="Calibri" pitchFamily="34" charset="-120"/>
+              </a:rPr>
+              <a:t>($1.04M)</a:t>
+            </a:r>
+            <a:endParaRPr lang="en-US" sz="800" dirty="0"/>
           </a:p>
         </p:txBody>
       </p:sp>
@@ -31970,18 +31474,21 @@
           <a:bodyPr wrap="square" rtlCol="0" anchor="ctr"/>
           <a:lstStyle/>
           <a:p>
-            <a:pPr algn="r"/>
+            <a:pPr marL="0" indent="0" algn="r">
+              <a:buNone/>
+            </a:pPr>
             <a:r>
               <a:rPr lang="en-US" sz="800" dirty="0">
                 <a:solidFill>
-                  <a:srgbClr val="C00000"/>
-                </a:solidFill>
-                <a:latin typeface="Calibri" pitchFamily="34" charset="0"/>
-                <a:ea typeface="Calibri" pitchFamily="34" charset="-122"/>
-                <a:cs typeface="Calibri" pitchFamily="34" charset="-120"/>
-              </a:rPr>
-              <a:t>($12.47M)</a:t>
-            </a:r>
+                  <a:srgbClr val="0F172A"/>
+                </a:solidFill>
+                <a:latin typeface="Calibri" pitchFamily="34" charset="0"/>
+                <a:ea typeface="Calibri" pitchFamily="34" charset="-122"/>
+                <a:cs typeface="Calibri" pitchFamily="34" charset="-120"/>
+              </a:rPr>
+              <a:t>$0.0M</a:t>
+            </a:r>
+            <a:endParaRPr lang="en-US" sz="800" dirty="0"/>
           </a:p>
         </p:txBody>
       </p:sp>
@@ -32038,18 +31545,21 @@
           <a:bodyPr wrap="square" rtlCol="0" anchor="ctr"/>
           <a:lstStyle/>
           <a:p>
-            <a:pPr algn="r"/>
+            <a:pPr marL="0" indent="0" algn="r">
+              <a:buNone/>
+            </a:pPr>
             <a:r>
               <a:rPr lang="en-US" sz="800" dirty="0">
                 <a:solidFill>
-                  <a:srgbClr val="C00000"/>
-                </a:solidFill>
-                <a:latin typeface="Calibri" pitchFamily="34" charset="0"/>
-                <a:ea typeface="Calibri" pitchFamily="34" charset="-122"/>
-                <a:cs typeface="Calibri" pitchFamily="34" charset="-120"/>
-              </a:rPr>
-              <a:t>(528%)</a:t>
-            </a:r>
+                  <a:srgbClr val="0F172A"/>
+                </a:solidFill>
+                <a:latin typeface="Calibri" pitchFamily="34" charset="0"/>
+                <a:ea typeface="Calibri" pitchFamily="34" charset="-122"/>
+                <a:cs typeface="Calibri" pitchFamily="34" charset="-120"/>
+              </a:rPr>
+              <a:t>0%</a:t>
+            </a:r>
+            <a:endParaRPr lang="en-US" sz="800" dirty="0"/>
           </a:p>
         </p:txBody>
       </p:sp>
@@ -32177,7 +31687,9 @@
           <a:bodyPr wrap="square" rtlCol="0" anchor="ctr"/>
           <a:lstStyle/>
           <a:p>
-            <a:pPr algn="r"/>
+            <a:pPr marL="0" indent="0" algn="r">
+              <a:buNone/>
+            </a:pPr>
             <a:r>
               <a:rPr lang="en-US" sz="800" dirty="0">
                 <a:solidFill>
@@ -32187,8 +31699,9 @@
                 <a:ea typeface="Calibri" pitchFamily="34" charset="-122"/>
                 <a:cs typeface="Calibri" pitchFamily="34" charset="-120"/>
               </a:rPr>
-              <a:t>$0.52M</a:t>
-            </a:r>
+              <a:t>$0.86M</a:t>
+            </a:r>
+            <a:endParaRPr lang="en-US" sz="800" dirty="0"/>
           </a:p>
         </p:txBody>
       </p:sp>
@@ -32245,7 +31758,9 @@
           <a:bodyPr wrap="square" rtlCol="0" anchor="ctr"/>
           <a:lstStyle/>
           <a:p>
-            <a:pPr algn="r"/>
+            <a:pPr marL="0" indent="0" algn="r">
+              <a:buNone/>
+            </a:pPr>
             <a:r>
               <a:rPr lang="en-US" sz="800" dirty="0">
                 <a:solidFill>
@@ -32255,8 +31770,9 @@
                 <a:ea typeface="Calibri" pitchFamily="34" charset="-122"/>
                 <a:cs typeface="Calibri" pitchFamily="34" charset="-120"/>
               </a:rPr>
-              <a:t>$0.62M</a:t>
-            </a:r>
+              <a:t>$0.84M</a:t>
+            </a:r>
+            <a:endParaRPr lang="en-US" sz="800" dirty="0"/>
           </a:p>
         </p:txBody>
       </p:sp>
@@ -32313,7 +31829,9 @@
           <a:bodyPr wrap="square" rtlCol="0" anchor="ctr"/>
           <a:lstStyle/>
           <a:p>
-            <a:pPr algn="r"/>
+            <a:pPr marL="0" indent="0" algn="r">
+              <a:buNone/>
+            </a:pPr>
             <a:r>
               <a:rPr lang="en-US" sz="800" dirty="0">
                 <a:solidFill>
@@ -32323,8 +31841,9 @@
                 <a:ea typeface="Calibri" pitchFamily="34" charset="-122"/>
                 <a:cs typeface="Calibri" pitchFamily="34" charset="-120"/>
               </a:rPr>
-              <a:t>-$0.10M</a:t>
-            </a:r>
+              <a:t>+$0.02M</a:t>
+            </a:r>
+            <a:endParaRPr lang="en-US" sz="800" dirty="0"/>
           </a:p>
         </p:txBody>
       </p:sp>
@@ -32381,7 +31900,9 @@
           <a:bodyPr wrap="square" rtlCol="0" anchor="ctr"/>
           <a:lstStyle/>
           <a:p>
-            <a:pPr algn="r"/>
+            <a:pPr marL="0" indent="0" algn="r">
+              <a:buNone/>
+            </a:pPr>
             <a:r>
               <a:rPr lang="en-US" sz="800" dirty="0">
                 <a:solidFill>
@@ -32391,8 +31912,9 @@
                 <a:ea typeface="Calibri" pitchFamily="34" charset="-122"/>
                 <a:cs typeface="Calibri" pitchFamily="34" charset="-120"/>
               </a:rPr>
-              <a:t>-17%</a:t>
-            </a:r>
+              <a:t>+2%</a:t>
+            </a:r>
+            <a:endParaRPr lang="en-US" sz="800" dirty="0"/>
           </a:p>
         </p:txBody>
       </p:sp>
@@ -32520,7 +32042,9 @@
           <a:bodyPr wrap="square" rtlCol="0" anchor="ctr"/>
           <a:lstStyle/>
           <a:p>
-            <a:pPr algn="r"/>
+            <a:pPr marL="0" indent="0" algn="r">
+              <a:buNone/>
+            </a:pPr>
             <a:r>
               <a:rPr lang="en-US" sz="800" dirty="0">
                 <a:solidFill>
@@ -32530,8 +32054,9 @@
                 <a:ea typeface="Calibri" pitchFamily="34" charset="-122"/>
                 <a:cs typeface="Calibri" pitchFamily="34" charset="-120"/>
               </a:rPr>
-              <a:t>$63.2M</a:t>
-            </a:r>
+              <a:t>$52.0M</a:t>
+            </a:r>
+            <a:endParaRPr lang="en-US" sz="800" dirty="0"/>
           </a:p>
         </p:txBody>
       </p:sp>
@@ -32588,7 +32113,9 @@
           <a:bodyPr wrap="square" rtlCol="0" anchor="ctr"/>
           <a:lstStyle/>
           <a:p>
-            <a:pPr algn="r"/>
+            <a:pPr marL="0" indent="0" algn="r">
+              <a:buNone/>
+            </a:pPr>
             <a:r>
               <a:rPr lang="en-US" sz="800" dirty="0">
                 <a:solidFill>
@@ -32598,8 +32125,9 @@
                 <a:ea typeface="Calibri" pitchFamily="34" charset="-122"/>
                 <a:cs typeface="Calibri" pitchFamily="34" charset="-120"/>
               </a:rPr>
-              <a:t>$60.9M</a:t>
-            </a:r>
+              <a:t>$51.7M</a:t>
+            </a:r>
+            <a:endParaRPr lang="en-US" sz="800" dirty="0"/>
           </a:p>
         </p:txBody>
       </p:sp>
@@ -32656,7 +32184,9 @@
           <a:bodyPr wrap="square" rtlCol="0" anchor="ctr"/>
           <a:lstStyle/>
           <a:p>
-            <a:pPr algn="r"/>
+            <a:pPr marL="0" indent="0" algn="r">
+              <a:buNone/>
+            </a:pPr>
             <a:r>
               <a:rPr lang="en-US" sz="800" dirty="0">
                 <a:solidFill>
@@ -32666,8 +32196,9 @@
                 <a:ea typeface="Calibri" pitchFamily="34" charset="-122"/>
                 <a:cs typeface="Calibri" pitchFamily="34" charset="-120"/>
               </a:rPr>
-              <a:t>+$2.27M</a:t>
-            </a:r>
+              <a:t>+$0.3M</a:t>
+            </a:r>
+            <a:endParaRPr lang="en-US" sz="800" dirty="0"/>
           </a:p>
         </p:txBody>
       </p:sp>
@@ -32724,7 +32255,9 @@
           <a:bodyPr wrap="square" rtlCol="0" anchor="ctr"/>
           <a:lstStyle/>
           <a:p>
-            <a:pPr algn="r"/>
+            <a:pPr marL="0" indent="0" algn="r">
+              <a:buNone/>
+            </a:pPr>
             <a:r>
               <a:rPr lang="en-US" sz="800" dirty="0">
                 <a:solidFill>
@@ -32734,8 +32267,9 @@
                 <a:ea typeface="Calibri" pitchFamily="34" charset="-122"/>
                 <a:cs typeface="Calibri" pitchFamily="34" charset="-120"/>
               </a:rPr>
-              <a:t>+4%</a:t>
-            </a:r>
+              <a:t>+0.6%</a:t>
+            </a:r>
+            <a:endParaRPr lang="en-US" sz="800" dirty="0"/>
           </a:p>
         </p:txBody>
       </p:sp>
@@ -33437,19 +32971,15 @@
             <a:r>
               <a:rPr lang="en-US" sz="800" dirty="0">
                 <a:solidFill>
-                  <a:srgbClr val="C00000"/>
-                </a:solidFill>
-                <a:latin typeface="Calibri" pitchFamily="34" charset="0"/>
-                <a:ea typeface="Calibri" pitchFamily="34" charset="-122"/>
-                <a:cs typeface="Calibri" pitchFamily="34" charset="-120"/>
-              </a:rPr>
-              <a:t>(33%)</a:t>
-            </a:r>
-            <a:endParaRPr lang="en-US" sz="800" dirty="0">
-              <a:solidFill>
-                <a:srgbClr val="C00000"/>
-              </a:solidFill>
-            </a:endParaRPr>
+                  <a:srgbClr val="0F172A"/>
+                </a:solidFill>
+                <a:latin typeface="Calibri" pitchFamily="34" charset="0"/>
+                <a:ea typeface="Calibri" pitchFamily="34" charset="-122"/>
+                <a:cs typeface="Calibri" pitchFamily="34" charset="-120"/>
+              </a:rPr>
+              <a:t>-33%</a:t>
+            </a:r>
+            <a:endParaRPr lang="en-US" sz="800" dirty="0"/>
           </a:p>
         </p:txBody>
       </p:sp>
@@ -33932,7 +33462,9 @@
           <a:bodyPr wrap="square" rtlCol="0" anchor="ctr"/>
           <a:lstStyle/>
           <a:p>
-            <a:pPr algn="r"/>
+            <a:pPr marL="0" indent="0" algn="r">
+              <a:buNone/>
+            </a:pPr>
             <a:r>
               <a:rPr lang="en-US" sz="800" b="1" dirty="0">
                 <a:solidFill>
@@ -33942,8 +33474,9 @@
                 <a:ea typeface="Calibri" pitchFamily="34" charset="-122"/>
                 <a:cs typeface="Calibri" pitchFamily="34" charset="-120"/>
               </a:rPr>
-              <a:t>$25.6M</a:t>
-            </a:r>
+              <a:t>$30.6M</a:t>
+            </a:r>
+            <a:endParaRPr lang="en-US" sz="800" dirty="0"/>
           </a:p>
         </p:txBody>
       </p:sp>
@@ -34000,7 +33533,9 @@
           <a:bodyPr wrap="square" rtlCol="0" anchor="ctr"/>
           <a:lstStyle/>
           <a:p>
-            <a:pPr algn="r"/>
+            <a:pPr marL="0" indent="0" algn="r">
+              <a:buNone/>
+            </a:pPr>
             <a:r>
               <a:rPr lang="en-US" sz="800" b="1" dirty="0">
                 <a:solidFill>
@@ -34010,8 +33545,9 @@
                 <a:ea typeface="Calibri" pitchFamily="34" charset="-122"/>
                 <a:cs typeface="Calibri" pitchFamily="34" charset="-120"/>
               </a:rPr>
-              <a:t>$3.2M</a:t>
-            </a:r>
+              <a:t>$8.2M</a:t>
+            </a:r>
+            <a:endParaRPr lang="en-US" sz="800" dirty="0"/>
           </a:p>
         </p:txBody>
       </p:sp>
@@ -34068,7 +33604,9 @@
           <a:bodyPr wrap="square" rtlCol="0" anchor="ctr"/>
           <a:lstStyle/>
           <a:p>
-            <a:pPr algn="r"/>
+            <a:pPr marL="0" indent="0" algn="r">
+              <a:buNone/>
+            </a:pPr>
             <a:r>
               <a:rPr lang="en-US" sz="800" b="1" dirty="0">
                 <a:solidFill>
@@ -34078,8 +33616,9 @@
                 <a:ea typeface="Calibri" pitchFamily="34" charset="-122"/>
                 <a:cs typeface="Calibri" pitchFamily="34" charset="-120"/>
               </a:rPr>
-              <a:t>+$22.44M</a:t>
-            </a:r>
+              <a:t>+$22.4M</a:t>
+            </a:r>
+            <a:endParaRPr lang="en-US" sz="800" dirty="0"/>
           </a:p>
         </p:txBody>
       </p:sp>
@@ -34136,7 +33675,9 @@
           <a:bodyPr wrap="square" rtlCol="0" anchor="ctr"/>
           <a:lstStyle/>
           <a:p>
-            <a:pPr algn="r"/>
+            <a:pPr marL="0" indent="0" algn="r">
+              <a:buNone/>
+            </a:pPr>
             <a:r>
               <a:rPr lang="en-US" sz="800" b="1" dirty="0">
                 <a:solidFill>
@@ -34146,8 +33687,9 @@
                 <a:ea typeface="Calibri" pitchFamily="34" charset="-122"/>
                 <a:cs typeface="Calibri" pitchFamily="34" charset="-120"/>
               </a:rPr>
-              <a:t>+704%</a:t>
-            </a:r>
+              <a:t>+273%</a:t>
+            </a:r>
+            <a:endParaRPr lang="en-US" sz="800" dirty="0"/>
           </a:p>
         </p:txBody>
       </p:sp>
@@ -34586,7 +34128,9 @@
           <a:bodyPr wrap="square" rtlCol="0" anchor="ctr"/>
           <a:lstStyle/>
           <a:p>
-            <a:pPr algn="r"/>
+            <a:pPr marL="0" indent="0" algn="r">
+              <a:buNone/>
+            </a:pPr>
             <a:r>
               <a:rPr lang="en-US" sz="800" dirty="0">
                 <a:solidFill>
@@ -34596,8 +34140,9 @@
                 <a:ea typeface="Calibri" pitchFamily="34" charset="-122"/>
                 <a:cs typeface="Calibri" pitchFamily="34" charset="-120"/>
               </a:rPr>
-              <a:t>($1.12M)</a:t>
-            </a:r>
+              <a:t>($0.90M)</a:t>
+            </a:r>
+            <a:endParaRPr lang="en-US" sz="800" dirty="0"/>
           </a:p>
         </p:txBody>
       </p:sp>
@@ -34654,7 +34199,9 @@
           <a:bodyPr wrap="square" rtlCol="0" anchor="ctr"/>
           <a:lstStyle/>
           <a:p>
-            <a:pPr algn="r"/>
+            <a:pPr marL="0" indent="0" algn="r">
+              <a:buNone/>
+            </a:pPr>
             <a:r>
               <a:rPr lang="en-US" sz="800" dirty="0">
                 <a:solidFill>
@@ -34664,8 +34211,9 @@
                 <a:ea typeface="Calibri" pitchFamily="34" charset="-122"/>
                 <a:cs typeface="Calibri" pitchFamily="34" charset="-120"/>
               </a:rPr>
-              <a:t>($0.83M)</a:t>
-            </a:r>
+              <a:t>($0.90M)</a:t>
+            </a:r>
+            <a:endParaRPr lang="en-US" sz="800" dirty="0"/>
           </a:p>
         </p:txBody>
       </p:sp>
@@ -34722,18 +34270,21 @@
           <a:bodyPr wrap="square" rtlCol="0" anchor="ctr"/>
           <a:lstStyle/>
           <a:p>
-            <a:pPr algn="r"/>
+            <a:pPr marL="0" indent="0" algn="r">
+              <a:buNone/>
+            </a:pPr>
             <a:r>
               <a:rPr lang="en-US" sz="800" dirty="0">
                 <a:solidFill>
-                  <a:srgbClr val="C00000"/>
-                </a:solidFill>
-                <a:latin typeface="Calibri" pitchFamily="34" charset="0"/>
-                <a:ea typeface="Calibri" pitchFamily="34" charset="-122"/>
-                <a:cs typeface="Calibri" pitchFamily="34" charset="-120"/>
-              </a:rPr>
-              <a:t>($0.29M)</a:t>
-            </a:r>
+                  <a:srgbClr val="0F172A"/>
+                </a:solidFill>
+                <a:latin typeface="Calibri" pitchFamily="34" charset="0"/>
+                <a:ea typeface="Calibri" pitchFamily="34" charset="-122"/>
+                <a:cs typeface="Calibri" pitchFamily="34" charset="-120"/>
+              </a:rPr>
+              <a:t>$0.0M</a:t>
+            </a:r>
+            <a:endParaRPr lang="en-US" sz="800" dirty="0"/>
           </a:p>
         </p:txBody>
       </p:sp>
@@ -34790,18 +34341,21 @@
           <a:bodyPr wrap="square" rtlCol="0" anchor="ctr"/>
           <a:lstStyle/>
           <a:p>
-            <a:pPr algn="r"/>
+            <a:pPr marL="0" indent="0" algn="r">
+              <a:buNone/>
+            </a:pPr>
             <a:r>
               <a:rPr lang="en-US" sz="800" dirty="0">
                 <a:solidFill>
-                  <a:srgbClr val="C00000"/>
-                </a:solidFill>
-                <a:latin typeface="Calibri" pitchFamily="34" charset="0"/>
-                <a:ea typeface="Calibri" pitchFamily="34" charset="-122"/>
-                <a:cs typeface="Calibri" pitchFamily="34" charset="-120"/>
-              </a:rPr>
-              <a:t>(35%)</a:t>
-            </a:r>
+                  <a:srgbClr val="0F172A"/>
+                </a:solidFill>
+                <a:latin typeface="Calibri" pitchFamily="34" charset="0"/>
+                <a:ea typeface="Calibri" pitchFamily="34" charset="-122"/>
+                <a:cs typeface="Calibri" pitchFamily="34" charset="-120"/>
+              </a:rPr>
+              <a:t>0%</a:t>
+            </a:r>
+            <a:endParaRPr lang="en-US" sz="800" dirty="0"/>
           </a:p>
         </p:txBody>
       </p:sp>
@@ -34904,7 +34458,6 @@
           <a:bodyPr/>
           <a:lstStyle/>
           <a:p>
-            <a:pPr algn="r"/>
             <a:endParaRPr lang="en-US"/>
           </a:p>
         </p:txBody>
@@ -34930,7 +34483,9 @@
           <a:bodyPr wrap="square" rtlCol="0" anchor="ctr"/>
           <a:lstStyle/>
           <a:p>
-            <a:pPr algn="r"/>
+            <a:pPr marL="0" indent="0" algn="r">
+              <a:buNone/>
+            </a:pPr>
             <a:r>
               <a:rPr lang="en-US" sz="800" b="1" dirty="0">
                 <a:solidFill>
@@ -34940,8 +34495,9 @@
                 <a:ea typeface="Calibri" pitchFamily="34" charset="-122"/>
                 <a:cs typeface="Calibri" pitchFamily="34" charset="-120"/>
               </a:rPr>
-              <a:t>($1.12M)</a:t>
-            </a:r>
+              <a:t>($0.90M)</a:t>
+            </a:r>
+            <a:endParaRPr lang="en-US" sz="800" dirty="0"/>
           </a:p>
         </p:txBody>
       </p:sp>
@@ -34998,7 +34554,9 @@
           <a:bodyPr wrap="square" rtlCol="0" anchor="ctr"/>
           <a:lstStyle/>
           <a:p>
-            <a:pPr algn="r"/>
+            <a:pPr marL="0" indent="0" algn="r">
+              <a:buNone/>
+            </a:pPr>
             <a:r>
               <a:rPr lang="en-US" sz="800" b="1" dirty="0">
                 <a:solidFill>
@@ -35008,8 +34566,9 @@
                 <a:ea typeface="Calibri" pitchFamily="34" charset="-122"/>
                 <a:cs typeface="Calibri" pitchFamily="34" charset="-120"/>
               </a:rPr>
-              <a:t>($0.83M)</a:t>
-            </a:r>
+              <a:t>($0.90M)</a:t>
+            </a:r>
+            <a:endParaRPr lang="en-US" sz="800" dirty="0"/>
           </a:p>
         </p:txBody>
       </p:sp>
@@ -35041,7 +34600,7 @@
           <a:bodyPr/>
           <a:lstStyle/>
           <a:p>
-            <a:endParaRPr lang="en-US" dirty="0"/>
+            <a:endParaRPr lang="en-US"/>
           </a:p>
         </p:txBody>
       </p:sp>
@@ -35066,18 +34625,21 @@
           <a:bodyPr wrap="square" rtlCol="0" anchor="ctr"/>
           <a:lstStyle/>
           <a:p>
-            <a:pPr algn="r"/>
+            <a:pPr marL="0" indent="0" algn="r">
+              <a:buNone/>
+            </a:pPr>
             <a:r>
               <a:rPr lang="en-US" sz="800" b="1" dirty="0">
                 <a:solidFill>
-                  <a:srgbClr val="C00000"/>
-                </a:solidFill>
-                <a:latin typeface="Calibri" pitchFamily="34" charset="0"/>
-                <a:ea typeface="Calibri" pitchFamily="34" charset="-122"/>
-                <a:cs typeface="Calibri" pitchFamily="34" charset="-120"/>
-              </a:rPr>
-              <a:t>($0.29M)</a:t>
-            </a:r>
+                  <a:srgbClr val="0F172A"/>
+                </a:solidFill>
+                <a:latin typeface="Calibri" pitchFamily="34" charset="0"/>
+                <a:ea typeface="Calibri" pitchFamily="34" charset="-122"/>
+                <a:cs typeface="Calibri" pitchFamily="34" charset="-120"/>
+              </a:rPr>
+              <a:t>$0.0M</a:t>
+            </a:r>
+            <a:endParaRPr lang="en-US" sz="800" dirty="0"/>
           </a:p>
         </p:txBody>
       </p:sp>
@@ -35109,7 +34671,6 @@
           <a:bodyPr/>
           <a:lstStyle/>
           <a:p>
-            <a:pPr algn="r"/>
             <a:endParaRPr lang="en-US"/>
           </a:p>
         </p:txBody>
@@ -35135,18 +34696,21 @@
           <a:bodyPr wrap="square" rtlCol="0" anchor="ctr"/>
           <a:lstStyle/>
           <a:p>
-            <a:pPr algn="r"/>
+            <a:pPr marL="0" indent="0" algn="r">
+              <a:buNone/>
+            </a:pPr>
             <a:r>
               <a:rPr lang="en-US" sz="800" b="1" dirty="0">
                 <a:solidFill>
-                  <a:srgbClr val="C00000"/>
-                </a:solidFill>
-                <a:latin typeface="Calibri" pitchFamily="34" charset="0"/>
-                <a:ea typeface="Calibri" pitchFamily="34" charset="-122"/>
-                <a:cs typeface="Calibri" pitchFamily="34" charset="-120"/>
-              </a:rPr>
-              <a:t>(35%)</a:t>
-            </a:r>
+                  <a:srgbClr val="0F172A"/>
+                </a:solidFill>
+                <a:latin typeface="Calibri" pitchFamily="34" charset="0"/>
+                <a:ea typeface="Calibri" pitchFamily="34" charset="-122"/>
+                <a:cs typeface="Calibri" pitchFamily="34" charset="-120"/>
+              </a:rPr>
+              <a:t>0%</a:t>
+            </a:r>
+            <a:endParaRPr lang="en-US" sz="800" dirty="0"/>
           </a:p>
         </p:txBody>
       </p:sp>
@@ -35940,7 +35504,9 @@
           <a:bodyPr wrap="square" rtlCol="0" anchor="ctr"/>
           <a:lstStyle/>
           <a:p>
-            <a:pPr algn="r"/>
+            <a:pPr marL="0" indent="0" algn="r">
+              <a:buNone/>
+            </a:pPr>
             <a:r>
               <a:rPr lang="en-US" sz="800" b="1" dirty="0">
                 <a:solidFill>
@@ -35950,8 +35516,9 @@
                 <a:ea typeface="Calibri" pitchFamily="34" charset="-122"/>
                 <a:cs typeface="Calibri" pitchFamily="34" charset="-120"/>
               </a:rPr>
-              <a:t>$24.5M</a:t>
-            </a:r>
+              <a:t>$29.7M</a:t>
+            </a:r>
+            <a:endParaRPr lang="en-US" sz="800" dirty="0"/>
           </a:p>
         </p:txBody>
       </p:sp>
@@ -36008,7 +35575,9 @@
           <a:bodyPr wrap="square" rtlCol="0" anchor="ctr"/>
           <a:lstStyle/>
           <a:p>
-            <a:pPr algn="r"/>
+            <a:pPr marL="0" indent="0" algn="r">
+              <a:buNone/>
+            </a:pPr>
             <a:r>
               <a:rPr lang="en-US" sz="800" b="1" dirty="0">
                 <a:solidFill>
@@ -36018,8 +35587,9 @@
                 <a:ea typeface="Calibri" pitchFamily="34" charset="-122"/>
                 <a:cs typeface="Calibri" pitchFamily="34" charset="-120"/>
               </a:rPr>
-              <a:t>$2.4M</a:t>
-            </a:r>
+              <a:t>$7.3M</a:t>
+            </a:r>
+            <a:endParaRPr lang="en-US" sz="800" dirty="0"/>
           </a:p>
         </p:txBody>
       </p:sp>
@@ -36076,7 +35646,9 @@
           <a:bodyPr wrap="square" rtlCol="0" anchor="ctr"/>
           <a:lstStyle/>
           <a:p>
-            <a:pPr algn="r"/>
+            <a:pPr marL="0" indent="0" algn="r">
+              <a:buNone/>
+            </a:pPr>
             <a:r>
               <a:rPr lang="en-US" sz="800" b="1" dirty="0">
                 <a:solidFill>
@@ -36086,8 +35658,9 @@
                 <a:ea typeface="Calibri" pitchFamily="34" charset="-122"/>
                 <a:cs typeface="Calibri" pitchFamily="34" charset="-120"/>
               </a:rPr>
-              <a:t>+$22.15M</a:t>
-            </a:r>
+              <a:t>+$22.4M</a:t>
+            </a:r>
+            <a:endParaRPr lang="en-US" sz="800" dirty="0"/>
           </a:p>
         </p:txBody>
       </p:sp>
@@ -36144,7 +35717,9 @@
           <a:bodyPr wrap="square" rtlCol="0" anchor="ctr"/>
           <a:lstStyle/>
           <a:p>
-            <a:pPr algn="r"/>
+            <a:pPr marL="0" indent="0" algn="r">
+              <a:buNone/>
+            </a:pPr>
             <a:r>
               <a:rPr lang="en-US" sz="800" b="1" dirty="0">
                 <a:solidFill>
@@ -36154,8 +35729,9 @@
                 <a:ea typeface="Calibri" pitchFamily="34" charset="-122"/>
                 <a:cs typeface="Calibri" pitchFamily="34" charset="-120"/>
               </a:rPr>
-              <a:t>+938%</a:t>
-            </a:r>
+              <a:t>+307%</a:t>
+            </a:r>
+            <a:endParaRPr lang="en-US" sz="800" dirty="0"/>
           </a:p>
         </p:txBody>
       </p:sp>
@@ -36283,7 +35859,9 @@
           <a:bodyPr wrap="square" rtlCol="0" anchor="ctr"/>
           <a:lstStyle/>
           <a:p>
-            <a:pPr algn="r"/>
+            <a:pPr marL="0" indent="0" algn="r">
+              <a:buNone/>
+            </a:pPr>
             <a:r>
               <a:rPr lang="en-US" sz="800" dirty="0">
                 <a:solidFill>
@@ -36295,6 +35873,7 @@
               </a:rPr>
               <a:t>$46.10M</a:t>
             </a:r>
+            <a:endParaRPr lang="en-US" sz="800" dirty="0"/>
           </a:p>
         </p:txBody>
       </p:sp>
@@ -36351,7 +35930,9 @@
           <a:bodyPr wrap="square" rtlCol="0" anchor="ctr"/>
           <a:lstStyle/>
           <a:p>
-            <a:pPr algn="r"/>
+            <a:pPr marL="0" indent="0" algn="r">
+              <a:buNone/>
+            </a:pPr>
             <a:r>
               <a:rPr lang="en-US" sz="800" dirty="0">
                 <a:solidFill>
@@ -36361,8 +35942,9 @@
                 <a:ea typeface="Calibri" pitchFamily="34" charset="-122"/>
                 <a:cs typeface="Calibri" pitchFamily="34" charset="-120"/>
               </a:rPr>
-              <a:t>$46.00M</a:t>
-            </a:r>
+              <a:t>$10.25M</a:t>
+            </a:r>
+            <a:endParaRPr lang="en-US" sz="800" dirty="0"/>
           </a:p>
         </p:txBody>
       </p:sp>
@@ -36419,18 +36001,21 @@
           <a:bodyPr wrap="square" rtlCol="0" anchor="ctr"/>
           <a:lstStyle/>
           <a:p>
-            <a:pPr algn="r"/>
-            <a:r>
-              <a:rPr lang="en-US" sz="800" b="1" dirty="0">
-                <a:solidFill>
-                  <a:srgbClr val="15803D"/>
-                </a:solidFill>
-                <a:latin typeface="Calibri" pitchFamily="34" charset="0"/>
-                <a:ea typeface="Calibri" pitchFamily="34" charset="-122"/>
-                <a:cs typeface="Calibri" pitchFamily="34" charset="-120"/>
-              </a:rPr>
-              <a:t>+$0.10M</a:t>
-            </a:r>
+            <a:pPr marL="0" indent="0" algn="r">
+              <a:buNone/>
+            </a:pPr>
+            <a:r>
+              <a:rPr lang="en-US" sz="800" dirty="0">
+                <a:solidFill>
+                  <a:srgbClr val="0F172A"/>
+                </a:solidFill>
+                <a:latin typeface="Calibri" pitchFamily="34" charset="0"/>
+                <a:ea typeface="Calibri" pitchFamily="34" charset="-122"/>
+                <a:cs typeface="Calibri" pitchFamily="34" charset="-120"/>
+              </a:rPr>
+              <a:t>—</a:t>
+            </a:r>
+            <a:endParaRPr lang="en-US" sz="800" dirty="0"/>
           </a:p>
         </p:txBody>
       </p:sp>
@@ -36487,7 +36072,9 @@
           <a:bodyPr wrap="square" rtlCol="0" anchor="ctr"/>
           <a:lstStyle/>
           <a:p>
-            <a:pPr algn="r"/>
+            <a:pPr marL="0" indent="0" algn="r">
+              <a:buNone/>
+            </a:pPr>
             <a:r>
               <a:rPr lang="en-US" sz="800" dirty="0">
                 <a:solidFill>
@@ -36497,8 +36084,9 @@
                 <a:ea typeface="Calibri" pitchFamily="34" charset="-122"/>
                 <a:cs typeface="Calibri" pitchFamily="34" charset="-120"/>
               </a:rPr>
-              <a:t>+0%</a:t>
-            </a:r>
+              <a:t>—</a:t>
+            </a:r>
+            <a:endParaRPr lang="en-US" sz="800" dirty="0"/>
           </a:p>
         </p:txBody>
       </p:sp>
@@ -36626,7 +36214,9 @@
           <a:bodyPr wrap="square" rtlCol="0" anchor="ctr"/>
           <a:lstStyle/>
           <a:p>
-            <a:pPr algn="r"/>
+            <a:pPr marL="0" indent="0" algn="r">
+              <a:buNone/>
+            </a:pPr>
             <a:r>
               <a:rPr lang="en-US" sz="800" b="1" dirty="0">
                 <a:solidFill>
@@ -36636,8 +36226,9 @@
                 <a:ea typeface="Calibri" pitchFamily="34" charset="-122"/>
                 <a:cs typeface="Calibri" pitchFamily="34" charset="-120"/>
               </a:rPr>
-              <a:t>$70.61M</a:t>
-            </a:r>
+              <a:t>$66.04M</a:t>
+            </a:r>
+            <a:endParaRPr lang="en-US" sz="800" dirty="0"/>
           </a:p>
         </p:txBody>
       </p:sp>
@@ -36694,7 +36285,9 @@
           <a:bodyPr wrap="square" rtlCol="0" anchor="ctr"/>
           <a:lstStyle/>
           <a:p>
-            <a:pPr algn="r"/>
+            <a:pPr marL="0" indent="0" algn="r">
+              <a:buNone/>
+            </a:pPr>
             <a:r>
               <a:rPr lang="en-US" sz="800" b="1" dirty="0">
                 <a:solidFill>
@@ -36704,8 +36297,9 @@
                 <a:ea typeface="Calibri" pitchFamily="34" charset="-122"/>
                 <a:cs typeface="Calibri" pitchFamily="34" charset="-120"/>
               </a:rPr>
-              <a:t>$48.36M</a:t>
-            </a:r>
+              <a:t>$28.64M</a:t>
+            </a:r>
+            <a:endParaRPr lang="en-US" sz="800" dirty="0"/>
           </a:p>
         </p:txBody>
       </p:sp>
@@ -36762,7 +36356,9 @@
           <a:bodyPr wrap="square" rtlCol="0" anchor="ctr"/>
           <a:lstStyle/>
           <a:p>
-            <a:pPr algn="r"/>
+            <a:pPr marL="0" indent="0" algn="r">
+              <a:buNone/>
+            </a:pPr>
             <a:r>
               <a:rPr lang="en-US" sz="800" b="1" dirty="0">
                 <a:solidFill>
@@ -36772,8 +36368,9 @@
                 <a:ea typeface="Calibri" pitchFamily="34" charset="-122"/>
                 <a:cs typeface="Calibri" pitchFamily="34" charset="-120"/>
               </a:rPr>
-              <a:t>+$22.25M</a:t>
-            </a:r>
+              <a:t>+$37.4M</a:t>
+            </a:r>
+            <a:endParaRPr lang="en-US" sz="800" dirty="0"/>
           </a:p>
         </p:txBody>
       </p:sp>
@@ -36830,7 +36427,9 @@
           <a:bodyPr wrap="square" rtlCol="0" anchor="ctr"/>
           <a:lstStyle/>
           <a:p>
-            <a:pPr algn="r"/>
+            <a:pPr marL="0" indent="0" algn="r">
+              <a:buNone/>
+            </a:pPr>
             <a:r>
               <a:rPr lang="en-US" sz="800" b="1" dirty="0">
                 <a:solidFill>
@@ -36840,8 +36439,9 @@
                 <a:ea typeface="Calibri" pitchFamily="34" charset="-122"/>
                 <a:cs typeface="Calibri" pitchFamily="34" charset="-120"/>
               </a:rPr>
-              <a:t>+46%</a:t>
-            </a:r>
+              <a:t>+131%</a:t>
+            </a:r>
+            <a:endParaRPr lang="en-US" sz="800" dirty="0"/>
           </a:p>
         </p:txBody>
       </p:sp>
@@ -36886,29 +36486,33 @@
         <p:spPr>
           <a:xfrm>
             <a:off x="6629400" y="1152144"/>
-            <a:ext cx="2194560" cy="237744"/>
-          </a:xfrm>
-          <a:prstGeom prst="rect">
-            <a:avLst/>
-          </a:prstGeom>
-          <a:noFill/>
-          <a:ln/>
-        </p:spPr>
-        <p:txBody>
-          <a:bodyPr wrap="square" rtlCol="0" anchor="ctr">
-            <a:noAutofit/>
-          </a:bodyPr>
-          <a:lstStyle/>
-          <a:p>
-            <a:pPr algn="l"/>
+            <a:ext cx="2194560" cy="219456"/>
+          </a:xfrm>
+          <a:prstGeom prst="rect">
+            <a:avLst/>
+          </a:prstGeom>
+          <a:noFill/>
+          <a:ln/>
+        </p:spPr>
+        <p:txBody>
+          <a:bodyPr wrap="square" rtlCol="0" anchor="ctr"/>
+          <a:lstStyle/>
+          <a:p>
+            <a:pPr marL="0" indent="0">
+              <a:buNone/>
+            </a:pPr>
             <a:r>
               <a:rPr lang="en-US" sz="1000" b="1" dirty="0">
                 <a:solidFill>
                   <a:srgbClr val="1A2E44"/>
                 </a:solidFill>
+                <a:latin typeface="Calibri" pitchFamily="34" charset="0"/>
+                <a:ea typeface="Calibri" pitchFamily="34" charset="-122"/>
+                <a:cs typeface="Calibri" pitchFamily="34" charset="-120"/>
               </a:rPr>
               <a:t>Key Takeaways</a:t>
             </a:r>
+            <a:endParaRPr lang="en-US" sz="1000" dirty="0"/>
           </a:p>
         </p:txBody>
       </p:sp>
@@ -36950,30 +36554,45 @@
         </p:nvSpPr>
         <p:spPr>
           <a:xfrm>
-            <a:off x="6629400" y="1426464"/>
-            <a:ext cx="2194560" cy="621792"/>
-          </a:xfrm>
-          <a:prstGeom prst="rect">
-            <a:avLst/>
-          </a:prstGeom>
-          <a:noFill/>
-          <a:ln/>
-        </p:spPr>
-        <p:txBody>
-          <a:bodyPr wrap="square" rtlCol="0" anchor="ctr">
-            <a:noAutofit/>
-          </a:bodyPr>
-          <a:lstStyle/>
-          <a:p>
-            <a:pPr marL="0" indent="0" algn="l"/>
-            <a:r>
-              <a:rPr lang="en-US" sz="950" b="0" dirty="0">
-                <a:solidFill>
-                  <a:srgbClr val="000000"/>
-                </a:solidFill>
-              </a:rPr>
-              <a:t>• YTD CFO $25.6M exceeds $3.2M budget, +$22.4M and +703% — Q1 annual billing collections generated the surplus; Jun CFO $4.8M</a:t>
-            </a:r>
+            <a:off x="6629400" y="1463040"/>
+            <a:ext cx="2194560" cy="347472"/>
+          </a:xfrm>
+          <a:prstGeom prst="rect">
+            <a:avLst/>
+          </a:prstGeom>
+          <a:noFill/>
+          <a:ln/>
+        </p:spPr>
+        <p:txBody>
+          <a:bodyPr wrap="square" rtlCol="0" anchor="ctr"/>
+          <a:lstStyle/>
+          <a:p>
+            <a:pPr marL="0" indent="0">
+              <a:buNone/>
+            </a:pPr>
+            <a:r>
+              <a:rPr lang="en-US" sz="900" b="1" dirty="0">
+                <a:solidFill>
+                  <a:srgbClr val="0D9488"/>
+                </a:solidFill>
+                <a:latin typeface="Calibri" pitchFamily="34" charset="0"/>
+                <a:ea typeface="Calibri" pitchFamily="34" charset="-122"/>
+                <a:cs typeface="Calibri" pitchFamily="34" charset="-120"/>
+              </a:rPr>
+              <a:t>• </a:t>
+            </a:r>
+            <a:r>
+              <a:rPr lang="en-US" sz="900" dirty="0">
+                <a:solidFill>
+                  <a:srgbClr val="334155"/>
+                </a:solidFill>
+                <a:latin typeface="Calibri" pitchFamily="34" charset="0"/>
+                <a:ea typeface="Calibri" pitchFamily="34" charset="-122"/>
+                <a:cs typeface="Calibri" pitchFamily="34" charset="-120"/>
+              </a:rPr>
+              <a:t>CFO of $30.6M dramatically exceeds $8.2M budget — annual billing collections in Q1 generated the surplus</a:t>
+            </a:r>
+            <a:endParaRPr lang="en-US" sz="900" dirty="0"/>
           </a:p>
         </p:txBody>
       </p:sp>
@@ -36985,30 +36604,45 @@
         </p:nvSpPr>
         <p:spPr>
           <a:xfrm>
-            <a:off x="6629400" y="2084832"/>
-            <a:ext cx="2194560" cy="621792"/>
-          </a:xfrm>
-          <a:prstGeom prst="rect">
-            <a:avLst/>
-          </a:prstGeom>
-          <a:noFill/>
-          <a:ln/>
-        </p:spPr>
-        <p:txBody>
-          <a:bodyPr wrap="square" rtlCol="0" anchor="ctr">
-            <a:noAutofit/>
-          </a:bodyPr>
-          <a:lstStyle/>
-          <a:p>
-            <a:pPr marL="0" indent="0" algn="l"/>
-            <a:r>
-              <a:rPr lang="en-US" sz="950" b="0" dirty="0">
-                <a:solidFill>
-                  <a:srgbClr val="000000"/>
-                </a:solidFill>
-              </a:rPr>
-              <a:t>• Net income -$10.1M vs $2.4M budget ($12.5M) — actual cost structure reflects investment phase vs plan</a:t>
-            </a:r>
+            <a:off x="6629400" y="1901952"/>
+            <a:ext cx="2194560" cy="347472"/>
+          </a:xfrm>
+          <a:prstGeom prst="rect">
+            <a:avLst/>
+          </a:prstGeom>
+          <a:noFill/>
+          <a:ln/>
+        </p:spPr>
+        <p:txBody>
+          <a:bodyPr wrap="square" rtlCol="0" anchor="ctr"/>
+          <a:lstStyle/>
+          <a:p>
+            <a:pPr marL="0" indent="0">
+              <a:buNone/>
+            </a:pPr>
+            <a:r>
+              <a:rPr lang="en-US" sz="900" b="1" dirty="0">
+                <a:solidFill>
+                  <a:srgbClr val="0D9488"/>
+                </a:solidFill>
+                <a:latin typeface="Calibri" pitchFamily="34" charset="0"/>
+                <a:ea typeface="Calibri" pitchFamily="34" charset="-122"/>
+                <a:cs typeface="Calibri" pitchFamily="34" charset="-120"/>
+              </a:rPr>
+              <a:t>• </a:t>
+            </a:r>
+            <a:r>
+              <a:rPr lang="en-US" sz="900" dirty="0">
+                <a:solidFill>
+                  <a:srgbClr val="334155"/>
+                </a:solidFill>
+                <a:latin typeface="Calibri" pitchFamily="34" charset="0"/>
+                <a:ea typeface="Calibri" pitchFamily="34" charset="-122"/>
+                <a:cs typeface="Calibri" pitchFamily="34" charset="-120"/>
+              </a:rPr>
+              <a:t>Deferred revenue build +$0.6M vs plan confirms contracted backlog ahead of GAAP recognition</a:t>
+            </a:r>
+            <a:endParaRPr lang="en-US" sz="900" dirty="0"/>
           </a:p>
         </p:txBody>
       </p:sp>
@@ -37020,30 +36654,45 @@
         </p:nvSpPr>
         <p:spPr>
           <a:xfrm>
-            <a:off x="6629400" y="2743200"/>
-            <a:ext cx="2194560" cy="621792"/>
-          </a:xfrm>
-          <a:prstGeom prst="rect">
-            <a:avLst/>
-          </a:prstGeom>
-          <a:noFill/>
-          <a:ln/>
-        </p:spPr>
-        <p:txBody>
-          <a:bodyPr wrap="square" rtlCol="0" anchor="ctr">
-            <a:noAutofit/>
-          </a:bodyPr>
-          <a:lstStyle/>
-          <a:p>
-            <a:pPr marL="0" indent="0" algn="l"/>
-            <a:r>
-              <a:rPr lang="en-US" sz="950" b="0" dirty="0">
-                <a:solidFill>
-                  <a:srgbClr val="000000"/>
-                </a:solidFill>
-              </a:rPr>
-              <a:t>• Zero financing across all 6 months; business fully self-funding; ending cash $70.61M vs $48.36M budget +$22.25M</a:t>
-            </a:r>
+            <a:off x="6629400" y="2331720"/>
+            <a:ext cx="2194560" cy="347472"/>
+          </a:xfrm>
+          <a:prstGeom prst="rect">
+            <a:avLst/>
+          </a:prstGeom>
+          <a:noFill/>
+          <a:ln/>
+        </p:spPr>
+        <p:txBody>
+          <a:bodyPr wrap="square" rtlCol="0" anchor="ctr"/>
+          <a:lstStyle/>
+          <a:p>
+            <a:pPr marL="0" indent="0">
+              <a:buNone/>
+            </a:pPr>
+            <a:r>
+              <a:rPr lang="en-US" sz="900" b="1" dirty="0">
+                <a:solidFill>
+                  <a:srgbClr val="0D9488"/>
+                </a:solidFill>
+                <a:latin typeface="Calibri" pitchFamily="34" charset="0"/>
+                <a:ea typeface="Calibri" pitchFamily="34" charset="-122"/>
+                <a:cs typeface="Calibri" pitchFamily="34" charset="-120"/>
+              </a:rPr>
+              <a:t>• </a:t>
+            </a:r>
+            <a:r>
+              <a:rPr lang="en-US" sz="900" dirty="0">
+                <a:solidFill>
+                  <a:srgbClr val="334155"/>
+                </a:solidFill>
+                <a:latin typeface="Calibri" pitchFamily="34" charset="0"/>
+                <a:ea typeface="Calibri" pitchFamily="34" charset="-122"/>
+                <a:cs typeface="Calibri" pitchFamily="34" charset="-120"/>
+              </a:rPr>
+              <a:t>Zero financing across all 5 months — business is fully self-funding above $10M cash floor</a:t>
+            </a:r>
+            <a:endParaRPr lang="en-US" sz="900" dirty="0"/>
           </a:p>
         </p:txBody>
       </p:sp>
@@ -37055,30 +36704,45 @@
         </p:nvSpPr>
         <p:spPr>
           <a:xfrm>
-            <a:off x="6629400" y="3401568"/>
-            <a:ext cx="2194560" cy="621792"/>
-          </a:xfrm>
-          <a:prstGeom prst="rect">
-            <a:avLst/>
-          </a:prstGeom>
-          <a:noFill/>
-          <a:ln/>
-        </p:spPr>
-        <p:txBody>
-          <a:bodyPr wrap="square" rtlCol="0" anchor="ctr">
-            <a:noAutofit/>
-          </a:bodyPr>
-          <a:lstStyle/>
-          <a:p>
-            <a:pPr marL="0" indent="0" algn="l"/>
-            <a:r>
-              <a:rPr lang="en-US" sz="950" b="0" dirty="0">
-                <a:solidFill>
-                  <a:srgbClr val="000000"/>
-                </a:solidFill>
-              </a:rPr>
-              <a:t>• H2 watchpoint: CFO will moderate as Q1 annual billing spike does not repeat; target $8–10M/month collections</a:t>
-            </a:r>
+            <a:off x="6629400" y="2799989"/>
+            <a:ext cx="2194560" cy="347472"/>
+          </a:xfrm>
+          <a:prstGeom prst="rect">
+            <a:avLst/>
+          </a:prstGeom>
+          <a:noFill/>
+          <a:ln/>
+        </p:spPr>
+        <p:txBody>
+          <a:bodyPr wrap="square" rtlCol="0" anchor="ctr"/>
+          <a:lstStyle/>
+          <a:p>
+            <a:pPr marL="0" indent="0">
+              <a:buNone/>
+            </a:pPr>
+            <a:r>
+              <a:rPr lang="en-US" sz="900" b="1" dirty="0">
+                <a:solidFill>
+                  <a:srgbClr val="0D9488"/>
+                </a:solidFill>
+                <a:latin typeface="Calibri" pitchFamily="34" charset="0"/>
+                <a:ea typeface="Calibri" pitchFamily="34" charset="-122"/>
+                <a:cs typeface="Calibri" pitchFamily="34" charset="-120"/>
+              </a:rPr>
+              <a:t>• </a:t>
+            </a:r>
+            <a:r>
+              <a:rPr lang="en-US" sz="900" dirty="0">
+                <a:solidFill>
+                  <a:srgbClr val="334155"/>
+                </a:solidFill>
+                <a:latin typeface="Calibri" pitchFamily="34" charset="0"/>
+                <a:ea typeface="Calibri" pitchFamily="34" charset="-122"/>
+                <a:cs typeface="Calibri" pitchFamily="34" charset="-120"/>
+              </a:rPr>
+              <a:t>H2 watchpoint: CFO will moderate materially as Q1 annual billing collections do not repeat (Jun–Aug: $6–8M/mo)</a:t>
+            </a:r>
+            <a:endParaRPr lang="en-US" sz="900" dirty="0"/>
           </a:p>
         </p:txBody>
       </p:sp>
@@ -37508,7 +37172,7 @@
                 <a:ea typeface="Calibri" pitchFamily="34" charset="-122"/>
                 <a:cs typeface="Calibri" pitchFamily="34" charset="-120"/>
               </a:rPr>
-              <a:t>23,100+</a:t>
+              <a:t>20,527</a:t>
             </a:r>
             <a:endParaRPr lang="en-US" sz="1700" dirty="0"/>
           </a:p>
@@ -37547,7 +37211,7 @@
                 <a:ea typeface="Calibri" pitchFamily="34" charset="-122"/>
                 <a:cs typeface="Calibri" pitchFamily="34" charset="-120"/>
               </a:rPr>
-              <a:t>+6% vs budget</a:t>
+              <a:t>+8% vs budget</a:t>
             </a:r>
             <a:endParaRPr lang="en-US" sz="750" dirty="0"/>
           </a:p>
@@ -37689,7 +37353,7 @@
                 <a:ea typeface="Calibri" pitchFamily="34" charset="-122"/>
                 <a:cs typeface="Calibri" pitchFamily="34" charset="-120"/>
               </a:rPr>
-              <a:t>$27.1M</a:t>
+              <a:t>$22.5M</a:t>
             </a:r>
             <a:endParaRPr lang="en-US" sz="1700" dirty="0"/>
           </a:p>
@@ -37728,7 +37392,7 @@
                 <a:ea typeface="Calibri" pitchFamily="34" charset="-122"/>
                 <a:cs typeface="Calibri" pitchFamily="34" charset="-120"/>
               </a:rPr>
-              <a:t>+$2.6M vs May</a:t>
+              <a:t>+$0.9M vs budget</a:t>
             </a:r>
             <a:endParaRPr lang="en-US" sz="750" dirty="0"/>
           </a:p>
@@ -37870,7 +37534,7 @@
                 <a:ea typeface="Calibri" pitchFamily="34" charset="-122"/>
                 <a:cs typeface="Calibri" pitchFamily="34" charset="-120"/>
               </a:rPr>
-              <a:t>$5.4M</a:t>
+              <a:t>$7.6M</a:t>
             </a:r>
             <a:endParaRPr lang="en-US" sz="1700" dirty="0"/>
           </a:p>
@@ -38051,7 +37715,7 @@
                 <a:ea typeface="Calibri" pitchFamily="34" charset="-122"/>
                 <a:cs typeface="Calibri" pitchFamily="34" charset="-120"/>
               </a:rPr>
-              <a:t>Partner 59.1%</a:t>
+              <a:t>Referral 65.7%</a:t>
             </a:r>
             <a:endParaRPr lang="en-US" sz="1700" dirty="0"/>
           </a:p>
@@ -38090,7 +37754,7 @@
                 <a:ea typeface="Calibri" pitchFamily="34" charset="-122"/>
                 <a:cs typeface="Calibri" pitchFamily="34" charset="-120"/>
               </a:rPr>
-              <a:t>Referral 65.7%</a:t>
+              <a:t>Partner 59.1%</a:t>
             </a:r>
             <a:endParaRPr lang="en-US" sz="750" dirty="0"/>
           </a:p>
@@ -38129,7 +37793,7 @@
                 <a:ea typeface="Calibri" pitchFamily="34" charset="-122"/>
                 <a:cs typeface="Calibri" pitchFamily="34" charset="-120"/>
               </a:rPr>
-              <a:t>CHANNEL PERFORMANCE — YTD JAN–JUN 2026</a:t>
+              <a:t>CHANNEL PERFORMANCE — YTD JAN–MAY 2026</a:t>
             </a:r>
             <a:endParaRPr lang="en-US" sz="750" dirty="0"/>
           </a:p>
@@ -39401,7 +39065,7 @@
             <a:r>
               <a:rPr lang="en-US" sz="750" b="1" dirty="0">
                 <a:solidFill>
-                  <a:srgbClr val="15803D"/>
+                  <a:srgbClr val="0D9488"/>
                 </a:solidFill>
                 <a:latin typeface="Calibri" pitchFamily="34" charset="0"/>
                 <a:ea typeface="Calibri" pitchFamily="34" charset="-122"/>
@@ -39409,11 +39073,7 @@
               </a:rPr>
               <a:t>364.1x</a:t>
             </a:r>
-            <a:endParaRPr lang="en-US" sz="750" dirty="0">
-              <a:solidFill>
-                <a:srgbClr val="15803D"/>
-              </a:solidFill>
-            </a:endParaRPr>
+            <a:endParaRPr lang="en-US" sz="750" dirty="0"/>
           </a:p>
         </p:txBody>
       </p:sp>
@@ -39837,7 +39497,7 @@
                 <a:ea typeface="Calibri" pitchFamily="34" charset="-122"/>
                 <a:cs typeface="Calibri" pitchFamily="34" charset="-120"/>
               </a:rPr>
-              <a:t>($0.86M)</a:t>
+              <a:t>-$0.86M</a:t>
             </a:r>
             <a:endParaRPr lang="en-US" sz="750" dirty="0"/>
           </a:p>
@@ -40115,7 +39775,7 @@
             <a:r>
               <a:rPr lang="en-US" sz="750" b="1" dirty="0">
                 <a:solidFill>
-                  <a:srgbClr val="15803D"/>
+                  <a:srgbClr val="0D9488"/>
                 </a:solidFill>
                 <a:latin typeface="Calibri" pitchFamily="34" charset="0"/>
                 <a:ea typeface="Calibri" pitchFamily="34" charset="-122"/>
@@ -40123,11 +39783,7 @@
               </a:rPr>
               <a:t>141.0x</a:t>
             </a:r>
-            <a:endParaRPr lang="en-US" sz="750" dirty="0">
-              <a:solidFill>
-                <a:srgbClr val="15803D"/>
-              </a:solidFill>
-            </a:endParaRPr>
+            <a:endParaRPr lang="en-US" sz="750" dirty="0"/>
           </a:p>
         </p:txBody>
       </p:sp>
@@ -40551,7 +40207,7 @@
                 <a:ea typeface="Calibri" pitchFamily="34" charset="-122"/>
                 <a:cs typeface="Calibri" pitchFamily="34" charset="-120"/>
               </a:rPr>
-              <a:t>($0.56M)</a:t>
+              <a:t>-$0.56M</a:t>
             </a:r>
             <a:endParaRPr lang="en-US" sz="750" dirty="0"/>
           </a:p>
@@ -40829,7 +40485,7 @@
             <a:r>
               <a:rPr lang="en-US" sz="750" b="1" dirty="0">
                 <a:solidFill>
-                  <a:srgbClr val="15803D"/>
+                  <a:srgbClr val="0D9488"/>
                 </a:solidFill>
                 <a:latin typeface="Calibri" pitchFamily="34" charset="0"/>
                 <a:ea typeface="Calibri" pitchFamily="34" charset="-122"/>
@@ -40837,11 +40493,7 @@
               </a:rPr>
               <a:t>70.3x</a:t>
             </a:r>
-            <a:endParaRPr lang="en-US" sz="750" dirty="0">
-              <a:solidFill>
-                <a:srgbClr val="15803D"/>
-              </a:solidFill>
-            </a:endParaRPr>
+            <a:endParaRPr lang="en-US" sz="750" dirty="0"/>
           </a:p>
         </p:txBody>
       </p:sp>
@@ -41265,7 +40917,7 @@
                 <a:ea typeface="Calibri" pitchFamily="34" charset="-122"/>
                 <a:cs typeface="Calibri" pitchFamily="34" charset="-120"/>
               </a:rPr>
-              <a:t>($0.60M)</a:t>
+              <a:t>-$0.60M</a:t>
             </a:r>
             <a:endParaRPr lang="en-US" sz="750" dirty="0"/>
           </a:p>
@@ -41472,19 +41124,15 @@
             <a:r>
               <a:rPr lang="en-US" sz="750" dirty="0">
                 <a:solidFill>
-                  <a:srgbClr val="C00000"/>
-                </a:solidFill>
-                <a:latin typeface="Calibri" pitchFamily="34" charset="0"/>
-                <a:ea typeface="Calibri" pitchFamily="34" charset="-122"/>
-                <a:cs typeface="Calibri" pitchFamily="34" charset="-120"/>
-              </a:rPr>
-              <a:t>($0.57M)</a:t>
-            </a:r>
-            <a:endParaRPr lang="en-US" sz="750" dirty="0">
-              <a:solidFill>
-                <a:srgbClr val="C00000"/>
-              </a:solidFill>
-            </a:endParaRPr>
+                  <a:srgbClr val="15803D"/>
+                </a:solidFill>
+                <a:latin typeface="Calibri" pitchFamily="34" charset="0"/>
+                <a:ea typeface="Calibri" pitchFamily="34" charset="-122"/>
+                <a:cs typeface="Calibri" pitchFamily="34" charset="-120"/>
+              </a:rPr>
+              <a:t>-$0.57M</a:t>
+            </a:r>
+            <a:endParaRPr lang="en-US" sz="750" dirty="0"/>
           </a:p>
         </p:txBody>
       </p:sp>
@@ -41547,7 +41195,7 @@
             <a:r>
               <a:rPr lang="en-US" sz="750" b="1" dirty="0">
                 <a:solidFill>
-                  <a:srgbClr val="C00000"/>
+                  <a:srgbClr val="15803D"/>
                 </a:solidFill>
                 <a:latin typeface="Calibri" pitchFamily="34" charset="0"/>
                 <a:ea typeface="Calibri" pitchFamily="34" charset="-122"/>
@@ -41555,11 +41203,7 @@
               </a:rPr>
               <a:t>16.8x</a:t>
             </a:r>
-            <a:endParaRPr lang="en-US" sz="750" dirty="0">
-              <a:solidFill>
-                <a:srgbClr val="C00000"/>
-              </a:solidFill>
-            </a:endParaRPr>
+            <a:endParaRPr lang="en-US" sz="750" dirty="0"/>
           </a:p>
         </p:txBody>
       </p:sp>
@@ -41622,7 +41266,7 @@
             <a:r>
               <a:rPr lang="en-US" sz="750" dirty="0">
                 <a:solidFill>
-                  <a:srgbClr val="C00000"/>
+                  <a:srgbClr val="D97706"/>
                 </a:solidFill>
                 <a:latin typeface="Calibri" pitchFamily="34" charset="0"/>
                 <a:ea typeface="Calibri" pitchFamily="34" charset="-122"/>
@@ -41630,11 +41274,7 @@
               </a:rPr>
               <a:t>14.6%</a:t>
             </a:r>
-            <a:endParaRPr lang="en-US" sz="750" dirty="0">
-              <a:solidFill>
-                <a:srgbClr val="C00000"/>
-              </a:solidFill>
-            </a:endParaRPr>
+            <a:endParaRPr lang="en-US" sz="750" dirty="0"/>
           </a:p>
         </p:txBody>
       </p:sp>
@@ -41987,7 +41627,7 @@
                 <a:ea typeface="Calibri" pitchFamily="34" charset="-122"/>
                 <a:cs typeface="Calibri" pitchFamily="34" charset="-120"/>
               </a:rPr>
-              <a:t>($0.23M)</a:t>
+              <a:t>-$0.23M</a:t>
             </a:r>
             <a:endParaRPr lang="en-US" sz="750" dirty="0"/>
           </a:p>
@@ -42697,7 +42337,7 @@
                 <a:ea typeface="Calibri" pitchFamily="34" charset="-122"/>
                 <a:cs typeface="Calibri" pitchFamily="34" charset="-120"/>
               </a:rPr>
-              <a:t>($0.37M)</a:t>
+              <a:t>-$0.37M</a:t>
             </a:r>
             <a:endParaRPr lang="en-US" sz="750" dirty="0"/>
           </a:p>
@@ -42904,19 +42544,15 @@
             <a:r>
               <a:rPr lang="en-US" sz="750" dirty="0">
                 <a:solidFill>
-                  <a:srgbClr val="C00000"/>
-                </a:solidFill>
-                <a:latin typeface="Calibri" pitchFamily="34" charset="0"/>
-                <a:ea typeface="Calibri" pitchFamily="34" charset="-122"/>
-                <a:cs typeface="Calibri" pitchFamily="34" charset="-120"/>
-              </a:rPr>
-              <a:t>($0.31M)</a:t>
-            </a:r>
-            <a:endParaRPr lang="en-US" sz="750" dirty="0">
-              <a:solidFill>
-                <a:srgbClr val="C00000"/>
-              </a:solidFill>
-            </a:endParaRPr>
+                  <a:srgbClr val="15803D"/>
+                </a:solidFill>
+                <a:latin typeface="Calibri" pitchFamily="34" charset="0"/>
+                <a:ea typeface="Calibri" pitchFamily="34" charset="-122"/>
+                <a:cs typeface="Calibri" pitchFamily="34" charset="-120"/>
+              </a:rPr>
+              <a:t>-$0.31M</a:t>
+            </a:r>
+            <a:endParaRPr lang="en-US" sz="750" dirty="0"/>
           </a:p>
         </p:txBody>
       </p:sp>
@@ -42979,7 +42615,7 @@
             <a:r>
               <a:rPr lang="en-US" sz="750" b="1" dirty="0">
                 <a:solidFill>
-                  <a:srgbClr val="C00000"/>
+                  <a:srgbClr val="D97706"/>
                 </a:solidFill>
                 <a:latin typeface="Calibri" pitchFamily="34" charset="0"/>
                 <a:ea typeface="Calibri" pitchFamily="34" charset="-122"/>
@@ -42987,11 +42623,7 @@
               </a:rPr>
               <a:t>4.2x</a:t>
             </a:r>
-            <a:endParaRPr lang="en-US" sz="750" dirty="0">
-              <a:solidFill>
-                <a:srgbClr val="C00000"/>
-              </a:solidFill>
-            </a:endParaRPr>
+            <a:endParaRPr lang="en-US" sz="750" dirty="0"/>
           </a:p>
         </p:txBody>
       </p:sp>
@@ -43415,7 +43047,7 @@
                 <a:ea typeface="Calibri" pitchFamily="34" charset="-122"/>
                 <a:cs typeface="Calibri" pitchFamily="34" charset="-120"/>
               </a:rPr>
-              <a:t>($0.12M)</a:t>
+              <a:t>-$0.12M</a:t>
             </a:r>
             <a:endParaRPr lang="en-US" sz="750" dirty="0"/>
           </a:p>
@@ -43622,19 +43254,15 @@
             <a:r>
               <a:rPr lang="en-US" sz="750" dirty="0">
                 <a:solidFill>
-                  <a:srgbClr val="C00000"/>
-                </a:solidFill>
-                <a:latin typeface="Calibri" pitchFamily="34" charset="0"/>
-                <a:ea typeface="Calibri" pitchFamily="34" charset="-122"/>
-                <a:cs typeface="Calibri" pitchFamily="34" charset="-120"/>
-              </a:rPr>
-              <a:t>($0.70M)</a:t>
-            </a:r>
-            <a:endParaRPr lang="en-US" sz="750" dirty="0">
-              <a:solidFill>
-                <a:srgbClr val="C00000"/>
-              </a:solidFill>
-            </a:endParaRPr>
+                  <a:srgbClr val="15803D"/>
+                </a:solidFill>
+                <a:latin typeface="Calibri" pitchFamily="34" charset="0"/>
+                <a:ea typeface="Calibri" pitchFamily="34" charset="-122"/>
+                <a:cs typeface="Calibri" pitchFamily="34" charset="-120"/>
+              </a:rPr>
+              <a:t>-$0.70M</a:t>
+            </a:r>
+            <a:endParaRPr lang="en-US" sz="750" dirty="0"/>
           </a:p>
         </p:txBody>
       </p:sp>
@@ -43697,7 +43325,7 @@
             <a:r>
               <a:rPr lang="en-US" sz="750" b="1" dirty="0">
                 <a:solidFill>
-                  <a:srgbClr val="C00000"/>
+                  <a:srgbClr val="D97706"/>
                 </a:solidFill>
                 <a:latin typeface="Calibri" pitchFamily="34" charset="0"/>
                 <a:ea typeface="Calibri" pitchFamily="34" charset="-122"/>
@@ -43705,11 +43333,7 @@
               </a:rPr>
               <a:t>2.8x</a:t>
             </a:r>
-            <a:endParaRPr lang="en-US" sz="750" dirty="0">
-              <a:solidFill>
-                <a:srgbClr val="C00000"/>
-              </a:solidFill>
-            </a:endParaRPr>
+            <a:endParaRPr lang="en-US" sz="750" dirty="0"/>
           </a:p>
         </p:txBody>
       </p:sp>
@@ -43772,7 +43396,7 @@
             <a:r>
               <a:rPr lang="en-US" sz="750" dirty="0">
                 <a:solidFill>
-                  <a:srgbClr val="C00000"/>
+                  <a:srgbClr val="D97706"/>
                 </a:solidFill>
                 <a:latin typeface="Calibri" pitchFamily="34" charset="0"/>
                 <a:ea typeface="Calibri" pitchFamily="34" charset="-122"/>
@@ -43780,11 +43404,7 @@
               </a:rPr>
               <a:t>14.5%</a:t>
             </a:r>
-            <a:endParaRPr lang="en-US" sz="750" dirty="0">
-              <a:solidFill>
-                <a:srgbClr val="C00000"/>
-              </a:solidFill>
-            </a:endParaRPr>
+            <a:endParaRPr lang="en-US" sz="750" dirty="0"/>
           </a:p>
         </p:txBody>
       </p:sp>
@@ -44344,19 +43964,15 @@
             <a:r>
               <a:rPr lang="en-US" sz="750" dirty="0">
                 <a:solidFill>
-                  <a:srgbClr val="C00000"/>
-                </a:solidFill>
-                <a:latin typeface="Calibri" pitchFamily="34" charset="0"/>
-                <a:ea typeface="Calibri" pitchFamily="34" charset="-122"/>
-                <a:cs typeface="Calibri" pitchFamily="34" charset="-120"/>
-              </a:rPr>
-              <a:t>($0.47M)</a:t>
-            </a:r>
-            <a:endParaRPr lang="en-US" sz="750" dirty="0">
-              <a:solidFill>
-                <a:srgbClr val="C00000"/>
-              </a:solidFill>
-            </a:endParaRPr>
+                  <a:srgbClr val="15803D"/>
+                </a:solidFill>
+                <a:latin typeface="Calibri" pitchFamily="34" charset="0"/>
+                <a:ea typeface="Calibri" pitchFamily="34" charset="-122"/>
+                <a:cs typeface="Calibri" pitchFamily="34" charset="-120"/>
+              </a:rPr>
+              <a:t>-$0.47M</a:t>
+            </a:r>
+            <a:endParaRPr lang="en-US" sz="750" dirty="0"/>
           </a:p>
         </p:txBody>
       </p:sp>
@@ -44419,7 +44035,7 @@
             <a:r>
               <a:rPr lang="en-US" sz="750" b="1" dirty="0">
                 <a:solidFill>
-                  <a:srgbClr val="C00000"/>
+                  <a:srgbClr val="DC2626"/>
                 </a:solidFill>
                 <a:latin typeface="Calibri" pitchFamily="34" charset="0"/>
                 <a:ea typeface="Calibri" pitchFamily="34" charset="-122"/>
@@ -44427,11 +44043,7 @@
               </a:rPr>
               <a:t>1.3x</a:t>
             </a:r>
-            <a:endParaRPr lang="en-US" sz="750" dirty="0">
-              <a:solidFill>
-                <a:srgbClr val="C00000"/>
-              </a:solidFill>
-            </a:endParaRPr>
+            <a:endParaRPr lang="en-US" sz="750" dirty="0"/>
           </a:p>
         </p:txBody>
       </p:sp>
@@ -45062,19 +44674,15 @@
             <a:r>
               <a:rPr lang="en-US" sz="750" dirty="0">
                 <a:solidFill>
-                  <a:srgbClr val="C00000"/>
-                </a:solidFill>
-                <a:latin typeface="Calibri" pitchFamily="34" charset="0"/>
-                <a:ea typeface="Calibri" pitchFamily="34" charset="-122"/>
-                <a:cs typeface="Calibri" pitchFamily="34" charset="-120"/>
-              </a:rPr>
-              <a:t>($0.01M)</a:t>
-            </a:r>
-            <a:endParaRPr lang="en-US" sz="750" dirty="0">
-              <a:solidFill>
-                <a:srgbClr val="C00000"/>
-              </a:solidFill>
-            </a:endParaRPr>
+                  <a:srgbClr val="15803D"/>
+                </a:solidFill>
+                <a:latin typeface="Calibri" pitchFamily="34" charset="0"/>
+                <a:ea typeface="Calibri" pitchFamily="34" charset="-122"/>
+                <a:cs typeface="Calibri" pitchFamily="34" charset="-120"/>
+              </a:rPr>
+              <a:t>-$0.01M</a:t>
+            </a:r>
+            <a:endParaRPr lang="en-US" sz="750" dirty="0"/>
           </a:p>
         </p:txBody>
       </p:sp>
@@ -45137,7 +44745,7 @@
             <a:r>
               <a:rPr lang="en-US" sz="750" b="1" dirty="0">
                 <a:solidFill>
-                  <a:srgbClr val="C00000"/>
+                  <a:srgbClr val="DC2626"/>
                 </a:solidFill>
                 <a:latin typeface="Calibri" pitchFamily="34" charset="0"/>
                 <a:ea typeface="Calibri" pitchFamily="34" charset="-122"/>
@@ -45145,11 +44753,7 @@
               </a:rPr>
               <a:t>1.2x</a:t>
             </a:r>
-            <a:endParaRPr lang="en-US" sz="750" dirty="0">
-              <a:solidFill>
-                <a:srgbClr val="C00000"/>
-              </a:solidFill>
-            </a:endParaRPr>
+            <a:endParaRPr lang="en-US" sz="750" dirty="0"/>
           </a:p>
         </p:txBody>
       </p:sp>
@@ -45851,7 +45455,7 @@
             <a:r>
               <a:rPr lang="en-US" sz="750" b="1" dirty="0">
                 <a:solidFill>
-                  <a:srgbClr val="15803D"/>
+                  <a:srgbClr val="DC2626"/>
                 </a:solidFill>
                 <a:latin typeface="Calibri" pitchFamily="34" charset="0"/>
                 <a:ea typeface="Calibri" pitchFamily="34" charset="-122"/>
@@ -45859,11 +45463,7 @@
               </a:rPr>
               <a:t>1.0x</a:t>
             </a:r>
-            <a:endParaRPr lang="en-US" sz="750" dirty="0">
-              <a:solidFill>
-                <a:srgbClr val="15803D"/>
-              </a:solidFill>
-            </a:endParaRPr>
+            <a:endParaRPr lang="en-US" sz="750" dirty="0"/>
           </a:p>
         </p:txBody>
       </p:sp>
@@ -45926,7 +45526,7 @@
             <a:r>
               <a:rPr lang="en-US" sz="750" dirty="0">
                 <a:solidFill>
-                  <a:srgbClr val="15803D"/>
+                  <a:srgbClr val="DC2626"/>
                 </a:solidFill>
                 <a:latin typeface="Calibri" pitchFamily="34" charset="0"/>
                 <a:ea typeface="Calibri" pitchFamily="34" charset="-122"/>
@@ -45934,11 +45534,7 @@
               </a:rPr>
               <a:t>9.5%</a:t>
             </a:r>
-            <a:endParaRPr lang="en-US" sz="750" dirty="0">
-              <a:solidFill>
-                <a:srgbClr val="15803D"/>
-              </a:solidFill>
-            </a:endParaRPr>
+            <a:endParaRPr lang="en-US" sz="750" dirty="0"/>
           </a:p>
         </p:txBody>
       </p:sp>
@@ -46498,19 +46094,15 @@
             <a:r>
               <a:rPr lang="en-US" sz="750" dirty="0">
                 <a:solidFill>
-                  <a:srgbClr val="C00000"/>
-                </a:solidFill>
-                <a:latin typeface="Calibri" pitchFamily="34" charset="0"/>
-                <a:ea typeface="Calibri" pitchFamily="34" charset="-122"/>
-                <a:cs typeface="Calibri" pitchFamily="34" charset="-120"/>
-              </a:rPr>
-              <a:t>($1.01M)</a:t>
-            </a:r>
-            <a:endParaRPr lang="en-US" sz="750" dirty="0">
-              <a:solidFill>
-                <a:srgbClr val="C00000"/>
-              </a:solidFill>
-            </a:endParaRPr>
+                  <a:srgbClr val="15803D"/>
+                </a:solidFill>
+                <a:latin typeface="Calibri" pitchFamily="34" charset="0"/>
+                <a:ea typeface="Calibri" pitchFamily="34" charset="-122"/>
+                <a:cs typeface="Calibri" pitchFamily="34" charset="-120"/>
+              </a:rPr>
+              <a:t>-$1.01M</a:t>
+            </a:r>
+            <a:endParaRPr lang="en-US" sz="750" dirty="0"/>
           </a:p>
         </p:txBody>
       </p:sp>
@@ -46573,7 +46165,7 @@
             <a:r>
               <a:rPr lang="en-US" sz="750" b="1" dirty="0">
                 <a:solidFill>
-                  <a:srgbClr val="C00000"/>
+                  <a:srgbClr val="DC2626"/>
                 </a:solidFill>
                 <a:latin typeface="Calibri" pitchFamily="34" charset="0"/>
                 <a:ea typeface="Calibri" pitchFamily="34" charset="-122"/>
@@ -46581,11 +46173,7 @@
               </a:rPr>
               <a:t>0.8x</a:t>
             </a:r>
-            <a:endParaRPr lang="en-US" sz="750" dirty="0">
-              <a:solidFill>
-                <a:srgbClr val="C00000"/>
-              </a:solidFill>
-            </a:endParaRPr>
+            <a:endParaRPr lang="en-US" sz="750" dirty="0"/>
           </a:p>
         </p:txBody>
       </p:sp>
@@ -46648,7 +46236,7 @@
             <a:r>
               <a:rPr lang="en-US" sz="750" dirty="0">
                 <a:solidFill>
-                  <a:srgbClr val="C00000"/>
+                  <a:srgbClr val="D97706"/>
                 </a:solidFill>
                 <a:latin typeface="Calibri" pitchFamily="34" charset="0"/>
                 <a:ea typeface="Calibri" pitchFamily="34" charset="-122"/>
@@ -46656,11 +46244,7 @@
               </a:rPr>
               <a:t>18.4%</a:t>
             </a:r>
-            <a:endParaRPr lang="en-US" sz="750" dirty="0">
-              <a:solidFill>
-                <a:srgbClr val="C00000"/>
-              </a:solidFill>
-            </a:endParaRPr>
+            <a:endParaRPr lang="en-US" sz="750" dirty="0"/>
           </a:p>
         </p:txBody>
       </p:sp>
@@ -47007,6 +46591,9 @@
           <a:bodyPr wrap="square" rtlCol="0" anchor="ctr"/>
           <a:lstStyle/>
           <a:p>
+            <a:pPr marL="0" indent="0">
+              <a:buNone/>
+            </a:pPr>
             <a:r>
               <a:rPr lang="en-US" sz="950" dirty="0">
                 <a:solidFill>
@@ -47016,8 +46603,9 @@
                 <a:ea typeface="Calibri" pitchFamily="34" charset="-122"/>
                 <a:cs typeface="Calibri" pitchFamily="34" charset="-120"/>
               </a:rPr>
-              <a:t>YTD 2026 vs Budget</a:t>
-            </a:r>
+              <a:t>YTD 2026 · Q1 Actual · Q2 Partial (Apr–May) · vs Budget</a:t>
+            </a:r>
+            <a:endParaRPr lang="en-US" sz="950" dirty="0"/>
           </a:p>
         </p:txBody>
       </p:sp>
@@ -47228,7 +46816,7 @@
                 <a:ea typeface="Calibri" pitchFamily="34" charset="-122"/>
                 <a:cs typeface="Calibri" pitchFamily="34" charset="-120"/>
               </a:rPr>
-              <a:t>Q2 Actual</a:t>
+              <a:t>Q2 Partial</a:t>
             </a:r>
             <a:endParaRPr lang="en-US" sz="750" dirty="0"/>
           </a:p>
@@ -47938,7 +47526,7 @@
                 <a:ea typeface="Calibri" pitchFamily="34" charset="-122"/>
                 <a:cs typeface="Calibri" pitchFamily="34" charset="-120"/>
               </a:rPr>
-              <a:t>1,250</a:t>
+              <a:t>810</a:t>
             </a:r>
             <a:endParaRPr lang="en-US" sz="800" dirty="0"/>
           </a:p>
@@ -48009,7 +47597,7 @@
                 <a:ea typeface="Calibri" pitchFamily="34" charset="-122"/>
                 <a:cs typeface="Calibri" pitchFamily="34" charset="-120"/>
               </a:rPr>
-              <a:t>2,367</a:t>
+              <a:t>1,927</a:t>
             </a:r>
             <a:endParaRPr lang="en-US" sz="800" dirty="0"/>
           </a:p>
@@ -48222,7 +47810,7 @@
                 <a:ea typeface="Calibri" pitchFamily="34" charset="-122"/>
                 <a:cs typeface="Calibri" pitchFamily="34" charset="-120"/>
               </a:rPr>
-              <a:t>728</a:t>
+              <a:t>847</a:t>
             </a:r>
             <a:endParaRPr lang="en-US" sz="800" dirty="0"/>
           </a:p>
@@ -48293,7 +47881,7 @@
                 <a:ea typeface="Calibri" pitchFamily="34" charset="-122"/>
                 <a:cs typeface="Calibri" pitchFamily="34" charset="-120"/>
               </a:rPr>
-              <a:t>847</a:t>
+              <a:t>614</a:t>
             </a:r>
             <a:endParaRPr lang="en-US" sz="800" dirty="0"/>
           </a:p>
@@ -48364,7 +47952,7 @@
                 <a:ea typeface="Calibri" pitchFamily="34" charset="-122"/>
                 <a:cs typeface="Calibri" pitchFamily="34" charset="-120"/>
               </a:rPr>
-              <a:t>1,575</a:t>
+              <a:t>1,461</a:t>
             </a:r>
             <a:endParaRPr lang="en-US" sz="800" dirty="0"/>
           </a:p>
@@ -48648,7 +48236,7 @@
                 <a:ea typeface="Calibri" pitchFamily="34" charset="-122"/>
                 <a:cs typeface="Calibri" pitchFamily="34" charset="-120"/>
               </a:rPr>
-              <a:t>68%</a:t>
+              <a:t>72%</a:t>
             </a:r>
             <a:endParaRPr lang="en-US" sz="800" dirty="0"/>
           </a:p>
@@ -48719,7 +48307,7 @@
                 <a:ea typeface="Calibri" pitchFamily="34" charset="-122"/>
                 <a:cs typeface="Calibri" pitchFamily="34" charset="-120"/>
               </a:rPr>
-              <a:t>66%</a:t>
+              <a:t>74%</a:t>
             </a:r>
             <a:endParaRPr lang="en-US" sz="800" dirty="0"/>
           </a:p>
@@ -48932,7 +48520,7 @@
                 <a:ea typeface="Calibri" pitchFamily="34" charset="-122"/>
                 <a:cs typeface="Calibri" pitchFamily="34" charset="-120"/>
               </a:rPr>
-              <a:t>119</a:t>
+              <a:t>19</a:t>
             </a:r>
             <a:endParaRPr lang="en-US" sz="800" dirty="0"/>
           </a:p>
@@ -49003,7 +48591,7 @@
                 <a:ea typeface="Calibri" pitchFamily="34" charset="-122"/>
                 <a:cs typeface="Calibri" pitchFamily="34" charset="-120"/>
               </a:rPr>
-              <a:t>191</a:t>
+              <a:t>12</a:t>
             </a:r>
             <a:endParaRPr lang="en-US" sz="800" dirty="0"/>
           </a:p>
@@ -49074,7 +48662,7 @@
                 <a:ea typeface="Calibri" pitchFamily="34" charset="-122"/>
                 <a:cs typeface="Calibri" pitchFamily="34" charset="-120"/>
               </a:rPr>
-              <a:t>310</a:t>
+              <a:t>31</a:t>
             </a:r>
             <a:endParaRPr lang="en-US" sz="800" dirty="0"/>
           </a:p>
@@ -49287,7 +48875,7 @@
                 <a:ea typeface="Calibri" pitchFamily="34" charset="-122"/>
                 <a:cs typeface="Calibri" pitchFamily="34" charset="-120"/>
               </a:rPr>
-              <a:t>$4.5M</a:t>
+              <a:t>$256k</a:t>
             </a:r>
             <a:endParaRPr lang="en-US" sz="800" dirty="0"/>
           </a:p>
@@ -49358,7 +48946,7 @@
                 <a:ea typeface="Calibri" pitchFamily="34" charset="-122"/>
                 <a:cs typeface="Calibri" pitchFamily="34" charset="-120"/>
               </a:rPr>
-              <a:t>$6.7M</a:t>
+              <a:t>$180k</a:t>
             </a:r>
             <a:endParaRPr lang="en-US" sz="800" dirty="0"/>
           </a:p>
@@ -49713,7 +49301,7 @@
                 <a:ea typeface="Calibri" pitchFamily="34" charset="-122"/>
                 <a:cs typeface="Calibri" pitchFamily="34" charset="-120"/>
               </a:rPr>
-              <a:t>22%</a:t>
+              <a:t>13%</a:t>
             </a:r>
             <a:endParaRPr lang="en-US" sz="800" dirty="0"/>
           </a:p>
@@ -49784,7 +49372,7 @@
                 <a:ea typeface="Calibri" pitchFamily="34" charset="-122"/>
                 <a:cs typeface="Calibri" pitchFamily="34" charset="-120"/>
               </a:rPr>
-              <a:t>20%</a:t>
+              <a:t>15%</a:t>
             </a:r>
             <a:endParaRPr lang="en-US" sz="800" dirty="0"/>
           </a:p>
@@ -49997,7 +49585,7 @@
                 <a:ea typeface="Calibri" pitchFamily="34" charset="-122"/>
                 <a:cs typeface="Calibri" pitchFamily="34" charset="-120"/>
               </a:rPr>
-              <a:t>$37.8k</a:t>
+              <a:t>$9k</a:t>
             </a:r>
             <a:endParaRPr lang="en-US" sz="800" dirty="0"/>
           </a:p>
@@ -50068,7 +49656,7 @@
                 <a:ea typeface="Calibri" pitchFamily="34" charset="-122"/>
                 <a:cs typeface="Calibri" pitchFamily="34" charset="-120"/>
               </a:rPr>
-              <a:t>$35k</a:t>
+              <a:t>$12k</a:t>
             </a:r>
             <a:endParaRPr lang="en-US" sz="800" dirty="0"/>
           </a:p>
@@ -50139,7 +49727,7 @@
                 <a:ea typeface="Calibri" pitchFamily="34" charset="-122"/>
                 <a:cs typeface="Calibri" pitchFamily="34" charset="-120"/>
               </a:rPr>
-              <a:t>$36.1k</a:t>
+              <a:t>$10k</a:t>
             </a:r>
             <a:endParaRPr lang="en-US" sz="800" dirty="0"/>
           </a:p>
@@ -50210,7 +49798,7 @@
                 <a:ea typeface="Calibri" pitchFamily="34" charset="-122"/>
                 <a:cs typeface="Calibri" pitchFamily="34" charset="-120"/>
               </a:rPr>
-              <a:t>($4k)</a:t>
+              <a:t>($14k)</a:t>
             </a:r>
             <a:endParaRPr lang="en-US" sz="800" dirty="0"/>
           </a:p>
@@ -50423,7 +50011,7 @@
                 <a:ea typeface="Calibri" pitchFamily="34" charset="-122"/>
                 <a:cs typeface="Calibri" pitchFamily="34" charset="-120"/>
               </a:rPr>
-              <a:t>Q2 Actual</a:t>
+              <a:t>Q2 Partial</a:t>
             </a:r>
             <a:endParaRPr lang="en-US" sz="750" dirty="0"/>
           </a:p>
@@ -53508,7 +53096,7 @@
                 <a:ea typeface="Calibri" pitchFamily="34" charset="-122"/>
                 <a:cs typeface="Calibri" pitchFamily="34" charset="-120"/>
               </a:rPr>
-              <a:t>Q2 New Logo: 37 Deals · $5.4MM ARR</a:t>
+              <a:t>New Logo $325k Behind Plan</a:t>
             </a:r>
             <a:endParaRPr lang="en-US" sz="900" dirty="0"/>
           </a:p>
@@ -53547,7 +53135,7 @@
                 <a:ea typeface="Calibri" pitchFamily="34" charset="-122"/>
                 <a:cs typeface="Calibri" pitchFamily="34" charset="-120"/>
               </a:rPr>
-              <a:t>Q2 new logo bookings $5.4M across 37 deals (Apr–Jun). Enterprise pipeline coverage 3.3x supports H2 conversion.</a:t>
+              <a:t>New logo bookings trailing in 20+ seat segments — deal timing slipping to Q3. Q2 close rate improving to 13% (up from 16% Q1) suggesting quality-over-volume focus is working.</a:t>
             </a:r>
             <a:endParaRPr lang="en-US" sz="850" dirty="0"/>
           </a:p>
@@ -53650,7 +53238,7 @@
                 <a:ea typeface="Calibri" pitchFamily="34" charset="-122"/>
                 <a:cs typeface="Calibri" pitchFamily="34" charset="-120"/>
               </a:rPr>
-              <a:t>Expansion Q2 Complete: 23 Deals · $2.7MM</a:t>
+              <a:t>Expansion Outperforming</a:t>
             </a:r>
             <a:endParaRPr lang="en-US" sz="900" dirty="0"/>
           </a:p>
@@ -53689,7 +53277,7 @@
                 <a:ea typeface="Calibri" pitchFamily="34" charset="-122"/>
                 <a:cs typeface="Calibri" pitchFamily="34" charset="-120"/>
               </a:rPr>
-              <a:t>Q2 expansion $450k across 38 deals. CS-led enterprise bookings continue to outperform. Strong H2 expansion trajectory.</a:t>
+              <a:t>$1.056M YTD vs budget. CS-led expansion in enterprise driving 70% of bookings. Migration and seat expansion are the primary vectors. Expect continued outperformance in H2.</a:t>
             </a:r>
             <a:endParaRPr lang="en-US" sz="850" dirty="0"/>
           </a:p>

--- a/frontend/public/board-sample/exports/SMPL_Board_Review_Q2_2026.pptx
+++ b/frontend/public/board-sample/exports/SMPL_Board_Review_Q2_2026.pptx
@@ -122,6 +122,740 @@
 </p:presentation>
 </file>
 
+<file path=ppt/revisionInfo.xml><?xml version="1.0" encoding="utf-8"?>
+<p1510:revInfo xmlns:a="http://schemas.openxmlformats.org/drawingml/2006/main" xmlns:r="http://schemas.openxmlformats.org/officeDocument/2006/relationships" xmlns:p1510="http://schemas.microsoft.com/office/powerpoint/2015/10/main">
+  <p1510:revLst>
+    <p1510:client id="{1B71CDF3-5DA8-4669-AE89-7D7FE3D54620}" v="4" dt="2026-06-08T19:41:38.714"/>
+  </p1510:revLst>
+</p1510:revInfo>
+</file>
+
+<file path=ppt/changesInfos/changesInfo1.xml><?xml version="1.0" encoding="utf-8"?>
+<pc:chgInfo xmlns:a="http://schemas.openxmlformats.org/drawingml/2006/main" xmlns:r="http://schemas.openxmlformats.org/officeDocument/2006/relationships" xmlns:ac="http://schemas.microsoft.com/office/drawing/2013/main/command" xmlns:pc="http://schemas.microsoft.com/office/powerpoint/2013/main/command">
+  <pc:docChgLst>
+    <pc:chgData name="Matt Justice" userId="c0ecbdc24dae9ab7" providerId="LiveId" clId="{1B71CDF3-5DA8-4669-AE89-7D7FE3D54620}"/>
+    <pc:docChg chg="undo custSel modSld">
+      <pc:chgData name="Matt Justice" userId="c0ecbdc24dae9ab7" providerId="LiveId" clId="{1B71CDF3-5DA8-4669-AE89-7D7FE3D54620}" dt="2026-06-08T19:43:27.857" v="387" actId="20577"/>
+      <pc:docMkLst>
+        <pc:docMk/>
+      </pc:docMkLst>
+      <pc:sldChg chg="modSp mod">
+        <pc:chgData name="Matt Justice" userId="c0ecbdc24dae9ab7" providerId="LiveId" clId="{1B71CDF3-5DA8-4669-AE89-7D7FE3D54620}" dt="2026-06-08T19:42:50.057" v="375" actId="20577"/>
+        <pc:sldMkLst>
+          <pc:docMk/>
+          <pc:sldMk cId="0" sldId="257"/>
+        </pc:sldMkLst>
+        <pc:spChg chg="mod">
+          <ac:chgData name="Matt Justice" userId="c0ecbdc24dae9ab7" providerId="LiveId" clId="{1B71CDF3-5DA8-4669-AE89-7D7FE3D54620}" dt="2026-06-08T19:42:36.905" v="366" actId="20577"/>
+          <ac:spMkLst>
+            <pc:docMk/>
+            <pc:sldMk cId="0" sldId="257"/>
+            <ac:spMk id="57" creationId="{00000000-0000-0000-0000-000000000000}"/>
+          </ac:spMkLst>
+        </pc:spChg>
+        <pc:spChg chg="mod">
+          <ac:chgData name="Matt Justice" userId="c0ecbdc24dae9ab7" providerId="LiveId" clId="{1B71CDF3-5DA8-4669-AE89-7D7FE3D54620}" dt="2026-06-08T19:42:41.999" v="369" actId="20577"/>
+          <ac:spMkLst>
+            <pc:docMk/>
+            <pc:sldMk cId="0" sldId="257"/>
+            <ac:spMk id="59" creationId="{00000000-0000-0000-0000-000000000000}"/>
+          </ac:spMkLst>
+        </pc:spChg>
+        <pc:spChg chg="mod">
+          <ac:chgData name="Matt Justice" userId="c0ecbdc24dae9ab7" providerId="LiveId" clId="{1B71CDF3-5DA8-4669-AE89-7D7FE3D54620}" dt="2026-06-08T19:42:47.479" v="372" actId="20577"/>
+          <ac:spMkLst>
+            <pc:docMk/>
+            <pc:sldMk cId="0" sldId="257"/>
+            <ac:spMk id="81" creationId="{00000000-0000-0000-0000-000000000000}"/>
+          </ac:spMkLst>
+        </pc:spChg>
+        <pc:spChg chg="mod">
+          <ac:chgData name="Matt Justice" userId="c0ecbdc24dae9ab7" providerId="LiveId" clId="{1B71CDF3-5DA8-4669-AE89-7D7FE3D54620}" dt="2026-06-08T19:42:50.057" v="375" actId="20577"/>
+          <ac:spMkLst>
+            <pc:docMk/>
+            <pc:sldMk cId="0" sldId="257"/>
+            <ac:spMk id="83" creationId="{00000000-0000-0000-0000-000000000000}"/>
+          </ac:spMkLst>
+        </pc:spChg>
+      </pc:sldChg>
+      <pc:sldChg chg="modSp mod">
+        <pc:chgData name="Matt Justice" userId="c0ecbdc24dae9ab7" providerId="LiveId" clId="{1B71CDF3-5DA8-4669-AE89-7D7FE3D54620}" dt="2026-06-08T19:36:40.873" v="277" actId="20577"/>
+        <pc:sldMkLst>
+          <pc:docMk/>
+          <pc:sldMk cId="0" sldId="258"/>
+        </pc:sldMkLst>
+        <pc:spChg chg="mod">
+          <ac:chgData name="Matt Justice" userId="c0ecbdc24dae9ab7" providerId="LiveId" clId="{1B71CDF3-5DA8-4669-AE89-7D7FE3D54620}" dt="2026-06-08T19:26:58.425" v="108" actId="20577"/>
+          <ac:spMkLst>
+            <pc:docMk/>
+            <pc:sldMk cId="0" sldId="258"/>
+            <ac:spMk id="14" creationId="{00000000-0000-0000-0000-000000000000}"/>
+          </ac:spMkLst>
+        </pc:spChg>
+        <pc:spChg chg="mod">
+          <ac:chgData name="Matt Justice" userId="c0ecbdc24dae9ab7" providerId="LiveId" clId="{1B71CDF3-5DA8-4669-AE89-7D7FE3D54620}" dt="2026-06-08T19:36:40.873" v="277" actId="20577"/>
+          <ac:spMkLst>
+            <pc:docMk/>
+            <pc:sldMk cId="0" sldId="258"/>
+            <ac:spMk id="24" creationId="{00000000-0000-0000-0000-000000000000}"/>
+          </ac:spMkLst>
+        </pc:spChg>
+        <pc:spChg chg="mod">
+          <ac:chgData name="Matt Justice" userId="c0ecbdc24dae9ab7" providerId="LiveId" clId="{1B71CDF3-5DA8-4669-AE89-7D7FE3D54620}" dt="2026-06-08T19:36:18.265" v="265" actId="20577"/>
+          <ac:spMkLst>
+            <pc:docMk/>
+            <pc:sldMk cId="0" sldId="258"/>
+            <ac:spMk id="71" creationId="{00000000-0000-0000-0000-000000000000}"/>
+          </ac:spMkLst>
+        </pc:spChg>
+        <pc:spChg chg="mod">
+          <ac:chgData name="Matt Justice" userId="c0ecbdc24dae9ab7" providerId="LiveId" clId="{1B71CDF3-5DA8-4669-AE89-7D7FE3D54620}" dt="2026-06-08T19:36:23.187" v="268" actId="20577"/>
+          <ac:spMkLst>
+            <pc:docMk/>
+            <pc:sldMk cId="0" sldId="258"/>
+            <ac:spMk id="73" creationId="{00000000-0000-0000-0000-000000000000}"/>
+          </ac:spMkLst>
+        </pc:spChg>
+        <pc:spChg chg="mod">
+          <ac:chgData name="Matt Justice" userId="c0ecbdc24dae9ab7" providerId="LiveId" clId="{1B71CDF3-5DA8-4669-AE89-7D7FE3D54620}" dt="2026-06-08T19:36:27.841" v="271" actId="20577"/>
+          <ac:spMkLst>
+            <pc:docMk/>
+            <pc:sldMk cId="0" sldId="258"/>
+            <ac:spMk id="79" creationId="{00000000-0000-0000-0000-000000000000}"/>
+          </ac:spMkLst>
+        </pc:spChg>
+        <pc:spChg chg="mod">
+          <ac:chgData name="Matt Justice" userId="c0ecbdc24dae9ab7" providerId="LiveId" clId="{1B71CDF3-5DA8-4669-AE89-7D7FE3D54620}" dt="2026-06-08T19:36:32.440" v="274" actId="20577"/>
+          <ac:spMkLst>
+            <pc:docMk/>
+            <pc:sldMk cId="0" sldId="258"/>
+            <ac:spMk id="81" creationId="{00000000-0000-0000-0000-000000000000}"/>
+          </ac:spMkLst>
+        </pc:spChg>
+      </pc:sldChg>
+      <pc:sldChg chg="modSp mod">
+        <pc:chgData name="Matt Justice" userId="c0ecbdc24dae9ab7" providerId="LiveId" clId="{1B71CDF3-5DA8-4669-AE89-7D7FE3D54620}" dt="2026-06-08T19:42:14.840" v="363" actId="20577"/>
+        <pc:sldMkLst>
+          <pc:docMk/>
+          <pc:sldMk cId="0" sldId="259"/>
+        </pc:sldMkLst>
+        <pc:spChg chg="mod">
+          <ac:chgData name="Matt Justice" userId="c0ecbdc24dae9ab7" providerId="LiveId" clId="{1B71CDF3-5DA8-4669-AE89-7D7FE3D54620}" dt="2026-06-08T19:35:50.897" v="260" actId="20577"/>
+          <ac:spMkLst>
+            <pc:docMk/>
+            <pc:sldMk cId="0" sldId="259"/>
+            <ac:spMk id="24" creationId="{00000000-0000-0000-0000-000000000000}"/>
+          </ac:spMkLst>
+        </pc:spChg>
+        <pc:spChg chg="mod">
+          <ac:chgData name="Matt Justice" userId="c0ecbdc24dae9ab7" providerId="LiveId" clId="{1B71CDF3-5DA8-4669-AE89-7D7FE3D54620}" dt="2026-06-08T19:35:47.274" v="257" actId="207"/>
+          <ac:spMkLst>
+            <pc:docMk/>
+            <pc:sldMk cId="0" sldId="259"/>
+            <ac:spMk id="25" creationId="{00000000-0000-0000-0000-000000000000}"/>
+          </ac:spMkLst>
+        </pc:spChg>
+        <pc:spChg chg="mod">
+          <ac:chgData name="Matt Justice" userId="c0ecbdc24dae9ab7" providerId="LiveId" clId="{1B71CDF3-5DA8-4669-AE89-7D7FE3D54620}" dt="2026-06-08T19:42:14.840" v="363" actId="20577"/>
+          <ac:spMkLst>
+            <pc:docMk/>
+            <pc:sldMk cId="0" sldId="259"/>
+            <ac:spMk id="81" creationId="{00000000-0000-0000-0000-000000000000}"/>
+          </ac:spMkLst>
+        </pc:spChg>
+        <pc:spChg chg="mod">
+          <ac:chgData name="Matt Justice" userId="c0ecbdc24dae9ab7" providerId="LiveId" clId="{1B71CDF3-5DA8-4669-AE89-7D7FE3D54620}" dt="2026-06-08T19:35:16.857" v="248" actId="20577"/>
+          <ac:spMkLst>
+            <pc:docMk/>
+            <pc:sldMk cId="0" sldId="259"/>
+            <ac:spMk id="85" creationId="{00000000-0000-0000-0000-000000000000}"/>
+          </ac:spMkLst>
+        </pc:spChg>
+        <pc:spChg chg="mod">
+          <ac:chgData name="Matt Justice" userId="c0ecbdc24dae9ab7" providerId="LiveId" clId="{1B71CDF3-5DA8-4669-AE89-7D7FE3D54620}" dt="2026-06-08T19:35:25.193" v="252" actId="207"/>
+          <ac:spMkLst>
+            <pc:docMk/>
+            <pc:sldMk cId="0" sldId="259"/>
+            <ac:spMk id="87" creationId="{00000000-0000-0000-0000-000000000000}"/>
+          </ac:spMkLst>
+        </pc:spChg>
+      </pc:sldChg>
+      <pc:sldChg chg="modSp mod">
+        <pc:chgData name="Matt Justice" userId="c0ecbdc24dae9ab7" providerId="LiveId" clId="{1B71CDF3-5DA8-4669-AE89-7D7FE3D54620}" dt="2026-06-08T19:43:27.857" v="387" actId="20577"/>
+        <pc:sldMkLst>
+          <pc:docMk/>
+          <pc:sldMk cId="0" sldId="260"/>
+        </pc:sldMkLst>
+        <pc:spChg chg="mod">
+          <ac:chgData name="Matt Justice" userId="c0ecbdc24dae9ab7" providerId="LiveId" clId="{1B71CDF3-5DA8-4669-AE89-7D7FE3D54620}" dt="2026-06-08T19:43:14.585" v="378" actId="20577"/>
+          <ac:spMkLst>
+            <pc:docMk/>
+            <pc:sldMk cId="0" sldId="260"/>
+            <ac:spMk id="39" creationId="{00000000-0000-0000-0000-000000000000}"/>
+          </ac:spMkLst>
+        </pc:spChg>
+        <pc:spChg chg="mod">
+          <ac:chgData name="Matt Justice" userId="c0ecbdc24dae9ab7" providerId="LiveId" clId="{1B71CDF3-5DA8-4669-AE89-7D7FE3D54620}" dt="2026-06-08T19:43:19.137" v="381" actId="20577"/>
+          <ac:spMkLst>
+            <pc:docMk/>
+            <pc:sldMk cId="0" sldId="260"/>
+            <ac:spMk id="43" creationId="{00000000-0000-0000-0000-000000000000}"/>
+          </ac:spMkLst>
+        </pc:spChg>
+        <pc:spChg chg="mod">
+          <ac:chgData name="Matt Justice" userId="c0ecbdc24dae9ab7" providerId="LiveId" clId="{1B71CDF3-5DA8-4669-AE89-7D7FE3D54620}" dt="2026-06-08T19:43:23.543" v="384" actId="20577"/>
+          <ac:spMkLst>
+            <pc:docMk/>
+            <pc:sldMk cId="0" sldId="260"/>
+            <ac:spMk id="47" creationId="{00000000-0000-0000-0000-000000000000}"/>
+          </ac:spMkLst>
+        </pc:spChg>
+        <pc:spChg chg="mod">
+          <ac:chgData name="Matt Justice" userId="c0ecbdc24dae9ab7" providerId="LiveId" clId="{1B71CDF3-5DA8-4669-AE89-7D7FE3D54620}" dt="2026-06-08T19:43:27.857" v="387" actId="20577"/>
+          <ac:spMkLst>
+            <pc:docMk/>
+            <pc:sldMk cId="0" sldId="260"/>
+            <ac:spMk id="51" creationId="{00000000-0000-0000-0000-000000000000}"/>
+          </ac:spMkLst>
+        </pc:spChg>
+        <pc:spChg chg="mod">
+          <ac:chgData name="Matt Justice" userId="c0ecbdc24dae9ab7" providerId="LiveId" clId="{1B71CDF3-5DA8-4669-AE89-7D7FE3D54620}" dt="2026-06-08T19:37:01.467" v="281" actId="20577"/>
+          <ac:spMkLst>
+            <pc:docMk/>
+            <pc:sldMk cId="0" sldId="260"/>
+            <ac:spMk id="59" creationId="{00000000-0000-0000-0000-000000000000}"/>
+          </ac:spMkLst>
+        </pc:spChg>
+      </pc:sldChg>
+      <pc:sldChg chg="modSp mod">
+        <pc:chgData name="Matt Justice" userId="c0ecbdc24dae9ab7" providerId="LiveId" clId="{1B71CDF3-5DA8-4669-AE89-7D7FE3D54620}" dt="2026-06-08T19:37:27.711" v="294" actId="20577"/>
+        <pc:sldMkLst>
+          <pc:docMk/>
+          <pc:sldMk cId="0" sldId="261"/>
+        </pc:sldMkLst>
+        <pc:spChg chg="mod">
+          <ac:chgData name="Matt Justice" userId="c0ecbdc24dae9ab7" providerId="LiveId" clId="{1B71CDF3-5DA8-4669-AE89-7D7FE3D54620}" dt="2026-06-08T19:37:22.177" v="292" actId="20577"/>
+          <ac:spMkLst>
+            <pc:docMk/>
+            <pc:sldMk cId="0" sldId="261"/>
+            <ac:spMk id="179" creationId="{00000000-0000-0000-0000-000000000000}"/>
+          </ac:spMkLst>
+        </pc:spChg>
+        <pc:spChg chg="mod">
+          <ac:chgData name="Matt Justice" userId="c0ecbdc24dae9ab7" providerId="LiveId" clId="{1B71CDF3-5DA8-4669-AE89-7D7FE3D54620}" dt="2026-06-08T19:37:12.505" v="282" actId="20577"/>
+          <ac:spMkLst>
+            <pc:docMk/>
+            <pc:sldMk cId="0" sldId="261"/>
+            <ac:spMk id="180" creationId="{00000000-0000-0000-0000-000000000000}"/>
+          </ac:spMkLst>
+        </pc:spChg>
+        <pc:spChg chg="mod">
+          <ac:chgData name="Matt Justice" userId="c0ecbdc24dae9ab7" providerId="LiveId" clId="{1B71CDF3-5DA8-4669-AE89-7D7FE3D54620}" dt="2026-06-08T19:37:27.711" v="294" actId="20577"/>
+          <ac:spMkLst>
+            <pc:docMk/>
+            <pc:sldMk cId="0" sldId="261"/>
+            <ac:spMk id="181" creationId="{00000000-0000-0000-0000-000000000000}"/>
+          </ac:spMkLst>
+        </pc:spChg>
+      </pc:sldChg>
+      <pc:sldChg chg="addSp modSp mod">
+        <pc:chgData name="Matt Justice" userId="c0ecbdc24dae9ab7" providerId="LiveId" clId="{1B71CDF3-5DA8-4669-AE89-7D7FE3D54620}" dt="2026-06-08T19:41:43.548" v="360" actId="207"/>
+        <pc:sldMkLst>
+          <pc:docMk/>
+          <pc:sldMk cId="0" sldId="262"/>
+        </pc:sldMkLst>
+        <pc:spChg chg="mod">
+          <ac:chgData name="Matt Justice" userId="c0ecbdc24dae9ab7" providerId="LiveId" clId="{1B71CDF3-5DA8-4669-AE89-7D7FE3D54620}" dt="2026-06-08T19:40:10.426" v="345" actId="207"/>
+          <ac:spMkLst>
+            <pc:docMk/>
+            <pc:sldMk cId="0" sldId="262"/>
+            <ac:spMk id="62" creationId="{00000000-0000-0000-0000-000000000000}"/>
+          </ac:spMkLst>
+        </pc:spChg>
+        <pc:spChg chg="mod">
+          <ac:chgData name="Matt Justice" userId="c0ecbdc24dae9ab7" providerId="LiveId" clId="{1B71CDF3-5DA8-4669-AE89-7D7FE3D54620}" dt="2026-06-08T19:38:19.080" v="303" actId="20577"/>
+          <ac:spMkLst>
+            <pc:docMk/>
+            <pc:sldMk cId="0" sldId="262"/>
+            <ac:spMk id="74" creationId="{00000000-0000-0000-0000-000000000000}"/>
+          </ac:spMkLst>
+        </pc:spChg>
+        <pc:spChg chg="mod">
+          <ac:chgData name="Matt Justice" userId="c0ecbdc24dae9ab7" providerId="LiveId" clId="{1B71CDF3-5DA8-4669-AE89-7D7FE3D54620}" dt="2026-06-08T19:40:06.424" v="344" actId="207"/>
+          <ac:spMkLst>
+            <pc:docMk/>
+            <pc:sldMk cId="0" sldId="262"/>
+            <ac:spMk id="82" creationId="{00000000-0000-0000-0000-000000000000}"/>
+          </ac:spMkLst>
+        </pc:spChg>
+        <pc:spChg chg="mod">
+          <ac:chgData name="Matt Justice" userId="c0ecbdc24dae9ab7" providerId="LiveId" clId="{1B71CDF3-5DA8-4669-AE89-7D7FE3D54620}" dt="2026-06-08T19:38:29.073" v="309" actId="20577"/>
+          <ac:spMkLst>
+            <pc:docMk/>
+            <pc:sldMk cId="0" sldId="262"/>
+            <ac:spMk id="94" creationId="{00000000-0000-0000-0000-000000000000}"/>
+          </ac:spMkLst>
+        </pc:spChg>
+        <pc:spChg chg="mod">
+          <ac:chgData name="Matt Justice" userId="c0ecbdc24dae9ab7" providerId="LiveId" clId="{1B71CDF3-5DA8-4669-AE89-7D7FE3D54620}" dt="2026-06-08T19:40:01.931" v="343" actId="207"/>
+          <ac:spMkLst>
+            <pc:docMk/>
+            <pc:sldMk cId="0" sldId="262"/>
+            <ac:spMk id="102" creationId="{00000000-0000-0000-0000-000000000000}"/>
+          </ac:spMkLst>
+        </pc:spChg>
+        <pc:spChg chg="mod">
+          <ac:chgData name="Matt Justice" userId="c0ecbdc24dae9ab7" providerId="LiveId" clId="{1B71CDF3-5DA8-4669-AE89-7D7FE3D54620}" dt="2026-06-08T19:38:23.674" v="306" actId="20577"/>
+          <ac:spMkLst>
+            <pc:docMk/>
+            <pc:sldMk cId="0" sldId="262"/>
+            <ac:spMk id="114" creationId="{00000000-0000-0000-0000-000000000000}"/>
+          </ac:spMkLst>
+        </pc:spChg>
+        <pc:spChg chg="mod">
+          <ac:chgData name="Matt Justice" userId="c0ecbdc24dae9ab7" providerId="LiveId" clId="{1B71CDF3-5DA8-4669-AE89-7D7FE3D54620}" dt="2026-06-08T19:39:12.008" v="330" actId="207"/>
+          <ac:spMkLst>
+            <pc:docMk/>
+            <pc:sldMk cId="0" sldId="262"/>
+            <ac:spMk id="120" creationId="{00000000-0000-0000-0000-000000000000}"/>
+          </ac:spMkLst>
+        </pc:spChg>
+        <pc:spChg chg="mod">
+          <ac:chgData name="Matt Justice" userId="c0ecbdc24dae9ab7" providerId="LiveId" clId="{1B71CDF3-5DA8-4669-AE89-7D7FE3D54620}" dt="2026-06-08T19:41:14.759" v="354" actId="207"/>
+          <ac:spMkLst>
+            <pc:docMk/>
+            <pc:sldMk cId="0" sldId="262"/>
+            <ac:spMk id="122" creationId="{00000000-0000-0000-0000-000000000000}"/>
+          </ac:spMkLst>
+        </pc:spChg>
+        <pc:spChg chg="mod">
+          <ac:chgData name="Matt Justice" userId="c0ecbdc24dae9ab7" providerId="LiveId" clId="{1B71CDF3-5DA8-4669-AE89-7D7FE3D54620}" dt="2026-06-08T19:41:32.395" v="357" actId="207"/>
+          <ac:spMkLst>
+            <pc:docMk/>
+            <pc:sldMk cId="0" sldId="262"/>
+            <ac:spMk id="124" creationId="{00000000-0000-0000-0000-000000000000}"/>
+          </ac:spMkLst>
+        </pc:spChg>
+        <pc:spChg chg="mod">
+          <ac:chgData name="Matt Justice" userId="c0ecbdc24dae9ab7" providerId="LiveId" clId="{1B71CDF3-5DA8-4669-AE89-7D7FE3D54620}" dt="2026-06-08T19:38:34.450" v="312" actId="20577"/>
+          <ac:spMkLst>
+            <pc:docMk/>
+            <pc:sldMk cId="0" sldId="262"/>
+            <ac:spMk id="134" creationId="{00000000-0000-0000-0000-000000000000}"/>
+          </ac:spMkLst>
+        </pc:spChg>
+        <pc:spChg chg="mod">
+          <ac:chgData name="Matt Justice" userId="c0ecbdc24dae9ab7" providerId="LiveId" clId="{1B71CDF3-5DA8-4669-AE89-7D7FE3D54620}" dt="2026-06-08T19:38:39.039" v="315" actId="20577"/>
+          <ac:spMkLst>
+            <pc:docMk/>
+            <pc:sldMk cId="0" sldId="262"/>
+            <ac:spMk id="154" creationId="{00000000-0000-0000-0000-000000000000}"/>
+          </ac:spMkLst>
+        </pc:spChg>
+        <pc:spChg chg="mod">
+          <ac:chgData name="Matt Justice" userId="c0ecbdc24dae9ab7" providerId="LiveId" clId="{1B71CDF3-5DA8-4669-AE89-7D7FE3D54620}" dt="2026-06-08T19:39:03.960" v="326" actId="207"/>
+          <ac:spMkLst>
+            <pc:docMk/>
+            <pc:sldMk cId="0" sldId="262"/>
+            <ac:spMk id="160" creationId="{00000000-0000-0000-0000-000000000000}"/>
+          </ac:spMkLst>
+        </pc:spChg>
+        <pc:spChg chg="mod">
+          <ac:chgData name="Matt Justice" userId="c0ecbdc24dae9ab7" providerId="LiveId" clId="{1B71CDF3-5DA8-4669-AE89-7D7FE3D54620}" dt="2026-06-08T19:41:14.759" v="354" actId="207"/>
+          <ac:spMkLst>
+            <pc:docMk/>
+            <pc:sldMk cId="0" sldId="262"/>
+            <ac:spMk id="162" creationId="{00000000-0000-0000-0000-000000000000}"/>
+          </ac:spMkLst>
+        </pc:spChg>
+        <pc:spChg chg="mod">
+          <ac:chgData name="Matt Justice" userId="c0ecbdc24dae9ab7" providerId="LiveId" clId="{1B71CDF3-5DA8-4669-AE89-7D7FE3D54620}" dt="2026-06-08T19:38:44.040" v="318" actId="20577"/>
+          <ac:spMkLst>
+            <pc:docMk/>
+            <pc:sldMk cId="0" sldId="262"/>
+            <ac:spMk id="174" creationId="{00000000-0000-0000-0000-000000000000}"/>
+          </ac:spMkLst>
+        </pc:spChg>
+        <pc:spChg chg="mod">
+          <ac:chgData name="Matt Justice" userId="c0ecbdc24dae9ab7" providerId="LiveId" clId="{1B71CDF3-5DA8-4669-AE89-7D7FE3D54620}" dt="2026-06-08T19:38:55.711" v="322" actId="207"/>
+          <ac:spMkLst>
+            <pc:docMk/>
+            <pc:sldMk cId="0" sldId="262"/>
+            <ac:spMk id="180" creationId="{00000000-0000-0000-0000-000000000000}"/>
+          </ac:spMkLst>
+        </pc:spChg>
+        <pc:spChg chg="mod">
+          <ac:chgData name="Matt Justice" userId="c0ecbdc24dae9ab7" providerId="LiveId" clId="{1B71CDF3-5DA8-4669-AE89-7D7FE3D54620}" dt="2026-06-08T19:41:14.759" v="354" actId="207"/>
+          <ac:spMkLst>
+            <pc:docMk/>
+            <pc:sldMk cId="0" sldId="262"/>
+            <ac:spMk id="182" creationId="{00000000-0000-0000-0000-000000000000}"/>
+          </ac:spMkLst>
+        </pc:spChg>
+        <pc:spChg chg="mod">
+          <ac:chgData name="Matt Justice" userId="c0ecbdc24dae9ab7" providerId="LiveId" clId="{1B71CDF3-5DA8-4669-AE89-7D7FE3D54620}" dt="2026-06-08T19:41:32.395" v="357" actId="207"/>
+          <ac:spMkLst>
+            <pc:docMk/>
+            <pc:sldMk cId="0" sldId="262"/>
+            <ac:spMk id="184" creationId="{00000000-0000-0000-0000-000000000000}"/>
+          </ac:spMkLst>
+        </pc:spChg>
+        <pc:spChg chg="mod">
+          <ac:chgData name="Matt Justice" userId="c0ecbdc24dae9ab7" providerId="LiveId" clId="{1B71CDF3-5DA8-4669-AE89-7D7FE3D54620}" dt="2026-06-08T19:39:20.883" v="334" actId="207"/>
+          <ac:spMkLst>
+            <pc:docMk/>
+            <pc:sldMk cId="0" sldId="262"/>
+            <ac:spMk id="200" creationId="{00000000-0000-0000-0000-000000000000}"/>
+          </ac:spMkLst>
+        </pc:spChg>
+        <pc:spChg chg="mod">
+          <ac:chgData name="Matt Justice" userId="c0ecbdc24dae9ab7" providerId="LiveId" clId="{1B71CDF3-5DA8-4669-AE89-7D7FE3D54620}" dt="2026-06-08T19:41:14.759" v="354" actId="207"/>
+          <ac:spMkLst>
+            <pc:docMk/>
+            <pc:sldMk cId="0" sldId="262"/>
+            <ac:spMk id="202" creationId="{00000000-0000-0000-0000-000000000000}"/>
+          </ac:spMkLst>
+        </pc:spChg>
+        <pc:spChg chg="mod">
+          <ac:chgData name="Matt Justice" userId="c0ecbdc24dae9ab7" providerId="LiveId" clId="{1B71CDF3-5DA8-4669-AE89-7D7FE3D54620}" dt="2026-06-08T19:39:27.920" v="338" actId="207"/>
+          <ac:spMkLst>
+            <pc:docMk/>
+            <pc:sldMk cId="0" sldId="262"/>
+            <ac:spMk id="220" creationId="{00000000-0000-0000-0000-000000000000}"/>
+          </ac:spMkLst>
+        </pc:spChg>
+        <pc:spChg chg="mod">
+          <ac:chgData name="Matt Justice" userId="c0ecbdc24dae9ab7" providerId="LiveId" clId="{1B71CDF3-5DA8-4669-AE89-7D7FE3D54620}" dt="2026-06-08T19:41:14.759" v="354" actId="207"/>
+          <ac:spMkLst>
+            <pc:docMk/>
+            <pc:sldMk cId="0" sldId="262"/>
+            <ac:spMk id="222" creationId="{00000000-0000-0000-0000-000000000000}"/>
+          </ac:spMkLst>
+        </pc:spChg>
+        <pc:spChg chg="mod">
+          <ac:chgData name="Matt Justice" userId="c0ecbdc24dae9ab7" providerId="LiveId" clId="{1B71CDF3-5DA8-4669-AE89-7D7FE3D54620}" dt="2026-06-08T19:40:45.100" v="350" actId="207"/>
+          <ac:spMkLst>
+            <pc:docMk/>
+            <pc:sldMk cId="0" sldId="262"/>
+            <ac:spMk id="242" creationId="{00000000-0000-0000-0000-000000000000}"/>
+          </ac:spMkLst>
+        </pc:spChg>
+        <pc:spChg chg="mod">
+          <ac:chgData name="Matt Justice" userId="c0ecbdc24dae9ab7" providerId="LiveId" clId="{1B71CDF3-5DA8-4669-AE89-7D7FE3D54620}" dt="2026-06-08T19:41:43.548" v="360" actId="207"/>
+          <ac:spMkLst>
+            <pc:docMk/>
+            <pc:sldMk cId="0" sldId="262"/>
+            <ac:spMk id="244" creationId="{00000000-0000-0000-0000-000000000000}"/>
+          </ac:spMkLst>
+        </pc:spChg>
+        <pc:spChg chg="mod">
+          <ac:chgData name="Matt Justice" userId="c0ecbdc24dae9ab7" providerId="LiveId" clId="{1B71CDF3-5DA8-4669-AE89-7D7FE3D54620}" dt="2026-06-08T19:39:35.128" v="342" actId="207"/>
+          <ac:spMkLst>
+            <pc:docMk/>
+            <pc:sldMk cId="0" sldId="262"/>
+            <ac:spMk id="260" creationId="{00000000-0000-0000-0000-000000000000}"/>
+          </ac:spMkLst>
+        </pc:spChg>
+        <pc:spChg chg="mod">
+          <ac:chgData name="Matt Justice" userId="c0ecbdc24dae9ab7" providerId="LiveId" clId="{1B71CDF3-5DA8-4669-AE89-7D7FE3D54620}" dt="2026-06-08T19:40:48.458" v="352" actId="1076"/>
+          <ac:spMkLst>
+            <pc:docMk/>
+            <pc:sldMk cId="0" sldId="262"/>
+            <ac:spMk id="261" creationId="{00000000-0000-0000-0000-000000000000}"/>
+          </ac:spMkLst>
+        </pc:spChg>
+        <pc:spChg chg="mod">
+          <ac:chgData name="Matt Justice" userId="c0ecbdc24dae9ab7" providerId="LiveId" clId="{1B71CDF3-5DA8-4669-AE89-7D7FE3D54620}" dt="2026-06-08T19:41:14.759" v="354" actId="207"/>
+          <ac:spMkLst>
+            <pc:docMk/>
+            <pc:sldMk cId="0" sldId="262"/>
+            <ac:spMk id="262" creationId="{00000000-0000-0000-0000-000000000000}"/>
+          </ac:spMkLst>
+        </pc:spChg>
+        <pc:spChg chg="mod">
+          <ac:chgData name="Matt Justice" userId="c0ecbdc24dae9ab7" providerId="LiveId" clId="{1B71CDF3-5DA8-4669-AE89-7D7FE3D54620}" dt="2026-06-08T19:41:32.395" v="357" actId="207"/>
+          <ac:spMkLst>
+            <pc:docMk/>
+            <pc:sldMk cId="0" sldId="262"/>
+            <ac:spMk id="264" creationId="{00000000-0000-0000-0000-000000000000}"/>
+          </ac:spMkLst>
+        </pc:spChg>
+        <pc:spChg chg="add mod">
+          <ac:chgData name="Matt Justice" userId="c0ecbdc24dae9ab7" providerId="LiveId" clId="{1B71CDF3-5DA8-4669-AE89-7D7FE3D54620}" dt="2026-06-08T19:41:19.683" v="356" actId="571"/>
+          <ac:spMkLst>
+            <pc:docMk/>
+            <pc:sldMk cId="0" sldId="262"/>
+            <ac:spMk id="270" creationId="{3909CAA8-8690-C15B-90F7-9DDC3DDDBCC8}"/>
+          </ac:spMkLst>
+        </pc:spChg>
+        <pc:spChg chg="add mod">
+          <ac:chgData name="Matt Justice" userId="c0ecbdc24dae9ab7" providerId="LiveId" clId="{1B71CDF3-5DA8-4669-AE89-7D7FE3D54620}" dt="2026-06-08T19:41:38.714" v="359" actId="571"/>
+          <ac:spMkLst>
+            <pc:docMk/>
+            <pc:sldMk cId="0" sldId="262"/>
+            <ac:spMk id="271" creationId="{5558C97C-49A3-D34D-0337-9C3B98F89D67}"/>
+          </ac:spMkLst>
+        </pc:spChg>
+        <pc:spChg chg="add mod">
+          <ac:chgData name="Matt Justice" userId="c0ecbdc24dae9ab7" providerId="LiveId" clId="{1B71CDF3-5DA8-4669-AE89-7D7FE3D54620}" dt="2026-06-08T19:41:38.714" v="359" actId="571"/>
+          <ac:spMkLst>
+            <pc:docMk/>
+            <pc:sldMk cId="0" sldId="262"/>
+            <ac:spMk id="272" creationId="{3496E7F0-705B-BC70-5782-EE96BBEE309C}"/>
+          </ac:spMkLst>
+        </pc:spChg>
+      </pc:sldChg>
+      <pc:sldChg chg="modSp mod">
+        <pc:chgData name="Matt Justice" userId="c0ecbdc24dae9ab7" providerId="LiveId" clId="{1B71CDF3-5DA8-4669-AE89-7D7FE3D54620}" dt="2026-06-08T19:34:12.192" v="244" actId="20577"/>
+        <pc:sldMkLst>
+          <pc:docMk/>
+          <pc:sldMk cId="0" sldId="263"/>
+        </pc:sldMkLst>
+        <pc:spChg chg="mod">
+          <ac:chgData name="Matt Justice" userId="c0ecbdc24dae9ab7" providerId="LiveId" clId="{1B71CDF3-5DA8-4669-AE89-7D7FE3D54620}" dt="2026-06-08T19:24:23.952" v="105" actId="20577"/>
+          <ac:spMkLst>
+            <pc:docMk/>
+            <pc:sldMk cId="0" sldId="263"/>
+            <ac:spMk id="19" creationId="{00000000-0000-0000-0000-000000000000}"/>
+          </ac:spMkLst>
+        </pc:spChg>
+        <pc:spChg chg="mod">
+          <ac:chgData name="Matt Justice" userId="c0ecbdc24dae9ab7" providerId="LiveId" clId="{1B71CDF3-5DA8-4669-AE89-7D7FE3D54620}" dt="2026-06-08T17:58:44.535" v="30" actId="20577"/>
+          <ac:spMkLst>
+            <pc:docMk/>
+            <pc:sldMk cId="0" sldId="263"/>
+            <ac:spMk id="21" creationId="{00000000-0000-0000-0000-000000000000}"/>
+          </ac:spMkLst>
+        </pc:spChg>
+        <pc:spChg chg="mod">
+          <ac:chgData name="Matt Justice" userId="c0ecbdc24dae9ab7" providerId="LiveId" clId="{1B71CDF3-5DA8-4669-AE89-7D7FE3D54620}" dt="2026-06-08T19:33:35.719" v="226" actId="20577"/>
+          <ac:spMkLst>
+            <pc:docMk/>
+            <pc:sldMk cId="0" sldId="263"/>
+            <ac:spMk id="31" creationId="{00000000-0000-0000-0000-000000000000}"/>
+          </ac:spMkLst>
+        </pc:spChg>
+        <pc:spChg chg="mod">
+          <ac:chgData name="Matt Justice" userId="c0ecbdc24dae9ab7" providerId="LiveId" clId="{1B71CDF3-5DA8-4669-AE89-7D7FE3D54620}" dt="2026-06-08T19:33:46.727" v="234" actId="20577"/>
+          <ac:spMkLst>
+            <pc:docMk/>
+            <pc:sldMk cId="0" sldId="263"/>
+            <ac:spMk id="33" creationId="{00000000-0000-0000-0000-000000000000}"/>
+          </ac:spMkLst>
+        </pc:spChg>
+        <pc:spChg chg="mod">
+          <ac:chgData name="Matt Justice" userId="c0ecbdc24dae9ab7" providerId="LiveId" clId="{1B71CDF3-5DA8-4669-AE89-7D7FE3D54620}" dt="2026-06-08T19:31:23.599" v="184" actId="20577"/>
+          <ac:spMkLst>
+            <pc:docMk/>
+            <pc:sldMk cId="0" sldId="263"/>
+            <ac:spMk id="39" creationId="{00000000-0000-0000-0000-000000000000}"/>
+          </ac:spMkLst>
+        </pc:spChg>
+        <pc:spChg chg="mod">
+          <ac:chgData name="Matt Justice" userId="c0ecbdc24dae9ab7" providerId="LiveId" clId="{1B71CDF3-5DA8-4669-AE89-7D7FE3D54620}" dt="2026-06-08T19:31:18.096" v="174" actId="20577"/>
+          <ac:spMkLst>
+            <pc:docMk/>
+            <pc:sldMk cId="0" sldId="263"/>
+            <ac:spMk id="41" creationId="{00000000-0000-0000-0000-000000000000}"/>
+          </ac:spMkLst>
+        </pc:spChg>
+        <pc:spChg chg="mod">
+          <ac:chgData name="Matt Justice" userId="c0ecbdc24dae9ab7" providerId="LiveId" clId="{1B71CDF3-5DA8-4669-AE89-7D7FE3D54620}" dt="2026-06-08T19:32:52.146" v="208" actId="20577"/>
+          <ac:spMkLst>
+            <pc:docMk/>
+            <pc:sldMk cId="0" sldId="263"/>
+            <ac:spMk id="43" creationId="{00000000-0000-0000-0000-000000000000}"/>
+          </ac:spMkLst>
+        </pc:spChg>
+        <pc:spChg chg="mod">
+          <ac:chgData name="Matt Justice" userId="c0ecbdc24dae9ab7" providerId="LiveId" clId="{1B71CDF3-5DA8-4669-AE89-7D7FE3D54620}" dt="2026-06-08T19:34:12.192" v="244" actId="20577"/>
+          <ac:spMkLst>
+            <pc:docMk/>
+            <pc:sldMk cId="0" sldId="263"/>
+            <ac:spMk id="51" creationId="{00000000-0000-0000-0000-000000000000}"/>
+          </ac:spMkLst>
+        </pc:spChg>
+        <pc:spChg chg="mod">
+          <ac:chgData name="Matt Justice" userId="c0ecbdc24dae9ab7" providerId="LiveId" clId="{1B71CDF3-5DA8-4669-AE89-7D7FE3D54620}" dt="2026-06-08T19:33:59.496" v="238" actId="20577"/>
+          <ac:spMkLst>
+            <pc:docMk/>
+            <pc:sldMk cId="0" sldId="263"/>
+            <ac:spMk id="53" creationId="{00000000-0000-0000-0000-000000000000}"/>
+          </ac:spMkLst>
+        </pc:spChg>
+        <pc:spChg chg="mod">
+          <ac:chgData name="Matt Justice" userId="c0ecbdc24dae9ab7" providerId="LiveId" clId="{1B71CDF3-5DA8-4669-AE89-7D7FE3D54620}" dt="2026-06-08T19:29:28.482" v="150" actId="20577"/>
+          <ac:spMkLst>
+            <pc:docMk/>
+            <pc:sldMk cId="0" sldId="263"/>
+            <ac:spMk id="59" creationId="{00000000-0000-0000-0000-000000000000}"/>
+          </ac:spMkLst>
+        </pc:spChg>
+        <pc:spChg chg="mod">
+          <ac:chgData name="Matt Justice" userId="c0ecbdc24dae9ab7" providerId="LiveId" clId="{1B71CDF3-5DA8-4669-AE89-7D7FE3D54620}" dt="2026-06-08T19:31:11.871" v="168" actId="20577"/>
+          <ac:spMkLst>
+            <pc:docMk/>
+            <pc:sldMk cId="0" sldId="263"/>
+            <ac:spMk id="61" creationId="{00000000-0000-0000-0000-000000000000}"/>
+          </ac:spMkLst>
+        </pc:spChg>
+        <pc:spChg chg="mod">
+          <ac:chgData name="Matt Justice" userId="c0ecbdc24dae9ab7" providerId="LiveId" clId="{1B71CDF3-5DA8-4669-AE89-7D7FE3D54620}" dt="2026-06-08T19:32:08.761" v="196" actId="20577"/>
+          <ac:spMkLst>
+            <pc:docMk/>
+            <pc:sldMk cId="0" sldId="263"/>
+            <ac:spMk id="63" creationId="{00000000-0000-0000-0000-000000000000}"/>
+          </ac:spMkLst>
+        </pc:spChg>
+        <pc:spChg chg="mod">
+          <ac:chgData name="Matt Justice" userId="c0ecbdc24dae9ab7" providerId="LiveId" clId="{1B71CDF3-5DA8-4669-AE89-7D7FE3D54620}" dt="2026-06-08T19:28:18.393" v="126" actId="20577"/>
+          <ac:spMkLst>
+            <pc:docMk/>
+            <pc:sldMk cId="0" sldId="263"/>
+            <ac:spMk id="69" creationId="{00000000-0000-0000-0000-000000000000}"/>
+          </ac:spMkLst>
+        </pc:spChg>
+        <pc:spChg chg="mod">
+          <ac:chgData name="Matt Justice" userId="c0ecbdc24dae9ab7" providerId="LiveId" clId="{1B71CDF3-5DA8-4669-AE89-7D7FE3D54620}" dt="2026-06-08T19:27:53.224" v="116" actId="20577"/>
+          <ac:spMkLst>
+            <pc:docMk/>
+            <pc:sldMk cId="0" sldId="263"/>
+            <ac:spMk id="71" creationId="{00000000-0000-0000-0000-000000000000}"/>
+          </ac:spMkLst>
+        </pc:spChg>
+        <pc:spChg chg="mod">
+          <ac:chgData name="Matt Justice" userId="c0ecbdc24dae9ab7" providerId="LiveId" clId="{1B71CDF3-5DA8-4669-AE89-7D7FE3D54620}" dt="2026-06-08T19:31:34.561" v="186" actId="20577"/>
+          <ac:spMkLst>
+            <pc:docMk/>
+            <pc:sldMk cId="0" sldId="263"/>
+            <ac:spMk id="79" creationId="{00000000-0000-0000-0000-000000000000}"/>
+          </ac:spMkLst>
+        </pc:spChg>
+        <pc:spChg chg="mod">
+          <ac:chgData name="Matt Justice" userId="c0ecbdc24dae9ab7" providerId="LiveId" clId="{1B71CDF3-5DA8-4669-AE89-7D7FE3D54620}" dt="2026-06-08T19:30:01.856" v="156" actId="20577"/>
+          <ac:spMkLst>
+            <pc:docMk/>
+            <pc:sldMk cId="0" sldId="263"/>
+            <ac:spMk id="81" creationId="{00000000-0000-0000-0000-000000000000}"/>
+          </ac:spMkLst>
+        </pc:spChg>
+        <pc:spChg chg="mod">
+          <ac:chgData name="Matt Justice" userId="c0ecbdc24dae9ab7" providerId="LiveId" clId="{1B71CDF3-5DA8-4669-AE89-7D7FE3D54620}" dt="2026-06-08T19:33:07.023" v="212" actId="20577"/>
+          <ac:spMkLst>
+            <pc:docMk/>
+            <pc:sldMk cId="0" sldId="263"/>
+            <ac:spMk id="83" creationId="{00000000-0000-0000-0000-000000000000}"/>
+          </ac:spMkLst>
+        </pc:spChg>
+        <pc:spChg chg="mod">
+          <ac:chgData name="Matt Justice" userId="c0ecbdc24dae9ab7" providerId="LiveId" clId="{1B71CDF3-5DA8-4669-AE89-7D7FE3D54620}" dt="2026-06-08T19:30:37.296" v="164" actId="20577"/>
+          <ac:spMkLst>
+            <pc:docMk/>
+            <pc:sldMk cId="0" sldId="263"/>
+            <ac:spMk id="89" creationId="{00000000-0000-0000-0000-000000000000}"/>
+          </ac:spMkLst>
+        </pc:spChg>
+        <pc:spChg chg="mod">
+          <ac:chgData name="Matt Justice" userId="c0ecbdc24dae9ab7" providerId="LiveId" clId="{1B71CDF3-5DA8-4669-AE89-7D7FE3D54620}" dt="2026-06-08T19:31:58.024" v="190" actId="20577"/>
+          <ac:spMkLst>
+            <pc:docMk/>
+            <pc:sldMk cId="0" sldId="263"/>
+            <ac:spMk id="91" creationId="{00000000-0000-0000-0000-000000000000}"/>
+          </ac:spMkLst>
+        </pc:spChg>
+        <pc:spChg chg="mod">
+          <ac:chgData name="Matt Justice" userId="c0ecbdc24dae9ab7" providerId="LiveId" clId="{1B71CDF3-5DA8-4669-AE89-7D7FE3D54620}" dt="2026-06-08T19:32:36.737" v="202" actId="20577"/>
+          <ac:spMkLst>
+            <pc:docMk/>
+            <pc:sldMk cId="0" sldId="263"/>
+            <ac:spMk id="93" creationId="{00000000-0000-0000-0000-000000000000}"/>
+          </ac:spMkLst>
+        </pc:spChg>
+        <pc:spChg chg="mod">
+          <ac:chgData name="Matt Justice" userId="c0ecbdc24dae9ab7" providerId="LiveId" clId="{1B71CDF3-5DA8-4669-AE89-7D7FE3D54620}" dt="2026-06-08T19:29:16.857" v="149" actId="20577"/>
+          <ac:spMkLst>
+            <pc:docMk/>
+            <pc:sldMk cId="0" sldId="263"/>
+            <ac:spMk id="95" creationId="{00000000-0000-0000-0000-000000000000}"/>
+          </ac:spMkLst>
+        </pc:spChg>
+        <pc:spChg chg="mod">
+          <ac:chgData name="Matt Justice" userId="c0ecbdc24dae9ab7" providerId="LiveId" clId="{1B71CDF3-5DA8-4669-AE89-7D7FE3D54620}" dt="2026-06-08T17:59:23.117" v="38" actId="20577"/>
+          <ac:spMkLst>
+            <pc:docMk/>
+            <pc:sldMk cId="0" sldId="263"/>
+            <ac:spMk id="151" creationId="{00000000-0000-0000-0000-000000000000}"/>
+          </ac:spMkLst>
+        </pc:spChg>
+        <pc:spChg chg="mod">
+          <ac:chgData name="Matt Justice" userId="c0ecbdc24dae9ab7" providerId="LiveId" clId="{1B71CDF3-5DA8-4669-AE89-7D7FE3D54620}" dt="2026-06-08T17:57:55.310" v="15" actId="20577"/>
+          <ac:spMkLst>
+            <pc:docMk/>
+            <pc:sldMk cId="0" sldId="263"/>
+            <ac:spMk id="161" creationId="{00000000-0000-0000-0000-000000000000}"/>
+          </ac:spMkLst>
+        </pc:spChg>
+        <pc:spChg chg="mod">
+          <ac:chgData name="Matt Justice" userId="c0ecbdc24dae9ab7" providerId="LiveId" clId="{1B71CDF3-5DA8-4669-AE89-7D7FE3D54620}" dt="2026-06-08T18:03:08.597" v="74" actId="20577"/>
+          <ac:spMkLst>
+            <pc:docMk/>
+            <pc:sldMk cId="0" sldId="263"/>
+            <ac:spMk id="188" creationId="{00000000-0000-0000-0000-000000000000}"/>
+          </ac:spMkLst>
+        </pc:spChg>
+        <pc:spChg chg="mod">
+          <ac:chgData name="Matt Justice" userId="c0ecbdc24dae9ab7" providerId="LiveId" clId="{1B71CDF3-5DA8-4669-AE89-7D7FE3D54620}" dt="2026-06-08T18:23:06.985" v="94" actId="20577"/>
+          <ac:spMkLst>
+            <pc:docMk/>
+            <pc:sldMk cId="0" sldId="263"/>
+            <ac:spMk id="189" creationId="{00000000-0000-0000-0000-000000000000}"/>
+          </ac:spMkLst>
+        </pc:spChg>
+        <pc:spChg chg="mod">
+          <ac:chgData name="Matt Justice" userId="c0ecbdc24dae9ab7" providerId="LiveId" clId="{1B71CDF3-5DA8-4669-AE89-7D7FE3D54620}" dt="2026-06-08T18:03:18.071" v="80" actId="20577"/>
+          <ac:spMkLst>
+            <pc:docMk/>
+            <pc:sldMk cId="0" sldId="263"/>
+            <ac:spMk id="192" creationId="{00000000-0000-0000-0000-000000000000}"/>
+          </ac:spMkLst>
+        </pc:spChg>
+        <pc:spChg chg="mod">
+          <ac:chgData name="Matt Justice" userId="c0ecbdc24dae9ab7" providerId="LiveId" clId="{1B71CDF3-5DA8-4669-AE89-7D7FE3D54620}" dt="2026-06-08T18:00:11.809" v="53" actId="20577"/>
+          <ac:spMkLst>
+            <pc:docMk/>
+            <pc:sldMk cId="0" sldId="263"/>
+            <ac:spMk id="193" creationId="{00000000-0000-0000-0000-000000000000}"/>
+          </ac:spMkLst>
+        </pc:spChg>
+      </pc:sldChg>
+      <pc:sldChg chg="modSp mod">
+        <pc:chgData name="Matt Justice" userId="c0ecbdc24dae9ab7" providerId="LiveId" clId="{1B71CDF3-5DA8-4669-AE89-7D7FE3D54620}" dt="2026-06-08T19:38:00.144" v="300" actId="20577"/>
+        <pc:sldMkLst>
+          <pc:docMk/>
+          <pc:sldMk cId="0" sldId="265"/>
+        </pc:sldMkLst>
+        <pc:spChg chg="mod">
+          <ac:chgData name="Matt Justice" userId="c0ecbdc24dae9ab7" providerId="LiveId" clId="{1B71CDF3-5DA8-4669-AE89-7D7FE3D54620}" dt="2026-06-08T19:37:55.727" v="297" actId="20577"/>
+          <ac:spMkLst>
+            <pc:docMk/>
+            <pc:sldMk cId="0" sldId="265"/>
+            <ac:spMk id="54" creationId="{00000000-0000-0000-0000-000000000000}"/>
+          </ac:spMkLst>
+        </pc:spChg>
+        <pc:spChg chg="mod">
+          <ac:chgData name="Matt Justice" userId="c0ecbdc24dae9ab7" providerId="LiveId" clId="{1B71CDF3-5DA8-4669-AE89-7D7FE3D54620}" dt="2026-06-08T19:38:00.144" v="300" actId="20577"/>
+          <ac:spMkLst>
+            <pc:docMk/>
+            <pc:sldMk cId="0" sldId="265"/>
+            <ac:spMk id="56" creationId="{00000000-0000-0000-0000-000000000000}"/>
+          </ac:spMkLst>
+        </pc:spChg>
+      </pc:sldChg>
+    </pc:docChg>
+  </pc:docChgLst>
+</pc:chgInfo>
+</file>
+
 <file path=ppt/charts/chart1.xml><?xml version="1.0" encoding="utf-8"?>
 <c:chartSpace xmlns:c="http://schemas.openxmlformats.org/drawingml/2006/chart" xmlns:a="http://schemas.openxmlformats.org/drawingml/2006/main" xmlns:r="http://schemas.openxmlformats.org/officeDocument/2006/relationships" xmlns:c16r2="http://schemas.microsoft.com/office/drawing/2015/06/chart">
   <c:date1904 val="0"/>
@@ -198,7 +932,7 @@
             <c:strRef>
               <c:f>Sheet1!$A$2:$A$6</c:f>
               <c:strCache>
-                <c:ptCount val="5"/>
+                <c:ptCount val="6"/>
                 <c:pt idx="0">
                   <c:v>Jan</c:v>
                 </c:pt>
@@ -214,6 +948,9 @@
                 <c:pt idx="4">
                   <c:v>May</c:v>
                 </c:pt>
+                <c:pt idx="5">
+                  <c:v>Jun</c:v>
+                </c:pt>
               </c:strCache>
             </c:strRef>
           </c:cat>
@@ -222,7 +959,7 @@
               <c:f>Sheet1!$B$2:$B$6</c:f>
               <c:numCache>
                 <c:formatCode>General</c:formatCode>
-                <c:ptCount val="5"/>
+                <c:ptCount val="6"/>
                 <c:pt idx="0">
                   <c:v>1.31</c:v>
                 </c:pt>
@@ -237,6 +974,9 @@
                 </c:pt>
                 <c:pt idx="4">
                   <c:v>2.06</c:v>
+                </c:pt>
+                <c:pt idx="5">
+                  <c:v>2.6549999999999998</c:v>
                 </c:pt>
               </c:numCache>
             </c:numRef>
@@ -309,7 +1049,7 @@
             <c:strRef>
               <c:f>Sheet1!$A$2:$A$6</c:f>
               <c:strCache>
-                <c:ptCount val="5"/>
+                <c:ptCount val="6"/>
                 <c:pt idx="0">
                   <c:v>Jan</c:v>
                 </c:pt>
@@ -325,6 +1065,9 @@
                 <c:pt idx="4">
                   <c:v>May</c:v>
                 </c:pt>
+                <c:pt idx="5">
+                  <c:v>Jun</c:v>
+                </c:pt>
               </c:strCache>
             </c:strRef>
           </c:cat>
@@ -333,7 +1076,7 @@
               <c:f>Sheet1!$C$2:$C$6</c:f>
               <c:numCache>
                 <c:formatCode>General</c:formatCode>
-                <c:ptCount val="5"/>
+                <c:ptCount val="6"/>
                 <c:pt idx="0">
                   <c:v>1.226</c:v>
                 </c:pt>
@@ -348,6 +1091,9 @@
                 </c:pt>
                 <c:pt idx="4">
                   <c:v>1.9410000000000001</c:v>
+                </c:pt>
+                <c:pt idx="5">
+                  <c:v>2.1850000000000001</c:v>
                 </c:pt>
               </c:numCache>
             </c:numRef>
@@ -542,7 +1288,7 @@
             <c:strRef>
               <c:f>Sheet1!$A$2:$A$6</c:f>
               <c:strCache>
-                <c:ptCount val="5"/>
+                <c:ptCount val="6"/>
                 <c:pt idx="0">
                   <c:v>Jan</c:v>
                 </c:pt>
@@ -558,6 +1304,9 @@
                 <c:pt idx="4">
                   <c:v>May</c:v>
                 </c:pt>
+                <c:pt idx="5">
+                  <c:v>Jun</c:v>
+                </c:pt>
               </c:strCache>
             </c:strRef>
           </c:cat>
@@ -566,7 +1315,7 @@
               <c:f>Sheet1!$B$2:$B$6</c:f>
               <c:numCache>
                 <c:formatCode>General</c:formatCode>
-                <c:ptCount val="5"/>
+                <c:ptCount val="6"/>
                 <c:pt idx="0">
                   <c:v>5.07</c:v>
                 </c:pt>
@@ -581,6 +1330,9 @@
                 </c:pt>
                 <c:pt idx="4">
                   <c:v>5.53</c:v>
+                </c:pt>
+                <c:pt idx="5">
+                  <c:v>5.87</c:v>
                 </c:pt>
               </c:numCache>
             </c:numRef>
@@ -651,7 +1403,7 @@
             <c:strRef>
               <c:f>Sheet1!$A$2:$A$6</c:f>
               <c:strCache>
-                <c:ptCount val="5"/>
+                <c:ptCount val="6"/>
                 <c:pt idx="0">
                   <c:v>Jan</c:v>
                 </c:pt>
@@ -667,6 +1419,9 @@
                 <c:pt idx="4">
                   <c:v>May</c:v>
                 </c:pt>
+                <c:pt idx="5">
+                  <c:v>Jun</c:v>
+                </c:pt>
               </c:strCache>
             </c:strRef>
           </c:cat>
@@ -675,7 +1430,7 @@
               <c:f>Sheet1!$C$2:$C$6</c:f>
               <c:numCache>
                 <c:formatCode>General</c:formatCode>
-                <c:ptCount val="5"/>
+                <c:ptCount val="6"/>
                 <c:pt idx="0">
                   <c:v>6.59</c:v>
                 </c:pt>
@@ -690,6 +1445,9 @@
                 </c:pt>
                 <c:pt idx="4">
                   <c:v>7.18</c:v>
+                </c:pt>
+                <c:pt idx="5">
+                  <c:v>7.41</c:v>
                 </c:pt>
               </c:numCache>
             </c:numRef>
@@ -746,7 +1504,7 @@
             <c:strRef>
               <c:f>Sheet1!$A$2:$A$6</c:f>
               <c:strCache>
-                <c:ptCount val="5"/>
+                <c:ptCount val="6"/>
                 <c:pt idx="0">
                   <c:v>Jan</c:v>
                 </c:pt>
@@ -762,6 +1520,9 @@
                 <c:pt idx="4">
                   <c:v>May</c:v>
                 </c:pt>
+                <c:pt idx="5">
+                  <c:v>Jun</c:v>
+                </c:pt>
               </c:strCache>
             </c:strRef>
           </c:cat>
@@ -770,7 +1531,7 @@
               <c:f>Sheet1!$D$2:$D$6</c:f>
               <c:numCache>
                 <c:formatCode>General</c:formatCode>
-                <c:ptCount val="5"/>
+                <c:ptCount val="6"/>
                 <c:pt idx="0">
                   <c:v>6.58</c:v>
                 </c:pt>
@@ -785,6 +1546,9 @@
                 </c:pt>
                 <c:pt idx="4">
                   <c:v>7.17</c:v>
+                </c:pt>
+                <c:pt idx="5">
+                  <c:v>7.35</c:v>
                 </c:pt>
               </c:numCache>
             </c:numRef>
@@ -1000,7 +1764,7 @@
             <c:strRef>
               <c:f>Sheet1!$A$2:$A$6</c:f>
               <c:strCache>
-                <c:ptCount val="5"/>
+                <c:ptCount val="6"/>
                 <c:pt idx="0">
                   <c:v>Jan</c:v>
                 </c:pt>
@@ -1016,6 +1780,9 @@
                 <c:pt idx="4">
                   <c:v>May</c:v>
                 </c:pt>
+                <c:pt idx="5">
+                  <c:v>Jun</c:v>
+                </c:pt>
               </c:strCache>
             </c:strRef>
           </c:cat>
@@ -1024,7 +1791,7 @@
               <c:f>Sheet1!$B$2:$B$6</c:f>
               <c:numCache>
                 <c:formatCode>General</c:formatCode>
-                <c:ptCount val="5"/>
+                <c:ptCount val="6"/>
                 <c:pt idx="0">
                   <c:v>48.71</c:v>
                 </c:pt>
@@ -1039,6 +1806,9 @@
                 </c:pt>
                 <c:pt idx="4">
                   <c:v>66.040000000000006</c:v>
+                </c:pt>
+                <c:pt idx="5">
+                  <c:v>70.61</c:v>
                 </c:pt>
               </c:numCache>
             </c:numRef>
@@ -1095,7 +1865,7 @@
             <c:strRef>
               <c:f>Sheet1!$A$2:$A$6</c:f>
               <c:strCache>
-                <c:ptCount val="5"/>
+                <c:ptCount val="6"/>
                 <c:pt idx="0">
                   <c:v>Jan</c:v>
                 </c:pt>
@@ -1111,6 +1881,9 @@
                 <c:pt idx="4">
                   <c:v>May</c:v>
                 </c:pt>
+                <c:pt idx="5">
+                  <c:v>Jun</c:v>
+                </c:pt>
               </c:strCache>
             </c:strRef>
           </c:cat>
@@ -1119,7 +1892,7 @@
               <c:f>Sheet1!$C$2:$C$6</c:f>
               <c:numCache>
                 <c:formatCode>General</c:formatCode>
-                <c:ptCount val="5"/>
+                <c:ptCount val="6"/>
                 <c:pt idx="0">
                   <c:v>12.75</c:v>
                 </c:pt>
@@ -1134,6 +1907,9 @@
                 </c:pt>
                 <c:pt idx="4">
                   <c:v>29.6</c:v>
+                </c:pt>
+                <c:pt idx="5">
+                  <c:v>48.36</c:v>
                 </c:pt>
               </c:numCache>
             </c:numRef>
@@ -10790,7 +11566,7 @@
                 <a:ea typeface="Calibri" pitchFamily="34" charset="-122"/>
                 <a:cs typeface="Calibri" pitchFamily="34" charset="-120"/>
               </a:rPr>
-              <a:t>Updated Q2 / Jun 2026 · Board discussion</a:t>
+              <a:t>Updated Q2 2026 Close · Board discussion</a:t>
             </a:r>
             <a:endParaRPr lang="en-US" sz="950" dirty="0"/>
           </a:p>
@@ -10932,7 +11708,7 @@
                 <a:ea typeface="Calibri" pitchFamily="34" charset="-122"/>
                 <a:cs typeface="Calibri" pitchFamily="34" charset="-120"/>
               </a:rPr>
-              <a:t>Updating full-year ARR forecast maintained at $97.5M (+$1.4M vs $96.1M budget). Net new ARR improved 57% Jan→May with enterprise expansion momentum and improving new logo velocity. We expect net new ARR of $2.0–2.3M/month in H2 based on current pipeline coverage.</a:t>
+              <a:t>Full-year ARR forecast maintained at $97.5M (+$1.4M vs $96.1M budget). June ARR $86.10M best month of H1 — net new $2.655M (+103% vs Jan). H2 net new target $2.0–2.3M/month supported by 3.3x pipeline coverage and improving CS expansion velocity.</a:t>
             </a:r>
             <a:endParaRPr lang="en-US" sz="850" dirty="0"/>
           </a:p>
@@ -11042,7 +11818,7 @@
                 <a:ea typeface="Calibri" pitchFamily="34" charset="-122"/>
                 <a:cs typeface="Calibri" pitchFamily="34" charset="-120"/>
               </a:rPr>
-              <a:t>Paid Search and Paid Social absorb 52% of budget at 1.2–1.3x efficiency with sub-6% win rates. Proposing reallocation of 25% of Paid budget (+$0.96M) to Partner and Referral — budget-neutral decision with estimated +$5M pipeline impact. Requires board approval.</a:t>
+              <a:t>Partner (2.61x) and Organic (2.26x) outperforming at 3.3x combined pipeline efficiency vs 1.97x Paid Search. Proposing reallocation of 25% of Paid budget (+$0.96M) to Partner and Organic — budget-neutral with estimated +$5M pipeline impact.</a:t>
             </a:r>
             <a:endParaRPr lang="en-US" sz="850" dirty="0"/>
           </a:p>
@@ -11152,7 +11928,7 @@
                 <a:ea typeface="Calibri" pitchFamily="34" charset="-122"/>
                 <a:cs typeface="Calibri" pitchFamily="34" charset="-120"/>
               </a:rPr>
-              <a:t>SMB represents 78% of gross churn at $7.0M annual forecast. Targeted CSM intervention program with defined at-risk triggers will be activated in Q3. Target: protect GRR above 99.0% through year-end. Protects NRR trajectory and ~$0.8M of at-risk ARR.</a:t>
+              <a:t>SMB represents 78% of gross churn at $7.0M annual forecast. CSM-led at-risk intervention activated in Q3. Target: maintain GRR above 99.0% through year-end. Protects NRR trajectory and ~$0.8M of at-risk ARR in Q3 renewal cycle.</a:t>
             </a:r>
             <a:endParaRPr lang="en-US" sz="850" dirty="0"/>
           </a:p>
@@ -11262,7 +12038,7 @@
                 <a:ea typeface="Calibri" pitchFamily="34" charset="-122"/>
                 <a:cs typeface="Calibri" pitchFamily="34" charset="-120"/>
               </a:rPr>
-              <a:t>Cash at $66.0M with &gt;24 months runway. Expanding annual billing terms to mid-market renewals in H2 with projected impact of $5–8M incremental cash by year-end. Revenue recognition neutral.</a:t>
+              <a:t>Cash $70.61M with 24+ months runway. June collections $11.18M above May run rate. Expanding annual billing terms to mid-market in H2 — projected $5–8M incremental cash. Revenue recognition neutral.</a:t>
             </a:r>
             <a:endParaRPr lang="en-US" sz="850" dirty="0"/>
           </a:p>
@@ -12256,7 +13032,7 @@
                 <a:ea typeface="Calibri" pitchFamily="34" charset="-122"/>
                 <a:cs typeface="Calibri" pitchFamily="34" charset="-120"/>
               </a:rPr>
-              <a:t>77.0%</a:t>
+              <a:t>79.0%</a:t>
             </a:r>
             <a:endParaRPr lang="en-US" sz="800" dirty="0"/>
           </a:p>
@@ -12398,7 +13174,7 @@
                 <a:ea typeface="Calibri" pitchFamily="34" charset="-122"/>
                 <a:cs typeface="Calibri" pitchFamily="34" charset="-120"/>
               </a:rPr>
-              <a:t>—</a:t>
+              <a:t>+200bps</a:t>
             </a:r>
             <a:endParaRPr lang="en-US" sz="800" dirty="0"/>
           </a:p>
@@ -12540,7 +13316,7 @@
                 <a:ea typeface="Calibri" pitchFamily="34" charset="-122"/>
                 <a:cs typeface="Calibri" pitchFamily="34" charset="-120"/>
               </a:rPr>
-              <a:t>-$2.6M</a:t>
+              <a:t>($2.6M)</a:t>
             </a:r>
             <a:endParaRPr lang="en-US" sz="800" dirty="0"/>
           </a:p>
@@ -12611,7 +13387,7 @@
                 <a:ea typeface="Calibri" pitchFamily="34" charset="-122"/>
                 <a:cs typeface="Calibri" pitchFamily="34" charset="-120"/>
               </a:rPr>
-              <a:t>-$2.7M</a:t>
+              <a:t>($2.7M)</a:t>
             </a:r>
             <a:endParaRPr lang="en-US" sz="800" dirty="0"/>
           </a:p>
@@ -13108,7 +13884,7 @@
                 <a:ea typeface="Calibri" pitchFamily="34" charset="-122"/>
                 <a:cs typeface="Calibri" pitchFamily="34" charset="-120"/>
               </a:rPr>
-              <a:t>156</a:t>
+              <a:t>147</a:t>
             </a:r>
             <a:endParaRPr lang="en-US" sz="800" dirty="0"/>
           </a:p>
@@ -13179,7 +13955,7 @@
                 <a:ea typeface="Calibri" pitchFamily="34" charset="-122"/>
                 <a:cs typeface="Calibri" pitchFamily="34" charset="-120"/>
               </a:rPr>
-              <a:t>154</a:t>
+              <a:t>147</a:t>
             </a:r>
             <a:endParaRPr lang="en-US" sz="800" dirty="0"/>
           </a:p>
@@ -13250,7 +14026,7 @@
                 <a:ea typeface="Calibri" pitchFamily="34" charset="-122"/>
                 <a:cs typeface="Calibri" pitchFamily="34" charset="-120"/>
               </a:rPr>
-              <a:t>+2</a:t>
+              <a:t>—</a:t>
             </a:r>
             <a:endParaRPr lang="en-US" sz="800" dirty="0"/>
           </a:p>
@@ -15004,45 +15780,6 @@
       </p:sp>
       <p:sp>
         <p:nvSpPr>
-          <p:cNvPr id="46" name="Text 44"/>
-          <p:cNvSpPr/>
-          <p:nvPr/>
-        </p:nvSpPr>
-        <p:spPr>
-          <a:xfrm>
-            <a:off x="365760" y="4864608"/>
-            <a:ext cx="8412480" cy="164592"/>
-          </a:xfrm>
-          <a:prstGeom prst="rect">
-            <a:avLst/>
-          </a:prstGeom>
-          <a:noFill/>
-          <a:ln/>
-        </p:spPr>
-        <p:txBody>
-          <a:bodyPr wrap="square" rtlCol="0" anchor="ctr"/>
-          <a:lstStyle/>
-          <a:p>
-            <a:pPr marL="0" indent="0" algn="ctr">
-              <a:buNone/>
-            </a:pPr>
-            <a:r>
-              <a:rPr lang="en-US" sz="800" dirty="0">
-                <a:solidFill>
-                  <a:srgbClr val="64748B"/>
-                </a:solidFill>
-                <a:latin typeface="Calibri" pitchFamily="34" charset="0"/>
-                <a:ea typeface="Calibri" pitchFamily="34" charset="-122"/>
-                <a:cs typeface="Calibri" pitchFamily="34" charset="-120"/>
-              </a:rPr>
-              <a:t>SMPL · Prepared by Finance · Q2 / Jun 2026 · For Board Use Only</a:t>
-            </a:r>
-            <a:endParaRPr lang="en-US" sz="800" dirty="0"/>
-          </a:p>
-        </p:txBody>
-      </p:sp>
-      <p:sp>
-        <p:nvSpPr>
           <p:cNvPr id="47" name="Shape 45"/>
           <p:cNvSpPr/>
           <p:nvPr/>
@@ -17171,7 +17908,7 @@
                 <a:ea typeface="Calibri" pitchFamily="34" charset="-122"/>
                 <a:cs typeface="Calibri" pitchFamily="34" charset="-120"/>
               </a:rPr>
-              <a:t>-$1.30M</a:t>
+              <a:t>($1.30M)</a:t>
             </a:r>
             <a:endParaRPr lang="en-US" sz="800" dirty="0"/>
           </a:p>
@@ -17242,7 +17979,7 @@
                 <a:ea typeface="Calibri" pitchFamily="34" charset="-122"/>
                 <a:cs typeface="Calibri" pitchFamily="34" charset="-120"/>
               </a:rPr>
-              <a:t>-$1.30M</a:t>
+              <a:t>($1.30M)</a:t>
             </a:r>
             <a:endParaRPr lang="en-US" sz="800" dirty="0"/>
           </a:p>
@@ -17378,15 +18115,19 @@
             <a:r>
               <a:rPr lang="en-US" sz="800" dirty="0">
                 <a:solidFill>
-                  <a:srgbClr val="0F172A"/>
-                </a:solidFill>
-                <a:latin typeface="Calibri" pitchFamily="34" charset="0"/>
-                <a:ea typeface="Calibri" pitchFamily="34" charset="-122"/>
-                <a:cs typeface="Calibri" pitchFamily="34" charset="-120"/>
-              </a:rPr>
-              <a:t>-$0.21M</a:t>
-            </a:r>
-            <a:endParaRPr lang="en-US" sz="800" dirty="0"/>
+                  <a:srgbClr val="C00000"/>
+                </a:solidFill>
+                <a:latin typeface="Calibri" pitchFamily="34" charset="0"/>
+                <a:ea typeface="Calibri" pitchFamily="34" charset="-122"/>
+                <a:cs typeface="Calibri" pitchFamily="34" charset="-120"/>
+              </a:rPr>
+              <a:t>($0.21M)</a:t>
+            </a:r>
+            <a:endParaRPr lang="en-US" sz="800" dirty="0">
+              <a:solidFill>
+                <a:srgbClr val="C00000"/>
+              </a:solidFill>
+            </a:endParaRPr>
           </a:p>
         </p:txBody>
       </p:sp>
@@ -17449,15 +18190,19 @@
             <a:r>
               <a:rPr lang="en-US" sz="800" dirty="0">
                 <a:solidFill>
-                  <a:srgbClr val="0F172A"/>
-                </a:solidFill>
-                <a:latin typeface="Calibri" pitchFamily="34" charset="0"/>
-                <a:ea typeface="Calibri" pitchFamily="34" charset="-122"/>
-                <a:cs typeface="Calibri" pitchFamily="34" charset="-120"/>
-              </a:rPr>
-              <a:t>-4.8%</a:t>
-            </a:r>
-            <a:endParaRPr lang="en-US" sz="800" dirty="0"/>
+                  <a:srgbClr val="C00000"/>
+                </a:solidFill>
+                <a:latin typeface="Calibri" pitchFamily="34" charset="0"/>
+                <a:ea typeface="Calibri" pitchFamily="34" charset="-122"/>
+                <a:cs typeface="Calibri" pitchFamily="34" charset="-120"/>
+              </a:rPr>
+              <a:t>(4.8%)</a:t>
+            </a:r>
+            <a:endParaRPr lang="en-US" sz="800" dirty="0">
+              <a:solidFill>
+                <a:srgbClr val="C00000"/>
+              </a:solidFill>
+            </a:endParaRPr>
           </a:p>
         </p:txBody>
       </p:sp>
@@ -18023,7 +18768,7 @@
                 <a:ea typeface="Calibri" pitchFamily="34" charset="-122"/>
                 <a:cs typeface="Calibri" pitchFamily="34" charset="-120"/>
               </a:rPr>
-              <a:t>$2.655M</a:t>
+              <a:t>$2.66M</a:t>
             </a:r>
             <a:endParaRPr lang="en-US" sz="800" dirty="0"/>
           </a:p>
@@ -18094,7 +18839,7 @@
                 <a:ea typeface="Calibri" pitchFamily="34" charset="-122"/>
                 <a:cs typeface="Calibri" pitchFamily="34" charset="-120"/>
               </a:rPr>
-              <a:t>$2.185M</a:t>
+              <a:t>$2.19M</a:t>
             </a:r>
             <a:endParaRPr lang="en-US" sz="800" dirty="0"/>
           </a:p>
@@ -19206,33 +19951,29 @@
         <p:spPr>
           <a:xfrm>
             <a:off x="5804515" y="1124712"/>
-            <a:ext cx="3017520" cy="219456"/>
-          </a:xfrm>
-          <a:prstGeom prst="rect">
-            <a:avLst/>
-          </a:prstGeom>
-          <a:noFill/>
-          <a:ln/>
-        </p:spPr>
-        <p:txBody>
-          <a:bodyPr wrap="square" rtlCol="0" anchor="ctr"/>
-          <a:lstStyle/>
-          <a:p>
-            <a:pPr marL="0" indent="0">
-              <a:buNone/>
-            </a:pPr>
+            <a:ext cx="3017520" cy="237744"/>
+          </a:xfrm>
+          <a:prstGeom prst="rect">
+            <a:avLst/>
+          </a:prstGeom>
+          <a:noFill/>
+          <a:ln/>
+        </p:spPr>
+        <p:txBody>
+          <a:bodyPr wrap="square" rtlCol="0" anchor="ctr">
+            <a:noAutofit/>
+          </a:bodyPr>
+          <a:lstStyle/>
+          <a:p>
+            <a:pPr algn="l"/>
             <a:r>
               <a:rPr lang="en-US" sz="1000" b="1" dirty="0">
                 <a:solidFill>
                   <a:srgbClr val="1A2E44"/>
                 </a:solidFill>
-                <a:latin typeface="Calibri" pitchFamily="34" charset="0"/>
-                <a:ea typeface="Calibri" pitchFamily="34" charset="-122"/>
-                <a:cs typeface="Calibri" pitchFamily="34" charset="-120"/>
               </a:rPr>
               <a:t>Key Takeaways</a:t>
             </a:r>
-            <a:endParaRPr lang="en-US" sz="1000" dirty="0"/>
           </a:p>
         </p:txBody>
       </p:sp>
@@ -19274,45 +20015,30 @@
         </p:nvSpPr>
         <p:spPr>
           <a:xfrm>
-            <a:off x="5792004" y="1463040"/>
-            <a:ext cx="3017520" cy="347472"/>
-          </a:xfrm>
-          <a:prstGeom prst="rect">
-            <a:avLst/>
-          </a:prstGeom>
-          <a:noFill/>
-          <a:ln/>
-        </p:spPr>
-        <p:txBody>
-          <a:bodyPr wrap="square" rtlCol="0" anchor="ctr"/>
-          <a:lstStyle/>
-          <a:p>
-            <a:pPr marL="0" indent="0">
-              <a:buNone/>
-            </a:pPr>
-            <a:r>
-              <a:rPr lang="en-US" sz="900" b="1" dirty="0">
-                <a:solidFill>
-                  <a:srgbClr val="0D9488"/>
-                </a:solidFill>
-                <a:latin typeface="Calibri" pitchFamily="34" charset="0"/>
-                <a:ea typeface="Calibri" pitchFamily="34" charset="-122"/>
-                <a:cs typeface="Calibri" pitchFamily="34" charset="-120"/>
-              </a:rPr>
-              <a:t>• </a:t>
-            </a:r>
-            <a:r>
-              <a:rPr lang="en-US" sz="900" dirty="0">
-                <a:solidFill>
-                  <a:srgbClr val="334155"/>
-                </a:solidFill>
-                <a:latin typeface="Calibri" pitchFamily="34" charset="0"/>
-                <a:ea typeface="Calibri" pitchFamily="34" charset="-122"/>
-                <a:cs typeface="Calibri" pitchFamily="34" charset="-120"/>
-              </a:rPr>
-              <a:t>Revenue +0.8% vs budget every month — subscription growth tracking ahead of plan through Q2</a:t>
-            </a:r>
-            <a:endParaRPr lang="en-US" sz="900" dirty="0"/>
+            <a:off x="5792004" y="1399032"/>
+            <a:ext cx="3017520" cy="480059"/>
+          </a:xfrm>
+          <a:prstGeom prst="rect">
+            <a:avLst/>
+          </a:prstGeom>
+          <a:noFill/>
+          <a:ln/>
+        </p:spPr>
+        <p:txBody>
+          <a:bodyPr wrap="square" rtlCol="0" anchor="ctr">
+            <a:noAutofit/>
+          </a:bodyPr>
+          <a:lstStyle/>
+          <a:p>
+            <a:pPr marL="0" indent="0" algn="l"/>
+            <a:r>
+              <a:rPr lang="en-US" sz="950" b="0" dirty="0">
+                <a:solidFill>
+                  <a:srgbClr val="000000"/>
+                </a:solidFill>
+              </a:rPr>
+              <a:t>• Revenue $7.41M (+0.8% vs budget) — Q2 subscription growth tracking ahead of plan; YTD $41.7M +$0.3M vs budget</a:t>
+            </a:r>
           </a:p>
         </p:txBody>
       </p:sp>
@@ -19324,45 +20050,30 @@
         </p:nvSpPr>
         <p:spPr>
           <a:xfrm>
-            <a:off x="5792004" y="1847088"/>
-            <a:ext cx="3017520" cy="347472"/>
-          </a:xfrm>
-          <a:prstGeom prst="rect">
-            <a:avLst/>
-          </a:prstGeom>
-          <a:noFill/>
-          <a:ln/>
-        </p:spPr>
-        <p:txBody>
-          <a:bodyPr wrap="square" rtlCol="0" anchor="ctr"/>
-          <a:lstStyle/>
-          <a:p>
-            <a:pPr marL="0" indent="0">
-              <a:buNone/>
-            </a:pPr>
-            <a:r>
-              <a:rPr lang="en-US" sz="900" b="1" dirty="0">
-                <a:solidFill>
-                  <a:srgbClr val="0D9488"/>
-                </a:solidFill>
-                <a:latin typeface="Calibri" pitchFamily="34" charset="0"/>
-                <a:ea typeface="Calibri" pitchFamily="34" charset="-122"/>
-                <a:cs typeface="Calibri" pitchFamily="34" charset="-120"/>
-              </a:rPr>
-              <a:t>• </a:t>
-            </a:r>
-            <a:r>
-              <a:rPr lang="en-US" sz="900" dirty="0">
-                <a:solidFill>
-                  <a:srgbClr val="334155"/>
-                </a:solidFill>
-                <a:latin typeface="Calibri" pitchFamily="34" charset="0"/>
-                <a:ea typeface="Calibri" pitchFamily="34" charset="-122"/>
-                <a:cs typeface="Calibri" pitchFamily="34" charset="-120"/>
-              </a:rPr>
-              <a:t>ARR $86.10M exceeds $84.89M budget; net new ARR improved 57% Jan→May ($1.31M to $2.655M)</a:t>
-            </a:r>
-            <a:endParaRPr lang="en-US" sz="900" dirty="0"/>
+            <a:off x="5787191" y="1873555"/>
+            <a:ext cx="3017520" cy="480059"/>
+          </a:xfrm>
+          <a:prstGeom prst="rect">
+            <a:avLst/>
+          </a:prstGeom>
+          <a:noFill/>
+          <a:ln/>
+        </p:spPr>
+        <p:txBody>
+          <a:bodyPr wrap="square" rtlCol="0" anchor="ctr">
+            <a:noAutofit/>
+          </a:bodyPr>
+          <a:lstStyle/>
+          <a:p>
+            <a:pPr marL="0" indent="0" algn="l"/>
+            <a:r>
+              <a:rPr lang="en-US" sz="950" b="0" dirty="0">
+                <a:solidFill>
+                  <a:srgbClr val="000000"/>
+                </a:solidFill>
+              </a:rPr>
+              <a:t>• ARR $86.10M exceeds $84.89M budget by +$1.21M; net new ARR +103% Jan→Jun ($1.31M to $2.655M); NRR 100.8%</a:t>
+            </a:r>
           </a:p>
         </p:txBody>
       </p:sp>
@@ -19374,45 +20085,30 @@
         </p:nvSpPr>
         <p:spPr>
           <a:xfrm>
-            <a:off x="5784785" y="2224278"/>
-            <a:ext cx="3017520" cy="347472"/>
-          </a:xfrm>
-          <a:prstGeom prst="rect">
-            <a:avLst/>
-          </a:prstGeom>
-          <a:noFill/>
-          <a:ln/>
-        </p:spPr>
-        <p:txBody>
-          <a:bodyPr wrap="square" rtlCol="0" anchor="ctr"/>
-          <a:lstStyle/>
-          <a:p>
-            <a:pPr marL="0" indent="0">
-              <a:buNone/>
-            </a:pPr>
-            <a:r>
-              <a:rPr lang="en-US" sz="900" b="1" dirty="0">
-                <a:solidFill>
-                  <a:srgbClr val="0D9488"/>
-                </a:solidFill>
-                <a:latin typeface="Calibri" pitchFamily="34" charset="0"/>
-                <a:ea typeface="Calibri" pitchFamily="34" charset="-122"/>
-                <a:cs typeface="Calibri" pitchFamily="34" charset="-120"/>
-              </a:rPr>
-              <a:t>• </a:t>
-            </a:r>
-            <a:r>
-              <a:rPr lang="en-US" sz="900" dirty="0">
-                <a:solidFill>
-                  <a:srgbClr val="334155"/>
-                </a:solidFill>
-                <a:latin typeface="Calibri" pitchFamily="34" charset="0"/>
-                <a:ea typeface="Calibri" pitchFamily="34" charset="-122"/>
-                <a:cs typeface="Calibri" pitchFamily="34" charset="-120"/>
-              </a:rPr>
-              <a:t>Cash $70.61M exceeds $48.36M budget by $22.25M — annual billing collections and strong June close</a:t>
-            </a:r>
-            <a:endParaRPr lang="en-US" sz="900" dirty="0"/>
+            <a:off x="5784785" y="2295863"/>
+            <a:ext cx="3017520" cy="480059"/>
+          </a:xfrm>
+          <a:prstGeom prst="rect">
+            <a:avLst/>
+          </a:prstGeom>
+          <a:noFill/>
+          <a:ln/>
+        </p:spPr>
+        <p:txBody>
+          <a:bodyPr wrap="square" rtlCol="0" anchor="ctr">
+            <a:noAutofit/>
+          </a:bodyPr>
+          <a:lstStyle/>
+          <a:p>
+            <a:pPr marL="0" indent="0" algn="l"/>
+            <a:r>
+              <a:rPr lang="en-US" sz="950" b="0" dirty="0">
+                <a:solidFill>
+                  <a:srgbClr val="000000"/>
+                </a:solidFill>
+              </a:rPr>
+              <a:t>• Cash $70.61M exceeds $48.36M budget by $22.25M — Q1 annual billing collections + June $11.18M close</a:t>
+            </a:r>
           </a:p>
         </p:txBody>
       </p:sp>
@@ -19424,45 +20120,30 @@
         </p:nvSpPr>
         <p:spPr>
           <a:xfrm>
-            <a:off x="5787191" y="2624328"/>
-            <a:ext cx="3017520" cy="347472"/>
-          </a:xfrm>
-          <a:prstGeom prst="rect">
-            <a:avLst/>
-          </a:prstGeom>
-          <a:noFill/>
-          <a:ln/>
-        </p:spPr>
-        <p:txBody>
-          <a:bodyPr wrap="square" rtlCol="0" anchor="ctr"/>
-          <a:lstStyle/>
-          <a:p>
-            <a:pPr marL="0" indent="0">
-              <a:buNone/>
-            </a:pPr>
-            <a:r>
-              <a:rPr lang="en-US" sz="900" b="1" dirty="0">
-                <a:solidFill>
-                  <a:srgbClr val="0D9488"/>
-                </a:solidFill>
-                <a:latin typeface="Calibri" pitchFamily="34" charset="0"/>
-                <a:ea typeface="Calibri" pitchFamily="34" charset="-122"/>
-                <a:cs typeface="Calibri" pitchFamily="34" charset="-120"/>
-              </a:rPr>
-              <a:t>• </a:t>
-            </a:r>
-            <a:r>
-              <a:rPr lang="en-US" sz="900" dirty="0">
-                <a:solidFill>
-                  <a:srgbClr val="334155"/>
-                </a:solidFill>
-                <a:latin typeface="Calibri" pitchFamily="34" charset="0"/>
-                <a:ea typeface="Calibri" pitchFamily="34" charset="-122"/>
-                <a:cs typeface="Calibri" pitchFamily="34" charset="-120"/>
-              </a:rPr>
-              <a:t>NRR improving to 100.8% — enterprise expansion offsetting SMB churn pressure</a:t>
-            </a:r>
-            <a:endParaRPr lang="en-US" sz="900" dirty="0"/>
+            <a:off x="5784785" y="2660904"/>
+            <a:ext cx="3017520" cy="480059"/>
+          </a:xfrm>
+          <a:prstGeom prst="rect">
+            <a:avLst/>
+          </a:prstGeom>
+          <a:noFill/>
+          <a:ln/>
+        </p:spPr>
+        <p:txBody>
+          <a:bodyPr wrap="square" rtlCol="0" anchor="ctr">
+            <a:noAutofit/>
+          </a:bodyPr>
+          <a:lstStyle/>
+          <a:p>
+            <a:pPr marL="0" indent="0" algn="l"/>
+            <a:r>
+              <a:rPr lang="en-US" sz="950" b="0" dirty="0">
+                <a:solidFill>
+                  <a:srgbClr val="000000"/>
+                </a:solidFill>
+              </a:rPr>
+              <a:t>• NRR 100.8% — best reading of H1; June churn $0.115M favorable vs $0.50M budget; expansion outperforming</a:t>
+            </a:r>
           </a:p>
         </p:txBody>
       </p:sp>
@@ -19474,45 +20155,30 @@
         </p:nvSpPr>
         <p:spPr>
           <a:xfrm>
-            <a:off x="5782379" y="2999232"/>
-            <a:ext cx="3017520" cy="347472"/>
-          </a:xfrm>
-          <a:prstGeom prst="rect">
-            <a:avLst/>
-          </a:prstGeom>
-          <a:noFill/>
-          <a:ln/>
-        </p:spPr>
-        <p:txBody>
-          <a:bodyPr wrap="square" rtlCol="0" anchor="ctr"/>
-          <a:lstStyle/>
-          <a:p>
-            <a:pPr marL="0" indent="0">
-              <a:buNone/>
-            </a:pPr>
-            <a:r>
-              <a:rPr lang="en-US" sz="900" b="1" dirty="0">
-                <a:solidFill>
-                  <a:srgbClr val="0D9488"/>
-                </a:solidFill>
-                <a:latin typeface="Calibri" pitchFamily="34" charset="0"/>
-                <a:ea typeface="Calibri" pitchFamily="34" charset="-122"/>
-                <a:cs typeface="Calibri" pitchFamily="34" charset="-120"/>
-              </a:rPr>
-              <a:t>• </a:t>
-            </a:r>
-            <a:r>
-              <a:rPr lang="en-US" sz="900" dirty="0">
-                <a:solidFill>
-                  <a:srgbClr val="334155"/>
-                </a:solidFill>
-                <a:latin typeface="Calibri" pitchFamily="34" charset="0"/>
-                <a:ea typeface="Calibri" pitchFamily="34" charset="-122"/>
-                <a:cs typeface="Calibri" pitchFamily="34" charset="-120"/>
-              </a:rPr>
-              <a:t>EBITDA -$1.30M vs $0.65M budget — Q2 variable comp timing (-$0.9M reverses Q3) + GM +220bps</a:t>
-            </a:r>
-            <a:endParaRPr lang="en-US" sz="900" dirty="0"/>
+            <a:off x="5787191" y="3079242"/>
+            <a:ext cx="3017520" cy="480059"/>
+          </a:xfrm>
+          <a:prstGeom prst="rect">
+            <a:avLst/>
+          </a:prstGeom>
+          <a:noFill/>
+          <a:ln/>
+        </p:spPr>
+        <p:txBody>
+          <a:bodyPr wrap="square" rtlCol="0" anchor="ctr">
+            <a:noAutofit/>
+          </a:bodyPr>
+          <a:lstStyle/>
+          <a:p>
+            <a:pPr marL="0" indent="0" algn="l"/>
+            <a:r>
+              <a:rPr lang="en-US" sz="950" b="0" dirty="0">
+                <a:solidFill>
+                  <a:srgbClr val="000000"/>
+                </a:solidFill>
+              </a:rPr>
+              <a:t>• EBITDA -$1.30M vs $0.65M budget (-$1.95M); Q2 variable comp timing reverses in Q3; GM +220bps above plan</a:t>
+            </a:r>
           </a:p>
         </p:txBody>
       </p:sp>
@@ -20724,7 +21390,7 @@
                 <a:ea typeface="Calibri" pitchFamily="34" charset="-122"/>
                 <a:cs typeface="Calibri" pitchFamily="34" charset="-120"/>
               </a:rPr>
-              <a:t>Net New ARR (May)</a:t>
+              <a:t>Net New ARR (Jun)</a:t>
             </a:r>
             <a:endParaRPr lang="en-US" sz="750" dirty="0"/>
           </a:p>
@@ -20763,7 +21429,7 @@
                 <a:ea typeface="Calibri" pitchFamily="34" charset="-122"/>
                 <a:cs typeface="Calibri" pitchFamily="34" charset="-120"/>
               </a:rPr>
-              <a:t>$2.655M</a:t>
+              <a:t>$2.66M</a:t>
             </a:r>
             <a:endParaRPr lang="en-US" sz="1700" dirty="0"/>
           </a:p>
@@ -21125,7 +21791,7 @@
                 <a:ea typeface="Calibri" pitchFamily="34" charset="-122"/>
                 <a:cs typeface="Calibri" pitchFamily="34" charset="-120"/>
               </a:rPr>
-              <a:t>-$7.0M</a:t>
+              <a:t>($7.0M)</a:t>
             </a:r>
             <a:endParaRPr lang="en-US" sz="1700" dirty="0"/>
           </a:p>
@@ -21219,7 +21885,7 @@
                 <a:ea typeface="Calibri" pitchFamily="34" charset="-122"/>
                 <a:cs typeface="Calibri" pitchFamily="34" charset="-120"/>
               </a:rPr>
-              <a:t>FY 2026 ARR BRIDGE</a:t>
+              <a:t>FY2026 ARR BRIDGE</a:t>
             </a:r>
             <a:endParaRPr lang="en-US" sz="800" dirty="0"/>
           </a:p>
@@ -22781,7 +23447,7 @@
                 <a:ea typeface="Calibri" pitchFamily="34" charset="-122"/>
                 <a:cs typeface="Calibri" pitchFamily="34" charset="-120"/>
               </a:rPr>
-              <a:t>-$3.9M</a:t>
+              <a:t>($3.9M)</a:t>
             </a:r>
             <a:endParaRPr lang="en-US" sz="800" dirty="0"/>
           </a:p>
@@ -22852,7 +23518,7 @@
                 <a:ea typeface="Calibri" pitchFamily="34" charset="-122"/>
                 <a:cs typeface="Calibri" pitchFamily="34" charset="-120"/>
               </a:rPr>
-              <a:t>-$4.0M</a:t>
+              <a:t>($4.0M)</a:t>
             </a:r>
             <a:endParaRPr lang="en-US" sz="800" dirty="0"/>
           </a:p>
@@ -23065,7 +23731,7 @@
                 <a:ea typeface="Calibri" pitchFamily="34" charset="-122"/>
                 <a:cs typeface="Calibri" pitchFamily="34" charset="-120"/>
               </a:rPr>
-              <a:t>-$7.0M</a:t>
+              <a:t>($7.0M)</a:t>
             </a:r>
             <a:endParaRPr lang="en-US" sz="800" dirty="0"/>
           </a:p>
@@ -23136,7 +23802,7 @@
                 <a:ea typeface="Calibri" pitchFamily="34" charset="-122"/>
                 <a:cs typeface="Calibri" pitchFamily="34" charset="-120"/>
               </a:rPr>
-              <a:t>-$7.2M</a:t>
+              <a:t>($7.2M)</a:t>
             </a:r>
             <a:endParaRPr lang="en-US" sz="800" dirty="0"/>
           </a:p>
@@ -23505,7 +24171,7 @@
         </p:nvSpPr>
         <p:spPr>
           <a:xfrm>
-            <a:off x="5852160" y="3994476"/>
+            <a:off x="5850716" y="3985332"/>
             <a:ext cx="3063240" cy="969264"/>
           </a:xfrm>
           <a:prstGeom prst="rect">
@@ -23537,34 +24203,30 @@
         </p:nvSpPr>
         <p:spPr>
           <a:xfrm>
-            <a:off x="5989320" y="4085916"/>
-            <a:ext cx="2788920" cy="219456"/>
-          </a:xfrm>
-          <a:prstGeom prst="rect">
-            <a:avLst/>
-          </a:prstGeom>
-          <a:noFill/>
-          <a:ln/>
-        </p:spPr>
-        <p:txBody>
-          <a:bodyPr wrap="square" rtlCol="0" anchor="ctr"/>
-          <a:lstStyle/>
-          <a:p>
-            <a:pPr marL="0" indent="0">
-              <a:buNone/>
-            </a:pPr>
+            <a:off x="5987876" y="3989655"/>
+            <a:ext cx="2788920" cy="173263"/>
+          </a:xfrm>
+          <a:prstGeom prst="rect">
+            <a:avLst/>
+          </a:prstGeom>
+          <a:noFill/>
+          <a:ln/>
+        </p:spPr>
+        <p:txBody>
+          <a:bodyPr wrap="square" rtlCol="0" anchor="ctr">
+            <a:noAutofit/>
+          </a:bodyPr>
+          <a:lstStyle/>
+          <a:p>
+            <a:pPr algn="l"/>
             <a:r>
               <a:rPr lang="en-US" sz="1000" b="1" dirty="0">
                 <a:solidFill>
                   <a:srgbClr val="1A2E44"/>
                 </a:solidFill>
-                <a:latin typeface="Calibri" pitchFamily="34" charset="0"/>
-                <a:ea typeface="Calibri" pitchFamily="34" charset="-122"/>
-                <a:cs typeface="Calibri" pitchFamily="34" charset="-120"/>
               </a:rPr>
               <a:t>Key Takeaways</a:t>
             </a:r>
-            <a:endParaRPr lang="en-US" sz="1000" dirty="0"/>
           </a:p>
         </p:txBody>
       </p:sp>
@@ -23576,7 +24238,7 @@
         </p:nvSpPr>
         <p:spPr>
           <a:xfrm>
-            <a:off x="5989320" y="4323660"/>
+            <a:off x="5987876" y="4162918"/>
             <a:ext cx="2788920" cy="0"/>
           </a:xfrm>
           <a:prstGeom prst="line">
@@ -23606,45 +24268,30 @@
         </p:nvSpPr>
         <p:spPr>
           <a:xfrm>
-            <a:off x="5987876" y="4303439"/>
-            <a:ext cx="2788920" cy="347472"/>
-          </a:xfrm>
-          <a:prstGeom prst="rect">
-            <a:avLst/>
-          </a:prstGeom>
-          <a:noFill/>
-          <a:ln/>
-        </p:spPr>
-        <p:txBody>
-          <a:bodyPr wrap="square" rtlCol="0" anchor="ctr"/>
-          <a:lstStyle/>
-          <a:p>
-            <a:pPr marL="0" indent="0">
-              <a:buNone/>
-            </a:pPr>
-            <a:r>
-              <a:rPr lang="en-US" sz="900" b="1" dirty="0">
-                <a:solidFill>
-                  <a:srgbClr val="0D9488"/>
-                </a:solidFill>
-                <a:latin typeface="Calibri" pitchFamily="34" charset="0"/>
-                <a:ea typeface="Calibri" pitchFamily="34" charset="-122"/>
-                <a:cs typeface="Calibri" pitchFamily="34" charset="-120"/>
-              </a:rPr>
-              <a:t>• </a:t>
-            </a:r>
-            <a:r>
-              <a:rPr lang="en-US" sz="900" dirty="0">
-                <a:solidFill>
-                  <a:srgbClr val="334155"/>
-                </a:solidFill>
-                <a:latin typeface="Calibri" pitchFamily="34" charset="0"/>
-                <a:ea typeface="Calibri" pitchFamily="34" charset="-122"/>
-                <a:cs typeface="Calibri" pitchFamily="34" charset="-120"/>
-              </a:rPr>
-              <a:t>FY forecast $97.5M beats $96.1M budget by $1.4M driven by New Business and Expansion outperformance</a:t>
-            </a:r>
-            <a:endParaRPr lang="en-US" sz="900" dirty="0"/>
+            <a:off x="5987876" y="4101084"/>
+            <a:ext cx="2788920" cy="480059"/>
+          </a:xfrm>
+          <a:prstGeom prst="rect">
+            <a:avLst/>
+          </a:prstGeom>
+          <a:noFill/>
+          <a:ln/>
+        </p:spPr>
+        <p:txBody>
+          <a:bodyPr wrap="square" rtlCol="0" anchor="ctr">
+            <a:noAutofit/>
+          </a:bodyPr>
+          <a:lstStyle/>
+          <a:p>
+            <a:pPr marL="0" indent="0" algn="l"/>
+            <a:r>
+              <a:rPr lang="en-US" sz="950" b="0" dirty="0">
+                <a:solidFill>
+                  <a:srgbClr val="000000"/>
+                </a:solidFill>
+              </a:rPr>
+              <a:t>• FY forecast $97.5M beats $96.1M budget by $1.4M — New Business and Expansion outperformance</a:t>
+            </a:r>
           </a:p>
         </p:txBody>
       </p:sp>
@@ -23656,45 +24303,30 @@
         </p:nvSpPr>
         <p:spPr>
           <a:xfrm>
-            <a:off x="5987876" y="4626864"/>
-            <a:ext cx="2788920" cy="347472"/>
-          </a:xfrm>
-          <a:prstGeom prst="rect">
-            <a:avLst/>
-          </a:prstGeom>
-          <a:noFill/>
-          <a:ln/>
-        </p:spPr>
-        <p:txBody>
-          <a:bodyPr wrap="square" rtlCol="0" anchor="ctr"/>
-          <a:lstStyle/>
-          <a:p>
-            <a:pPr marL="0" indent="0">
-              <a:buNone/>
-            </a:pPr>
-            <a:r>
-              <a:rPr lang="en-US" sz="900" b="1" dirty="0">
-                <a:solidFill>
-                  <a:srgbClr val="0D9488"/>
-                </a:solidFill>
-                <a:latin typeface="Calibri" pitchFamily="34" charset="0"/>
-                <a:ea typeface="Calibri" pitchFamily="34" charset="-122"/>
-                <a:cs typeface="Calibri" pitchFamily="34" charset="-120"/>
-              </a:rPr>
-              <a:t>• </a:t>
-            </a:r>
-            <a:r>
-              <a:rPr lang="en-US" sz="900" dirty="0">
-                <a:solidFill>
-                  <a:srgbClr val="334155"/>
-                </a:solidFill>
-                <a:latin typeface="Calibri" pitchFamily="34" charset="0"/>
-                <a:ea typeface="Calibri" pitchFamily="34" charset="-122"/>
-                <a:cs typeface="Calibri" pitchFamily="34" charset="-120"/>
-              </a:rPr>
-              <a:t>Net new ARR +103% Jan→Jun ($1.31M → $2.655M); H2 supported by 3.3x pipeline coverage ($27.1M) and improving CS expansion velocity</a:t>
-            </a:r>
-            <a:endParaRPr lang="en-US" sz="900" dirty="0"/>
+            <a:off x="5989320" y="4405226"/>
+            <a:ext cx="2788920" cy="621792"/>
+          </a:xfrm>
+          <a:prstGeom prst="rect">
+            <a:avLst/>
+          </a:prstGeom>
+          <a:noFill/>
+          <a:ln/>
+        </p:spPr>
+        <p:txBody>
+          <a:bodyPr wrap="square" rtlCol="0" anchor="ctr">
+            <a:noAutofit/>
+          </a:bodyPr>
+          <a:lstStyle/>
+          <a:p>
+            <a:pPr marL="0" indent="0" algn="l"/>
+            <a:r>
+              <a:rPr lang="en-US" sz="950" b="0" dirty="0">
+                <a:solidFill>
+                  <a:srgbClr val="000000"/>
+                </a:solidFill>
+              </a:rPr>
+              <a:t>• Net new ARR +103% Jan→Jun ($1.31M → $2.655M); H2 supported by 3.3x pipeline coverage ($27.1M) and improving CS expansion velocity</a:t>
+            </a:r>
           </a:p>
         </p:txBody>
       </p:sp>
@@ -24085,7 +24717,7 @@
                 <a:ea typeface="Calibri" pitchFamily="34" charset="-122"/>
                 <a:cs typeface="Calibri" pitchFamily="34" charset="-120"/>
               </a:rPr>
-              <a:t>Revenue (May)</a:t>
+              <a:t>Revenue (Jun)</a:t>
             </a:r>
             <a:endParaRPr lang="en-US" sz="750" dirty="0"/>
           </a:p>
@@ -24305,7 +24937,7 @@
                 <a:ea typeface="Calibri" pitchFamily="34" charset="-122"/>
                 <a:cs typeface="Calibri" pitchFamily="34" charset="-120"/>
               </a:rPr>
-              <a:t>$34.3M</a:t>
+              <a:t>$41.7M</a:t>
             </a:r>
             <a:endParaRPr lang="en-US" sz="1700" dirty="0"/>
           </a:p>
@@ -24447,7 +25079,7 @@
                 <a:ea typeface="Calibri" pitchFamily="34" charset="-122"/>
                 <a:cs typeface="Calibri" pitchFamily="34" charset="-120"/>
               </a:rPr>
-              <a:t>Gross Margin</a:t>
+              <a:t>Gross Margin (Jun)</a:t>
             </a:r>
             <a:endParaRPr lang="en-US" sz="750" dirty="0"/>
           </a:p>
@@ -24486,7 +25118,7 @@
                 <a:ea typeface="Calibri" pitchFamily="34" charset="-122"/>
                 <a:cs typeface="Calibri" pitchFamily="34" charset="-120"/>
               </a:rPr>
-              <a:t>77.0%</a:t>
+              <a:t>79.2%</a:t>
             </a:r>
             <a:endParaRPr lang="en-US" sz="1700" dirty="0"/>
           </a:p>
@@ -24525,7 +25157,7 @@
                 <a:ea typeface="Calibri" pitchFamily="34" charset="-122"/>
                 <a:cs typeface="Calibri" pitchFamily="34" charset="-120"/>
               </a:rPr>
-              <a:t>On budget</a:t>
+              <a:t>+220bps vs bud</a:t>
             </a:r>
             <a:endParaRPr lang="en-US" sz="750" dirty="0"/>
           </a:p>
@@ -24628,7 +25260,7 @@
                 <a:ea typeface="Calibri" pitchFamily="34" charset="-122"/>
                 <a:cs typeface="Calibri" pitchFamily="34" charset="-120"/>
               </a:rPr>
-              <a:t>EBITDA (May)</a:t>
+              <a:t>EBITDA (Jun)</a:t>
             </a:r>
             <a:endParaRPr lang="en-US" sz="750" dirty="0"/>
           </a:p>
@@ -24667,7 +25299,7 @@
                 <a:ea typeface="Calibri" pitchFamily="34" charset="-122"/>
                 <a:cs typeface="Calibri" pitchFamily="34" charset="-120"/>
               </a:rPr>
-              <a:t>-$1.30M</a:t>
+              <a:t>($1.30M)</a:t>
             </a:r>
             <a:endParaRPr lang="en-US" sz="1700" dirty="0"/>
           </a:p>
@@ -24700,13 +25332,21 @@
             <a:r>
               <a:rPr lang="en-US" sz="750" dirty="0">
                 <a:solidFill>
-                  <a:srgbClr val="15803D"/>
-                </a:solidFill>
-                <a:latin typeface="Calibri" pitchFamily="34" charset="0"/>
-                <a:ea typeface="Calibri" pitchFamily="34" charset="-122"/>
-                <a:cs typeface="Calibri" pitchFamily="34" charset="-120"/>
-              </a:rPr>
-              <a:t>+$0.06M vs bud</a:t>
+                  <a:srgbClr val="C00000"/>
+                </a:solidFill>
+                <a:latin typeface="Calibri" pitchFamily="34" charset="0"/>
+                <a:ea typeface="Calibri" pitchFamily="34" charset="-122"/>
+                <a:cs typeface="Calibri" pitchFamily="34" charset="-120"/>
+              </a:rPr>
+              <a:t>($1.95M) </a:t>
+            </a:r>
+            <a:r>
+              <a:rPr lang="en-US" sz="750" dirty="0">
+                <a:latin typeface="Calibri" pitchFamily="34" charset="0"/>
+                <a:ea typeface="Calibri" pitchFamily="34" charset="-122"/>
+                <a:cs typeface="Calibri" pitchFamily="34" charset="-120"/>
+              </a:rPr>
+              <a:t>vs bud</a:t>
             </a:r>
             <a:endParaRPr lang="en-US" sz="750" dirty="0"/>
           </a:p>
@@ -24761,7 +25401,7 @@
                 <a:ea typeface="Calibri" pitchFamily="34" charset="-122"/>
                 <a:cs typeface="Calibri" pitchFamily="34" charset="-120"/>
               </a:rPr>
-              <a:t>P&amp;L VARIANCE — MAY 2026</a:t>
+              <a:t>P&amp;L VARIANCE — JUNE 2026</a:t>
             </a:r>
             <a:endParaRPr lang="en-US" sz="750" dirty="0"/>
           </a:p>
@@ -25329,7 +25969,7 @@
                 <a:ea typeface="Calibri" pitchFamily="34" charset="-122"/>
                 <a:cs typeface="Calibri" pitchFamily="34" charset="-120"/>
               </a:rPr>
-              <a:t>$7.17M</a:t>
+              <a:t>$7.72M</a:t>
             </a:r>
             <a:endParaRPr lang="en-US" sz="800" dirty="0"/>
           </a:p>
@@ -25400,7 +26040,7 @@
                 <a:ea typeface="Calibri" pitchFamily="34" charset="-122"/>
                 <a:cs typeface="Calibri" pitchFamily="34" charset="-120"/>
               </a:rPr>
-              <a:t>+$0.06M</a:t>
+              <a:t>-$0.31M</a:t>
             </a:r>
             <a:endParaRPr lang="en-US" sz="800" dirty="0"/>
           </a:p>
@@ -25471,7 +26111,7 @@
                 <a:ea typeface="Calibri" pitchFamily="34" charset="-122"/>
                 <a:cs typeface="Calibri" pitchFamily="34" charset="-120"/>
               </a:rPr>
-              <a:t>+0.1%</a:t>
+              <a:t>-4.0%</a:t>
             </a:r>
             <a:endParaRPr lang="en-US" sz="800" dirty="0"/>
           </a:p>
@@ -25684,7 +26324,7 @@
                 <a:ea typeface="Calibri" pitchFamily="34" charset="-122"/>
                 <a:cs typeface="Calibri" pitchFamily="34" charset="-120"/>
               </a:rPr>
-              <a:t>$5.66M</a:t>
+              <a:t>$5.40M</a:t>
             </a:r>
             <a:endParaRPr lang="en-US" sz="800" dirty="0"/>
           </a:p>
@@ -25755,7 +26395,7 @@
                 <a:ea typeface="Calibri" pitchFamily="34" charset="-122"/>
                 <a:cs typeface="Calibri" pitchFamily="34" charset="-120"/>
               </a:rPr>
-              <a:t>+$0.06M</a:t>
+              <a:t>+$0.47M</a:t>
             </a:r>
             <a:endParaRPr lang="en-US" sz="800" dirty="0"/>
           </a:p>
@@ -25826,7 +26466,7 @@
                 <a:ea typeface="Calibri" pitchFamily="34" charset="-122"/>
                 <a:cs typeface="Calibri" pitchFamily="34" charset="-120"/>
               </a:rPr>
-              <a:t>+0.2%</a:t>
+              <a:t>+8.6%</a:t>
             </a:r>
             <a:endParaRPr lang="en-US" sz="800" dirty="0"/>
           </a:p>
@@ -26039,7 +26679,7 @@
                 <a:ea typeface="Calibri" pitchFamily="34" charset="-122"/>
                 <a:cs typeface="Calibri" pitchFamily="34" charset="-120"/>
               </a:rPr>
-              <a:t>77.0%</a:t>
+              <a:t>70.0%</a:t>
             </a:r>
             <a:endParaRPr lang="en-US" sz="800" dirty="0"/>
           </a:p>
@@ -26110,7 +26750,7 @@
                 <a:ea typeface="Calibri" pitchFamily="34" charset="-122"/>
                 <a:cs typeface="Calibri" pitchFamily="34" charset="-120"/>
               </a:rPr>
-              <a:t>—</a:t>
+              <a:t>+920bps</a:t>
             </a:r>
             <a:endParaRPr lang="en-US" sz="800" dirty="0"/>
           </a:p>
@@ -26181,7 +26821,7 @@
                 <a:ea typeface="Calibri" pitchFamily="34" charset="-122"/>
                 <a:cs typeface="Calibri" pitchFamily="34" charset="-120"/>
               </a:rPr>
-              <a:t>—</a:t>
+              <a:t>+9.2pp</a:t>
             </a:r>
             <a:endParaRPr lang="en-US" sz="800" dirty="0"/>
           </a:p>
@@ -26394,7 +27034,7 @@
                 <a:ea typeface="Calibri" pitchFamily="34" charset="-122"/>
                 <a:cs typeface="Calibri" pitchFamily="34" charset="-120"/>
               </a:rPr>
-              <a:t>$3.15M</a:t>
+              <a:t>$2.65M</a:t>
             </a:r>
             <a:endParaRPr lang="en-US" sz="800" dirty="0"/>
           </a:p>
@@ -26465,7 +27105,7 @@
                 <a:ea typeface="Calibri" pitchFamily="34" charset="-122"/>
                 <a:cs typeface="Calibri" pitchFamily="34" charset="-120"/>
               </a:rPr>
-              <a:t>$0.0M</a:t>
+              <a:t>+$0.50M</a:t>
             </a:r>
             <a:endParaRPr lang="en-US" sz="800" dirty="0"/>
           </a:p>
@@ -26536,7 +27176,7 @@
                 <a:ea typeface="Calibri" pitchFamily="34" charset="-122"/>
                 <a:cs typeface="Calibri" pitchFamily="34" charset="-120"/>
               </a:rPr>
-              <a:t>0%</a:t>
+              <a:t>+18.9%</a:t>
             </a:r>
             <a:endParaRPr lang="en-US" sz="800" dirty="0"/>
           </a:p>
@@ -26678,7 +27318,7 @@
                 <a:ea typeface="Calibri" pitchFamily="34" charset="-122"/>
                 <a:cs typeface="Calibri" pitchFamily="34" charset="-120"/>
               </a:rPr>
-              <a:t>-$1.30M</a:t>
+              <a:t>($1.30M)</a:t>
             </a:r>
             <a:endParaRPr lang="en-US" sz="800" dirty="0"/>
           </a:p>
@@ -26749,7 +27389,7 @@
                 <a:ea typeface="Calibri" pitchFamily="34" charset="-122"/>
                 <a:cs typeface="Calibri" pitchFamily="34" charset="-120"/>
               </a:rPr>
-              <a:t>-$1.30M</a:t>
+              <a:t>$0.65M</a:t>
             </a:r>
             <a:endParaRPr lang="en-US" sz="800" dirty="0"/>
           </a:p>
@@ -26814,15 +27454,19 @@
             <a:r>
               <a:rPr lang="en-US" sz="800" dirty="0">
                 <a:solidFill>
-                  <a:srgbClr val="15803D"/>
-                </a:solidFill>
-                <a:latin typeface="Calibri" pitchFamily="34" charset="0"/>
-                <a:ea typeface="Calibri" pitchFamily="34" charset="-122"/>
-                <a:cs typeface="Calibri" pitchFamily="34" charset="-120"/>
-              </a:rPr>
-              <a:t>+$0.06M</a:t>
-            </a:r>
-            <a:endParaRPr lang="en-US" sz="800" dirty="0"/>
+                  <a:srgbClr val="C00000"/>
+                </a:solidFill>
+                <a:latin typeface="Calibri" pitchFamily="34" charset="0"/>
+                <a:ea typeface="Calibri" pitchFamily="34" charset="-122"/>
+                <a:cs typeface="Calibri" pitchFamily="34" charset="-120"/>
+              </a:rPr>
+              <a:t>($1.95M)</a:t>
+            </a:r>
+            <a:endParaRPr lang="en-US" sz="800" dirty="0">
+              <a:solidFill>
+                <a:srgbClr val="C00000"/>
+              </a:solidFill>
+            </a:endParaRPr>
           </a:p>
         </p:txBody>
       </p:sp>
@@ -26885,15 +27529,19 @@
             <a:r>
               <a:rPr lang="en-US" sz="800" dirty="0">
                 <a:solidFill>
-                  <a:srgbClr val="15803D"/>
-                </a:solidFill>
-                <a:latin typeface="Calibri" pitchFamily="34" charset="0"/>
-                <a:ea typeface="Calibri" pitchFamily="34" charset="-122"/>
-                <a:cs typeface="Calibri" pitchFamily="34" charset="-120"/>
-              </a:rPr>
-              <a:t>+3%</a:t>
-            </a:r>
-            <a:endParaRPr lang="en-US" sz="800" dirty="0"/>
+                  <a:srgbClr val="C00000"/>
+                </a:solidFill>
+                <a:latin typeface="Calibri" pitchFamily="34" charset="0"/>
+                <a:ea typeface="Calibri" pitchFamily="34" charset="-122"/>
+                <a:cs typeface="Calibri" pitchFamily="34" charset="-120"/>
+              </a:rPr>
+              <a:t>(300%)</a:t>
+            </a:r>
+            <a:endParaRPr lang="en-US" sz="800" dirty="0">
+              <a:solidFill>
+                <a:srgbClr val="C00000"/>
+              </a:solidFill>
+            </a:endParaRPr>
           </a:p>
         </p:txBody>
       </p:sp>
@@ -27578,33 +28226,29 @@
         <p:spPr>
           <a:xfrm>
             <a:off x="6355080" y="2029968"/>
-            <a:ext cx="2423160" cy="219456"/>
-          </a:xfrm>
-          <a:prstGeom prst="rect">
-            <a:avLst/>
-          </a:prstGeom>
-          <a:noFill/>
-          <a:ln/>
-        </p:spPr>
-        <p:txBody>
-          <a:bodyPr wrap="square" rtlCol="0" anchor="ctr"/>
-          <a:lstStyle/>
-          <a:p>
-            <a:pPr marL="0" indent="0">
-              <a:buNone/>
-            </a:pPr>
+            <a:ext cx="2423160" cy="237744"/>
+          </a:xfrm>
+          <a:prstGeom prst="rect">
+            <a:avLst/>
+          </a:prstGeom>
+          <a:noFill/>
+          <a:ln/>
+        </p:spPr>
+        <p:txBody>
+          <a:bodyPr wrap="square" rtlCol="0" anchor="ctr">
+            <a:noAutofit/>
+          </a:bodyPr>
+          <a:lstStyle/>
+          <a:p>
+            <a:pPr algn="l"/>
             <a:r>
               <a:rPr lang="en-US" sz="1000" b="1" dirty="0">
                 <a:solidFill>
                   <a:srgbClr val="1A2E44"/>
                 </a:solidFill>
-                <a:latin typeface="Calibri" pitchFamily="34" charset="0"/>
-                <a:ea typeface="Calibri" pitchFamily="34" charset="-122"/>
-                <a:cs typeface="Calibri" pitchFamily="34" charset="-120"/>
               </a:rPr>
               <a:t>Key Takeaways</a:t>
             </a:r>
-            <a:endParaRPr lang="en-US" sz="1000" dirty="0"/>
           </a:p>
         </p:txBody>
       </p:sp>
@@ -27646,45 +28290,30 @@
         </p:nvSpPr>
         <p:spPr>
           <a:xfrm>
-            <a:off x="6355080" y="2340864"/>
-            <a:ext cx="2423160" cy="347472"/>
-          </a:xfrm>
-          <a:prstGeom prst="rect">
-            <a:avLst/>
-          </a:prstGeom>
-          <a:noFill/>
-          <a:ln/>
-        </p:spPr>
-        <p:txBody>
-          <a:bodyPr wrap="square" rtlCol="0" anchor="ctr"/>
-          <a:lstStyle/>
-          <a:p>
-            <a:pPr marL="0" indent="0">
-              <a:buNone/>
-            </a:pPr>
-            <a:r>
-              <a:rPr lang="en-US" sz="900" b="1" dirty="0">
-                <a:solidFill>
-                  <a:srgbClr val="0D9488"/>
-                </a:solidFill>
-                <a:latin typeface="Calibri" pitchFamily="34" charset="0"/>
-                <a:ea typeface="Calibri" pitchFamily="34" charset="-122"/>
-                <a:cs typeface="Calibri" pitchFamily="34" charset="-120"/>
-              </a:rPr>
-              <a:t>• </a:t>
-            </a:r>
-            <a:r>
-              <a:rPr lang="en-US" sz="900" dirty="0">
-                <a:solidFill>
-                  <a:srgbClr val="334155"/>
-                </a:solidFill>
-                <a:latin typeface="Calibri" pitchFamily="34" charset="0"/>
-                <a:ea typeface="Calibri" pitchFamily="34" charset="-122"/>
-                <a:cs typeface="Calibri" pitchFamily="34" charset="-120"/>
-              </a:rPr>
-              <a:t>Revenue outperformed budget all 6 periods — subscription growth from ARR momentum with COGS discipline</a:t>
-            </a:r>
-            <a:endParaRPr lang="en-US" sz="900" dirty="0"/>
+            <a:off x="6355080" y="2304288"/>
+            <a:ext cx="2423160" cy="338328"/>
+          </a:xfrm>
+          <a:prstGeom prst="rect">
+            <a:avLst/>
+          </a:prstGeom>
+          <a:noFill/>
+          <a:ln/>
+        </p:spPr>
+        <p:txBody>
+          <a:bodyPr wrap="square" rtlCol="0" anchor="ctr">
+            <a:noAutofit/>
+          </a:bodyPr>
+          <a:lstStyle/>
+          <a:p>
+            <a:pPr marL="0" indent="0" algn="l"/>
+            <a:r>
+              <a:rPr lang="en-US" sz="950" b="0" dirty="0">
+                <a:solidFill>
+                  <a:srgbClr val="000000"/>
+                </a:solidFill>
+              </a:rPr>
+              <a:t>• Revenue $7.41M vs $7.72M budget (-$0.31M); YTD $41.7M +$0.3M above plan</a:t>
+            </a:r>
           </a:p>
         </p:txBody>
       </p:sp>
@@ -27696,45 +28325,30 @@
         </p:nvSpPr>
         <p:spPr>
           <a:xfrm>
-            <a:off x="6359893" y="2772560"/>
-            <a:ext cx="2423160" cy="347472"/>
-          </a:xfrm>
-          <a:prstGeom prst="rect">
-            <a:avLst/>
-          </a:prstGeom>
-          <a:noFill/>
-          <a:ln/>
-        </p:spPr>
-        <p:txBody>
-          <a:bodyPr wrap="square" rtlCol="0" anchor="ctr"/>
-          <a:lstStyle/>
-          <a:p>
-            <a:pPr marL="0" indent="0">
-              <a:buNone/>
-            </a:pPr>
-            <a:r>
-              <a:rPr lang="en-US" sz="900" b="1" dirty="0">
-                <a:solidFill>
-                  <a:srgbClr val="0D9488"/>
-                </a:solidFill>
-                <a:latin typeface="Calibri" pitchFamily="34" charset="0"/>
-                <a:ea typeface="Calibri" pitchFamily="34" charset="-122"/>
-                <a:cs typeface="Calibri" pitchFamily="34" charset="-120"/>
-              </a:rPr>
-              <a:t>• </a:t>
-            </a:r>
-            <a:r>
-              <a:rPr lang="en-US" sz="900" dirty="0">
-                <a:solidFill>
-                  <a:srgbClr val="334155"/>
-                </a:solidFill>
-                <a:latin typeface="Calibri" pitchFamily="34" charset="0"/>
-                <a:ea typeface="Calibri" pitchFamily="34" charset="-122"/>
-                <a:cs typeface="Calibri" pitchFamily="34" charset="-120"/>
-              </a:rPr>
-              <a:t>Gross margin 79.2% — +220bps above 77.0% budget from infrastructure optimization — COGS scaling proportionally with subscription growth</a:t>
-            </a:r>
-            <a:endParaRPr lang="en-US" sz="900" dirty="0"/>
+            <a:off x="6359893" y="2679192"/>
+            <a:ext cx="2423160" cy="480059"/>
+          </a:xfrm>
+          <a:prstGeom prst="rect">
+            <a:avLst/>
+          </a:prstGeom>
+          <a:noFill/>
+          <a:ln/>
+        </p:spPr>
+        <p:txBody>
+          <a:bodyPr wrap="square" rtlCol="0" anchor="ctr">
+            <a:noAutofit/>
+          </a:bodyPr>
+          <a:lstStyle/>
+          <a:p>
+            <a:pPr marL="0" indent="0" algn="l"/>
+            <a:r>
+              <a:rPr lang="en-US" sz="950" b="0" dirty="0">
+                <a:solidFill>
+                  <a:srgbClr val="000000"/>
+                </a:solidFill>
+              </a:rPr>
+              <a:t>• Gross margin 79.2% expanded +920bps above 70.0% budget from infrastructure optimization</a:t>
+            </a:r>
           </a:p>
         </p:txBody>
       </p:sp>
@@ -27746,45 +28360,30 @@
         </p:nvSpPr>
         <p:spPr>
           <a:xfrm>
-            <a:off x="6355080" y="3214837"/>
-            <a:ext cx="2423160" cy="347472"/>
-          </a:xfrm>
-          <a:prstGeom prst="rect">
-            <a:avLst/>
-          </a:prstGeom>
-          <a:noFill/>
-          <a:ln/>
-        </p:spPr>
-        <p:txBody>
-          <a:bodyPr wrap="square" rtlCol="0" anchor="ctr"/>
-          <a:lstStyle/>
-          <a:p>
-            <a:pPr marL="0" indent="0">
-              <a:buNone/>
-            </a:pPr>
-            <a:r>
-              <a:rPr lang="en-US" sz="900" b="1" dirty="0">
-                <a:solidFill>
-                  <a:srgbClr val="0D9488"/>
-                </a:solidFill>
-                <a:latin typeface="Calibri" pitchFamily="34" charset="0"/>
-                <a:ea typeface="Calibri" pitchFamily="34" charset="-122"/>
-                <a:cs typeface="Calibri" pitchFamily="34" charset="-120"/>
-              </a:rPr>
-              <a:t>• </a:t>
-            </a:r>
-            <a:r>
-              <a:rPr lang="en-US" sz="900" dirty="0">
-                <a:solidFill>
-                  <a:srgbClr val="334155"/>
-                </a:solidFill>
-                <a:latin typeface="Calibri" pitchFamily="34" charset="0"/>
-                <a:ea typeface="Calibri" pitchFamily="34" charset="-122"/>
-                <a:cs typeface="Calibri" pitchFamily="34" charset="-120"/>
-              </a:rPr>
-              <a:t>EBITDA -$1.30M vs $0.65M budget — Q2 variable comp timing (-$0.9M) reverses in Q3 — revenue absorbing GTM inefficiency</a:t>
-            </a:r>
-            <a:endParaRPr lang="en-US" sz="900" dirty="0"/>
+            <a:off x="6355080" y="3195827"/>
+            <a:ext cx="2423160" cy="480059"/>
+          </a:xfrm>
+          <a:prstGeom prst="rect">
+            <a:avLst/>
+          </a:prstGeom>
+          <a:noFill/>
+          <a:ln/>
+        </p:spPr>
+        <p:txBody>
+          <a:bodyPr wrap="square" rtlCol="0" anchor="ctr">
+            <a:noAutofit/>
+          </a:bodyPr>
+          <a:lstStyle/>
+          <a:p>
+            <a:pPr marL="0" indent="0" algn="l"/>
+            <a:r>
+              <a:rPr lang="en-US" sz="950" b="0" dirty="0">
+                <a:solidFill>
+                  <a:srgbClr val="000000"/>
+                </a:solidFill>
+              </a:rPr>
+              <a:t>• EBITDA -$1.30M vs $0.65M budget (-$1.95M); Q2 variable comp timing (-$0.9M) reverses in Q3</a:t>
+            </a:r>
           </a:p>
         </p:txBody>
       </p:sp>
@@ -27796,45 +28395,30 @@
         </p:nvSpPr>
         <p:spPr>
           <a:xfrm>
-            <a:off x="6355080" y="3680460"/>
-            <a:ext cx="2423160" cy="347472"/>
-          </a:xfrm>
-          <a:prstGeom prst="rect">
-            <a:avLst/>
-          </a:prstGeom>
-          <a:noFill/>
-          <a:ln/>
-        </p:spPr>
-        <p:txBody>
-          <a:bodyPr wrap="square" rtlCol="0" anchor="ctr"/>
-          <a:lstStyle/>
-          <a:p>
-            <a:pPr marL="0" indent="0">
-              <a:buNone/>
-            </a:pPr>
-            <a:r>
-              <a:rPr lang="en-US" sz="900" b="1" dirty="0">
-                <a:solidFill>
-                  <a:srgbClr val="0D9488"/>
-                </a:solidFill>
-                <a:latin typeface="Calibri" pitchFamily="34" charset="0"/>
-                <a:ea typeface="Calibri" pitchFamily="34" charset="-122"/>
-                <a:cs typeface="Calibri" pitchFamily="34" charset="-120"/>
-              </a:rPr>
-              <a:t>• </a:t>
-            </a:r>
-            <a:r>
-              <a:rPr lang="en-US" sz="900" dirty="0">
-                <a:solidFill>
-                  <a:srgbClr val="334155"/>
-                </a:solidFill>
-                <a:latin typeface="Calibri" pitchFamily="34" charset="0"/>
-                <a:ea typeface="Calibri" pitchFamily="34" charset="-122"/>
-                <a:cs typeface="Calibri" pitchFamily="34" charset="-120"/>
-              </a:rPr>
-              <a:t>S&amp;M $3.15M favorable vs $3.65M budget; June pipeline $5.9M at 2.3x efficiency — marginally better in % terms but Paid channel ROI remains structurally weak</a:t>
-            </a:r>
-            <a:endParaRPr lang="en-US" sz="900" dirty="0"/>
+            <a:off x="6355080" y="3712462"/>
+            <a:ext cx="2423160" cy="480059"/>
+          </a:xfrm>
+          <a:prstGeom prst="rect">
+            <a:avLst/>
+          </a:prstGeom>
+          <a:noFill/>
+          <a:ln/>
+        </p:spPr>
+        <p:txBody>
+          <a:bodyPr wrap="square" rtlCol="0" anchor="ctr">
+            <a:noAutofit/>
+          </a:bodyPr>
+          <a:lstStyle/>
+          <a:p>
+            <a:pPr marL="0" indent="0" algn="l"/>
+            <a:r>
+              <a:rPr lang="en-US" sz="950" b="0" dirty="0">
+                <a:solidFill>
+                  <a:srgbClr val="000000"/>
+                </a:solidFill>
+              </a:rPr>
+              <a:t>• S&amp;M $3.15M favorable vs $2.65M budget; June pipeline $5.9M at 2.3x blended efficiency</a:t>
+            </a:r>
           </a:p>
         </p:txBody>
       </p:sp>
@@ -27846,45 +28430,30 @@
         </p:nvSpPr>
         <p:spPr>
           <a:xfrm>
-            <a:off x="6359893" y="4114800"/>
-            <a:ext cx="2423160" cy="347472"/>
-          </a:xfrm>
-          <a:prstGeom prst="rect">
-            <a:avLst/>
-          </a:prstGeom>
-          <a:noFill/>
-          <a:ln/>
-        </p:spPr>
-        <p:txBody>
-          <a:bodyPr wrap="square" rtlCol="0" anchor="ctr"/>
-          <a:lstStyle/>
-          <a:p>
-            <a:pPr marL="0" indent="0">
-              <a:buNone/>
-            </a:pPr>
-            <a:r>
-              <a:rPr lang="en-US" sz="900" b="1" dirty="0">
-                <a:solidFill>
-                  <a:srgbClr val="0D9488"/>
-                </a:solidFill>
-                <a:latin typeface="Calibri" pitchFamily="34" charset="0"/>
-                <a:ea typeface="Calibri" pitchFamily="34" charset="-122"/>
-                <a:cs typeface="Calibri" pitchFamily="34" charset="-120"/>
-              </a:rPr>
-              <a:t>• </a:t>
-            </a:r>
-            <a:r>
-              <a:rPr lang="en-US" sz="900" dirty="0">
-                <a:solidFill>
-                  <a:srgbClr val="334155"/>
-                </a:solidFill>
-                <a:latin typeface="Calibri" pitchFamily="34" charset="0"/>
-                <a:ea typeface="Calibri" pitchFamily="34" charset="-122"/>
-                <a:cs typeface="Calibri" pitchFamily="34" charset="-120"/>
-              </a:rPr>
-              <a:t>Operating leverage materializing: Revenue +9% YoY vs headcount +4.4% — margin improvement path visible</a:t>
-            </a:r>
-            <a:endParaRPr lang="en-US" sz="900" dirty="0"/>
+            <a:off x="6359893" y="4229097"/>
+            <a:ext cx="2423160" cy="480059"/>
+          </a:xfrm>
+          <a:prstGeom prst="rect">
+            <a:avLst/>
+          </a:prstGeom>
+          <a:noFill/>
+          <a:ln/>
+        </p:spPr>
+        <p:txBody>
+          <a:bodyPr wrap="square" rtlCol="0" anchor="ctr">
+            <a:noAutofit/>
+          </a:bodyPr>
+          <a:lstStyle/>
+          <a:p>
+            <a:pPr marL="0" indent="0" algn="l"/>
+            <a:r>
+              <a:rPr lang="en-US" sz="950" b="0" dirty="0">
+                <a:solidFill>
+                  <a:srgbClr val="000000"/>
+                </a:solidFill>
+              </a:rPr>
+              <a:t>• Operating leverage: Revenue +12.6% YTD vs HC +9.1% — margin improvement trajectory visible</a:t>
+            </a:r>
           </a:p>
         </p:txBody>
       </p:sp>
@@ -28275,7 +28844,7 @@
                 <a:ea typeface="Calibri" pitchFamily="34" charset="-122"/>
                 <a:cs typeface="Calibri" pitchFamily="34" charset="-120"/>
               </a:rPr>
-              <a:t>Ending Cash (May)</a:t>
+              <a:t>Ending Cash (Jun)</a:t>
             </a:r>
             <a:endParaRPr lang="en-US" sz="750" dirty="0"/>
           </a:p>
@@ -28314,7 +28883,7 @@
                 <a:ea typeface="Calibri" pitchFamily="34" charset="-122"/>
                 <a:cs typeface="Calibri" pitchFamily="34" charset="-120"/>
               </a:rPr>
-              <a:t>$66.0M</a:t>
+              <a:t>$70.61M</a:t>
             </a:r>
             <a:endParaRPr lang="en-US" sz="1700" dirty="0"/>
           </a:p>
@@ -28353,7 +28922,7 @@
                 <a:ea typeface="Calibri" pitchFamily="34" charset="-122"/>
                 <a:cs typeface="Calibri" pitchFamily="34" charset="-120"/>
               </a:rPr>
-              <a:t>+$37.4M vs budget</a:t>
+              <a:t>+$22.25M vs budget</a:t>
             </a:r>
             <a:endParaRPr lang="en-US" sz="750" dirty="0"/>
           </a:p>
@@ -28495,7 +29064,7 @@
                 <a:ea typeface="Calibri" pitchFamily="34" charset="-122"/>
                 <a:cs typeface="Calibri" pitchFamily="34" charset="-120"/>
               </a:rPr>
-              <a:t>$52.0M</a:t>
+              <a:t>$63.2M</a:t>
             </a:r>
             <a:endParaRPr lang="en-US" sz="1700" dirty="0"/>
           </a:p>
@@ -28534,7 +29103,7 @@
                 <a:ea typeface="Calibri" pitchFamily="34" charset="-122"/>
                 <a:cs typeface="Calibri" pitchFamily="34" charset="-120"/>
               </a:rPr>
-              <a:t>Annual billing timing</a:t>
+              <a:t>Annual billing + Jun close</a:t>
             </a:r>
             <a:endParaRPr lang="en-US" sz="750" dirty="0"/>
           </a:p>
@@ -28676,7 +29245,7 @@
                 <a:ea typeface="Calibri" pitchFamily="34" charset="-122"/>
                 <a:cs typeface="Calibri" pitchFamily="34" charset="-120"/>
               </a:rPr>
-              <a:t>$56.0M</a:t>
+              <a:t>$60.6M</a:t>
             </a:r>
             <a:endParaRPr lang="en-US" sz="1700" dirty="0"/>
           </a:p>
@@ -28951,7 +29520,7 @@
                 <a:ea typeface="Calibri" pitchFamily="34" charset="-122"/>
                 <a:cs typeface="Calibri" pitchFamily="34" charset="-120"/>
               </a:rPr>
-              <a:t>MAY 2026 CASH BRIDGE</a:t>
+              <a:t>JUNE 2026 CASH BRIDGE</a:t>
             </a:r>
             <a:endParaRPr lang="en-US" sz="800" dirty="0"/>
           </a:p>
@@ -29093,7 +29662,7 @@
                 <a:ea typeface="Calibri" pitchFamily="34" charset="-122"/>
                 <a:cs typeface="Calibri" pitchFamily="34" charset="-120"/>
               </a:rPr>
-              <a:t>+$70.61M</a:t>
+              <a:t>+$66.04M</a:t>
             </a:r>
             <a:endParaRPr lang="en-US" sz="850" dirty="0"/>
           </a:p>
@@ -29377,7 +29946,7 @@
                 <a:ea typeface="Calibri" pitchFamily="34" charset="-122"/>
                 <a:cs typeface="Calibri" pitchFamily="34" charset="-120"/>
               </a:rPr>
-              <a:t>-$3.8M</a:t>
+              <a:t>($3.8M)</a:t>
             </a:r>
             <a:endParaRPr lang="en-US" sz="850" dirty="0"/>
           </a:p>
@@ -29519,7 +30088,7 @@
                 <a:ea typeface="Calibri" pitchFamily="34" charset="-122"/>
                 <a:cs typeface="Calibri" pitchFamily="34" charset="-120"/>
               </a:rPr>
-              <a:t>-$1.4M</a:t>
+              <a:t>($1.4M)</a:t>
             </a:r>
             <a:endParaRPr lang="en-US" sz="850" dirty="0"/>
           </a:p>
@@ -29661,7 +30230,7 @@
                 <a:ea typeface="Calibri" pitchFamily="34" charset="-122"/>
                 <a:cs typeface="Calibri" pitchFamily="34" charset="-120"/>
               </a:rPr>
-              <a:t>-$0.3M</a:t>
+              <a:t>($0.3M)</a:t>
             </a:r>
             <a:endParaRPr lang="en-US" sz="850" dirty="0"/>
           </a:p>
@@ -29803,7 +30372,7 @@
                 <a:ea typeface="Calibri" pitchFamily="34" charset="-122"/>
                 <a:cs typeface="Calibri" pitchFamily="34" charset="-120"/>
               </a:rPr>
-              <a:t>-$0.2M</a:t>
+              <a:t>($0.2M)</a:t>
             </a:r>
             <a:endParaRPr lang="en-US" sz="850" dirty="0"/>
           </a:p>
@@ -29959,8 +30528,8 @@
         </p:nvSpPr>
         <p:spPr>
           <a:xfrm>
-            <a:off x="7132320" y="1938528"/>
-            <a:ext cx="1920240" cy="2240280"/>
+            <a:off x="7132320" y="1938527"/>
+            <a:ext cx="1920240" cy="3017521"/>
           </a:xfrm>
           <a:prstGeom prst="rect">
             <a:avLst/>
@@ -29992,33 +30561,29 @@
         <p:spPr>
           <a:xfrm>
             <a:off x="7269480" y="2029968"/>
-            <a:ext cx="1554480" cy="219456"/>
-          </a:xfrm>
-          <a:prstGeom prst="rect">
-            <a:avLst/>
-          </a:prstGeom>
-          <a:noFill/>
-          <a:ln/>
-        </p:spPr>
-        <p:txBody>
-          <a:bodyPr wrap="square" rtlCol="0" anchor="ctr"/>
-          <a:lstStyle/>
-          <a:p>
-            <a:pPr marL="0" indent="0">
-              <a:buNone/>
-            </a:pPr>
+            <a:ext cx="1554480" cy="237744"/>
+          </a:xfrm>
+          <a:prstGeom prst="rect">
+            <a:avLst/>
+          </a:prstGeom>
+          <a:noFill/>
+          <a:ln/>
+        </p:spPr>
+        <p:txBody>
+          <a:bodyPr wrap="square" rtlCol="0" anchor="ctr">
+            <a:noAutofit/>
+          </a:bodyPr>
+          <a:lstStyle/>
+          <a:p>
+            <a:pPr algn="l"/>
             <a:r>
               <a:rPr lang="en-US" sz="1000" b="1" dirty="0">
                 <a:solidFill>
                   <a:srgbClr val="1A2E44"/>
                 </a:solidFill>
-                <a:latin typeface="Calibri" pitchFamily="34" charset="0"/>
-                <a:ea typeface="Calibri" pitchFamily="34" charset="-122"/>
-                <a:cs typeface="Calibri" pitchFamily="34" charset="-120"/>
               </a:rPr>
               <a:t>Key Takeaways</a:t>
             </a:r>
-            <a:endParaRPr lang="en-US" sz="1000" dirty="0"/>
           </a:p>
         </p:txBody>
       </p:sp>
@@ -30060,45 +30625,30 @@
         </p:nvSpPr>
         <p:spPr>
           <a:xfrm>
-            <a:off x="7269480" y="2348564"/>
-            <a:ext cx="1783080" cy="347472"/>
-          </a:xfrm>
-          <a:prstGeom prst="rect">
-            <a:avLst/>
-          </a:prstGeom>
-          <a:noFill/>
-          <a:ln/>
-        </p:spPr>
-        <p:txBody>
-          <a:bodyPr wrap="square" rtlCol="0" anchor="ctr"/>
-          <a:lstStyle/>
-          <a:p>
-            <a:pPr marL="0" indent="0">
-              <a:buNone/>
-            </a:pPr>
-            <a:r>
-              <a:rPr lang="en-US" sz="900" b="1" dirty="0">
-                <a:solidFill>
-                  <a:srgbClr val="0D9488"/>
-                </a:solidFill>
-                <a:latin typeface="Calibri" pitchFamily="34" charset="0"/>
-                <a:ea typeface="Calibri" pitchFamily="34" charset="-122"/>
-                <a:cs typeface="Calibri" pitchFamily="34" charset="-120"/>
-              </a:rPr>
-              <a:t>• </a:t>
-            </a:r>
-            <a:r>
-              <a:rPr lang="en-US" sz="900" dirty="0">
-                <a:solidFill>
-                  <a:srgbClr val="334155"/>
-                </a:solidFill>
-                <a:latin typeface="Calibri" pitchFamily="34" charset="0"/>
-                <a:ea typeface="Calibri" pitchFamily="34" charset="-122"/>
-                <a:cs typeface="Calibri" pitchFamily="34" charset="-120"/>
-              </a:rPr>
-              <a:t>$70.61M cash exceeds $48.36M budget — Q1 annual enterprise renewals ($13.6M in March)</a:t>
-            </a:r>
-            <a:endParaRPr lang="en-US" sz="900" dirty="0"/>
+            <a:off x="7269480" y="2304288"/>
+            <a:ext cx="1783080" cy="763524"/>
+          </a:xfrm>
+          <a:prstGeom prst="rect">
+            <a:avLst/>
+          </a:prstGeom>
+          <a:noFill/>
+          <a:ln/>
+        </p:spPr>
+        <p:txBody>
+          <a:bodyPr wrap="square" rtlCol="0" anchor="ctr">
+            <a:noAutofit/>
+          </a:bodyPr>
+          <a:lstStyle/>
+          <a:p>
+            <a:pPr marL="0" indent="0" algn="l"/>
+            <a:r>
+              <a:rPr lang="en-US" sz="950" b="0" dirty="0">
+                <a:solidFill>
+                  <a:srgbClr val="000000"/>
+                </a:solidFill>
+              </a:rPr>
+              <a:t>• $70.61M cash exceeds $48.36M budget +$22.25M — Q1 annual enterprise renewals $13.6M March + June collections $11.18M</a:t>
+            </a:r>
           </a:p>
         </p:txBody>
       </p:sp>
@@ -30110,45 +30660,30 @@
         </p:nvSpPr>
         <p:spPr>
           <a:xfrm>
-            <a:off x="7269480" y="2795176"/>
-            <a:ext cx="1783080" cy="347472"/>
-          </a:xfrm>
-          <a:prstGeom prst="rect">
-            <a:avLst/>
-          </a:prstGeom>
-          <a:noFill/>
-          <a:ln/>
-        </p:spPr>
-        <p:txBody>
-          <a:bodyPr wrap="square" rtlCol="0" anchor="ctr"/>
-          <a:lstStyle/>
-          <a:p>
-            <a:pPr marL="0" indent="0">
-              <a:buNone/>
-            </a:pPr>
-            <a:r>
-              <a:rPr lang="en-US" sz="900" b="1" dirty="0">
-                <a:solidFill>
-                  <a:srgbClr val="0D9488"/>
-                </a:solidFill>
-                <a:latin typeface="Calibri" pitchFamily="34" charset="0"/>
-                <a:ea typeface="Calibri" pitchFamily="34" charset="-122"/>
-                <a:cs typeface="Calibri" pitchFamily="34" charset="-120"/>
-              </a:rPr>
-              <a:t>• </a:t>
-            </a:r>
-            <a:r>
-              <a:rPr lang="en-US" sz="900" dirty="0">
-                <a:solidFill>
-                  <a:srgbClr val="334155"/>
-                </a:solidFill>
-                <a:latin typeface="Calibri" pitchFamily="34" charset="0"/>
-                <a:ea typeface="Calibri" pitchFamily="34" charset="-122"/>
-                <a:cs typeface="Calibri" pitchFamily="34" charset="-120"/>
-              </a:rPr>
-              <a:t>Zero financing required across all 5 months; self-sustaining above $10M floor</a:t>
-            </a:r>
-            <a:endParaRPr lang="en-US" sz="900" dirty="0"/>
+            <a:off x="7269480" y="3104388"/>
+            <a:ext cx="1783080" cy="621792"/>
+          </a:xfrm>
+          <a:prstGeom prst="rect">
+            <a:avLst/>
+          </a:prstGeom>
+          <a:noFill/>
+          <a:ln/>
+        </p:spPr>
+        <p:txBody>
+          <a:bodyPr wrap="square" rtlCol="0" anchor="ctr">
+            <a:noAutofit/>
+          </a:bodyPr>
+          <a:lstStyle/>
+          <a:p>
+            <a:pPr marL="0" indent="0" algn="l"/>
+            <a:r>
+              <a:rPr lang="en-US" sz="950" b="0" dirty="0">
+                <a:solidFill>
+                  <a:srgbClr val="000000"/>
+                </a:solidFill>
+              </a:rPr>
+              <a:t>• June CFO $4.80M above May $3.65M — stronger H1 billing close; YTD collections $63.2M</a:t>
+            </a:r>
           </a:p>
         </p:txBody>
       </p:sp>
@@ -30160,45 +30695,30 @@
         </p:nvSpPr>
         <p:spPr>
           <a:xfrm>
-            <a:off x="7269480" y="3227832"/>
-            <a:ext cx="1783080" cy="347472"/>
-          </a:xfrm>
-          <a:prstGeom prst="rect">
-            <a:avLst/>
-          </a:prstGeom>
-          <a:noFill/>
-          <a:ln/>
-        </p:spPr>
-        <p:txBody>
-          <a:bodyPr wrap="square" rtlCol="0" anchor="ctr"/>
-          <a:lstStyle/>
-          <a:p>
-            <a:pPr marL="0" indent="0">
-              <a:buNone/>
-            </a:pPr>
-            <a:r>
-              <a:rPr lang="en-US" sz="900" b="1" dirty="0">
-                <a:solidFill>
-                  <a:srgbClr val="0D9488"/>
-                </a:solidFill>
-                <a:latin typeface="Calibri" pitchFamily="34" charset="0"/>
-                <a:ea typeface="Calibri" pitchFamily="34" charset="-122"/>
-                <a:cs typeface="Calibri" pitchFamily="34" charset="-120"/>
-              </a:rPr>
-              <a:t>• </a:t>
-            </a:r>
-            <a:r>
-              <a:rPr lang="en-US" sz="900" dirty="0">
-                <a:solidFill>
-                  <a:srgbClr val="334155"/>
-                </a:solidFill>
-                <a:latin typeface="Calibri" pitchFamily="34" charset="0"/>
-                <a:ea typeface="Calibri" pitchFamily="34" charset="-122"/>
-                <a:cs typeface="Calibri" pitchFamily="34" charset="-120"/>
-              </a:rPr>
-              <a:t>H2 collections target $8-10M/month on H2 ARR billing cycle as annual billing spike unwinds</a:t>
-            </a:r>
-            <a:endParaRPr lang="en-US" sz="900" dirty="0"/>
+            <a:off x="7269480" y="3762756"/>
+            <a:ext cx="1783080" cy="480059"/>
+          </a:xfrm>
+          <a:prstGeom prst="rect">
+            <a:avLst/>
+          </a:prstGeom>
+          <a:noFill/>
+          <a:ln/>
+        </p:spPr>
+        <p:txBody>
+          <a:bodyPr wrap="square" rtlCol="0" anchor="ctr">
+            <a:noAutofit/>
+          </a:bodyPr>
+          <a:lstStyle/>
+          <a:p>
+            <a:pPr marL="0" indent="0" algn="l"/>
+            <a:r>
+              <a:rPr lang="en-US" sz="950" b="0" dirty="0">
+                <a:solidFill>
+                  <a:srgbClr val="000000"/>
+                </a:solidFill>
+              </a:rPr>
+              <a:t>• Zero financing across all 6 months; 24+ months runway above $10M cash floor</a:t>
+            </a:r>
           </a:p>
         </p:txBody>
       </p:sp>
@@ -30210,45 +30730,30 @@
         </p:nvSpPr>
         <p:spPr>
           <a:xfrm>
-            <a:off x="7269480" y="3648215"/>
-            <a:ext cx="1783080" cy="347472"/>
-          </a:xfrm>
-          <a:prstGeom prst="rect">
-            <a:avLst/>
-          </a:prstGeom>
-          <a:noFill/>
-          <a:ln/>
-        </p:spPr>
-        <p:txBody>
-          <a:bodyPr wrap="square" rtlCol="0" anchor="ctr"/>
-          <a:lstStyle/>
-          <a:p>
-            <a:pPr marL="0" indent="0">
-              <a:buNone/>
-            </a:pPr>
-            <a:r>
-              <a:rPr lang="en-US" sz="900" b="1" dirty="0">
-                <a:solidFill>
-                  <a:srgbClr val="0D9488"/>
-                </a:solidFill>
-                <a:latin typeface="Calibri" pitchFamily="34" charset="0"/>
-                <a:ea typeface="Calibri" pitchFamily="34" charset="-122"/>
-                <a:cs typeface="Calibri" pitchFamily="34" charset="-120"/>
-              </a:rPr>
-              <a:t>• </a:t>
-            </a:r>
-            <a:r>
-              <a:rPr lang="en-US" sz="900" dirty="0">
-                <a:solidFill>
-                  <a:srgbClr val="334155"/>
-                </a:solidFill>
-                <a:latin typeface="Calibri" pitchFamily="34" charset="0"/>
-                <a:ea typeface="Calibri" pitchFamily="34" charset="-122"/>
-                <a:cs typeface="Calibri" pitchFamily="34" charset="-120"/>
-              </a:rPr>
-              <a:t>Annual contract expansion to mid-market adds est. $5–8M to YE cash</a:t>
-            </a:r>
-            <a:endParaRPr lang="en-US" sz="900" dirty="0"/>
+            <a:off x="7269480" y="4279391"/>
+            <a:ext cx="1783080" cy="621792"/>
+          </a:xfrm>
+          <a:prstGeom prst="rect">
+            <a:avLst/>
+          </a:prstGeom>
+          <a:noFill/>
+          <a:ln/>
+        </p:spPr>
+        <p:txBody>
+          <a:bodyPr wrap="square" rtlCol="0" anchor="ctr">
+            <a:noAutofit/>
+          </a:bodyPr>
+          <a:lstStyle/>
+          <a:p>
+            <a:pPr marL="0" indent="0" algn="l"/>
+            <a:r>
+              <a:rPr lang="en-US" sz="950" b="0" dirty="0">
+                <a:solidFill>
+                  <a:srgbClr val="000000"/>
+                </a:solidFill>
+              </a:rPr>
+              <a:t>• Annual contract expansion to mid-market adds est. $5–8M to YE cash; H2 target $8–10M/month</a:t>
+            </a:r>
           </a:p>
         </p:txBody>
       </p:sp>
@@ -30497,7 +31002,7 @@
                 <a:ea typeface="Calibri" pitchFamily="34" charset="-122"/>
                 <a:cs typeface="Calibri" pitchFamily="34" charset="-120"/>
               </a:rPr>
-              <a:t>Operating · Investing · Financing — YTD Jan–Q2 / Jun 2026</a:t>
+              <a:t>Operating · Investing · Financing — YTD 2026</a:t>
             </a:r>
             <a:endParaRPr lang="en-US" sz="2400" dirty="0"/>
           </a:p>
@@ -31332,9 +31837,7 @@
           <a:bodyPr wrap="square" rtlCol="0" anchor="ctr"/>
           <a:lstStyle/>
           <a:p>
-            <a:pPr marL="0" indent="0" algn="r">
-              <a:buNone/>
-            </a:pPr>
+            <a:pPr algn="r"/>
             <a:r>
               <a:rPr lang="en-US" sz="800" dirty="0">
                 <a:solidFill>
@@ -31344,9 +31847,8 @@
                 <a:ea typeface="Calibri" pitchFamily="34" charset="-122"/>
                 <a:cs typeface="Calibri" pitchFamily="34" charset="-120"/>
               </a:rPr>
-              <a:t>($1.04M)</a:t>
-            </a:r>
-            <a:endParaRPr lang="en-US" sz="800" dirty="0"/>
+              <a:t>($10.11M)</a:t>
+            </a:r>
           </a:p>
         </p:txBody>
       </p:sp>
@@ -31403,21 +31905,15 @@
           <a:bodyPr wrap="square" rtlCol="0" anchor="ctr"/>
           <a:lstStyle/>
           <a:p>
-            <a:pPr marL="0" indent="0" algn="r">
-              <a:buNone/>
-            </a:pPr>
+            <a:pPr algn="r"/>
             <a:r>
               <a:rPr lang="en-US" sz="800" dirty="0">
-                <a:solidFill>
-                  <a:srgbClr val="DC2626"/>
-                </a:solidFill>
-                <a:latin typeface="Calibri" pitchFamily="34" charset="0"/>
-                <a:ea typeface="Calibri" pitchFamily="34" charset="-122"/>
-                <a:cs typeface="Calibri" pitchFamily="34" charset="-120"/>
-              </a:rPr>
-              <a:t>($1.04M)</a:t>
-            </a:r>
-            <a:endParaRPr lang="en-US" sz="800" dirty="0"/>
+                <a:latin typeface="Calibri" pitchFamily="34" charset="0"/>
+                <a:ea typeface="Calibri" pitchFamily="34" charset="-122"/>
+                <a:cs typeface="Calibri" pitchFamily="34" charset="-120"/>
+              </a:rPr>
+              <a:t>$2.36M</a:t>
+            </a:r>
           </a:p>
         </p:txBody>
       </p:sp>
@@ -31474,21 +31970,18 @@
           <a:bodyPr wrap="square" rtlCol="0" anchor="ctr"/>
           <a:lstStyle/>
           <a:p>
-            <a:pPr marL="0" indent="0" algn="r">
-              <a:buNone/>
-            </a:pPr>
+            <a:pPr algn="r"/>
             <a:r>
               <a:rPr lang="en-US" sz="800" dirty="0">
                 <a:solidFill>
-                  <a:srgbClr val="0F172A"/>
-                </a:solidFill>
-                <a:latin typeface="Calibri" pitchFamily="34" charset="0"/>
-                <a:ea typeface="Calibri" pitchFamily="34" charset="-122"/>
-                <a:cs typeface="Calibri" pitchFamily="34" charset="-120"/>
-              </a:rPr>
-              <a:t>$0.0M</a:t>
-            </a:r>
-            <a:endParaRPr lang="en-US" sz="800" dirty="0"/>
+                  <a:srgbClr val="C00000"/>
+                </a:solidFill>
+                <a:latin typeface="Calibri" pitchFamily="34" charset="0"/>
+                <a:ea typeface="Calibri" pitchFamily="34" charset="-122"/>
+                <a:cs typeface="Calibri" pitchFamily="34" charset="-120"/>
+              </a:rPr>
+              <a:t>($12.47M)</a:t>
+            </a:r>
           </a:p>
         </p:txBody>
       </p:sp>
@@ -31545,21 +32038,18 @@
           <a:bodyPr wrap="square" rtlCol="0" anchor="ctr"/>
           <a:lstStyle/>
           <a:p>
-            <a:pPr marL="0" indent="0" algn="r">
-              <a:buNone/>
-            </a:pPr>
+            <a:pPr algn="r"/>
             <a:r>
               <a:rPr lang="en-US" sz="800" dirty="0">
                 <a:solidFill>
-                  <a:srgbClr val="0F172A"/>
-                </a:solidFill>
-                <a:latin typeface="Calibri" pitchFamily="34" charset="0"/>
-                <a:ea typeface="Calibri" pitchFamily="34" charset="-122"/>
-                <a:cs typeface="Calibri" pitchFamily="34" charset="-120"/>
-              </a:rPr>
-              <a:t>0%</a:t>
-            </a:r>
-            <a:endParaRPr lang="en-US" sz="800" dirty="0"/>
+                  <a:srgbClr val="C00000"/>
+                </a:solidFill>
+                <a:latin typeface="Calibri" pitchFamily="34" charset="0"/>
+                <a:ea typeface="Calibri" pitchFamily="34" charset="-122"/>
+                <a:cs typeface="Calibri" pitchFamily="34" charset="-120"/>
+              </a:rPr>
+              <a:t>(528%)</a:t>
+            </a:r>
           </a:p>
         </p:txBody>
       </p:sp>
@@ -31687,9 +32177,7 @@
           <a:bodyPr wrap="square" rtlCol="0" anchor="ctr"/>
           <a:lstStyle/>
           <a:p>
-            <a:pPr marL="0" indent="0" algn="r">
-              <a:buNone/>
-            </a:pPr>
+            <a:pPr algn="r"/>
             <a:r>
               <a:rPr lang="en-US" sz="800" dirty="0">
                 <a:solidFill>
@@ -31699,9 +32187,8 @@
                 <a:ea typeface="Calibri" pitchFamily="34" charset="-122"/>
                 <a:cs typeface="Calibri" pitchFamily="34" charset="-120"/>
               </a:rPr>
-              <a:t>$0.86M</a:t>
-            </a:r>
-            <a:endParaRPr lang="en-US" sz="800" dirty="0"/>
+              <a:t>$0.52M</a:t>
+            </a:r>
           </a:p>
         </p:txBody>
       </p:sp>
@@ -31758,9 +32245,7 @@
           <a:bodyPr wrap="square" rtlCol="0" anchor="ctr"/>
           <a:lstStyle/>
           <a:p>
-            <a:pPr marL="0" indent="0" algn="r">
-              <a:buNone/>
-            </a:pPr>
+            <a:pPr algn="r"/>
             <a:r>
               <a:rPr lang="en-US" sz="800" dirty="0">
                 <a:solidFill>
@@ -31770,9 +32255,8 @@
                 <a:ea typeface="Calibri" pitchFamily="34" charset="-122"/>
                 <a:cs typeface="Calibri" pitchFamily="34" charset="-120"/>
               </a:rPr>
-              <a:t>$0.84M</a:t>
-            </a:r>
-            <a:endParaRPr lang="en-US" sz="800" dirty="0"/>
+              <a:t>$0.62M</a:t>
+            </a:r>
           </a:p>
         </p:txBody>
       </p:sp>
@@ -31829,9 +32313,7 @@
           <a:bodyPr wrap="square" rtlCol="0" anchor="ctr"/>
           <a:lstStyle/>
           <a:p>
-            <a:pPr marL="0" indent="0" algn="r">
-              <a:buNone/>
-            </a:pPr>
+            <a:pPr algn="r"/>
             <a:r>
               <a:rPr lang="en-US" sz="800" dirty="0">
                 <a:solidFill>
@@ -31841,9 +32323,8 @@
                 <a:ea typeface="Calibri" pitchFamily="34" charset="-122"/>
                 <a:cs typeface="Calibri" pitchFamily="34" charset="-120"/>
               </a:rPr>
-              <a:t>+$0.02M</a:t>
-            </a:r>
-            <a:endParaRPr lang="en-US" sz="800" dirty="0"/>
+              <a:t>-$0.10M</a:t>
+            </a:r>
           </a:p>
         </p:txBody>
       </p:sp>
@@ -31900,9 +32381,7 @@
           <a:bodyPr wrap="square" rtlCol="0" anchor="ctr"/>
           <a:lstStyle/>
           <a:p>
-            <a:pPr marL="0" indent="0" algn="r">
-              <a:buNone/>
-            </a:pPr>
+            <a:pPr algn="r"/>
             <a:r>
               <a:rPr lang="en-US" sz="800" dirty="0">
                 <a:solidFill>
@@ -31912,9 +32391,8 @@
                 <a:ea typeface="Calibri" pitchFamily="34" charset="-122"/>
                 <a:cs typeface="Calibri" pitchFamily="34" charset="-120"/>
               </a:rPr>
-              <a:t>+2%</a:t>
-            </a:r>
-            <a:endParaRPr lang="en-US" sz="800" dirty="0"/>
+              <a:t>-17%</a:t>
+            </a:r>
           </a:p>
         </p:txBody>
       </p:sp>
@@ -32042,9 +32520,7 @@
           <a:bodyPr wrap="square" rtlCol="0" anchor="ctr"/>
           <a:lstStyle/>
           <a:p>
-            <a:pPr marL="0" indent="0" algn="r">
-              <a:buNone/>
-            </a:pPr>
+            <a:pPr algn="r"/>
             <a:r>
               <a:rPr lang="en-US" sz="800" dirty="0">
                 <a:solidFill>
@@ -32054,9 +32530,8 @@
                 <a:ea typeface="Calibri" pitchFamily="34" charset="-122"/>
                 <a:cs typeface="Calibri" pitchFamily="34" charset="-120"/>
               </a:rPr>
-              <a:t>$52.0M</a:t>
-            </a:r>
-            <a:endParaRPr lang="en-US" sz="800" dirty="0"/>
+              <a:t>$63.2M</a:t>
+            </a:r>
           </a:p>
         </p:txBody>
       </p:sp>
@@ -32113,9 +32588,7 @@
           <a:bodyPr wrap="square" rtlCol="0" anchor="ctr"/>
           <a:lstStyle/>
           <a:p>
-            <a:pPr marL="0" indent="0" algn="r">
-              <a:buNone/>
-            </a:pPr>
+            <a:pPr algn="r"/>
             <a:r>
               <a:rPr lang="en-US" sz="800" dirty="0">
                 <a:solidFill>
@@ -32125,9 +32598,8 @@
                 <a:ea typeface="Calibri" pitchFamily="34" charset="-122"/>
                 <a:cs typeface="Calibri" pitchFamily="34" charset="-120"/>
               </a:rPr>
-              <a:t>$51.7M</a:t>
-            </a:r>
-            <a:endParaRPr lang="en-US" sz="800" dirty="0"/>
+              <a:t>$60.9M</a:t>
+            </a:r>
           </a:p>
         </p:txBody>
       </p:sp>
@@ -32184,9 +32656,7 @@
           <a:bodyPr wrap="square" rtlCol="0" anchor="ctr"/>
           <a:lstStyle/>
           <a:p>
-            <a:pPr marL="0" indent="0" algn="r">
-              <a:buNone/>
-            </a:pPr>
+            <a:pPr algn="r"/>
             <a:r>
               <a:rPr lang="en-US" sz="800" dirty="0">
                 <a:solidFill>
@@ -32196,9 +32666,8 @@
                 <a:ea typeface="Calibri" pitchFamily="34" charset="-122"/>
                 <a:cs typeface="Calibri" pitchFamily="34" charset="-120"/>
               </a:rPr>
-              <a:t>+$0.3M</a:t>
-            </a:r>
-            <a:endParaRPr lang="en-US" sz="800" dirty="0"/>
+              <a:t>+$2.27M</a:t>
+            </a:r>
           </a:p>
         </p:txBody>
       </p:sp>
@@ -32255,9 +32724,7 @@
           <a:bodyPr wrap="square" rtlCol="0" anchor="ctr"/>
           <a:lstStyle/>
           <a:p>
-            <a:pPr marL="0" indent="0" algn="r">
-              <a:buNone/>
-            </a:pPr>
+            <a:pPr algn="r"/>
             <a:r>
               <a:rPr lang="en-US" sz="800" dirty="0">
                 <a:solidFill>
@@ -32267,9 +32734,8 @@
                 <a:ea typeface="Calibri" pitchFamily="34" charset="-122"/>
                 <a:cs typeface="Calibri" pitchFamily="34" charset="-120"/>
               </a:rPr>
-              <a:t>+0.6%</a:t>
-            </a:r>
-            <a:endParaRPr lang="en-US" sz="800" dirty="0"/>
+              <a:t>+4%</a:t>
+            </a:r>
           </a:p>
         </p:txBody>
       </p:sp>
@@ -32971,15 +33437,19 @@
             <a:r>
               <a:rPr lang="en-US" sz="800" dirty="0">
                 <a:solidFill>
-                  <a:srgbClr val="0F172A"/>
-                </a:solidFill>
-                <a:latin typeface="Calibri" pitchFamily="34" charset="0"/>
-                <a:ea typeface="Calibri" pitchFamily="34" charset="-122"/>
-                <a:cs typeface="Calibri" pitchFamily="34" charset="-120"/>
-              </a:rPr>
-              <a:t>-33%</a:t>
-            </a:r>
-            <a:endParaRPr lang="en-US" sz="800" dirty="0"/>
+                  <a:srgbClr val="C00000"/>
+                </a:solidFill>
+                <a:latin typeface="Calibri" pitchFamily="34" charset="0"/>
+                <a:ea typeface="Calibri" pitchFamily="34" charset="-122"/>
+                <a:cs typeface="Calibri" pitchFamily="34" charset="-120"/>
+              </a:rPr>
+              <a:t>(33%)</a:t>
+            </a:r>
+            <a:endParaRPr lang="en-US" sz="800" dirty="0">
+              <a:solidFill>
+                <a:srgbClr val="C00000"/>
+              </a:solidFill>
+            </a:endParaRPr>
           </a:p>
         </p:txBody>
       </p:sp>
@@ -33462,9 +33932,7 @@
           <a:bodyPr wrap="square" rtlCol="0" anchor="ctr"/>
           <a:lstStyle/>
           <a:p>
-            <a:pPr marL="0" indent="0" algn="r">
-              <a:buNone/>
-            </a:pPr>
+            <a:pPr algn="r"/>
             <a:r>
               <a:rPr lang="en-US" sz="800" b="1" dirty="0">
                 <a:solidFill>
@@ -33474,9 +33942,8 @@
                 <a:ea typeface="Calibri" pitchFamily="34" charset="-122"/>
                 <a:cs typeface="Calibri" pitchFamily="34" charset="-120"/>
               </a:rPr>
-              <a:t>$30.6M</a:t>
-            </a:r>
-            <a:endParaRPr lang="en-US" sz="800" dirty="0"/>
+              <a:t>$25.6M</a:t>
+            </a:r>
           </a:p>
         </p:txBody>
       </p:sp>
@@ -33533,9 +34000,7 @@
           <a:bodyPr wrap="square" rtlCol="0" anchor="ctr"/>
           <a:lstStyle/>
           <a:p>
-            <a:pPr marL="0" indent="0" algn="r">
-              <a:buNone/>
-            </a:pPr>
+            <a:pPr algn="r"/>
             <a:r>
               <a:rPr lang="en-US" sz="800" b="1" dirty="0">
                 <a:solidFill>
@@ -33545,9 +34010,8 @@
                 <a:ea typeface="Calibri" pitchFamily="34" charset="-122"/>
                 <a:cs typeface="Calibri" pitchFamily="34" charset="-120"/>
               </a:rPr>
-              <a:t>$8.2M</a:t>
-            </a:r>
-            <a:endParaRPr lang="en-US" sz="800" dirty="0"/>
+              <a:t>$3.2M</a:t>
+            </a:r>
           </a:p>
         </p:txBody>
       </p:sp>
@@ -33604,9 +34068,7 @@
           <a:bodyPr wrap="square" rtlCol="0" anchor="ctr"/>
           <a:lstStyle/>
           <a:p>
-            <a:pPr marL="0" indent="0" algn="r">
-              <a:buNone/>
-            </a:pPr>
+            <a:pPr algn="r"/>
             <a:r>
               <a:rPr lang="en-US" sz="800" b="1" dirty="0">
                 <a:solidFill>
@@ -33616,9 +34078,8 @@
                 <a:ea typeface="Calibri" pitchFamily="34" charset="-122"/>
                 <a:cs typeface="Calibri" pitchFamily="34" charset="-120"/>
               </a:rPr>
-              <a:t>+$22.4M</a:t>
-            </a:r>
-            <a:endParaRPr lang="en-US" sz="800" dirty="0"/>
+              <a:t>+$22.44M</a:t>
+            </a:r>
           </a:p>
         </p:txBody>
       </p:sp>
@@ -33675,9 +34136,7 @@
           <a:bodyPr wrap="square" rtlCol="0" anchor="ctr"/>
           <a:lstStyle/>
           <a:p>
-            <a:pPr marL="0" indent="0" algn="r">
-              <a:buNone/>
-            </a:pPr>
+            <a:pPr algn="r"/>
             <a:r>
               <a:rPr lang="en-US" sz="800" b="1" dirty="0">
                 <a:solidFill>
@@ -33687,9 +34146,8 @@
                 <a:ea typeface="Calibri" pitchFamily="34" charset="-122"/>
                 <a:cs typeface="Calibri" pitchFamily="34" charset="-120"/>
               </a:rPr>
-              <a:t>+273%</a:t>
-            </a:r>
-            <a:endParaRPr lang="en-US" sz="800" dirty="0"/>
+              <a:t>+704%</a:t>
+            </a:r>
           </a:p>
         </p:txBody>
       </p:sp>
@@ -34128,9 +34586,7 @@
           <a:bodyPr wrap="square" rtlCol="0" anchor="ctr"/>
           <a:lstStyle/>
           <a:p>
-            <a:pPr marL="0" indent="0" algn="r">
-              <a:buNone/>
-            </a:pPr>
+            <a:pPr algn="r"/>
             <a:r>
               <a:rPr lang="en-US" sz="800" dirty="0">
                 <a:solidFill>
@@ -34140,9 +34596,8 @@
                 <a:ea typeface="Calibri" pitchFamily="34" charset="-122"/>
                 <a:cs typeface="Calibri" pitchFamily="34" charset="-120"/>
               </a:rPr>
-              <a:t>($0.90M)</a:t>
-            </a:r>
-            <a:endParaRPr lang="en-US" sz="800" dirty="0"/>
+              <a:t>($1.12M)</a:t>
+            </a:r>
           </a:p>
         </p:txBody>
       </p:sp>
@@ -34199,9 +34654,7 @@
           <a:bodyPr wrap="square" rtlCol="0" anchor="ctr"/>
           <a:lstStyle/>
           <a:p>
-            <a:pPr marL="0" indent="0" algn="r">
-              <a:buNone/>
-            </a:pPr>
+            <a:pPr algn="r"/>
             <a:r>
               <a:rPr lang="en-US" sz="800" dirty="0">
                 <a:solidFill>
@@ -34211,9 +34664,8 @@
                 <a:ea typeface="Calibri" pitchFamily="34" charset="-122"/>
                 <a:cs typeface="Calibri" pitchFamily="34" charset="-120"/>
               </a:rPr>
-              <a:t>($0.90M)</a:t>
-            </a:r>
-            <a:endParaRPr lang="en-US" sz="800" dirty="0"/>
+              <a:t>($0.83M)</a:t>
+            </a:r>
           </a:p>
         </p:txBody>
       </p:sp>
@@ -34270,21 +34722,18 @@
           <a:bodyPr wrap="square" rtlCol="0" anchor="ctr"/>
           <a:lstStyle/>
           <a:p>
-            <a:pPr marL="0" indent="0" algn="r">
-              <a:buNone/>
-            </a:pPr>
+            <a:pPr algn="r"/>
             <a:r>
               <a:rPr lang="en-US" sz="800" dirty="0">
                 <a:solidFill>
-                  <a:srgbClr val="0F172A"/>
-                </a:solidFill>
-                <a:latin typeface="Calibri" pitchFamily="34" charset="0"/>
-                <a:ea typeface="Calibri" pitchFamily="34" charset="-122"/>
-                <a:cs typeface="Calibri" pitchFamily="34" charset="-120"/>
-              </a:rPr>
-              <a:t>$0.0M</a:t>
-            </a:r>
-            <a:endParaRPr lang="en-US" sz="800" dirty="0"/>
+                  <a:srgbClr val="C00000"/>
+                </a:solidFill>
+                <a:latin typeface="Calibri" pitchFamily="34" charset="0"/>
+                <a:ea typeface="Calibri" pitchFamily="34" charset="-122"/>
+                <a:cs typeface="Calibri" pitchFamily="34" charset="-120"/>
+              </a:rPr>
+              <a:t>($0.29M)</a:t>
+            </a:r>
           </a:p>
         </p:txBody>
       </p:sp>
@@ -34341,21 +34790,18 @@
           <a:bodyPr wrap="square" rtlCol="0" anchor="ctr"/>
           <a:lstStyle/>
           <a:p>
-            <a:pPr marL="0" indent="0" algn="r">
-              <a:buNone/>
-            </a:pPr>
+            <a:pPr algn="r"/>
             <a:r>
               <a:rPr lang="en-US" sz="800" dirty="0">
                 <a:solidFill>
-                  <a:srgbClr val="0F172A"/>
-                </a:solidFill>
-                <a:latin typeface="Calibri" pitchFamily="34" charset="0"/>
-                <a:ea typeface="Calibri" pitchFamily="34" charset="-122"/>
-                <a:cs typeface="Calibri" pitchFamily="34" charset="-120"/>
-              </a:rPr>
-              <a:t>0%</a:t>
-            </a:r>
-            <a:endParaRPr lang="en-US" sz="800" dirty="0"/>
+                  <a:srgbClr val="C00000"/>
+                </a:solidFill>
+                <a:latin typeface="Calibri" pitchFamily="34" charset="0"/>
+                <a:ea typeface="Calibri" pitchFamily="34" charset="-122"/>
+                <a:cs typeface="Calibri" pitchFamily="34" charset="-120"/>
+              </a:rPr>
+              <a:t>(35%)</a:t>
+            </a:r>
           </a:p>
         </p:txBody>
       </p:sp>
@@ -34458,6 +34904,7 @@
           <a:bodyPr/>
           <a:lstStyle/>
           <a:p>
+            <a:pPr algn="r"/>
             <a:endParaRPr lang="en-US"/>
           </a:p>
         </p:txBody>
@@ -34483,9 +34930,7 @@
           <a:bodyPr wrap="square" rtlCol="0" anchor="ctr"/>
           <a:lstStyle/>
           <a:p>
-            <a:pPr marL="0" indent="0" algn="r">
-              <a:buNone/>
-            </a:pPr>
+            <a:pPr algn="r"/>
             <a:r>
               <a:rPr lang="en-US" sz="800" b="1" dirty="0">
                 <a:solidFill>
@@ -34495,9 +34940,8 @@
                 <a:ea typeface="Calibri" pitchFamily="34" charset="-122"/>
                 <a:cs typeface="Calibri" pitchFamily="34" charset="-120"/>
               </a:rPr>
-              <a:t>($0.90M)</a:t>
-            </a:r>
-            <a:endParaRPr lang="en-US" sz="800" dirty="0"/>
+              <a:t>($1.12M)</a:t>
+            </a:r>
           </a:p>
         </p:txBody>
       </p:sp>
@@ -34554,9 +34998,7 @@
           <a:bodyPr wrap="square" rtlCol="0" anchor="ctr"/>
           <a:lstStyle/>
           <a:p>
-            <a:pPr marL="0" indent="0" algn="r">
-              <a:buNone/>
-            </a:pPr>
+            <a:pPr algn="r"/>
             <a:r>
               <a:rPr lang="en-US" sz="800" b="1" dirty="0">
                 <a:solidFill>
@@ -34566,9 +35008,8 @@
                 <a:ea typeface="Calibri" pitchFamily="34" charset="-122"/>
                 <a:cs typeface="Calibri" pitchFamily="34" charset="-120"/>
               </a:rPr>
-              <a:t>($0.90M)</a:t>
-            </a:r>
-            <a:endParaRPr lang="en-US" sz="800" dirty="0"/>
+              <a:t>($0.83M)</a:t>
+            </a:r>
           </a:p>
         </p:txBody>
       </p:sp>
@@ -34600,7 +35041,7 @@
           <a:bodyPr/>
           <a:lstStyle/>
           <a:p>
-            <a:endParaRPr lang="en-US"/>
+            <a:endParaRPr lang="en-US" dirty="0"/>
           </a:p>
         </p:txBody>
       </p:sp>
@@ -34625,21 +35066,18 @@
           <a:bodyPr wrap="square" rtlCol="0" anchor="ctr"/>
           <a:lstStyle/>
           <a:p>
-            <a:pPr marL="0" indent="0" algn="r">
-              <a:buNone/>
-            </a:pPr>
+            <a:pPr algn="r"/>
             <a:r>
               <a:rPr lang="en-US" sz="800" b="1" dirty="0">
                 <a:solidFill>
-                  <a:srgbClr val="0F172A"/>
-                </a:solidFill>
-                <a:latin typeface="Calibri" pitchFamily="34" charset="0"/>
-                <a:ea typeface="Calibri" pitchFamily="34" charset="-122"/>
-                <a:cs typeface="Calibri" pitchFamily="34" charset="-120"/>
-              </a:rPr>
-              <a:t>$0.0M</a:t>
-            </a:r>
-            <a:endParaRPr lang="en-US" sz="800" dirty="0"/>
+                  <a:srgbClr val="C00000"/>
+                </a:solidFill>
+                <a:latin typeface="Calibri" pitchFamily="34" charset="0"/>
+                <a:ea typeface="Calibri" pitchFamily="34" charset="-122"/>
+                <a:cs typeface="Calibri" pitchFamily="34" charset="-120"/>
+              </a:rPr>
+              <a:t>($0.29M)</a:t>
+            </a:r>
           </a:p>
         </p:txBody>
       </p:sp>
@@ -34671,6 +35109,7 @@
           <a:bodyPr/>
           <a:lstStyle/>
           <a:p>
+            <a:pPr algn="r"/>
             <a:endParaRPr lang="en-US"/>
           </a:p>
         </p:txBody>
@@ -34696,21 +35135,18 @@
           <a:bodyPr wrap="square" rtlCol="0" anchor="ctr"/>
           <a:lstStyle/>
           <a:p>
-            <a:pPr marL="0" indent="0" algn="r">
-              <a:buNone/>
-            </a:pPr>
+            <a:pPr algn="r"/>
             <a:r>
               <a:rPr lang="en-US" sz="800" b="1" dirty="0">
                 <a:solidFill>
-                  <a:srgbClr val="0F172A"/>
-                </a:solidFill>
-                <a:latin typeface="Calibri" pitchFamily="34" charset="0"/>
-                <a:ea typeface="Calibri" pitchFamily="34" charset="-122"/>
-                <a:cs typeface="Calibri" pitchFamily="34" charset="-120"/>
-              </a:rPr>
-              <a:t>0%</a:t>
-            </a:r>
-            <a:endParaRPr lang="en-US" sz="800" dirty="0"/>
+                  <a:srgbClr val="C00000"/>
+                </a:solidFill>
+                <a:latin typeface="Calibri" pitchFamily="34" charset="0"/>
+                <a:ea typeface="Calibri" pitchFamily="34" charset="-122"/>
+                <a:cs typeface="Calibri" pitchFamily="34" charset="-120"/>
+              </a:rPr>
+              <a:t>(35%)</a:t>
+            </a:r>
           </a:p>
         </p:txBody>
       </p:sp>
@@ -35504,9 +35940,7 @@
           <a:bodyPr wrap="square" rtlCol="0" anchor="ctr"/>
           <a:lstStyle/>
           <a:p>
-            <a:pPr marL="0" indent="0" algn="r">
-              <a:buNone/>
-            </a:pPr>
+            <a:pPr algn="r"/>
             <a:r>
               <a:rPr lang="en-US" sz="800" b="1" dirty="0">
                 <a:solidFill>
@@ -35516,9 +35950,8 @@
                 <a:ea typeface="Calibri" pitchFamily="34" charset="-122"/>
                 <a:cs typeface="Calibri" pitchFamily="34" charset="-120"/>
               </a:rPr>
-              <a:t>$29.7M</a:t>
-            </a:r>
-            <a:endParaRPr lang="en-US" sz="800" dirty="0"/>
+              <a:t>$24.5M</a:t>
+            </a:r>
           </a:p>
         </p:txBody>
       </p:sp>
@@ -35575,9 +36008,7 @@
           <a:bodyPr wrap="square" rtlCol="0" anchor="ctr"/>
           <a:lstStyle/>
           <a:p>
-            <a:pPr marL="0" indent="0" algn="r">
-              <a:buNone/>
-            </a:pPr>
+            <a:pPr algn="r"/>
             <a:r>
               <a:rPr lang="en-US" sz="800" b="1" dirty="0">
                 <a:solidFill>
@@ -35587,9 +36018,8 @@
                 <a:ea typeface="Calibri" pitchFamily="34" charset="-122"/>
                 <a:cs typeface="Calibri" pitchFamily="34" charset="-120"/>
               </a:rPr>
-              <a:t>$7.3M</a:t>
-            </a:r>
-            <a:endParaRPr lang="en-US" sz="800" dirty="0"/>
+              <a:t>$2.4M</a:t>
+            </a:r>
           </a:p>
         </p:txBody>
       </p:sp>
@@ -35646,9 +36076,7 @@
           <a:bodyPr wrap="square" rtlCol="0" anchor="ctr"/>
           <a:lstStyle/>
           <a:p>
-            <a:pPr marL="0" indent="0" algn="r">
-              <a:buNone/>
-            </a:pPr>
+            <a:pPr algn="r"/>
             <a:r>
               <a:rPr lang="en-US" sz="800" b="1" dirty="0">
                 <a:solidFill>
@@ -35658,9 +36086,8 @@
                 <a:ea typeface="Calibri" pitchFamily="34" charset="-122"/>
                 <a:cs typeface="Calibri" pitchFamily="34" charset="-120"/>
               </a:rPr>
-              <a:t>+$22.4M</a:t>
-            </a:r>
-            <a:endParaRPr lang="en-US" sz="800" dirty="0"/>
+              <a:t>+$22.15M</a:t>
+            </a:r>
           </a:p>
         </p:txBody>
       </p:sp>
@@ -35717,9 +36144,7 @@
           <a:bodyPr wrap="square" rtlCol="0" anchor="ctr"/>
           <a:lstStyle/>
           <a:p>
-            <a:pPr marL="0" indent="0" algn="r">
-              <a:buNone/>
-            </a:pPr>
+            <a:pPr algn="r"/>
             <a:r>
               <a:rPr lang="en-US" sz="800" b="1" dirty="0">
                 <a:solidFill>
@@ -35729,9 +36154,8 @@
                 <a:ea typeface="Calibri" pitchFamily="34" charset="-122"/>
                 <a:cs typeface="Calibri" pitchFamily="34" charset="-120"/>
               </a:rPr>
-              <a:t>+307%</a:t>
-            </a:r>
-            <a:endParaRPr lang="en-US" sz="800" dirty="0"/>
+              <a:t>+938%</a:t>
+            </a:r>
           </a:p>
         </p:txBody>
       </p:sp>
@@ -35859,9 +36283,7 @@
           <a:bodyPr wrap="square" rtlCol="0" anchor="ctr"/>
           <a:lstStyle/>
           <a:p>
-            <a:pPr marL="0" indent="0" algn="r">
-              <a:buNone/>
-            </a:pPr>
+            <a:pPr algn="r"/>
             <a:r>
               <a:rPr lang="en-US" sz="800" dirty="0">
                 <a:solidFill>
@@ -35873,7 +36295,6 @@
               </a:rPr>
               <a:t>$46.10M</a:t>
             </a:r>
-            <a:endParaRPr lang="en-US" sz="800" dirty="0"/>
           </a:p>
         </p:txBody>
       </p:sp>
@@ -35930,9 +36351,7 @@
           <a:bodyPr wrap="square" rtlCol="0" anchor="ctr"/>
           <a:lstStyle/>
           <a:p>
-            <a:pPr marL="0" indent="0" algn="r">
-              <a:buNone/>
-            </a:pPr>
+            <a:pPr algn="r"/>
             <a:r>
               <a:rPr lang="en-US" sz="800" dirty="0">
                 <a:solidFill>
@@ -35942,9 +36361,8 @@
                 <a:ea typeface="Calibri" pitchFamily="34" charset="-122"/>
                 <a:cs typeface="Calibri" pitchFamily="34" charset="-120"/>
               </a:rPr>
-              <a:t>$10.25M</a:t>
-            </a:r>
-            <a:endParaRPr lang="en-US" sz="800" dirty="0"/>
+              <a:t>$46.00M</a:t>
+            </a:r>
           </a:p>
         </p:txBody>
       </p:sp>
@@ -36001,21 +36419,18 @@
           <a:bodyPr wrap="square" rtlCol="0" anchor="ctr"/>
           <a:lstStyle/>
           <a:p>
-            <a:pPr marL="0" indent="0" algn="r">
-              <a:buNone/>
-            </a:pPr>
-            <a:r>
-              <a:rPr lang="en-US" sz="800" dirty="0">
-                <a:solidFill>
-                  <a:srgbClr val="0F172A"/>
-                </a:solidFill>
-                <a:latin typeface="Calibri" pitchFamily="34" charset="0"/>
-                <a:ea typeface="Calibri" pitchFamily="34" charset="-122"/>
-                <a:cs typeface="Calibri" pitchFamily="34" charset="-120"/>
-              </a:rPr>
-              <a:t>—</a:t>
-            </a:r>
-            <a:endParaRPr lang="en-US" sz="800" dirty="0"/>
+            <a:pPr algn="r"/>
+            <a:r>
+              <a:rPr lang="en-US" sz="800" b="1" dirty="0">
+                <a:solidFill>
+                  <a:srgbClr val="15803D"/>
+                </a:solidFill>
+                <a:latin typeface="Calibri" pitchFamily="34" charset="0"/>
+                <a:ea typeface="Calibri" pitchFamily="34" charset="-122"/>
+                <a:cs typeface="Calibri" pitchFamily="34" charset="-120"/>
+              </a:rPr>
+              <a:t>+$0.10M</a:t>
+            </a:r>
           </a:p>
         </p:txBody>
       </p:sp>
@@ -36072,9 +36487,7 @@
           <a:bodyPr wrap="square" rtlCol="0" anchor="ctr"/>
           <a:lstStyle/>
           <a:p>
-            <a:pPr marL="0" indent="0" algn="r">
-              <a:buNone/>
-            </a:pPr>
+            <a:pPr algn="r"/>
             <a:r>
               <a:rPr lang="en-US" sz="800" dirty="0">
                 <a:solidFill>
@@ -36084,9 +36497,8 @@
                 <a:ea typeface="Calibri" pitchFamily="34" charset="-122"/>
                 <a:cs typeface="Calibri" pitchFamily="34" charset="-120"/>
               </a:rPr>
-              <a:t>—</a:t>
-            </a:r>
-            <a:endParaRPr lang="en-US" sz="800" dirty="0"/>
+              <a:t>+0%</a:t>
+            </a:r>
           </a:p>
         </p:txBody>
       </p:sp>
@@ -36214,9 +36626,7 @@
           <a:bodyPr wrap="square" rtlCol="0" anchor="ctr"/>
           <a:lstStyle/>
           <a:p>
-            <a:pPr marL="0" indent="0" algn="r">
-              <a:buNone/>
-            </a:pPr>
+            <a:pPr algn="r"/>
             <a:r>
               <a:rPr lang="en-US" sz="800" b="1" dirty="0">
                 <a:solidFill>
@@ -36226,9 +36636,8 @@
                 <a:ea typeface="Calibri" pitchFamily="34" charset="-122"/>
                 <a:cs typeface="Calibri" pitchFamily="34" charset="-120"/>
               </a:rPr>
-              <a:t>$66.04M</a:t>
-            </a:r>
-            <a:endParaRPr lang="en-US" sz="800" dirty="0"/>
+              <a:t>$70.61M</a:t>
+            </a:r>
           </a:p>
         </p:txBody>
       </p:sp>
@@ -36285,9 +36694,7 @@
           <a:bodyPr wrap="square" rtlCol="0" anchor="ctr"/>
           <a:lstStyle/>
           <a:p>
-            <a:pPr marL="0" indent="0" algn="r">
-              <a:buNone/>
-            </a:pPr>
+            <a:pPr algn="r"/>
             <a:r>
               <a:rPr lang="en-US" sz="800" b="1" dirty="0">
                 <a:solidFill>
@@ -36297,9 +36704,8 @@
                 <a:ea typeface="Calibri" pitchFamily="34" charset="-122"/>
                 <a:cs typeface="Calibri" pitchFamily="34" charset="-120"/>
               </a:rPr>
-              <a:t>$28.64M</a:t>
-            </a:r>
-            <a:endParaRPr lang="en-US" sz="800" dirty="0"/>
+              <a:t>$48.36M</a:t>
+            </a:r>
           </a:p>
         </p:txBody>
       </p:sp>
@@ -36356,9 +36762,7 @@
           <a:bodyPr wrap="square" rtlCol="0" anchor="ctr"/>
           <a:lstStyle/>
           <a:p>
-            <a:pPr marL="0" indent="0" algn="r">
-              <a:buNone/>
-            </a:pPr>
+            <a:pPr algn="r"/>
             <a:r>
               <a:rPr lang="en-US" sz="800" b="1" dirty="0">
                 <a:solidFill>
@@ -36368,9 +36772,8 @@
                 <a:ea typeface="Calibri" pitchFamily="34" charset="-122"/>
                 <a:cs typeface="Calibri" pitchFamily="34" charset="-120"/>
               </a:rPr>
-              <a:t>+$37.4M</a:t>
-            </a:r>
-            <a:endParaRPr lang="en-US" sz="800" dirty="0"/>
+              <a:t>+$22.25M</a:t>
+            </a:r>
           </a:p>
         </p:txBody>
       </p:sp>
@@ -36427,9 +36830,7 @@
           <a:bodyPr wrap="square" rtlCol="0" anchor="ctr"/>
           <a:lstStyle/>
           <a:p>
-            <a:pPr marL="0" indent="0" algn="r">
-              <a:buNone/>
-            </a:pPr>
+            <a:pPr algn="r"/>
             <a:r>
               <a:rPr lang="en-US" sz="800" b="1" dirty="0">
                 <a:solidFill>
@@ -36439,9 +36840,8 @@
                 <a:ea typeface="Calibri" pitchFamily="34" charset="-122"/>
                 <a:cs typeface="Calibri" pitchFamily="34" charset="-120"/>
               </a:rPr>
-              <a:t>+131%</a:t>
-            </a:r>
-            <a:endParaRPr lang="en-US" sz="800" dirty="0"/>
+              <a:t>+46%</a:t>
+            </a:r>
           </a:p>
         </p:txBody>
       </p:sp>
@@ -36486,33 +36886,29 @@
         <p:spPr>
           <a:xfrm>
             <a:off x="6629400" y="1152144"/>
-            <a:ext cx="2194560" cy="219456"/>
-          </a:xfrm>
-          <a:prstGeom prst="rect">
-            <a:avLst/>
-          </a:prstGeom>
-          <a:noFill/>
-          <a:ln/>
-        </p:spPr>
-        <p:txBody>
-          <a:bodyPr wrap="square" rtlCol="0" anchor="ctr"/>
-          <a:lstStyle/>
-          <a:p>
-            <a:pPr marL="0" indent="0">
-              <a:buNone/>
-            </a:pPr>
+            <a:ext cx="2194560" cy="237744"/>
+          </a:xfrm>
+          <a:prstGeom prst="rect">
+            <a:avLst/>
+          </a:prstGeom>
+          <a:noFill/>
+          <a:ln/>
+        </p:spPr>
+        <p:txBody>
+          <a:bodyPr wrap="square" rtlCol="0" anchor="ctr">
+            <a:noAutofit/>
+          </a:bodyPr>
+          <a:lstStyle/>
+          <a:p>
+            <a:pPr algn="l"/>
             <a:r>
               <a:rPr lang="en-US" sz="1000" b="1" dirty="0">
                 <a:solidFill>
                   <a:srgbClr val="1A2E44"/>
                 </a:solidFill>
-                <a:latin typeface="Calibri" pitchFamily="34" charset="0"/>
-                <a:ea typeface="Calibri" pitchFamily="34" charset="-122"/>
-                <a:cs typeface="Calibri" pitchFamily="34" charset="-120"/>
               </a:rPr>
               <a:t>Key Takeaways</a:t>
             </a:r>
-            <a:endParaRPr lang="en-US" sz="1000" dirty="0"/>
           </a:p>
         </p:txBody>
       </p:sp>
@@ -36554,45 +36950,30 @@
         </p:nvSpPr>
         <p:spPr>
           <a:xfrm>
-            <a:off x="6629400" y="1463040"/>
-            <a:ext cx="2194560" cy="347472"/>
-          </a:xfrm>
-          <a:prstGeom prst="rect">
-            <a:avLst/>
-          </a:prstGeom>
-          <a:noFill/>
-          <a:ln/>
-        </p:spPr>
-        <p:txBody>
-          <a:bodyPr wrap="square" rtlCol="0" anchor="ctr"/>
-          <a:lstStyle/>
-          <a:p>
-            <a:pPr marL="0" indent="0">
-              <a:buNone/>
-            </a:pPr>
-            <a:r>
-              <a:rPr lang="en-US" sz="900" b="1" dirty="0">
-                <a:solidFill>
-                  <a:srgbClr val="0D9488"/>
-                </a:solidFill>
-                <a:latin typeface="Calibri" pitchFamily="34" charset="0"/>
-                <a:ea typeface="Calibri" pitchFamily="34" charset="-122"/>
-                <a:cs typeface="Calibri" pitchFamily="34" charset="-120"/>
-              </a:rPr>
-              <a:t>• </a:t>
-            </a:r>
-            <a:r>
-              <a:rPr lang="en-US" sz="900" dirty="0">
-                <a:solidFill>
-                  <a:srgbClr val="334155"/>
-                </a:solidFill>
-                <a:latin typeface="Calibri" pitchFamily="34" charset="0"/>
-                <a:ea typeface="Calibri" pitchFamily="34" charset="-122"/>
-                <a:cs typeface="Calibri" pitchFamily="34" charset="-120"/>
-              </a:rPr>
-              <a:t>CFO of $30.6M dramatically exceeds $8.2M budget — annual billing collections in Q1 generated the surplus</a:t>
-            </a:r>
-            <a:endParaRPr lang="en-US" sz="900" dirty="0"/>
+            <a:off x="6629400" y="1426464"/>
+            <a:ext cx="2194560" cy="621792"/>
+          </a:xfrm>
+          <a:prstGeom prst="rect">
+            <a:avLst/>
+          </a:prstGeom>
+          <a:noFill/>
+          <a:ln/>
+        </p:spPr>
+        <p:txBody>
+          <a:bodyPr wrap="square" rtlCol="0" anchor="ctr">
+            <a:noAutofit/>
+          </a:bodyPr>
+          <a:lstStyle/>
+          <a:p>
+            <a:pPr marL="0" indent="0" algn="l"/>
+            <a:r>
+              <a:rPr lang="en-US" sz="950" b="0" dirty="0">
+                <a:solidFill>
+                  <a:srgbClr val="000000"/>
+                </a:solidFill>
+              </a:rPr>
+              <a:t>• YTD CFO $25.6M exceeds $3.2M budget, +$22.4M and +703% — Q1 annual billing collections generated the surplus; Jun CFO $4.8M</a:t>
+            </a:r>
           </a:p>
         </p:txBody>
       </p:sp>
@@ -36604,45 +36985,30 @@
         </p:nvSpPr>
         <p:spPr>
           <a:xfrm>
-            <a:off x="6629400" y="1901952"/>
-            <a:ext cx="2194560" cy="347472"/>
-          </a:xfrm>
-          <a:prstGeom prst="rect">
-            <a:avLst/>
-          </a:prstGeom>
-          <a:noFill/>
-          <a:ln/>
-        </p:spPr>
-        <p:txBody>
-          <a:bodyPr wrap="square" rtlCol="0" anchor="ctr"/>
-          <a:lstStyle/>
-          <a:p>
-            <a:pPr marL="0" indent="0">
-              <a:buNone/>
-            </a:pPr>
-            <a:r>
-              <a:rPr lang="en-US" sz="900" b="1" dirty="0">
-                <a:solidFill>
-                  <a:srgbClr val="0D9488"/>
-                </a:solidFill>
-                <a:latin typeface="Calibri" pitchFamily="34" charset="0"/>
-                <a:ea typeface="Calibri" pitchFamily="34" charset="-122"/>
-                <a:cs typeface="Calibri" pitchFamily="34" charset="-120"/>
-              </a:rPr>
-              <a:t>• </a:t>
-            </a:r>
-            <a:r>
-              <a:rPr lang="en-US" sz="900" dirty="0">
-                <a:solidFill>
-                  <a:srgbClr val="334155"/>
-                </a:solidFill>
-                <a:latin typeface="Calibri" pitchFamily="34" charset="0"/>
-                <a:ea typeface="Calibri" pitchFamily="34" charset="-122"/>
-                <a:cs typeface="Calibri" pitchFamily="34" charset="-120"/>
-              </a:rPr>
-              <a:t>Deferred revenue build +$0.6M vs plan confirms contracted backlog ahead of GAAP recognition</a:t>
-            </a:r>
-            <a:endParaRPr lang="en-US" sz="900" dirty="0"/>
+            <a:off x="6629400" y="2084832"/>
+            <a:ext cx="2194560" cy="621792"/>
+          </a:xfrm>
+          <a:prstGeom prst="rect">
+            <a:avLst/>
+          </a:prstGeom>
+          <a:noFill/>
+          <a:ln/>
+        </p:spPr>
+        <p:txBody>
+          <a:bodyPr wrap="square" rtlCol="0" anchor="ctr">
+            <a:noAutofit/>
+          </a:bodyPr>
+          <a:lstStyle/>
+          <a:p>
+            <a:pPr marL="0" indent="0" algn="l"/>
+            <a:r>
+              <a:rPr lang="en-US" sz="950" b="0" dirty="0">
+                <a:solidFill>
+                  <a:srgbClr val="000000"/>
+                </a:solidFill>
+              </a:rPr>
+              <a:t>• Net income -$10.1M vs $2.4M budget ($12.5M) — actual cost structure reflects investment phase vs plan</a:t>
+            </a:r>
           </a:p>
         </p:txBody>
       </p:sp>
@@ -36654,45 +37020,30 @@
         </p:nvSpPr>
         <p:spPr>
           <a:xfrm>
-            <a:off x="6629400" y="2331720"/>
-            <a:ext cx="2194560" cy="347472"/>
-          </a:xfrm>
-          <a:prstGeom prst="rect">
-            <a:avLst/>
-          </a:prstGeom>
-          <a:noFill/>
-          <a:ln/>
-        </p:spPr>
-        <p:txBody>
-          <a:bodyPr wrap="square" rtlCol="0" anchor="ctr"/>
-          <a:lstStyle/>
-          <a:p>
-            <a:pPr marL="0" indent="0">
-              <a:buNone/>
-            </a:pPr>
-            <a:r>
-              <a:rPr lang="en-US" sz="900" b="1" dirty="0">
-                <a:solidFill>
-                  <a:srgbClr val="0D9488"/>
-                </a:solidFill>
-                <a:latin typeface="Calibri" pitchFamily="34" charset="0"/>
-                <a:ea typeface="Calibri" pitchFamily="34" charset="-122"/>
-                <a:cs typeface="Calibri" pitchFamily="34" charset="-120"/>
-              </a:rPr>
-              <a:t>• </a:t>
-            </a:r>
-            <a:r>
-              <a:rPr lang="en-US" sz="900" dirty="0">
-                <a:solidFill>
-                  <a:srgbClr val="334155"/>
-                </a:solidFill>
-                <a:latin typeface="Calibri" pitchFamily="34" charset="0"/>
-                <a:ea typeface="Calibri" pitchFamily="34" charset="-122"/>
-                <a:cs typeface="Calibri" pitchFamily="34" charset="-120"/>
-              </a:rPr>
-              <a:t>Zero financing across all 5 months — business is fully self-funding above $10M cash floor</a:t>
-            </a:r>
-            <a:endParaRPr lang="en-US" sz="900" dirty="0"/>
+            <a:off x="6629400" y="2743200"/>
+            <a:ext cx="2194560" cy="621792"/>
+          </a:xfrm>
+          <a:prstGeom prst="rect">
+            <a:avLst/>
+          </a:prstGeom>
+          <a:noFill/>
+          <a:ln/>
+        </p:spPr>
+        <p:txBody>
+          <a:bodyPr wrap="square" rtlCol="0" anchor="ctr">
+            <a:noAutofit/>
+          </a:bodyPr>
+          <a:lstStyle/>
+          <a:p>
+            <a:pPr marL="0" indent="0" algn="l"/>
+            <a:r>
+              <a:rPr lang="en-US" sz="950" b="0" dirty="0">
+                <a:solidFill>
+                  <a:srgbClr val="000000"/>
+                </a:solidFill>
+              </a:rPr>
+              <a:t>• Zero financing across all 6 months; business fully self-funding; ending cash $70.61M vs $48.36M budget +$22.25M</a:t>
+            </a:r>
           </a:p>
         </p:txBody>
       </p:sp>
@@ -36704,45 +37055,30 @@
         </p:nvSpPr>
         <p:spPr>
           <a:xfrm>
-            <a:off x="6629400" y="2799989"/>
-            <a:ext cx="2194560" cy="347472"/>
-          </a:xfrm>
-          <a:prstGeom prst="rect">
-            <a:avLst/>
-          </a:prstGeom>
-          <a:noFill/>
-          <a:ln/>
-        </p:spPr>
-        <p:txBody>
-          <a:bodyPr wrap="square" rtlCol="0" anchor="ctr"/>
-          <a:lstStyle/>
-          <a:p>
-            <a:pPr marL="0" indent="0">
-              <a:buNone/>
-            </a:pPr>
-            <a:r>
-              <a:rPr lang="en-US" sz="900" b="1" dirty="0">
-                <a:solidFill>
-                  <a:srgbClr val="0D9488"/>
-                </a:solidFill>
-                <a:latin typeface="Calibri" pitchFamily="34" charset="0"/>
-                <a:ea typeface="Calibri" pitchFamily="34" charset="-122"/>
-                <a:cs typeface="Calibri" pitchFamily="34" charset="-120"/>
-              </a:rPr>
-              <a:t>• </a:t>
-            </a:r>
-            <a:r>
-              <a:rPr lang="en-US" sz="900" dirty="0">
-                <a:solidFill>
-                  <a:srgbClr val="334155"/>
-                </a:solidFill>
-                <a:latin typeface="Calibri" pitchFamily="34" charset="0"/>
-                <a:ea typeface="Calibri" pitchFamily="34" charset="-122"/>
-                <a:cs typeface="Calibri" pitchFamily="34" charset="-120"/>
-              </a:rPr>
-              <a:t>H2 watchpoint: CFO will moderate materially as Q1 annual billing collections do not repeat (Jun–Aug: $6–8M/mo)</a:t>
-            </a:r>
-            <a:endParaRPr lang="en-US" sz="900" dirty="0"/>
+            <a:off x="6629400" y="3401568"/>
+            <a:ext cx="2194560" cy="621792"/>
+          </a:xfrm>
+          <a:prstGeom prst="rect">
+            <a:avLst/>
+          </a:prstGeom>
+          <a:noFill/>
+          <a:ln/>
+        </p:spPr>
+        <p:txBody>
+          <a:bodyPr wrap="square" rtlCol="0" anchor="ctr">
+            <a:noAutofit/>
+          </a:bodyPr>
+          <a:lstStyle/>
+          <a:p>
+            <a:pPr marL="0" indent="0" algn="l"/>
+            <a:r>
+              <a:rPr lang="en-US" sz="950" b="0" dirty="0">
+                <a:solidFill>
+                  <a:srgbClr val="000000"/>
+                </a:solidFill>
+              </a:rPr>
+              <a:t>• H2 watchpoint: CFO will moderate as Q1 annual billing spike does not repeat; target $8–10M/month collections</a:t>
+            </a:r>
           </a:p>
         </p:txBody>
       </p:sp>
@@ -37172,7 +37508,7 @@
                 <a:ea typeface="Calibri" pitchFamily="34" charset="-122"/>
                 <a:cs typeface="Calibri" pitchFamily="34" charset="-120"/>
               </a:rPr>
-              <a:t>20,527</a:t>
+              <a:t>23,100+</a:t>
             </a:r>
             <a:endParaRPr lang="en-US" sz="1700" dirty="0"/>
           </a:p>
@@ -37211,7 +37547,7 @@
                 <a:ea typeface="Calibri" pitchFamily="34" charset="-122"/>
                 <a:cs typeface="Calibri" pitchFamily="34" charset="-120"/>
               </a:rPr>
-              <a:t>+8% vs budget</a:t>
+              <a:t>+6% vs budget</a:t>
             </a:r>
             <a:endParaRPr lang="en-US" sz="750" dirty="0"/>
           </a:p>
@@ -37353,7 +37689,7 @@
                 <a:ea typeface="Calibri" pitchFamily="34" charset="-122"/>
                 <a:cs typeface="Calibri" pitchFamily="34" charset="-120"/>
               </a:rPr>
-              <a:t>$22.5M</a:t>
+              <a:t>$27.1M</a:t>
             </a:r>
             <a:endParaRPr lang="en-US" sz="1700" dirty="0"/>
           </a:p>
@@ -37392,7 +37728,7 @@
                 <a:ea typeface="Calibri" pitchFamily="34" charset="-122"/>
                 <a:cs typeface="Calibri" pitchFamily="34" charset="-120"/>
               </a:rPr>
-              <a:t>+$0.9M vs budget</a:t>
+              <a:t>+$2.6M vs May</a:t>
             </a:r>
             <a:endParaRPr lang="en-US" sz="750" dirty="0"/>
           </a:p>
@@ -37534,7 +37870,7 @@
                 <a:ea typeface="Calibri" pitchFamily="34" charset="-122"/>
                 <a:cs typeface="Calibri" pitchFamily="34" charset="-120"/>
               </a:rPr>
-              <a:t>$7.6M</a:t>
+              <a:t>$5.4M</a:t>
             </a:r>
             <a:endParaRPr lang="en-US" sz="1700" dirty="0"/>
           </a:p>
@@ -37715,7 +38051,7 @@
                 <a:ea typeface="Calibri" pitchFamily="34" charset="-122"/>
                 <a:cs typeface="Calibri" pitchFamily="34" charset="-120"/>
               </a:rPr>
-              <a:t>Referral 65.7%</a:t>
+              <a:t>Partner 59.1%</a:t>
             </a:r>
             <a:endParaRPr lang="en-US" sz="1700" dirty="0"/>
           </a:p>
@@ -37754,7 +38090,7 @@
                 <a:ea typeface="Calibri" pitchFamily="34" charset="-122"/>
                 <a:cs typeface="Calibri" pitchFamily="34" charset="-120"/>
               </a:rPr>
-              <a:t>Partner 59.1%</a:t>
+              <a:t>Referral 65.7%</a:t>
             </a:r>
             <a:endParaRPr lang="en-US" sz="750" dirty="0"/>
           </a:p>
@@ -37793,7 +38129,7 @@
                 <a:ea typeface="Calibri" pitchFamily="34" charset="-122"/>
                 <a:cs typeface="Calibri" pitchFamily="34" charset="-120"/>
               </a:rPr>
-              <a:t>CHANNEL PERFORMANCE — YTD JAN–MAY 2026</a:t>
+              <a:t>CHANNEL PERFORMANCE — YTD JAN–JUN 2026</a:t>
             </a:r>
             <a:endParaRPr lang="en-US" sz="750" dirty="0"/>
           </a:p>
@@ -39065,7 +39401,7 @@
             <a:r>
               <a:rPr lang="en-US" sz="750" b="1" dirty="0">
                 <a:solidFill>
-                  <a:srgbClr val="0D9488"/>
+                  <a:srgbClr val="15803D"/>
                 </a:solidFill>
                 <a:latin typeface="Calibri" pitchFamily="34" charset="0"/>
                 <a:ea typeface="Calibri" pitchFamily="34" charset="-122"/>
@@ -39073,7 +39409,11 @@
               </a:rPr>
               <a:t>364.1x</a:t>
             </a:r>
-            <a:endParaRPr lang="en-US" sz="750" dirty="0"/>
+            <a:endParaRPr lang="en-US" sz="750" dirty="0">
+              <a:solidFill>
+                <a:srgbClr val="15803D"/>
+              </a:solidFill>
+            </a:endParaRPr>
           </a:p>
         </p:txBody>
       </p:sp>
@@ -39497,7 +39837,7 @@
                 <a:ea typeface="Calibri" pitchFamily="34" charset="-122"/>
                 <a:cs typeface="Calibri" pitchFamily="34" charset="-120"/>
               </a:rPr>
-              <a:t>-$0.86M</a:t>
+              <a:t>($0.86M)</a:t>
             </a:r>
             <a:endParaRPr lang="en-US" sz="750" dirty="0"/>
           </a:p>
@@ -39775,7 +40115,7 @@
             <a:r>
               <a:rPr lang="en-US" sz="750" b="1" dirty="0">
                 <a:solidFill>
-                  <a:srgbClr val="0D9488"/>
+                  <a:srgbClr val="15803D"/>
                 </a:solidFill>
                 <a:latin typeface="Calibri" pitchFamily="34" charset="0"/>
                 <a:ea typeface="Calibri" pitchFamily="34" charset="-122"/>
@@ -39783,7 +40123,11 @@
               </a:rPr>
               <a:t>141.0x</a:t>
             </a:r>
-            <a:endParaRPr lang="en-US" sz="750" dirty="0"/>
+            <a:endParaRPr lang="en-US" sz="750" dirty="0">
+              <a:solidFill>
+                <a:srgbClr val="15803D"/>
+              </a:solidFill>
+            </a:endParaRPr>
           </a:p>
         </p:txBody>
       </p:sp>
@@ -40207,7 +40551,7 @@
                 <a:ea typeface="Calibri" pitchFamily="34" charset="-122"/>
                 <a:cs typeface="Calibri" pitchFamily="34" charset="-120"/>
               </a:rPr>
-              <a:t>-$0.56M</a:t>
+              <a:t>($0.56M)</a:t>
             </a:r>
             <a:endParaRPr lang="en-US" sz="750" dirty="0"/>
           </a:p>
@@ -40485,7 +40829,7 @@
             <a:r>
               <a:rPr lang="en-US" sz="750" b="1" dirty="0">
                 <a:solidFill>
-                  <a:srgbClr val="0D9488"/>
+                  <a:srgbClr val="15803D"/>
                 </a:solidFill>
                 <a:latin typeface="Calibri" pitchFamily="34" charset="0"/>
                 <a:ea typeface="Calibri" pitchFamily="34" charset="-122"/>
@@ -40493,7 +40837,11 @@
               </a:rPr>
               <a:t>70.3x</a:t>
             </a:r>
-            <a:endParaRPr lang="en-US" sz="750" dirty="0"/>
+            <a:endParaRPr lang="en-US" sz="750" dirty="0">
+              <a:solidFill>
+                <a:srgbClr val="15803D"/>
+              </a:solidFill>
+            </a:endParaRPr>
           </a:p>
         </p:txBody>
       </p:sp>
@@ -40917,7 +41265,7 @@
                 <a:ea typeface="Calibri" pitchFamily="34" charset="-122"/>
                 <a:cs typeface="Calibri" pitchFamily="34" charset="-120"/>
               </a:rPr>
-              <a:t>-$0.60M</a:t>
+              <a:t>($0.60M)</a:t>
             </a:r>
             <a:endParaRPr lang="en-US" sz="750" dirty="0"/>
           </a:p>
@@ -41124,15 +41472,19 @@
             <a:r>
               <a:rPr lang="en-US" sz="750" dirty="0">
                 <a:solidFill>
-                  <a:srgbClr val="15803D"/>
-                </a:solidFill>
-                <a:latin typeface="Calibri" pitchFamily="34" charset="0"/>
-                <a:ea typeface="Calibri" pitchFamily="34" charset="-122"/>
-                <a:cs typeface="Calibri" pitchFamily="34" charset="-120"/>
-              </a:rPr>
-              <a:t>-$0.57M</a:t>
-            </a:r>
-            <a:endParaRPr lang="en-US" sz="750" dirty="0"/>
+                  <a:srgbClr val="C00000"/>
+                </a:solidFill>
+                <a:latin typeface="Calibri" pitchFamily="34" charset="0"/>
+                <a:ea typeface="Calibri" pitchFamily="34" charset="-122"/>
+                <a:cs typeface="Calibri" pitchFamily="34" charset="-120"/>
+              </a:rPr>
+              <a:t>($0.57M)</a:t>
+            </a:r>
+            <a:endParaRPr lang="en-US" sz="750" dirty="0">
+              <a:solidFill>
+                <a:srgbClr val="C00000"/>
+              </a:solidFill>
+            </a:endParaRPr>
           </a:p>
         </p:txBody>
       </p:sp>
@@ -41195,7 +41547,7 @@
             <a:r>
               <a:rPr lang="en-US" sz="750" b="1" dirty="0">
                 <a:solidFill>
-                  <a:srgbClr val="15803D"/>
+                  <a:srgbClr val="C00000"/>
                 </a:solidFill>
                 <a:latin typeface="Calibri" pitchFamily="34" charset="0"/>
                 <a:ea typeface="Calibri" pitchFamily="34" charset="-122"/>
@@ -41203,7 +41555,11 @@
               </a:rPr>
               <a:t>16.8x</a:t>
             </a:r>
-            <a:endParaRPr lang="en-US" sz="750" dirty="0"/>
+            <a:endParaRPr lang="en-US" sz="750" dirty="0">
+              <a:solidFill>
+                <a:srgbClr val="C00000"/>
+              </a:solidFill>
+            </a:endParaRPr>
           </a:p>
         </p:txBody>
       </p:sp>
@@ -41266,7 +41622,7 @@
             <a:r>
               <a:rPr lang="en-US" sz="750" dirty="0">
                 <a:solidFill>
-                  <a:srgbClr val="D97706"/>
+                  <a:srgbClr val="C00000"/>
                 </a:solidFill>
                 <a:latin typeface="Calibri" pitchFamily="34" charset="0"/>
                 <a:ea typeface="Calibri" pitchFamily="34" charset="-122"/>
@@ -41274,7 +41630,11 @@
               </a:rPr>
               <a:t>14.6%</a:t>
             </a:r>
-            <a:endParaRPr lang="en-US" sz="750" dirty="0"/>
+            <a:endParaRPr lang="en-US" sz="750" dirty="0">
+              <a:solidFill>
+                <a:srgbClr val="C00000"/>
+              </a:solidFill>
+            </a:endParaRPr>
           </a:p>
         </p:txBody>
       </p:sp>
@@ -41627,7 +41987,7 @@
                 <a:ea typeface="Calibri" pitchFamily="34" charset="-122"/>
                 <a:cs typeface="Calibri" pitchFamily="34" charset="-120"/>
               </a:rPr>
-              <a:t>-$0.23M</a:t>
+              <a:t>($0.23M)</a:t>
             </a:r>
             <a:endParaRPr lang="en-US" sz="750" dirty="0"/>
           </a:p>
@@ -42337,7 +42697,7 @@
                 <a:ea typeface="Calibri" pitchFamily="34" charset="-122"/>
                 <a:cs typeface="Calibri" pitchFamily="34" charset="-120"/>
               </a:rPr>
-              <a:t>-$0.37M</a:t>
+              <a:t>($0.37M)</a:t>
             </a:r>
             <a:endParaRPr lang="en-US" sz="750" dirty="0"/>
           </a:p>
@@ -42544,15 +42904,19 @@
             <a:r>
               <a:rPr lang="en-US" sz="750" dirty="0">
                 <a:solidFill>
-                  <a:srgbClr val="15803D"/>
-                </a:solidFill>
-                <a:latin typeface="Calibri" pitchFamily="34" charset="0"/>
-                <a:ea typeface="Calibri" pitchFamily="34" charset="-122"/>
-                <a:cs typeface="Calibri" pitchFamily="34" charset="-120"/>
-              </a:rPr>
-              <a:t>-$0.31M</a:t>
-            </a:r>
-            <a:endParaRPr lang="en-US" sz="750" dirty="0"/>
+                  <a:srgbClr val="C00000"/>
+                </a:solidFill>
+                <a:latin typeface="Calibri" pitchFamily="34" charset="0"/>
+                <a:ea typeface="Calibri" pitchFamily="34" charset="-122"/>
+                <a:cs typeface="Calibri" pitchFamily="34" charset="-120"/>
+              </a:rPr>
+              <a:t>($0.31M)</a:t>
+            </a:r>
+            <a:endParaRPr lang="en-US" sz="750" dirty="0">
+              <a:solidFill>
+                <a:srgbClr val="C00000"/>
+              </a:solidFill>
+            </a:endParaRPr>
           </a:p>
         </p:txBody>
       </p:sp>
@@ -42615,7 +42979,7 @@
             <a:r>
               <a:rPr lang="en-US" sz="750" b="1" dirty="0">
                 <a:solidFill>
-                  <a:srgbClr val="D97706"/>
+                  <a:srgbClr val="C00000"/>
                 </a:solidFill>
                 <a:latin typeface="Calibri" pitchFamily="34" charset="0"/>
                 <a:ea typeface="Calibri" pitchFamily="34" charset="-122"/>
@@ -42623,7 +42987,11 @@
               </a:rPr>
               <a:t>4.2x</a:t>
             </a:r>
-            <a:endParaRPr lang="en-US" sz="750" dirty="0"/>
+            <a:endParaRPr lang="en-US" sz="750" dirty="0">
+              <a:solidFill>
+                <a:srgbClr val="C00000"/>
+              </a:solidFill>
+            </a:endParaRPr>
           </a:p>
         </p:txBody>
       </p:sp>
@@ -43047,7 +43415,7 @@
                 <a:ea typeface="Calibri" pitchFamily="34" charset="-122"/>
                 <a:cs typeface="Calibri" pitchFamily="34" charset="-120"/>
               </a:rPr>
-              <a:t>-$0.12M</a:t>
+              <a:t>($0.12M)</a:t>
             </a:r>
             <a:endParaRPr lang="en-US" sz="750" dirty="0"/>
           </a:p>
@@ -43254,15 +43622,19 @@
             <a:r>
               <a:rPr lang="en-US" sz="750" dirty="0">
                 <a:solidFill>
-                  <a:srgbClr val="15803D"/>
-                </a:solidFill>
-                <a:latin typeface="Calibri" pitchFamily="34" charset="0"/>
-                <a:ea typeface="Calibri" pitchFamily="34" charset="-122"/>
-                <a:cs typeface="Calibri" pitchFamily="34" charset="-120"/>
-              </a:rPr>
-              <a:t>-$0.70M</a:t>
-            </a:r>
-            <a:endParaRPr lang="en-US" sz="750" dirty="0"/>
+                  <a:srgbClr val="C00000"/>
+                </a:solidFill>
+                <a:latin typeface="Calibri" pitchFamily="34" charset="0"/>
+                <a:ea typeface="Calibri" pitchFamily="34" charset="-122"/>
+                <a:cs typeface="Calibri" pitchFamily="34" charset="-120"/>
+              </a:rPr>
+              <a:t>($0.70M)</a:t>
+            </a:r>
+            <a:endParaRPr lang="en-US" sz="750" dirty="0">
+              <a:solidFill>
+                <a:srgbClr val="C00000"/>
+              </a:solidFill>
+            </a:endParaRPr>
           </a:p>
         </p:txBody>
       </p:sp>
@@ -43325,7 +43697,7 @@
             <a:r>
               <a:rPr lang="en-US" sz="750" b="1" dirty="0">
                 <a:solidFill>
-                  <a:srgbClr val="D97706"/>
+                  <a:srgbClr val="C00000"/>
                 </a:solidFill>
                 <a:latin typeface="Calibri" pitchFamily="34" charset="0"/>
                 <a:ea typeface="Calibri" pitchFamily="34" charset="-122"/>
@@ -43333,7 +43705,11 @@
               </a:rPr>
               <a:t>2.8x</a:t>
             </a:r>
-            <a:endParaRPr lang="en-US" sz="750" dirty="0"/>
+            <a:endParaRPr lang="en-US" sz="750" dirty="0">
+              <a:solidFill>
+                <a:srgbClr val="C00000"/>
+              </a:solidFill>
+            </a:endParaRPr>
           </a:p>
         </p:txBody>
       </p:sp>
@@ -43396,7 +43772,7 @@
             <a:r>
               <a:rPr lang="en-US" sz="750" dirty="0">
                 <a:solidFill>
-                  <a:srgbClr val="D97706"/>
+                  <a:srgbClr val="C00000"/>
                 </a:solidFill>
                 <a:latin typeface="Calibri" pitchFamily="34" charset="0"/>
                 <a:ea typeface="Calibri" pitchFamily="34" charset="-122"/>
@@ -43404,7 +43780,11 @@
               </a:rPr>
               <a:t>14.5%</a:t>
             </a:r>
-            <a:endParaRPr lang="en-US" sz="750" dirty="0"/>
+            <a:endParaRPr lang="en-US" sz="750" dirty="0">
+              <a:solidFill>
+                <a:srgbClr val="C00000"/>
+              </a:solidFill>
+            </a:endParaRPr>
           </a:p>
         </p:txBody>
       </p:sp>
@@ -43964,15 +44344,19 @@
             <a:r>
               <a:rPr lang="en-US" sz="750" dirty="0">
                 <a:solidFill>
-                  <a:srgbClr val="15803D"/>
-                </a:solidFill>
-                <a:latin typeface="Calibri" pitchFamily="34" charset="0"/>
-                <a:ea typeface="Calibri" pitchFamily="34" charset="-122"/>
-                <a:cs typeface="Calibri" pitchFamily="34" charset="-120"/>
-              </a:rPr>
-              <a:t>-$0.47M</a:t>
-            </a:r>
-            <a:endParaRPr lang="en-US" sz="750" dirty="0"/>
+                  <a:srgbClr val="C00000"/>
+                </a:solidFill>
+                <a:latin typeface="Calibri" pitchFamily="34" charset="0"/>
+                <a:ea typeface="Calibri" pitchFamily="34" charset="-122"/>
+                <a:cs typeface="Calibri" pitchFamily="34" charset="-120"/>
+              </a:rPr>
+              <a:t>($0.47M)</a:t>
+            </a:r>
+            <a:endParaRPr lang="en-US" sz="750" dirty="0">
+              <a:solidFill>
+                <a:srgbClr val="C00000"/>
+              </a:solidFill>
+            </a:endParaRPr>
           </a:p>
         </p:txBody>
       </p:sp>
@@ -44035,7 +44419,7 @@
             <a:r>
               <a:rPr lang="en-US" sz="750" b="1" dirty="0">
                 <a:solidFill>
-                  <a:srgbClr val="DC2626"/>
+                  <a:srgbClr val="C00000"/>
                 </a:solidFill>
                 <a:latin typeface="Calibri" pitchFamily="34" charset="0"/>
                 <a:ea typeface="Calibri" pitchFamily="34" charset="-122"/>
@@ -44043,7 +44427,11 @@
               </a:rPr>
               <a:t>1.3x</a:t>
             </a:r>
-            <a:endParaRPr lang="en-US" sz="750" dirty="0"/>
+            <a:endParaRPr lang="en-US" sz="750" dirty="0">
+              <a:solidFill>
+                <a:srgbClr val="C00000"/>
+              </a:solidFill>
+            </a:endParaRPr>
           </a:p>
         </p:txBody>
       </p:sp>
@@ -44674,15 +45062,19 @@
             <a:r>
               <a:rPr lang="en-US" sz="750" dirty="0">
                 <a:solidFill>
-                  <a:srgbClr val="15803D"/>
-                </a:solidFill>
-                <a:latin typeface="Calibri" pitchFamily="34" charset="0"/>
-                <a:ea typeface="Calibri" pitchFamily="34" charset="-122"/>
-                <a:cs typeface="Calibri" pitchFamily="34" charset="-120"/>
-              </a:rPr>
-              <a:t>-$0.01M</a:t>
-            </a:r>
-            <a:endParaRPr lang="en-US" sz="750" dirty="0"/>
+                  <a:srgbClr val="C00000"/>
+                </a:solidFill>
+                <a:latin typeface="Calibri" pitchFamily="34" charset="0"/>
+                <a:ea typeface="Calibri" pitchFamily="34" charset="-122"/>
+                <a:cs typeface="Calibri" pitchFamily="34" charset="-120"/>
+              </a:rPr>
+              <a:t>($0.01M)</a:t>
+            </a:r>
+            <a:endParaRPr lang="en-US" sz="750" dirty="0">
+              <a:solidFill>
+                <a:srgbClr val="C00000"/>
+              </a:solidFill>
+            </a:endParaRPr>
           </a:p>
         </p:txBody>
       </p:sp>
@@ -44745,7 +45137,7 @@
             <a:r>
               <a:rPr lang="en-US" sz="750" b="1" dirty="0">
                 <a:solidFill>
-                  <a:srgbClr val="DC2626"/>
+                  <a:srgbClr val="C00000"/>
                 </a:solidFill>
                 <a:latin typeface="Calibri" pitchFamily="34" charset="0"/>
                 <a:ea typeface="Calibri" pitchFamily="34" charset="-122"/>
@@ -44753,7 +45145,11 @@
               </a:rPr>
               <a:t>1.2x</a:t>
             </a:r>
-            <a:endParaRPr lang="en-US" sz="750" dirty="0"/>
+            <a:endParaRPr lang="en-US" sz="750" dirty="0">
+              <a:solidFill>
+                <a:srgbClr val="C00000"/>
+              </a:solidFill>
+            </a:endParaRPr>
           </a:p>
         </p:txBody>
       </p:sp>
@@ -45455,7 +45851,7 @@
             <a:r>
               <a:rPr lang="en-US" sz="750" b="1" dirty="0">
                 <a:solidFill>
-                  <a:srgbClr val="DC2626"/>
+                  <a:srgbClr val="15803D"/>
                 </a:solidFill>
                 <a:latin typeface="Calibri" pitchFamily="34" charset="0"/>
                 <a:ea typeface="Calibri" pitchFamily="34" charset="-122"/>
@@ -45463,7 +45859,11 @@
               </a:rPr>
               <a:t>1.0x</a:t>
             </a:r>
-            <a:endParaRPr lang="en-US" sz="750" dirty="0"/>
+            <a:endParaRPr lang="en-US" sz="750" dirty="0">
+              <a:solidFill>
+                <a:srgbClr val="15803D"/>
+              </a:solidFill>
+            </a:endParaRPr>
           </a:p>
         </p:txBody>
       </p:sp>
@@ -45526,7 +45926,7 @@
             <a:r>
               <a:rPr lang="en-US" sz="750" dirty="0">
                 <a:solidFill>
-                  <a:srgbClr val="DC2626"/>
+                  <a:srgbClr val="15803D"/>
                 </a:solidFill>
                 <a:latin typeface="Calibri" pitchFamily="34" charset="0"/>
                 <a:ea typeface="Calibri" pitchFamily="34" charset="-122"/>
@@ -45534,7 +45934,11 @@
               </a:rPr>
               <a:t>9.5%</a:t>
             </a:r>
-            <a:endParaRPr lang="en-US" sz="750" dirty="0"/>
+            <a:endParaRPr lang="en-US" sz="750" dirty="0">
+              <a:solidFill>
+                <a:srgbClr val="15803D"/>
+              </a:solidFill>
+            </a:endParaRPr>
           </a:p>
         </p:txBody>
       </p:sp>
@@ -46094,15 +46498,19 @@
             <a:r>
               <a:rPr lang="en-US" sz="750" dirty="0">
                 <a:solidFill>
-                  <a:srgbClr val="15803D"/>
-                </a:solidFill>
-                <a:latin typeface="Calibri" pitchFamily="34" charset="0"/>
-                <a:ea typeface="Calibri" pitchFamily="34" charset="-122"/>
-                <a:cs typeface="Calibri" pitchFamily="34" charset="-120"/>
-              </a:rPr>
-              <a:t>-$1.01M</a:t>
-            </a:r>
-            <a:endParaRPr lang="en-US" sz="750" dirty="0"/>
+                  <a:srgbClr val="C00000"/>
+                </a:solidFill>
+                <a:latin typeface="Calibri" pitchFamily="34" charset="0"/>
+                <a:ea typeface="Calibri" pitchFamily="34" charset="-122"/>
+                <a:cs typeface="Calibri" pitchFamily="34" charset="-120"/>
+              </a:rPr>
+              <a:t>($1.01M)</a:t>
+            </a:r>
+            <a:endParaRPr lang="en-US" sz="750" dirty="0">
+              <a:solidFill>
+                <a:srgbClr val="C00000"/>
+              </a:solidFill>
+            </a:endParaRPr>
           </a:p>
         </p:txBody>
       </p:sp>
@@ -46165,7 +46573,7 @@
             <a:r>
               <a:rPr lang="en-US" sz="750" b="1" dirty="0">
                 <a:solidFill>
-                  <a:srgbClr val="DC2626"/>
+                  <a:srgbClr val="C00000"/>
                 </a:solidFill>
                 <a:latin typeface="Calibri" pitchFamily="34" charset="0"/>
                 <a:ea typeface="Calibri" pitchFamily="34" charset="-122"/>
@@ -46173,7 +46581,11 @@
               </a:rPr>
               <a:t>0.8x</a:t>
             </a:r>
-            <a:endParaRPr lang="en-US" sz="750" dirty="0"/>
+            <a:endParaRPr lang="en-US" sz="750" dirty="0">
+              <a:solidFill>
+                <a:srgbClr val="C00000"/>
+              </a:solidFill>
+            </a:endParaRPr>
           </a:p>
         </p:txBody>
       </p:sp>
@@ -46236,7 +46648,7 @@
             <a:r>
               <a:rPr lang="en-US" sz="750" dirty="0">
                 <a:solidFill>
-                  <a:srgbClr val="D97706"/>
+                  <a:srgbClr val="C00000"/>
                 </a:solidFill>
                 <a:latin typeface="Calibri" pitchFamily="34" charset="0"/>
                 <a:ea typeface="Calibri" pitchFamily="34" charset="-122"/>
@@ -46244,7 +46656,11 @@
               </a:rPr>
               <a:t>18.4%</a:t>
             </a:r>
-            <a:endParaRPr lang="en-US" sz="750" dirty="0"/>
+            <a:endParaRPr lang="en-US" sz="750" dirty="0">
+              <a:solidFill>
+                <a:srgbClr val="C00000"/>
+              </a:solidFill>
+            </a:endParaRPr>
           </a:p>
         </p:txBody>
       </p:sp>
@@ -46591,9 +47007,6 @@
           <a:bodyPr wrap="square" rtlCol="0" anchor="ctr"/>
           <a:lstStyle/>
           <a:p>
-            <a:pPr marL="0" indent="0">
-              <a:buNone/>
-            </a:pPr>
             <a:r>
               <a:rPr lang="en-US" sz="950" dirty="0">
                 <a:solidFill>
@@ -46603,9 +47016,8 @@
                 <a:ea typeface="Calibri" pitchFamily="34" charset="-122"/>
                 <a:cs typeface="Calibri" pitchFamily="34" charset="-120"/>
               </a:rPr>
-              <a:t>YTD 2026 · Q1 Actual · Q2 Partial (Apr–May) · vs Budget</a:t>
-            </a:r>
-            <a:endParaRPr lang="en-US" sz="950" dirty="0"/>
+              <a:t>YTD 2026 vs Budget</a:t>
+            </a:r>
           </a:p>
         </p:txBody>
       </p:sp>
@@ -46816,7 +47228,7 @@
                 <a:ea typeface="Calibri" pitchFamily="34" charset="-122"/>
                 <a:cs typeface="Calibri" pitchFamily="34" charset="-120"/>
               </a:rPr>
-              <a:t>Q2 Partial</a:t>
+              <a:t>Q2 Actual</a:t>
             </a:r>
             <a:endParaRPr lang="en-US" sz="750" dirty="0"/>
           </a:p>
@@ -47526,7 +47938,7 @@
                 <a:ea typeface="Calibri" pitchFamily="34" charset="-122"/>
                 <a:cs typeface="Calibri" pitchFamily="34" charset="-120"/>
               </a:rPr>
-              <a:t>810</a:t>
+              <a:t>1,250</a:t>
             </a:r>
             <a:endParaRPr lang="en-US" sz="800" dirty="0"/>
           </a:p>
@@ -47597,7 +48009,7 @@
                 <a:ea typeface="Calibri" pitchFamily="34" charset="-122"/>
                 <a:cs typeface="Calibri" pitchFamily="34" charset="-120"/>
               </a:rPr>
-              <a:t>1,927</a:t>
+              <a:t>2,367</a:t>
             </a:r>
             <a:endParaRPr lang="en-US" sz="800" dirty="0"/>
           </a:p>
@@ -47810,7 +48222,7 @@
                 <a:ea typeface="Calibri" pitchFamily="34" charset="-122"/>
                 <a:cs typeface="Calibri" pitchFamily="34" charset="-120"/>
               </a:rPr>
-              <a:t>847</a:t>
+              <a:t>728</a:t>
             </a:r>
             <a:endParaRPr lang="en-US" sz="800" dirty="0"/>
           </a:p>
@@ -47881,7 +48293,7 @@
                 <a:ea typeface="Calibri" pitchFamily="34" charset="-122"/>
                 <a:cs typeface="Calibri" pitchFamily="34" charset="-120"/>
               </a:rPr>
-              <a:t>614</a:t>
+              <a:t>847</a:t>
             </a:r>
             <a:endParaRPr lang="en-US" sz="800" dirty="0"/>
           </a:p>
@@ -47952,7 +48364,7 @@
                 <a:ea typeface="Calibri" pitchFamily="34" charset="-122"/>
                 <a:cs typeface="Calibri" pitchFamily="34" charset="-120"/>
               </a:rPr>
-              <a:t>1,461</a:t>
+              <a:t>1,575</a:t>
             </a:r>
             <a:endParaRPr lang="en-US" sz="800" dirty="0"/>
           </a:p>
@@ -48236,7 +48648,7 @@
                 <a:ea typeface="Calibri" pitchFamily="34" charset="-122"/>
                 <a:cs typeface="Calibri" pitchFamily="34" charset="-120"/>
               </a:rPr>
-              <a:t>72%</a:t>
+              <a:t>68%</a:t>
             </a:r>
             <a:endParaRPr lang="en-US" sz="800" dirty="0"/>
           </a:p>
@@ -48307,7 +48719,7 @@
                 <a:ea typeface="Calibri" pitchFamily="34" charset="-122"/>
                 <a:cs typeface="Calibri" pitchFamily="34" charset="-120"/>
               </a:rPr>
-              <a:t>74%</a:t>
+              <a:t>66%</a:t>
             </a:r>
             <a:endParaRPr lang="en-US" sz="800" dirty="0"/>
           </a:p>
@@ -48520,7 +48932,7 @@
                 <a:ea typeface="Calibri" pitchFamily="34" charset="-122"/>
                 <a:cs typeface="Calibri" pitchFamily="34" charset="-120"/>
               </a:rPr>
-              <a:t>19</a:t>
+              <a:t>119</a:t>
             </a:r>
             <a:endParaRPr lang="en-US" sz="800" dirty="0"/>
           </a:p>
@@ -48591,7 +49003,7 @@
                 <a:ea typeface="Calibri" pitchFamily="34" charset="-122"/>
                 <a:cs typeface="Calibri" pitchFamily="34" charset="-120"/>
               </a:rPr>
-              <a:t>12</a:t>
+              <a:t>191</a:t>
             </a:r>
             <a:endParaRPr lang="en-US" sz="800" dirty="0"/>
           </a:p>
@@ -48662,7 +49074,7 @@
                 <a:ea typeface="Calibri" pitchFamily="34" charset="-122"/>
                 <a:cs typeface="Calibri" pitchFamily="34" charset="-120"/>
               </a:rPr>
-              <a:t>31</a:t>
+              <a:t>310</a:t>
             </a:r>
             <a:endParaRPr lang="en-US" sz="800" dirty="0"/>
           </a:p>
@@ -48875,7 +49287,7 @@
                 <a:ea typeface="Calibri" pitchFamily="34" charset="-122"/>
                 <a:cs typeface="Calibri" pitchFamily="34" charset="-120"/>
               </a:rPr>
-              <a:t>$256k</a:t>
+              <a:t>$4.5M</a:t>
             </a:r>
             <a:endParaRPr lang="en-US" sz="800" dirty="0"/>
           </a:p>
@@ -48946,7 +49358,7 @@
                 <a:ea typeface="Calibri" pitchFamily="34" charset="-122"/>
                 <a:cs typeface="Calibri" pitchFamily="34" charset="-120"/>
               </a:rPr>
-              <a:t>$180k</a:t>
+              <a:t>$6.7M</a:t>
             </a:r>
             <a:endParaRPr lang="en-US" sz="800" dirty="0"/>
           </a:p>
@@ -49301,7 +49713,7 @@
                 <a:ea typeface="Calibri" pitchFamily="34" charset="-122"/>
                 <a:cs typeface="Calibri" pitchFamily="34" charset="-120"/>
               </a:rPr>
-              <a:t>13%</a:t>
+              <a:t>22%</a:t>
             </a:r>
             <a:endParaRPr lang="en-US" sz="800" dirty="0"/>
           </a:p>
@@ -49372,7 +49784,7 @@
                 <a:ea typeface="Calibri" pitchFamily="34" charset="-122"/>
                 <a:cs typeface="Calibri" pitchFamily="34" charset="-120"/>
               </a:rPr>
-              <a:t>15%</a:t>
+              <a:t>20%</a:t>
             </a:r>
             <a:endParaRPr lang="en-US" sz="800" dirty="0"/>
           </a:p>
@@ -49585,7 +49997,7 @@
                 <a:ea typeface="Calibri" pitchFamily="34" charset="-122"/>
                 <a:cs typeface="Calibri" pitchFamily="34" charset="-120"/>
               </a:rPr>
-              <a:t>$9k</a:t>
+              <a:t>$37.8k</a:t>
             </a:r>
             <a:endParaRPr lang="en-US" sz="800" dirty="0"/>
           </a:p>
@@ -49656,7 +50068,7 @@
                 <a:ea typeface="Calibri" pitchFamily="34" charset="-122"/>
                 <a:cs typeface="Calibri" pitchFamily="34" charset="-120"/>
               </a:rPr>
-              <a:t>$12k</a:t>
+              <a:t>$35k</a:t>
             </a:r>
             <a:endParaRPr lang="en-US" sz="800" dirty="0"/>
           </a:p>
@@ -49727,7 +50139,7 @@
                 <a:ea typeface="Calibri" pitchFamily="34" charset="-122"/>
                 <a:cs typeface="Calibri" pitchFamily="34" charset="-120"/>
               </a:rPr>
-              <a:t>$10k</a:t>
+              <a:t>$36.1k</a:t>
             </a:r>
             <a:endParaRPr lang="en-US" sz="800" dirty="0"/>
           </a:p>
@@ -49798,7 +50210,7 @@
                 <a:ea typeface="Calibri" pitchFamily="34" charset="-122"/>
                 <a:cs typeface="Calibri" pitchFamily="34" charset="-120"/>
               </a:rPr>
-              <a:t>($14k)</a:t>
+              <a:t>($4k)</a:t>
             </a:r>
             <a:endParaRPr lang="en-US" sz="800" dirty="0"/>
           </a:p>
@@ -50011,7 +50423,7 @@
                 <a:ea typeface="Calibri" pitchFamily="34" charset="-122"/>
                 <a:cs typeface="Calibri" pitchFamily="34" charset="-120"/>
               </a:rPr>
-              <a:t>Q2 Partial</a:t>
+              <a:t>Q2 Actual</a:t>
             </a:r>
             <a:endParaRPr lang="en-US" sz="750" dirty="0"/>
           </a:p>
@@ -53096,7 +53508,7 @@
                 <a:ea typeface="Calibri" pitchFamily="34" charset="-122"/>
                 <a:cs typeface="Calibri" pitchFamily="34" charset="-120"/>
               </a:rPr>
-              <a:t>New Logo $325k Behind Plan</a:t>
+              <a:t>Q2 New Logo: 37 Deals · $5.4MM ARR</a:t>
             </a:r>
             <a:endParaRPr lang="en-US" sz="900" dirty="0"/>
           </a:p>
@@ -53135,7 +53547,7 @@
                 <a:ea typeface="Calibri" pitchFamily="34" charset="-122"/>
                 <a:cs typeface="Calibri" pitchFamily="34" charset="-120"/>
               </a:rPr>
-              <a:t>New logo bookings trailing in 20+ seat segments — deal timing slipping to Q3. Q2 close rate improving to 13% (up from 16% Q1) suggesting quality-over-volume focus is working.</a:t>
+              <a:t>Q2 new logo bookings $5.4M across 37 deals (Apr–Jun). Enterprise pipeline coverage 3.3x supports H2 conversion.</a:t>
             </a:r>
             <a:endParaRPr lang="en-US" sz="850" dirty="0"/>
           </a:p>
@@ -53238,7 +53650,7 @@
                 <a:ea typeface="Calibri" pitchFamily="34" charset="-122"/>
                 <a:cs typeface="Calibri" pitchFamily="34" charset="-120"/>
               </a:rPr>
-              <a:t>Expansion Outperforming</a:t>
+              <a:t>Expansion Q2 Complete: 23 Deals · $2.7MM</a:t>
             </a:r>
             <a:endParaRPr lang="en-US" sz="900" dirty="0"/>
           </a:p>
@@ -53277,7 +53689,7 @@
                 <a:ea typeface="Calibri" pitchFamily="34" charset="-122"/>
                 <a:cs typeface="Calibri" pitchFamily="34" charset="-120"/>
               </a:rPr>
-              <a:t>$1.056M YTD vs budget. CS-led expansion in enterprise driving 70% of bookings. Migration and seat expansion are the primary vectors. Expect continued outperformance in H2.</a:t>
+              <a:t>Q2 expansion $450k across 38 deals. CS-led enterprise bookings continue to outperform. Strong H2 expansion trajectory.</a:t>
             </a:r>
             <a:endParaRPr lang="en-US" sz="850" dirty="0"/>
           </a:p>
